--- a/Projeto de Software e Segurança da Informação - 2026/Projeto de Software/Aula07-HerançaPolimorfismo/Herança e Porlimosfismo.pptx
+++ b/Projeto de Software e Segurança da Informação - 2026/Projeto de Software/Aula07-HerançaPolimorfismo/Herança e Porlimosfismo.pptx
@@ -5,19 +5,21 @@
     <p:sldMasterId id="2147483677" r:id="rId1"/>
   </p:sldMasterIdLst>
   <p:notesMasterIdLst>
-    <p:notesMasterId r:id="rId12"/>
+    <p:notesMasterId r:id="rId14"/>
   </p:notesMasterIdLst>
   <p:sldIdLst>
     <p:sldId id="256" r:id="rId2"/>
-    <p:sldId id="257" r:id="rId3"/>
-    <p:sldId id="258" r:id="rId4"/>
-    <p:sldId id="259" r:id="rId5"/>
-    <p:sldId id="260" r:id="rId6"/>
-    <p:sldId id="261" r:id="rId7"/>
-    <p:sldId id="264" r:id="rId8"/>
-    <p:sldId id="265" r:id="rId9"/>
-    <p:sldId id="262" r:id="rId10"/>
-    <p:sldId id="263" r:id="rId11"/>
+    <p:sldId id="266" r:id="rId3"/>
+    <p:sldId id="267" r:id="rId4"/>
+    <p:sldId id="257" r:id="rId5"/>
+    <p:sldId id="258" r:id="rId6"/>
+    <p:sldId id="259" r:id="rId7"/>
+    <p:sldId id="260" r:id="rId8"/>
+    <p:sldId id="261" r:id="rId9"/>
+    <p:sldId id="264" r:id="rId10"/>
+    <p:sldId id="265" r:id="rId11"/>
+    <p:sldId id="262" r:id="rId12"/>
+    <p:sldId id="263" r:id="rId13"/>
   </p:sldIdLst>
   <p:sldSz cx="12192000" cy="6858000"/>
   <p:notesSz cx="6858000" cy="9144000"/>
@@ -229,7 +231,7 @@
           <a:p>
             <a:fld id="{FCBB45FB-FC1C-4893-B550-48C1193193C6}" type="datetimeFigureOut">
               <a:rPr lang="pt-BR" smtClean="0"/>
-              <a:t>18/04/2025</a:t>
+              <a:t>18/03/2026</a:t>
             </a:fld>
             <a:endParaRPr lang="pt-BR"/>
           </a:p>
@@ -932,7 +934,7 @@
           <a:p>
             <a:fld id="{CDD55C27-F8C6-4481-8569-CAC50CAE9F1F}" type="datetimeFigureOut">
               <a:rPr lang="pt-BR" smtClean="0"/>
-              <a:t>18/04/2025</a:t>
+              <a:t>18/03/2026</a:t>
             </a:fld>
             <a:endParaRPr lang="pt-BR"/>
           </a:p>
@@ -1431,7 +1433,7 @@
           <a:p>
             <a:fld id="{CDD55C27-F8C6-4481-8569-CAC50CAE9F1F}" type="datetimeFigureOut">
               <a:rPr lang="pt-BR" smtClean="0"/>
-              <a:t>18/04/2025</a:t>
+              <a:t>18/03/2026</a:t>
             </a:fld>
             <a:endParaRPr lang="pt-BR"/>
           </a:p>
@@ -1734,7 +1736,7 @@
           <a:p>
             <a:fld id="{CDD55C27-F8C6-4481-8569-CAC50CAE9F1F}" type="datetimeFigureOut">
               <a:rPr lang="pt-BR" smtClean="0"/>
-              <a:t>18/04/2025</a:t>
+              <a:t>18/03/2026</a:t>
             </a:fld>
             <a:endParaRPr lang="pt-BR"/>
           </a:p>
@@ -2185,7 +2187,7 @@
           <a:p>
             <a:fld id="{CDD55C27-F8C6-4481-8569-CAC50CAE9F1F}" type="datetimeFigureOut">
               <a:rPr lang="pt-BR" smtClean="0"/>
-              <a:t>18/04/2025</a:t>
+              <a:t>18/03/2026</a:t>
             </a:fld>
             <a:endParaRPr lang="pt-BR"/>
           </a:p>
@@ -2358,7 +2360,7 @@
           <a:p>
             <a:fld id="{CDD55C27-F8C6-4481-8569-CAC50CAE9F1F}" type="datetimeFigureOut">
               <a:rPr lang="pt-BR" smtClean="0"/>
-              <a:t>18/04/2025</a:t>
+              <a:t>18/03/2026</a:t>
             </a:fld>
             <a:endParaRPr lang="pt-BR"/>
           </a:p>
@@ -2495,7 +2497,7 @@
           <a:p>
             <a:fld id="{CDD55C27-F8C6-4481-8569-CAC50CAE9F1F}" type="datetimeFigureOut">
               <a:rPr lang="pt-BR" smtClean="0"/>
-              <a:t>18/04/2025</a:t>
+              <a:t>18/03/2026</a:t>
             </a:fld>
             <a:endParaRPr lang="pt-BR"/>
           </a:p>
@@ -2839,7 +2841,7 @@
           <a:p>
             <a:fld id="{CDD55C27-F8C6-4481-8569-CAC50CAE9F1F}" type="datetimeFigureOut">
               <a:rPr lang="pt-BR" smtClean="0"/>
-              <a:t>18/04/2025</a:t>
+              <a:t>18/03/2026</a:t>
             </a:fld>
             <a:endParaRPr lang="pt-BR"/>
           </a:p>
@@ -3160,7 +3162,7 @@
           <a:p>
             <a:fld id="{CDD55C27-F8C6-4481-8569-CAC50CAE9F1F}" type="datetimeFigureOut">
               <a:rPr lang="pt-BR" smtClean="0"/>
-              <a:t>18/04/2025</a:t>
+              <a:t>18/03/2026</a:t>
             </a:fld>
             <a:endParaRPr lang="pt-BR"/>
           </a:p>
@@ -3789,6 +3791,1490 @@
           <p:cNvPr id="2" name="Título 1">
             <a:extLst>
               <a:ext uri="{FF2B5EF4-FFF2-40B4-BE49-F238E27FC236}">
+                <a16:creationId xmlns:a16="http://schemas.microsoft.com/office/drawing/2014/main" id="{4A744C23-AA41-4EE5-936C-BE42F1928F7C}"/>
+              </a:ext>
+            </a:extLst>
+          </p:cNvPr>
+          <p:cNvSpPr>
+            <a:spLocks noGrp="1"/>
+          </p:cNvSpPr>
+          <p:nvPr>
+            <p:ph type="title"/>
+          </p:nvPr>
+        </p:nvSpPr>
+        <p:spPr/>
+        <p:txBody>
+          <a:bodyPr/>
+          <a:lstStyle/>
+          <a:p>
+            <a:r>
+              <a:rPr lang="pt-BR" dirty="0"/>
+              <a:t>Exemplo de Polimorfismo</a:t>
+            </a:r>
+          </a:p>
+        </p:txBody>
+      </p:sp>
+      <p:sp>
+        <p:nvSpPr>
+          <p:cNvPr id="4" name="Retângulo 3">
+            <a:extLst>
+              <a:ext uri="{FF2B5EF4-FFF2-40B4-BE49-F238E27FC236}">
+                <a16:creationId xmlns:a16="http://schemas.microsoft.com/office/drawing/2014/main" id="{A9C127C7-5E90-4A82-86A4-C9E34D1D6277}"/>
+              </a:ext>
+            </a:extLst>
+          </p:cNvPr>
+          <p:cNvSpPr/>
+          <p:nvPr/>
+        </p:nvSpPr>
+        <p:spPr>
+          <a:xfrm>
+            <a:off x="852311" y="3028407"/>
+            <a:ext cx="4698999" cy="2975173"/>
+          </a:xfrm>
+          <a:prstGeom prst="rect">
+            <a:avLst/>
+          </a:prstGeom>
+        </p:spPr>
+        <p:txBody>
+          <a:bodyPr wrap="square">
+            <a:spAutoFit/>
+          </a:bodyPr>
+          <a:lstStyle/>
+          <a:p>
+            <a:pPr>
+              <a:spcBef>
+                <a:spcPts val="150"/>
+              </a:spcBef>
+              <a:spcAft>
+                <a:spcPts val="150"/>
+              </a:spcAft>
+            </a:pPr>
+            <a:r>
+              <a:rPr lang="pt-BR" sz="1400" b="1" dirty="0" err="1">
+                <a:solidFill>
+                  <a:srgbClr val="7F0055"/>
+                </a:solidFill>
+                <a:latin typeface="Consolas" panose="020B0609020204030204" pitchFamily="49" charset="0"/>
+              </a:rPr>
+              <a:t>public</a:t>
+            </a:r>
+            <a:r>
+              <a:rPr lang="pt-BR" sz="1400" dirty="0">
+                <a:solidFill>
+                  <a:srgbClr val="000000"/>
+                </a:solidFill>
+                <a:latin typeface="Consolas" panose="020B0609020204030204" pitchFamily="49" charset="0"/>
+              </a:rPr>
+              <a:t> </a:t>
+            </a:r>
+            <a:r>
+              <a:rPr lang="pt-BR" sz="1400" b="1" dirty="0" err="1">
+                <a:solidFill>
+                  <a:srgbClr val="7F0055"/>
+                </a:solidFill>
+                <a:latin typeface="Consolas" panose="020B0609020204030204" pitchFamily="49" charset="0"/>
+              </a:rPr>
+              <a:t>class</a:t>
+            </a:r>
+            <a:r>
+              <a:rPr lang="pt-BR" sz="1400" dirty="0">
+                <a:solidFill>
+                  <a:srgbClr val="000000"/>
+                </a:solidFill>
+                <a:latin typeface="Consolas" panose="020B0609020204030204" pitchFamily="49" charset="0"/>
+              </a:rPr>
+              <a:t> Calculadora {</a:t>
+            </a:r>
+          </a:p>
+          <a:p>
+            <a:pPr indent="457200">
+              <a:spcBef>
+                <a:spcPts val="150"/>
+              </a:spcBef>
+              <a:spcAft>
+                <a:spcPts val="150"/>
+              </a:spcAft>
+            </a:pPr>
+            <a:r>
+              <a:rPr lang="pt-BR" sz="1400" b="1" dirty="0" err="1">
+                <a:solidFill>
+                  <a:srgbClr val="7F0055"/>
+                </a:solidFill>
+                <a:latin typeface="Consolas" panose="020B0609020204030204" pitchFamily="49" charset="0"/>
+              </a:rPr>
+              <a:t>public</a:t>
+            </a:r>
+            <a:r>
+              <a:rPr lang="pt-BR" sz="1400" dirty="0">
+                <a:solidFill>
+                  <a:srgbClr val="000000"/>
+                </a:solidFill>
+                <a:latin typeface="Consolas" panose="020B0609020204030204" pitchFamily="49" charset="0"/>
+              </a:rPr>
+              <a:t> </a:t>
+            </a:r>
+            <a:r>
+              <a:rPr lang="pt-BR" sz="1400" b="1" dirty="0" err="1">
+                <a:solidFill>
+                  <a:srgbClr val="7F0055"/>
+                </a:solidFill>
+                <a:latin typeface="Consolas" panose="020B0609020204030204" pitchFamily="49" charset="0"/>
+              </a:rPr>
+              <a:t>int</a:t>
+            </a:r>
+            <a:r>
+              <a:rPr lang="pt-BR" sz="1400" dirty="0">
+                <a:solidFill>
+                  <a:srgbClr val="000000"/>
+                </a:solidFill>
+                <a:latin typeface="Consolas" panose="020B0609020204030204" pitchFamily="49" charset="0"/>
+              </a:rPr>
+              <a:t> somar(</a:t>
+            </a:r>
+            <a:r>
+              <a:rPr lang="pt-BR" sz="1400" b="1" dirty="0" err="1">
+                <a:solidFill>
+                  <a:srgbClr val="7F0055"/>
+                </a:solidFill>
+                <a:latin typeface="Consolas" panose="020B0609020204030204" pitchFamily="49" charset="0"/>
+              </a:rPr>
+              <a:t>int</a:t>
+            </a:r>
+            <a:r>
+              <a:rPr lang="pt-BR" sz="1400" dirty="0">
+                <a:solidFill>
+                  <a:srgbClr val="000000"/>
+                </a:solidFill>
+                <a:latin typeface="Consolas" panose="020B0609020204030204" pitchFamily="49" charset="0"/>
+              </a:rPr>
+              <a:t> </a:t>
+            </a:r>
+            <a:r>
+              <a:rPr lang="pt-BR" sz="1400" dirty="0">
+                <a:solidFill>
+                  <a:srgbClr val="6A3E3E"/>
+                </a:solidFill>
+                <a:latin typeface="Consolas" panose="020B0609020204030204" pitchFamily="49" charset="0"/>
+              </a:rPr>
+              <a:t>a</a:t>
+            </a:r>
+            <a:r>
+              <a:rPr lang="pt-BR" sz="1400" dirty="0">
+                <a:solidFill>
+                  <a:srgbClr val="000000"/>
+                </a:solidFill>
+                <a:latin typeface="Consolas" panose="020B0609020204030204" pitchFamily="49" charset="0"/>
+              </a:rPr>
+              <a:t>, </a:t>
+            </a:r>
+            <a:r>
+              <a:rPr lang="pt-BR" sz="1400" b="1" dirty="0" err="1">
+                <a:solidFill>
+                  <a:srgbClr val="7F0055"/>
+                </a:solidFill>
+                <a:latin typeface="Consolas" panose="020B0609020204030204" pitchFamily="49" charset="0"/>
+              </a:rPr>
+              <a:t>int</a:t>
+            </a:r>
+            <a:r>
+              <a:rPr lang="pt-BR" sz="1400" dirty="0">
+                <a:solidFill>
+                  <a:srgbClr val="000000"/>
+                </a:solidFill>
+                <a:latin typeface="Consolas" panose="020B0609020204030204" pitchFamily="49" charset="0"/>
+              </a:rPr>
+              <a:t> </a:t>
+            </a:r>
+            <a:r>
+              <a:rPr lang="pt-BR" sz="1400" dirty="0">
+                <a:solidFill>
+                  <a:srgbClr val="6A3E3E"/>
+                </a:solidFill>
+                <a:latin typeface="Consolas" panose="020B0609020204030204" pitchFamily="49" charset="0"/>
+              </a:rPr>
+              <a:t>b</a:t>
+            </a:r>
+            <a:r>
+              <a:rPr lang="pt-BR" sz="1400" dirty="0">
+                <a:solidFill>
+                  <a:srgbClr val="000000"/>
+                </a:solidFill>
+                <a:latin typeface="Consolas" panose="020B0609020204030204" pitchFamily="49" charset="0"/>
+              </a:rPr>
+              <a:t>) {</a:t>
+            </a:r>
+          </a:p>
+          <a:p>
+            <a:pPr indent="914400">
+              <a:spcBef>
+                <a:spcPts val="150"/>
+              </a:spcBef>
+              <a:spcAft>
+                <a:spcPts val="150"/>
+              </a:spcAft>
+            </a:pPr>
+            <a:r>
+              <a:rPr lang="pt-BR" sz="1400" b="1" dirty="0" err="1">
+                <a:solidFill>
+                  <a:srgbClr val="7F0055"/>
+                </a:solidFill>
+                <a:latin typeface="Consolas" panose="020B0609020204030204" pitchFamily="49" charset="0"/>
+              </a:rPr>
+              <a:t>return</a:t>
+            </a:r>
+            <a:r>
+              <a:rPr lang="pt-BR" sz="1400" dirty="0">
+                <a:solidFill>
+                  <a:srgbClr val="000000"/>
+                </a:solidFill>
+                <a:latin typeface="Consolas" panose="020B0609020204030204" pitchFamily="49" charset="0"/>
+              </a:rPr>
+              <a:t> </a:t>
+            </a:r>
+            <a:r>
+              <a:rPr lang="pt-BR" sz="1400" dirty="0">
+                <a:solidFill>
+                  <a:srgbClr val="6A3E3E"/>
+                </a:solidFill>
+                <a:latin typeface="Consolas" panose="020B0609020204030204" pitchFamily="49" charset="0"/>
+              </a:rPr>
+              <a:t>a</a:t>
+            </a:r>
+            <a:r>
+              <a:rPr lang="pt-BR" sz="1400" dirty="0">
+                <a:solidFill>
+                  <a:srgbClr val="000000"/>
+                </a:solidFill>
+                <a:latin typeface="Consolas" panose="020B0609020204030204" pitchFamily="49" charset="0"/>
+              </a:rPr>
+              <a:t> + </a:t>
+            </a:r>
+            <a:r>
+              <a:rPr lang="pt-BR" sz="1400" dirty="0">
+                <a:solidFill>
+                  <a:srgbClr val="6A3E3E"/>
+                </a:solidFill>
+                <a:latin typeface="Consolas" panose="020B0609020204030204" pitchFamily="49" charset="0"/>
+              </a:rPr>
+              <a:t>b</a:t>
+            </a:r>
+            <a:r>
+              <a:rPr lang="pt-BR" sz="1400" dirty="0">
+                <a:solidFill>
+                  <a:srgbClr val="000000"/>
+                </a:solidFill>
+                <a:latin typeface="Consolas" panose="020B0609020204030204" pitchFamily="49" charset="0"/>
+              </a:rPr>
+              <a:t>;</a:t>
+            </a:r>
+          </a:p>
+          <a:p>
+            <a:pPr indent="457200">
+              <a:spcBef>
+                <a:spcPts val="150"/>
+              </a:spcBef>
+              <a:spcAft>
+                <a:spcPts val="150"/>
+              </a:spcAft>
+            </a:pPr>
+            <a:r>
+              <a:rPr lang="pt-BR" sz="1400" dirty="0">
+                <a:solidFill>
+                  <a:srgbClr val="000000"/>
+                </a:solidFill>
+                <a:latin typeface="Consolas" panose="020B0609020204030204" pitchFamily="49" charset="0"/>
+              </a:rPr>
+              <a:t>}</a:t>
+            </a:r>
+          </a:p>
+          <a:p>
+            <a:pPr indent="457200">
+              <a:spcBef>
+                <a:spcPts val="150"/>
+              </a:spcBef>
+              <a:spcAft>
+                <a:spcPts val="150"/>
+              </a:spcAft>
+            </a:pPr>
+            <a:r>
+              <a:rPr lang="pt-BR" sz="1400" b="1" dirty="0" err="1">
+                <a:solidFill>
+                  <a:srgbClr val="7F0055"/>
+                </a:solidFill>
+                <a:latin typeface="Consolas" panose="020B0609020204030204" pitchFamily="49" charset="0"/>
+              </a:rPr>
+              <a:t>public</a:t>
+            </a:r>
+            <a:r>
+              <a:rPr lang="pt-BR" sz="1400" dirty="0">
+                <a:solidFill>
+                  <a:srgbClr val="000000"/>
+                </a:solidFill>
+                <a:latin typeface="Consolas" panose="020B0609020204030204" pitchFamily="49" charset="0"/>
+              </a:rPr>
+              <a:t> </a:t>
+            </a:r>
+            <a:r>
+              <a:rPr lang="pt-BR" sz="1400" b="1" dirty="0" err="1">
+                <a:solidFill>
+                  <a:srgbClr val="7F0055"/>
+                </a:solidFill>
+                <a:latin typeface="Consolas" panose="020B0609020204030204" pitchFamily="49" charset="0"/>
+              </a:rPr>
+              <a:t>double</a:t>
+            </a:r>
+            <a:r>
+              <a:rPr lang="pt-BR" sz="1400" dirty="0">
+                <a:solidFill>
+                  <a:srgbClr val="000000"/>
+                </a:solidFill>
+                <a:latin typeface="Consolas" panose="020B0609020204030204" pitchFamily="49" charset="0"/>
+              </a:rPr>
+              <a:t> somar(</a:t>
+            </a:r>
+            <a:r>
+              <a:rPr lang="pt-BR" sz="1400" b="1" dirty="0" err="1">
+                <a:solidFill>
+                  <a:srgbClr val="7F0055"/>
+                </a:solidFill>
+                <a:latin typeface="Consolas" panose="020B0609020204030204" pitchFamily="49" charset="0"/>
+              </a:rPr>
+              <a:t>double</a:t>
+            </a:r>
+            <a:r>
+              <a:rPr lang="pt-BR" sz="1400" dirty="0">
+                <a:solidFill>
+                  <a:srgbClr val="000000"/>
+                </a:solidFill>
+                <a:latin typeface="Consolas" panose="020B0609020204030204" pitchFamily="49" charset="0"/>
+              </a:rPr>
+              <a:t> </a:t>
+            </a:r>
+            <a:r>
+              <a:rPr lang="pt-BR" sz="1400" dirty="0">
+                <a:solidFill>
+                  <a:srgbClr val="6A3E3E"/>
+                </a:solidFill>
+                <a:latin typeface="Consolas" panose="020B0609020204030204" pitchFamily="49" charset="0"/>
+              </a:rPr>
+              <a:t>a</a:t>
+            </a:r>
+            <a:r>
+              <a:rPr lang="pt-BR" sz="1400" dirty="0">
+                <a:solidFill>
+                  <a:srgbClr val="000000"/>
+                </a:solidFill>
+                <a:latin typeface="Consolas" panose="020B0609020204030204" pitchFamily="49" charset="0"/>
+              </a:rPr>
+              <a:t>, </a:t>
+            </a:r>
+            <a:r>
+              <a:rPr lang="pt-BR" sz="1400" b="1" dirty="0" err="1">
+                <a:solidFill>
+                  <a:srgbClr val="7F0055"/>
+                </a:solidFill>
+                <a:latin typeface="Consolas" panose="020B0609020204030204" pitchFamily="49" charset="0"/>
+              </a:rPr>
+              <a:t>double</a:t>
+            </a:r>
+            <a:r>
+              <a:rPr lang="pt-BR" sz="1400" dirty="0">
+                <a:solidFill>
+                  <a:srgbClr val="000000"/>
+                </a:solidFill>
+                <a:latin typeface="Consolas" panose="020B0609020204030204" pitchFamily="49" charset="0"/>
+              </a:rPr>
+              <a:t> </a:t>
+            </a:r>
+            <a:r>
+              <a:rPr lang="pt-BR" sz="1400" dirty="0">
+                <a:solidFill>
+                  <a:srgbClr val="6A3E3E"/>
+                </a:solidFill>
+                <a:latin typeface="Consolas" panose="020B0609020204030204" pitchFamily="49" charset="0"/>
+              </a:rPr>
+              <a:t>b</a:t>
+            </a:r>
+            <a:r>
+              <a:rPr lang="pt-BR" sz="1400" dirty="0">
+                <a:solidFill>
+                  <a:srgbClr val="000000"/>
+                </a:solidFill>
+                <a:latin typeface="Consolas" panose="020B0609020204030204" pitchFamily="49" charset="0"/>
+              </a:rPr>
+              <a:t>) {</a:t>
+            </a:r>
+          </a:p>
+          <a:p>
+            <a:pPr indent="914400">
+              <a:spcBef>
+                <a:spcPts val="150"/>
+              </a:spcBef>
+              <a:spcAft>
+                <a:spcPts val="150"/>
+              </a:spcAft>
+            </a:pPr>
+            <a:r>
+              <a:rPr lang="pt-BR" sz="1400" b="1" dirty="0" err="1">
+                <a:solidFill>
+                  <a:srgbClr val="7F0055"/>
+                </a:solidFill>
+                <a:latin typeface="Consolas" panose="020B0609020204030204" pitchFamily="49" charset="0"/>
+              </a:rPr>
+              <a:t>return</a:t>
+            </a:r>
+            <a:r>
+              <a:rPr lang="pt-BR" sz="1400" dirty="0">
+                <a:solidFill>
+                  <a:srgbClr val="000000"/>
+                </a:solidFill>
+                <a:latin typeface="Consolas" panose="020B0609020204030204" pitchFamily="49" charset="0"/>
+              </a:rPr>
+              <a:t> </a:t>
+            </a:r>
+            <a:r>
+              <a:rPr lang="pt-BR" sz="1400" dirty="0">
+                <a:solidFill>
+                  <a:srgbClr val="6A3E3E"/>
+                </a:solidFill>
+                <a:latin typeface="Consolas" panose="020B0609020204030204" pitchFamily="49" charset="0"/>
+              </a:rPr>
+              <a:t>a</a:t>
+            </a:r>
+            <a:r>
+              <a:rPr lang="pt-BR" sz="1400" dirty="0">
+                <a:solidFill>
+                  <a:srgbClr val="000000"/>
+                </a:solidFill>
+                <a:latin typeface="Consolas" panose="020B0609020204030204" pitchFamily="49" charset="0"/>
+              </a:rPr>
+              <a:t> + </a:t>
+            </a:r>
+            <a:r>
+              <a:rPr lang="pt-BR" sz="1400" dirty="0">
+                <a:solidFill>
+                  <a:srgbClr val="6A3E3E"/>
+                </a:solidFill>
+                <a:latin typeface="Consolas" panose="020B0609020204030204" pitchFamily="49" charset="0"/>
+              </a:rPr>
+              <a:t>b</a:t>
+            </a:r>
+            <a:r>
+              <a:rPr lang="pt-BR" sz="1400" dirty="0">
+                <a:solidFill>
+                  <a:srgbClr val="000000"/>
+                </a:solidFill>
+                <a:latin typeface="Consolas" panose="020B0609020204030204" pitchFamily="49" charset="0"/>
+              </a:rPr>
+              <a:t>;</a:t>
+            </a:r>
+          </a:p>
+          <a:p>
+            <a:pPr indent="457200">
+              <a:spcBef>
+                <a:spcPts val="150"/>
+              </a:spcBef>
+              <a:spcAft>
+                <a:spcPts val="150"/>
+              </a:spcAft>
+            </a:pPr>
+            <a:r>
+              <a:rPr lang="pt-BR" sz="1400" dirty="0">
+                <a:solidFill>
+                  <a:srgbClr val="000000"/>
+                </a:solidFill>
+                <a:latin typeface="Consolas" panose="020B0609020204030204" pitchFamily="49" charset="0"/>
+              </a:rPr>
+              <a:t>}</a:t>
+            </a:r>
+          </a:p>
+          <a:p>
+            <a:pPr indent="457200">
+              <a:spcBef>
+                <a:spcPts val="150"/>
+              </a:spcBef>
+              <a:spcAft>
+                <a:spcPts val="150"/>
+              </a:spcAft>
+            </a:pPr>
+            <a:r>
+              <a:rPr lang="pt-BR" sz="1400" b="1" dirty="0" err="1">
+                <a:solidFill>
+                  <a:srgbClr val="7F0055"/>
+                </a:solidFill>
+                <a:latin typeface="Consolas" panose="020B0609020204030204" pitchFamily="49" charset="0"/>
+              </a:rPr>
+              <a:t>public</a:t>
+            </a:r>
+            <a:r>
+              <a:rPr lang="pt-BR" sz="1400" dirty="0">
+                <a:solidFill>
+                  <a:srgbClr val="000000"/>
+                </a:solidFill>
+                <a:latin typeface="Consolas" panose="020B0609020204030204" pitchFamily="49" charset="0"/>
+              </a:rPr>
+              <a:t> </a:t>
+            </a:r>
+            <a:r>
+              <a:rPr lang="pt-BR" sz="1400" b="1" dirty="0" err="1">
+                <a:solidFill>
+                  <a:srgbClr val="7F0055"/>
+                </a:solidFill>
+                <a:latin typeface="Consolas" panose="020B0609020204030204" pitchFamily="49" charset="0"/>
+              </a:rPr>
+              <a:t>int</a:t>
+            </a:r>
+            <a:r>
+              <a:rPr lang="pt-BR" sz="1400" dirty="0">
+                <a:solidFill>
+                  <a:srgbClr val="000000"/>
+                </a:solidFill>
+                <a:latin typeface="Consolas" panose="020B0609020204030204" pitchFamily="49" charset="0"/>
+              </a:rPr>
+              <a:t> somar(</a:t>
+            </a:r>
+            <a:r>
+              <a:rPr lang="pt-BR" sz="1400" b="1" dirty="0" err="1">
+                <a:solidFill>
+                  <a:srgbClr val="7F0055"/>
+                </a:solidFill>
+                <a:latin typeface="Consolas" panose="020B0609020204030204" pitchFamily="49" charset="0"/>
+              </a:rPr>
+              <a:t>int</a:t>
+            </a:r>
+            <a:r>
+              <a:rPr lang="pt-BR" sz="1400" dirty="0">
+                <a:solidFill>
+                  <a:srgbClr val="000000"/>
+                </a:solidFill>
+                <a:latin typeface="Consolas" panose="020B0609020204030204" pitchFamily="49" charset="0"/>
+              </a:rPr>
+              <a:t> </a:t>
+            </a:r>
+            <a:r>
+              <a:rPr lang="pt-BR" sz="1400" dirty="0">
+                <a:solidFill>
+                  <a:srgbClr val="6A3E3E"/>
+                </a:solidFill>
+                <a:latin typeface="Consolas" panose="020B0609020204030204" pitchFamily="49" charset="0"/>
+              </a:rPr>
+              <a:t>a</a:t>
+            </a:r>
+            <a:r>
+              <a:rPr lang="pt-BR" sz="1400" dirty="0">
+                <a:solidFill>
+                  <a:srgbClr val="000000"/>
+                </a:solidFill>
+                <a:latin typeface="Consolas" panose="020B0609020204030204" pitchFamily="49" charset="0"/>
+              </a:rPr>
+              <a:t>, </a:t>
+            </a:r>
+            <a:r>
+              <a:rPr lang="pt-BR" sz="1400" b="1" dirty="0" err="1">
+                <a:solidFill>
+                  <a:srgbClr val="7F0055"/>
+                </a:solidFill>
+                <a:latin typeface="Consolas" panose="020B0609020204030204" pitchFamily="49" charset="0"/>
+              </a:rPr>
+              <a:t>int</a:t>
+            </a:r>
+            <a:r>
+              <a:rPr lang="pt-BR" sz="1400" dirty="0">
+                <a:solidFill>
+                  <a:srgbClr val="000000"/>
+                </a:solidFill>
+                <a:latin typeface="Consolas" panose="020B0609020204030204" pitchFamily="49" charset="0"/>
+              </a:rPr>
+              <a:t> </a:t>
+            </a:r>
+            <a:r>
+              <a:rPr lang="pt-BR" sz="1400" dirty="0">
+                <a:solidFill>
+                  <a:srgbClr val="6A3E3E"/>
+                </a:solidFill>
+                <a:latin typeface="Consolas" panose="020B0609020204030204" pitchFamily="49" charset="0"/>
+              </a:rPr>
+              <a:t>b</a:t>
+            </a:r>
+            <a:r>
+              <a:rPr lang="pt-BR" sz="1400" dirty="0">
+                <a:solidFill>
+                  <a:srgbClr val="000000"/>
+                </a:solidFill>
+                <a:latin typeface="Consolas" panose="020B0609020204030204" pitchFamily="49" charset="0"/>
+              </a:rPr>
+              <a:t>, </a:t>
+            </a:r>
+            <a:r>
+              <a:rPr lang="pt-BR" sz="1400" b="1" dirty="0" err="1">
+                <a:solidFill>
+                  <a:srgbClr val="7F0055"/>
+                </a:solidFill>
+                <a:latin typeface="Consolas" panose="020B0609020204030204" pitchFamily="49" charset="0"/>
+              </a:rPr>
+              <a:t>int</a:t>
+            </a:r>
+            <a:r>
+              <a:rPr lang="pt-BR" sz="1400" dirty="0">
+                <a:solidFill>
+                  <a:srgbClr val="000000"/>
+                </a:solidFill>
+                <a:latin typeface="Consolas" panose="020B0609020204030204" pitchFamily="49" charset="0"/>
+              </a:rPr>
+              <a:t> </a:t>
+            </a:r>
+            <a:r>
+              <a:rPr lang="pt-BR" sz="1400" dirty="0">
+                <a:solidFill>
+                  <a:srgbClr val="6A3E3E"/>
+                </a:solidFill>
+                <a:latin typeface="Consolas" panose="020B0609020204030204" pitchFamily="49" charset="0"/>
+              </a:rPr>
+              <a:t>c</a:t>
+            </a:r>
+            <a:r>
+              <a:rPr lang="pt-BR" sz="1400" dirty="0">
+                <a:solidFill>
+                  <a:srgbClr val="000000"/>
+                </a:solidFill>
+                <a:latin typeface="Consolas" panose="020B0609020204030204" pitchFamily="49" charset="0"/>
+              </a:rPr>
+              <a:t>) {</a:t>
+            </a:r>
+          </a:p>
+          <a:p>
+            <a:pPr indent="914400">
+              <a:spcBef>
+                <a:spcPts val="150"/>
+              </a:spcBef>
+              <a:spcAft>
+                <a:spcPts val="150"/>
+              </a:spcAft>
+            </a:pPr>
+            <a:r>
+              <a:rPr lang="pt-BR" sz="1400" b="1" dirty="0" err="1">
+                <a:solidFill>
+                  <a:srgbClr val="7F0055"/>
+                </a:solidFill>
+                <a:latin typeface="Consolas" panose="020B0609020204030204" pitchFamily="49" charset="0"/>
+              </a:rPr>
+              <a:t>return</a:t>
+            </a:r>
+            <a:r>
+              <a:rPr lang="pt-BR" sz="1400" dirty="0">
+                <a:solidFill>
+                  <a:srgbClr val="000000"/>
+                </a:solidFill>
+                <a:latin typeface="Consolas" panose="020B0609020204030204" pitchFamily="49" charset="0"/>
+              </a:rPr>
+              <a:t> </a:t>
+            </a:r>
+            <a:r>
+              <a:rPr lang="pt-BR" sz="1400" dirty="0">
+                <a:solidFill>
+                  <a:srgbClr val="6A3E3E"/>
+                </a:solidFill>
+                <a:latin typeface="Consolas" panose="020B0609020204030204" pitchFamily="49" charset="0"/>
+              </a:rPr>
+              <a:t>a</a:t>
+            </a:r>
+            <a:r>
+              <a:rPr lang="pt-BR" sz="1400" dirty="0">
+                <a:solidFill>
+                  <a:srgbClr val="000000"/>
+                </a:solidFill>
+                <a:latin typeface="Consolas" panose="020B0609020204030204" pitchFamily="49" charset="0"/>
+              </a:rPr>
+              <a:t> + </a:t>
+            </a:r>
+            <a:r>
+              <a:rPr lang="pt-BR" sz="1400" dirty="0">
+                <a:solidFill>
+                  <a:srgbClr val="6A3E3E"/>
+                </a:solidFill>
+                <a:latin typeface="Consolas" panose="020B0609020204030204" pitchFamily="49" charset="0"/>
+              </a:rPr>
+              <a:t>b</a:t>
+            </a:r>
+            <a:r>
+              <a:rPr lang="pt-BR" sz="1400" dirty="0">
+                <a:solidFill>
+                  <a:srgbClr val="000000"/>
+                </a:solidFill>
+                <a:latin typeface="Consolas" panose="020B0609020204030204" pitchFamily="49" charset="0"/>
+              </a:rPr>
+              <a:t> + </a:t>
+            </a:r>
+            <a:r>
+              <a:rPr lang="pt-BR" sz="1400" dirty="0">
+                <a:solidFill>
+                  <a:srgbClr val="6A3E3E"/>
+                </a:solidFill>
+                <a:latin typeface="Consolas" panose="020B0609020204030204" pitchFamily="49" charset="0"/>
+              </a:rPr>
+              <a:t>c</a:t>
+            </a:r>
+            <a:r>
+              <a:rPr lang="pt-BR" sz="1400" dirty="0">
+                <a:solidFill>
+                  <a:srgbClr val="000000"/>
+                </a:solidFill>
+                <a:latin typeface="Consolas" panose="020B0609020204030204" pitchFamily="49" charset="0"/>
+              </a:rPr>
+              <a:t>;</a:t>
+            </a:r>
+          </a:p>
+          <a:p>
+            <a:pPr indent="457200">
+              <a:spcBef>
+                <a:spcPts val="150"/>
+              </a:spcBef>
+              <a:spcAft>
+                <a:spcPts val="150"/>
+              </a:spcAft>
+            </a:pPr>
+            <a:r>
+              <a:rPr lang="pt-BR" sz="1400" dirty="0">
+                <a:solidFill>
+                  <a:srgbClr val="000000"/>
+                </a:solidFill>
+                <a:latin typeface="Consolas" panose="020B0609020204030204" pitchFamily="49" charset="0"/>
+              </a:rPr>
+              <a:t>}</a:t>
+            </a:r>
+          </a:p>
+          <a:p>
+            <a:pPr>
+              <a:spcBef>
+                <a:spcPts val="150"/>
+              </a:spcBef>
+              <a:spcAft>
+                <a:spcPts val="150"/>
+              </a:spcAft>
+            </a:pPr>
+            <a:r>
+              <a:rPr lang="pt-BR" sz="1400" dirty="0">
+                <a:solidFill>
+                  <a:srgbClr val="000000"/>
+                </a:solidFill>
+                <a:latin typeface="Consolas" panose="020B0609020204030204" pitchFamily="49" charset="0"/>
+              </a:rPr>
+              <a:t>}</a:t>
+            </a:r>
+          </a:p>
+        </p:txBody>
+      </p:sp>
+      <p:sp>
+        <p:nvSpPr>
+          <p:cNvPr id="5" name="CaixaDeTexto 4">
+            <a:extLst>
+              <a:ext uri="{FF2B5EF4-FFF2-40B4-BE49-F238E27FC236}">
+                <a16:creationId xmlns:a16="http://schemas.microsoft.com/office/drawing/2014/main" id="{84F9EC0C-06FF-4414-87FA-9B60D0B83818}"/>
+              </a:ext>
+            </a:extLst>
+          </p:cNvPr>
+          <p:cNvSpPr txBox="1"/>
+          <p:nvPr/>
+        </p:nvSpPr>
+        <p:spPr>
+          <a:xfrm>
+            <a:off x="1897943" y="2514600"/>
+            <a:ext cx="2607734" cy="369332"/>
+          </a:xfrm>
+          <a:prstGeom prst="rect">
+            <a:avLst/>
+          </a:prstGeom>
+          <a:noFill/>
+        </p:spPr>
+        <p:txBody>
+          <a:bodyPr wrap="square" rtlCol="0">
+            <a:spAutoFit/>
+          </a:bodyPr>
+          <a:lstStyle/>
+          <a:p>
+            <a:pPr algn="ctr"/>
+            <a:r>
+              <a:rPr lang="pt-BR" dirty="0">
+                <a:latin typeface="Times New Roman" panose="02020603050405020304" pitchFamily="18" charset="0"/>
+                <a:cs typeface="Times New Roman" panose="02020603050405020304" pitchFamily="18" charset="0"/>
+              </a:rPr>
+              <a:t>Sobrecarga</a:t>
+            </a:r>
+          </a:p>
+        </p:txBody>
+      </p:sp>
+      <p:sp>
+        <p:nvSpPr>
+          <p:cNvPr id="6" name="Retângulo 5">
+            <a:extLst>
+              <a:ext uri="{FF2B5EF4-FFF2-40B4-BE49-F238E27FC236}">
+                <a16:creationId xmlns:a16="http://schemas.microsoft.com/office/drawing/2014/main" id="{92256B6E-0262-418B-82DC-A9263E124FF3}"/>
+              </a:ext>
+            </a:extLst>
+          </p:cNvPr>
+          <p:cNvSpPr/>
+          <p:nvPr/>
+        </p:nvSpPr>
+        <p:spPr>
+          <a:xfrm>
+            <a:off x="6403622" y="3028407"/>
+            <a:ext cx="4936067" cy="3241913"/>
+          </a:xfrm>
+          <a:prstGeom prst="rect">
+            <a:avLst/>
+          </a:prstGeom>
+        </p:spPr>
+        <p:txBody>
+          <a:bodyPr wrap="square">
+            <a:spAutoFit/>
+          </a:bodyPr>
+          <a:lstStyle/>
+          <a:p>
+            <a:pPr>
+              <a:spcBef>
+                <a:spcPts val="150"/>
+              </a:spcBef>
+              <a:spcAft>
+                <a:spcPts val="150"/>
+              </a:spcAft>
+            </a:pPr>
+            <a:r>
+              <a:rPr lang="pt-BR" sz="1400" b="1" dirty="0" err="1">
+                <a:solidFill>
+                  <a:srgbClr val="7F0055"/>
+                </a:solidFill>
+                <a:latin typeface="Consolas" panose="020B0609020204030204" pitchFamily="49" charset="0"/>
+              </a:rPr>
+              <a:t>class</a:t>
+            </a:r>
+            <a:r>
+              <a:rPr lang="pt-BR" sz="1400" dirty="0">
+                <a:solidFill>
+                  <a:srgbClr val="000000"/>
+                </a:solidFill>
+                <a:latin typeface="Consolas" panose="020B0609020204030204" pitchFamily="49" charset="0"/>
+              </a:rPr>
+              <a:t> Animal {</a:t>
+            </a:r>
+          </a:p>
+          <a:p>
+            <a:pPr indent="457200">
+              <a:spcBef>
+                <a:spcPts val="150"/>
+              </a:spcBef>
+              <a:spcAft>
+                <a:spcPts val="150"/>
+              </a:spcAft>
+            </a:pPr>
+            <a:r>
+              <a:rPr lang="pt-BR" sz="1400" b="1" dirty="0" err="1">
+                <a:solidFill>
+                  <a:srgbClr val="7F0055"/>
+                </a:solidFill>
+                <a:latin typeface="Consolas" panose="020B0609020204030204" pitchFamily="49" charset="0"/>
+              </a:rPr>
+              <a:t>public</a:t>
+            </a:r>
+            <a:r>
+              <a:rPr lang="pt-BR" sz="1400" dirty="0">
+                <a:solidFill>
+                  <a:srgbClr val="000000"/>
+                </a:solidFill>
+                <a:latin typeface="Consolas" panose="020B0609020204030204" pitchFamily="49" charset="0"/>
+              </a:rPr>
+              <a:t> </a:t>
+            </a:r>
+            <a:r>
+              <a:rPr lang="pt-BR" sz="1400" b="1" dirty="0" err="1">
+                <a:solidFill>
+                  <a:srgbClr val="7F0055"/>
+                </a:solidFill>
+                <a:latin typeface="Consolas" panose="020B0609020204030204" pitchFamily="49" charset="0"/>
+              </a:rPr>
+              <a:t>void</a:t>
+            </a:r>
+            <a:r>
+              <a:rPr lang="pt-BR" sz="1400" dirty="0">
+                <a:solidFill>
+                  <a:srgbClr val="000000"/>
+                </a:solidFill>
+                <a:latin typeface="Consolas" panose="020B0609020204030204" pitchFamily="49" charset="0"/>
+              </a:rPr>
+              <a:t> </a:t>
+            </a:r>
+            <a:r>
+              <a:rPr lang="pt-BR" sz="1400" dirty="0" err="1">
+                <a:solidFill>
+                  <a:srgbClr val="000000"/>
+                </a:solidFill>
+                <a:latin typeface="Consolas" panose="020B0609020204030204" pitchFamily="49" charset="0"/>
+              </a:rPr>
+              <a:t>emitirSom</a:t>
+            </a:r>
+            <a:r>
+              <a:rPr lang="pt-BR" sz="1400" dirty="0">
+                <a:solidFill>
+                  <a:srgbClr val="000000"/>
+                </a:solidFill>
+                <a:latin typeface="Consolas" panose="020B0609020204030204" pitchFamily="49" charset="0"/>
+              </a:rPr>
+              <a:t>() {</a:t>
+            </a:r>
+          </a:p>
+          <a:p>
+            <a:pPr indent="914400">
+              <a:spcBef>
+                <a:spcPts val="150"/>
+              </a:spcBef>
+              <a:spcAft>
+                <a:spcPts val="150"/>
+              </a:spcAft>
+            </a:pPr>
+            <a:r>
+              <a:rPr lang="pt-BR" sz="1400" dirty="0" err="1">
+                <a:solidFill>
+                  <a:srgbClr val="000000"/>
+                </a:solidFill>
+                <a:latin typeface="Consolas" panose="020B0609020204030204" pitchFamily="49" charset="0"/>
+              </a:rPr>
+              <a:t>System.</a:t>
+            </a:r>
+            <a:r>
+              <a:rPr lang="pt-BR" sz="1400" b="1" i="1" dirty="0" err="1">
+                <a:solidFill>
+                  <a:srgbClr val="0000C0"/>
+                </a:solidFill>
+                <a:latin typeface="Consolas" panose="020B0609020204030204" pitchFamily="49" charset="0"/>
+              </a:rPr>
+              <a:t>out</a:t>
+            </a:r>
+            <a:r>
+              <a:rPr lang="pt-BR" sz="1400" dirty="0" err="1">
+                <a:solidFill>
+                  <a:srgbClr val="000000"/>
+                </a:solidFill>
+                <a:latin typeface="Consolas" panose="020B0609020204030204" pitchFamily="49" charset="0"/>
+              </a:rPr>
+              <a:t>.println</a:t>
+            </a:r>
+            <a:r>
+              <a:rPr lang="pt-BR" sz="1400" dirty="0">
+                <a:solidFill>
+                  <a:srgbClr val="000000"/>
+                </a:solidFill>
+                <a:latin typeface="Consolas" panose="020B0609020204030204" pitchFamily="49" charset="0"/>
+              </a:rPr>
+              <a:t>(</a:t>
+            </a:r>
+            <a:r>
+              <a:rPr lang="pt-BR" sz="1400" dirty="0">
+                <a:solidFill>
+                  <a:srgbClr val="2A00FF"/>
+                </a:solidFill>
+                <a:latin typeface="Consolas" panose="020B0609020204030204" pitchFamily="49" charset="0"/>
+              </a:rPr>
+              <a:t>"Animal faz som"</a:t>
+            </a:r>
+            <a:r>
+              <a:rPr lang="pt-BR" sz="1400" dirty="0">
+                <a:solidFill>
+                  <a:srgbClr val="000000"/>
+                </a:solidFill>
+                <a:latin typeface="Consolas" panose="020B0609020204030204" pitchFamily="49" charset="0"/>
+              </a:rPr>
+              <a:t>);</a:t>
+            </a:r>
+          </a:p>
+          <a:p>
+            <a:pPr indent="457200">
+              <a:spcBef>
+                <a:spcPts val="150"/>
+              </a:spcBef>
+              <a:spcAft>
+                <a:spcPts val="150"/>
+              </a:spcAft>
+            </a:pPr>
+            <a:r>
+              <a:rPr lang="pt-BR" sz="1400" dirty="0">
+                <a:solidFill>
+                  <a:srgbClr val="000000"/>
+                </a:solidFill>
+                <a:latin typeface="Consolas" panose="020B0609020204030204" pitchFamily="49" charset="0"/>
+              </a:rPr>
+              <a:t>}</a:t>
+            </a:r>
+          </a:p>
+          <a:p>
+            <a:pPr>
+              <a:spcBef>
+                <a:spcPts val="150"/>
+              </a:spcBef>
+              <a:spcAft>
+                <a:spcPts val="150"/>
+              </a:spcAft>
+            </a:pPr>
+            <a:r>
+              <a:rPr lang="pt-BR" sz="1400" dirty="0">
+                <a:solidFill>
+                  <a:srgbClr val="000000"/>
+                </a:solidFill>
+                <a:latin typeface="Consolas" panose="020B0609020204030204" pitchFamily="49" charset="0"/>
+              </a:rPr>
+              <a:t>}</a:t>
+            </a:r>
+          </a:p>
+          <a:p>
+            <a:pPr>
+              <a:spcBef>
+                <a:spcPts val="150"/>
+              </a:spcBef>
+              <a:spcAft>
+                <a:spcPts val="150"/>
+              </a:spcAft>
+            </a:pPr>
+            <a:endParaRPr lang="pt-BR" sz="1400" dirty="0">
+              <a:solidFill>
+                <a:srgbClr val="000000"/>
+              </a:solidFill>
+              <a:latin typeface="Consolas" panose="020B0609020204030204" pitchFamily="49" charset="0"/>
+            </a:endParaRPr>
+          </a:p>
+          <a:p>
+            <a:pPr>
+              <a:spcBef>
+                <a:spcPts val="150"/>
+              </a:spcBef>
+              <a:spcAft>
+                <a:spcPts val="150"/>
+              </a:spcAft>
+            </a:pPr>
+            <a:r>
+              <a:rPr lang="pt-BR" sz="1400" b="1" dirty="0" err="1">
+                <a:solidFill>
+                  <a:srgbClr val="7F0055"/>
+                </a:solidFill>
+                <a:latin typeface="Consolas" panose="020B0609020204030204" pitchFamily="49" charset="0"/>
+              </a:rPr>
+              <a:t>class</a:t>
+            </a:r>
+            <a:r>
+              <a:rPr lang="pt-BR" sz="1400" dirty="0">
+                <a:solidFill>
+                  <a:srgbClr val="000000"/>
+                </a:solidFill>
+                <a:latin typeface="Consolas" panose="020B0609020204030204" pitchFamily="49" charset="0"/>
+              </a:rPr>
+              <a:t> Gato </a:t>
+            </a:r>
+            <a:r>
+              <a:rPr lang="pt-BR" sz="1400" b="1" dirty="0" err="1">
+                <a:solidFill>
+                  <a:srgbClr val="7F0055"/>
+                </a:solidFill>
+                <a:latin typeface="Consolas" panose="020B0609020204030204" pitchFamily="49" charset="0"/>
+              </a:rPr>
+              <a:t>extends</a:t>
+            </a:r>
+            <a:r>
+              <a:rPr lang="pt-BR" sz="1400" dirty="0">
+                <a:solidFill>
+                  <a:srgbClr val="000000"/>
+                </a:solidFill>
+                <a:latin typeface="Consolas" panose="020B0609020204030204" pitchFamily="49" charset="0"/>
+              </a:rPr>
+              <a:t> Animal {</a:t>
+            </a:r>
+          </a:p>
+          <a:p>
+            <a:pPr indent="457200">
+              <a:spcBef>
+                <a:spcPts val="150"/>
+              </a:spcBef>
+              <a:spcAft>
+                <a:spcPts val="150"/>
+              </a:spcAft>
+            </a:pPr>
+            <a:r>
+              <a:rPr lang="pt-BR" sz="1400" dirty="0">
+                <a:solidFill>
+                  <a:srgbClr val="646464"/>
+                </a:solidFill>
+                <a:latin typeface="Consolas" panose="020B0609020204030204" pitchFamily="49" charset="0"/>
+              </a:rPr>
+              <a:t>@</a:t>
+            </a:r>
+            <a:r>
+              <a:rPr lang="pt-BR" sz="1400" dirty="0" err="1">
+                <a:solidFill>
+                  <a:srgbClr val="646464"/>
+                </a:solidFill>
+                <a:latin typeface="Consolas" panose="020B0609020204030204" pitchFamily="49" charset="0"/>
+              </a:rPr>
+              <a:t>Override</a:t>
+            </a:r>
+            <a:endParaRPr lang="pt-BR" sz="1400" dirty="0">
+              <a:solidFill>
+                <a:srgbClr val="000000"/>
+              </a:solidFill>
+              <a:latin typeface="Consolas" panose="020B0609020204030204" pitchFamily="49" charset="0"/>
+            </a:endParaRPr>
+          </a:p>
+          <a:p>
+            <a:pPr indent="457200">
+              <a:spcBef>
+                <a:spcPts val="150"/>
+              </a:spcBef>
+              <a:spcAft>
+                <a:spcPts val="150"/>
+              </a:spcAft>
+            </a:pPr>
+            <a:r>
+              <a:rPr lang="pt-BR" sz="1400" b="1" dirty="0" err="1">
+                <a:solidFill>
+                  <a:srgbClr val="7F0055"/>
+                </a:solidFill>
+                <a:latin typeface="Consolas" panose="020B0609020204030204" pitchFamily="49" charset="0"/>
+              </a:rPr>
+              <a:t>public</a:t>
+            </a:r>
+            <a:r>
+              <a:rPr lang="pt-BR" sz="1400" dirty="0">
+                <a:solidFill>
+                  <a:srgbClr val="000000"/>
+                </a:solidFill>
+                <a:latin typeface="Consolas" panose="020B0609020204030204" pitchFamily="49" charset="0"/>
+              </a:rPr>
+              <a:t> </a:t>
+            </a:r>
+            <a:r>
+              <a:rPr lang="pt-BR" sz="1400" b="1" dirty="0" err="1">
+                <a:solidFill>
+                  <a:srgbClr val="7F0055"/>
+                </a:solidFill>
+                <a:latin typeface="Consolas" panose="020B0609020204030204" pitchFamily="49" charset="0"/>
+              </a:rPr>
+              <a:t>void</a:t>
+            </a:r>
+            <a:r>
+              <a:rPr lang="pt-BR" sz="1400" dirty="0">
+                <a:solidFill>
+                  <a:srgbClr val="000000"/>
+                </a:solidFill>
+                <a:latin typeface="Consolas" panose="020B0609020204030204" pitchFamily="49" charset="0"/>
+              </a:rPr>
+              <a:t> </a:t>
+            </a:r>
+            <a:r>
+              <a:rPr lang="pt-BR" sz="1400" dirty="0" err="1">
+                <a:solidFill>
+                  <a:srgbClr val="000000"/>
+                </a:solidFill>
+                <a:latin typeface="Consolas" panose="020B0609020204030204" pitchFamily="49" charset="0"/>
+              </a:rPr>
+              <a:t>emitirSom</a:t>
+            </a:r>
+            <a:r>
+              <a:rPr lang="pt-BR" sz="1400" dirty="0">
+                <a:solidFill>
+                  <a:srgbClr val="000000"/>
+                </a:solidFill>
+                <a:latin typeface="Consolas" panose="020B0609020204030204" pitchFamily="49" charset="0"/>
+              </a:rPr>
+              <a:t>() {</a:t>
+            </a:r>
+          </a:p>
+          <a:p>
+            <a:pPr indent="914400">
+              <a:spcBef>
+                <a:spcPts val="150"/>
+              </a:spcBef>
+              <a:spcAft>
+                <a:spcPts val="150"/>
+              </a:spcAft>
+            </a:pPr>
+            <a:r>
+              <a:rPr lang="pt-BR" sz="1400" dirty="0" err="1">
+                <a:solidFill>
+                  <a:srgbClr val="000000"/>
+                </a:solidFill>
+                <a:latin typeface="Consolas" panose="020B0609020204030204" pitchFamily="49" charset="0"/>
+              </a:rPr>
+              <a:t>System.</a:t>
+            </a:r>
+            <a:r>
+              <a:rPr lang="pt-BR" sz="1400" b="1" i="1" dirty="0" err="1">
+                <a:solidFill>
+                  <a:srgbClr val="0000C0"/>
+                </a:solidFill>
+                <a:latin typeface="Consolas" panose="020B0609020204030204" pitchFamily="49" charset="0"/>
+              </a:rPr>
+              <a:t>out</a:t>
+            </a:r>
+            <a:r>
+              <a:rPr lang="pt-BR" sz="1400" dirty="0" err="1">
+                <a:solidFill>
+                  <a:srgbClr val="000000"/>
+                </a:solidFill>
+                <a:latin typeface="Consolas" panose="020B0609020204030204" pitchFamily="49" charset="0"/>
+              </a:rPr>
+              <a:t>.println</a:t>
+            </a:r>
+            <a:r>
+              <a:rPr lang="pt-BR" sz="1400" dirty="0">
+                <a:solidFill>
+                  <a:srgbClr val="000000"/>
+                </a:solidFill>
+                <a:latin typeface="Consolas" panose="020B0609020204030204" pitchFamily="49" charset="0"/>
+              </a:rPr>
+              <a:t>(</a:t>
+            </a:r>
+            <a:r>
+              <a:rPr lang="pt-BR" sz="1400" dirty="0">
+                <a:solidFill>
+                  <a:srgbClr val="2A00FF"/>
+                </a:solidFill>
+                <a:latin typeface="Consolas" panose="020B0609020204030204" pitchFamily="49" charset="0"/>
+              </a:rPr>
+              <a:t>"Gato mia"</a:t>
+            </a:r>
+            <a:r>
+              <a:rPr lang="pt-BR" sz="1400" dirty="0">
+                <a:solidFill>
+                  <a:srgbClr val="000000"/>
+                </a:solidFill>
+                <a:latin typeface="Consolas" panose="020B0609020204030204" pitchFamily="49" charset="0"/>
+              </a:rPr>
+              <a:t>);</a:t>
+            </a:r>
+          </a:p>
+          <a:p>
+            <a:pPr indent="457200">
+              <a:spcBef>
+                <a:spcPts val="150"/>
+              </a:spcBef>
+              <a:spcAft>
+                <a:spcPts val="150"/>
+              </a:spcAft>
+            </a:pPr>
+            <a:r>
+              <a:rPr lang="pt-BR" sz="1400" dirty="0">
+                <a:solidFill>
+                  <a:srgbClr val="000000"/>
+                </a:solidFill>
+                <a:latin typeface="Consolas" panose="020B0609020204030204" pitchFamily="49" charset="0"/>
+              </a:rPr>
+              <a:t>}</a:t>
+            </a:r>
+          </a:p>
+          <a:p>
+            <a:pPr>
+              <a:spcBef>
+                <a:spcPts val="150"/>
+              </a:spcBef>
+              <a:spcAft>
+                <a:spcPts val="150"/>
+              </a:spcAft>
+            </a:pPr>
+            <a:r>
+              <a:rPr lang="pt-BR" sz="1400" dirty="0">
+                <a:solidFill>
+                  <a:srgbClr val="000000"/>
+                </a:solidFill>
+                <a:latin typeface="Consolas" panose="020B0609020204030204" pitchFamily="49" charset="0"/>
+              </a:rPr>
+              <a:t>}</a:t>
+            </a:r>
+          </a:p>
+        </p:txBody>
+      </p:sp>
+      <p:sp>
+        <p:nvSpPr>
+          <p:cNvPr id="7" name="CaixaDeTexto 6">
+            <a:extLst>
+              <a:ext uri="{FF2B5EF4-FFF2-40B4-BE49-F238E27FC236}">
+                <a16:creationId xmlns:a16="http://schemas.microsoft.com/office/drawing/2014/main" id="{EB5AEC25-BA37-441D-87EC-8DE38AED57BF}"/>
+              </a:ext>
+            </a:extLst>
+          </p:cNvPr>
+          <p:cNvSpPr txBox="1"/>
+          <p:nvPr/>
+        </p:nvSpPr>
+        <p:spPr>
+          <a:xfrm>
+            <a:off x="7567788" y="2514600"/>
+            <a:ext cx="2607734" cy="369332"/>
+          </a:xfrm>
+          <a:prstGeom prst="rect">
+            <a:avLst/>
+          </a:prstGeom>
+          <a:noFill/>
+        </p:spPr>
+        <p:txBody>
+          <a:bodyPr wrap="square" rtlCol="0">
+            <a:spAutoFit/>
+          </a:bodyPr>
+          <a:lstStyle/>
+          <a:p>
+            <a:pPr algn="ctr"/>
+            <a:r>
+              <a:rPr lang="pt-BR" dirty="0">
+                <a:latin typeface="Times New Roman" panose="02020603050405020304" pitchFamily="18" charset="0"/>
+                <a:cs typeface="Times New Roman" panose="02020603050405020304" pitchFamily="18" charset="0"/>
+              </a:rPr>
+              <a:t>Sobrescrita</a:t>
+            </a:r>
+          </a:p>
+        </p:txBody>
+      </p:sp>
+    </p:spTree>
+    <p:extLst>
+      <p:ext uri="{BB962C8B-B14F-4D97-AF65-F5344CB8AC3E}">
+        <p14:creationId xmlns:p14="http://schemas.microsoft.com/office/powerpoint/2010/main" val="2967410373"/>
+      </p:ext>
+    </p:extLst>
+  </p:cSld>
+  <p:clrMapOvr>
+    <a:masterClrMapping/>
+  </p:clrMapOvr>
+</p:sld>
+</file>
+
+<file path=ppt/slides/slide11.xml><?xml version="1.0" encoding="utf-8"?>
+<p:sld xmlns:a="http://schemas.openxmlformats.org/drawingml/2006/main" xmlns:r="http://schemas.openxmlformats.org/officeDocument/2006/relationships" xmlns:p="http://schemas.openxmlformats.org/presentationml/2006/main">
+  <p:cSld>
+    <p:spTree>
+      <p:nvGrpSpPr>
+        <p:cNvPr id="1" name=""/>
+        <p:cNvGrpSpPr/>
+        <p:nvPr/>
+      </p:nvGrpSpPr>
+      <p:grpSpPr>
+        <a:xfrm>
+          <a:off x="0" y="0"/>
+          <a:ext cx="0" cy="0"/>
+          <a:chOff x="0" y="0"/>
+          <a:chExt cx="0" cy="0"/>
+        </a:xfrm>
+      </p:grpSpPr>
+      <p:sp>
+        <p:nvSpPr>
+          <p:cNvPr id="2" name="Título 1">
+            <a:extLst>
+              <a:ext uri="{FF2B5EF4-FFF2-40B4-BE49-F238E27FC236}">
+                <a16:creationId xmlns:a16="http://schemas.microsoft.com/office/drawing/2014/main" id="{98F55CF7-7DD5-478F-8B89-574E79ED855F}"/>
+              </a:ext>
+            </a:extLst>
+          </p:cNvPr>
+          <p:cNvSpPr>
+            <a:spLocks noGrp="1"/>
+          </p:cNvSpPr>
+          <p:nvPr>
+            <p:ph type="title"/>
+          </p:nvPr>
+        </p:nvSpPr>
+        <p:spPr/>
+        <p:txBody>
+          <a:bodyPr/>
+          <a:lstStyle/>
+          <a:p>
+            <a:r>
+              <a:rPr lang="pt-BR" dirty="0"/>
+              <a:t>Projeto: Sistema para Locadora de Veículos</a:t>
+            </a:r>
+          </a:p>
+        </p:txBody>
+      </p:sp>
+      <p:sp>
+        <p:nvSpPr>
+          <p:cNvPr id="3" name="Espaço Reservado para Conteúdo 2">
+            <a:extLst>
+              <a:ext uri="{FF2B5EF4-FFF2-40B4-BE49-F238E27FC236}">
+                <a16:creationId xmlns:a16="http://schemas.microsoft.com/office/drawing/2014/main" id="{EA887720-5C48-4CFE-9800-78B1959096A9}"/>
+              </a:ext>
+            </a:extLst>
+          </p:cNvPr>
+          <p:cNvSpPr>
+            <a:spLocks noGrp="1"/>
+          </p:cNvSpPr>
+          <p:nvPr>
+            <p:ph idx="1"/>
+          </p:nvPr>
+        </p:nvSpPr>
+        <p:spPr/>
+        <p:txBody>
+          <a:bodyPr/>
+          <a:lstStyle/>
+          <a:p>
+            <a:r>
+              <a:rPr lang="pt-BR" dirty="0"/>
+              <a:t>O projeto consiste em um sistema que gerencia os veículos disponíveis para aluguel em uma locadora. Cada veículo pode ter características específicas, como tipo (carro, moto ou caminhão), capacidade de passageiros, valor da diária, entre outros. O sistema deve permitir:</a:t>
+            </a:r>
+          </a:p>
+          <a:p>
+            <a:pPr marL="1028700" lvl="1" indent="-342900"/>
+            <a:r>
+              <a:rPr lang="pt-BR" dirty="0"/>
+              <a:t>Cadastro de diferentes tipos de veículos</a:t>
+            </a:r>
+          </a:p>
+          <a:p>
+            <a:pPr marL="1028700" lvl="1" indent="-342900"/>
+            <a:r>
+              <a:rPr lang="pt-BR" dirty="0"/>
+              <a:t>Cálculo automático do valor do aluguel com base no tipo do veículo e na quantidade de dias</a:t>
+            </a:r>
+          </a:p>
+          <a:p>
+            <a:pPr marL="1028700" lvl="1" indent="-342900"/>
+            <a:r>
+              <a:rPr lang="pt-BR" dirty="0"/>
+              <a:t>Aplicação de taxas adicionais específicas por tipo de veículo</a:t>
+            </a:r>
+          </a:p>
+          <a:p>
+            <a:pPr marL="1028700" lvl="1" indent="-342900"/>
+            <a:r>
+              <a:rPr lang="pt-BR" dirty="0"/>
+              <a:t>Exibição de detalhes dos veículos cadastrados</a:t>
+            </a:r>
+          </a:p>
+        </p:txBody>
+      </p:sp>
+    </p:spTree>
+    <p:extLst>
+      <p:ext uri="{BB962C8B-B14F-4D97-AF65-F5344CB8AC3E}">
+        <p14:creationId xmlns:p14="http://schemas.microsoft.com/office/powerpoint/2010/main" val="294714244"/>
+      </p:ext>
+    </p:extLst>
+  </p:cSld>
+  <p:clrMapOvr>
+    <a:masterClrMapping/>
+  </p:clrMapOvr>
+</p:sld>
+</file>
+
+<file path=ppt/slides/slide12.xml><?xml version="1.0" encoding="utf-8"?>
+<p:sld xmlns:a="http://schemas.openxmlformats.org/drawingml/2006/main" xmlns:r="http://schemas.openxmlformats.org/officeDocument/2006/relationships" xmlns:p="http://schemas.openxmlformats.org/presentationml/2006/main">
+  <p:cSld>
+    <p:spTree>
+      <p:nvGrpSpPr>
+        <p:cNvPr id="1" name=""/>
+        <p:cNvGrpSpPr/>
+        <p:nvPr/>
+      </p:nvGrpSpPr>
+      <p:grpSpPr>
+        <a:xfrm>
+          <a:off x="0" y="0"/>
+          <a:ext cx="0" cy="0"/>
+          <a:chOff x="0" y="0"/>
+          <a:chExt cx="0" cy="0"/>
+        </a:xfrm>
+      </p:grpSpPr>
+      <p:sp>
+        <p:nvSpPr>
+          <p:cNvPr id="2" name="Título 1">
+            <a:extLst>
+              <a:ext uri="{FF2B5EF4-FFF2-40B4-BE49-F238E27FC236}">
                 <a16:creationId xmlns:a16="http://schemas.microsoft.com/office/drawing/2014/main" id="{80F7C297-18B3-44FA-BBD3-B3907CCA9DF2}"/>
               </a:ext>
             </a:extLst>
@@ -4132,6 +5618,446 @@
           <p:cNvPr id="2" name="Título 1">
             <a:extLst>
               <a:ext uri="{FF2B5EF4-FFF2-40B4-BE49-F238E27FC236}">
+                <a16:creationId xmlns:a16="http://schemas.microsoft.com/office/drawing/2014/main" id="{743E1A3D-8224-6B58-B499-03B3300E8D64}"/>
+              </a:ext>
+            </a:extLst>
+          </p:cNvPr>
+          <p:cNvSpPr>
+            <a:spLocks noGrp="1"/>
+          </p:cNvSpPr>
+          <p:nvPr>
+            <p:ph type="title"/>
+          </p:nvPr>
+        </p:nvSpPr>
+        <p:spPr/>
+        <p:txBody>
+          <a:bodyPr/>
+          <a:lstStyle/>
+          <a:p>
+            <a:r>
+              <a:rPr lang="pt-BR" dirty="0"/>
+              <a:t>Herança</a:t>
+            </a:r>
+          </a:p>
+        </p:txBody>
+      </p:sp>
+      <p:sp>
+        <p:nvSpPr>
+          <p:cNvPr id="3" name="Espaço Reservado para Conteúdo 2">
+            <a:extLst>
+              <a:ext uri="{FF2B5EF4-FFF2-40B4-BE49-F238E27FC236}">
+                <a16:creationId xmlns:a16="http://schemas.microsoft.com/office/drawing/2014/main" id="{B5C9C7AF-FBE7-9F76-2FD3-EFFC2B323FAE}"/>
+              </a:ext>
+            </a:extLst>
+          </p:cNvPr>
+          <p:cNvSpPr>
+            <a:spLocks noGrp="1"/>
+          </p:cNvSpPr>
+          <p:nvPr>
+            <p:ph idx="1"/>
+          </p:nvPr>
+        </p:nvSpPr>
+        <p:spPr>
+          <a:xfrm>
+            <a:off x="592347" y="1844675"/>
+            <a:ext cx="11007306" cy="2092843"/>
+          </a:xfrm>
+        </p:spPr>
+        <p:txBody>
+          <a:bodyPr/>
+          <a:lstStyle/>
+          <a:p>
+            <a:r>
+              <a:rPr lang="pt-BR" dirty="0"/>
+              <a:t>Na aula de hoje iremos trabalhar com herança. Para isso, vamos criar um sistema de cadastro de animais para um pet shop, onde teremos três tipos de animais: cachorro, gato e peixe.</a:t>
+            </a:r>
+          </a:p>
+          <a:p>
+            <a:endParaRPr lang="pt-BR" dirty="0"/>
+          </a:p>
+          <a:p>
+            <a:r>
+              <a:rPr lang="pt-BR" dirty="0"/>
+              <a:t>Antes de começar a codificar, vamos imaginar quais atributos cachorros, gatos e peixes possuem.</a:t>
+            </a:r>
+          </a:p>
+        </p:txBody>
+      </p:sp>
+      <p:pic>
+        <p:nvPicPr>
+          <p:cNvPr id="7" name="Imagem 6" descr="Cachorro com a língua de fora&#10;&#10;O conteúdo gerado por IA pode estar incorreto.">
+            <a:extLst>
+              <a:ext uri="{FF2B5EF4-FFF2-40B4-BE49-F238E27FC236}">
+                <a16:creationId xmlns:a16="http://schemas.microsoft.com/office/drawing/2014/main" id="{74D650BA-2A2F-369D-6F84-A2FED6C05118}"/>
+              </a:ext>
+            </a:extLst>
+          </p:cNvPr>
+          <p:cNvPicPr>
+            <a:picLocks noChangeAspect="1"/>
+          </p:cNvPicPr>
+          <p:nvPr/>
+        </p:nvPicPr>
+        <p:blipFill>
+          <a:blip r:embed="rId2"/>
+          <a:stretch>
+            <a:fillRect/>
+          </a:stretch>
+        </p:blipFill>
+        <p:spPr>
+          <a:xfrm>
+            <a:off x="1454069" y="4299071"/>
+            <a:ext cx="1524213" cy="1848108"/>
+          </a:xfrm>
+          <a:prstGeom prst="rect">
+            <a:avLst/>
+          </a:prstGeom>
+        </p:spPr>
+      </p:pic>
+      <p:pic>
+        <p:nvPicPr>
+          <p:cNvPr id="11" name="Imagem 10" descr="Gato cinza e branco&#10;&#10;O conteúdo gerado por IA pode estar incorreto.">
+            <a:extLst>
+              <a:ext uri="{FF2B5EF4-FFF2-40B4-BE49-F238E27FC236}">
+                <a16:creationId xmlns:a16="http://schemas.microsoft.com/office/drawing/2014/main" id="{6422CA0A-9A19-F97F-7408-7C6F665ABDBB}"/>
+              </a:ext>
+            </a:extLst>
+          </p:cNvPr>
+          <p:cNvPicPr>
+            <a:picLocks noChangeAspect="1"/>
+          </p:cNvPicPr>
+          <p:nvPr/>
+        </p:nvPicPr>
+        <p:blipFill>
+          <a:blip r:embed="rId3"/>
+          <a:stretch>
+            <a:fillRect/>
+          </a:stretch>
+        </p:blipFill>
+        <p:spPr>
+          <a:xfrm>
+            <a:off x="4432351" y="4176704"/>
+            <a:ext cx="1677883" cy="2092843"/>
+          </a:xfrm>
+          <a:prstGeom prst="rect">
+            <a:avLst/>
+          </a:prstGeom>
+        </p:spPr>
+      </p:pic>
+      <p:pic>
+        <p:nvPicPr>
+          <p:cNvPr id="13" name="Imagem 12" descr="Peixe laranja e azul&#10;&#10;O conteúdo gerado por IA pode estar incorreto.">
+            <a:extLst>
+              <a:ext uri="{FF2B5EF4-FFF2-40B4-BE49-F238E27FC236}">
+                <a16:creationId xmlns:a16="http://schemas.microsoft.com/office/drawing/2014/main" id="{224E3E91-A251-D18B-D926-2220E4521180}"/>
+              </a:ext>
+            </a:extLst>
+          </p:cNvPr>
+          <p:cNvPicPr>
+            <a:picLocks noChangeAspect="1"/>
+          </p:cNvPicPr>
+          <p:nvPr/>
+        </p:nvPicPr>
+        <p:blipFill>
+          <a:blip r:embed="rId4">
+            <a:extLst>
+              <a:ext uri="{28A0092B-C50C-407E-A947-70E740481C1C}">
+                <a14:useLocalDpi xmlns:a14="http://schemas.microsoft.com/office/drawing/2010/main" val="0"/>
+              </a:ext>
+            </a:extLst>
+          </a:blip>
+          <a:stretch>
+            <a:fillRect/>
+          </a:stretch>
+        </p:blipFill>
+        <p:spPr>
+          <a:xfrm>
+            <a:off x="7564303" y="4358229"/>
+            <a:ext cx="3173629" cy="1729792"/>
+          </a:xfrm>
+          <a:prstGeom prst="rect">
+            <a:avLst/>
+          </a:prstGeom>
+        </p:spPr>
+      </p:pic>
+    </p:spTree>
+    <p:extLst>
+      <p:ext uri="{BB962C8B-B14F-4D97-AF65-F5344CB8AC3E}">
+        <p14:creationId xmlns:p14="http://schemas.microsoft.com/office/powerpoint/2010/main" val="3194458827"/>
+      </p:ext>
+    </p:extLst>
+  </p:cSld>
+  <p:clrMapOvr>
+    <a:masterClrMapping/>
+  </p:clrMapOvr>
+</p:sld>
+</file>
+
+<file path=ppt/slides/slide3.xml><?xml version="1.0" encoding="utf-8"?>
+<p:sld xmlns:a="http://schemas.openxmlformats.org/drawingml/2006/main" xmlns:r="http://schemas.openxmlformats.org/officeDocument/2006/relationships" xmlns:p="http://schemas.openxmlformats.org/presentationml/2006/main">
+  <p:cSld>
+    <p:spTree>
+      <p:nvGrpSpPr>
+        <p:cNvPr id="1" name=""/>
+        <p:cNvGrpSpPr/>
+        <p:nvPr/>
+      </p:nvGrpSpPr>
+      <p:grpSpPr>
+        <a:xfrm>
+          <a:off x="0" y="0"/>
+          <a:ext cx="0" cy="0"/>
+          <a:chOff x="0" y="0"/>
+          <a:chExt cx="0" cy="0"/>
+        </a:xfrm>
+      </p:grpSpPr>
+      <p:sp>
+        <p:nvSpPr>
+          <p:cNvPr id="2" name="Título 1">
+            <a:extLst>
+              <a:ext uri="{FF2B5EF4-FFF2-40B4-BE49-F238E27FC236}">
+                <a16:creationId xmlns:a16="http://schemas.microsoft.com/office/drawing/2014/main" id="{79296B5F-2FC2-E973-F2E3-112ADA6BD42B}"/>
+              </a:ext>
+            </a:extLst>
+          </p:cNvPr>
+          <p:cNvSpPr>
+            <a:spLocks noGrp="1"/>
+          </p:cNvSpPr>
+          <p:nvPr>
+            <p:ph type="title"/>
+          </p:nvPr>
+        </p:nvSpPr>
+        <p:spPr/>
+        <p:txBody>
+          <a:bodyPr/>
+          <a:lstStyle/>
+          <a:p>
+            <a:r>
+              <a:rPr lang="pt-BR" dirty="0"/>
+              <a:t>Atributos e Métodos</a:t>
+            </a:r>
+          </a:p>
+        </p:txBody>
+      </p:sp>
+      <p:pic>
+        <p:nvPicPr>
+          <p:cNvPr id="10" name="Imagem 9" descr="Cachorro com a língua de fora&#10;&#10;O conteúdo gerado por IA pode estar incorreto.">
+            <a:extLst>
+              <a:ext uri="{FF2B5EF4-FFF2-40B4-BE49-F238E27FC236}">
+                <a16:creationId xmlns:a16="http://schemas.microsoft.com/office/drawing/2014/main" id="{0355D96C-1BFE-2ED3-AB0F-FEE9524D64A9}"/>
+              </a:ext>
+            </a:extLst>
+          </p:cNvPr>
+          <p:cNvPicPr>
+            <a:picLocks noChangeAspect="1"/>
+          </p:cNvPicPr>
+          <p:nvPr/>
+        </p:nvPicPr>
+        <p:blipFill>
+          <a:blip r:embed="rId2"/>
+          <a:stretch>
+            <a:fillRect/>
+          </a:stretch>
+        </p:blipFill>
+        <p:spPr>
+          <a:xfrm>
+            <a:off x="1757874" y="1828014"/>
+            <a:ext cx="1167833" cy="1415997"/>
+          </a:xfrm>
+          <a:prstGeom prst="rect">
+            <a:avLst/>
+          </a:prstGeom>
+        </p:spPr>
+      </p:pic>
+      <p:pic>
+        <p:nvPicPr>
+          <p:cNvPr id="11" name="Imagem 10" descr="Gato cinza e branco&#10;&#10;O conteúdo gerado por IA pode estar incorreto.">
+            <a:extLst>
+              <a:ext uri="{FF2B5EF4-FFF2-40B4-BE49-F238E27FC236}">
+                <a16:creationId xmlns:a16="http://schemas.microsoft.com/office/drawing/2014/main" id="{02C6DFC5-257B-628E-5C70-F4A674A04653}"/>
+              </a:ext>
+            </a:extLst>
+          </p:cNvPr>
+          <p:cNvPicPr>
+            <a:picLocks noChangeAspect="1"/>
+          </p:cNvPicPr>
+          <p:nvPr/>
+        </p:nvPicPr>
+        <p:blipFill>
+          <a:blip r:embed="rId3"/>
+          <a:stretch>
+            <a:fillRect/>
+          </a:stretch>
+        </p:blipFill>
+        <p:spPr>
+          <a:xfrm>
+            <a:off x="5447105" y="1726637"/>
+            <a:ext cx="1297791" cy="1618750"/>
+          </a:xfrm>
+          <a:prstGeom prst="rect">
+            <a:avLst/>
+          </a:prstGeom>
+        </p:spPr>
+      </p:pic>
+      <p:pic>
+        <p:nvPicPr>
+          <p:cNvPr id="12" name="Imagem 11" descr="Peixe laranja e azul&#10;&#10;O conteúdo gerado por IA pode estar incorreto.">
+            <a:extLst>
+              <a:ext uri="{FF2B5EF4-FFF2-40B4-BE49-F238E27FC236}">
+                <a16:creationId xmlns:a16="http://schemas.microsoft.com/office/drawing/2014/main" id="{C07AE0BF-8FE2-8951-BEC7-C1A36418F9B6}"/>
+              </a:ext>
+            </a:extLst>
+          </p:cNvPr>
+          <p:cNvPicPr>
+            <a:picLocks noChangeAspect="1"/>
+          </p:cNvPicPr>
+          <p:nvPr/>
+        </p:nvPicPr>
+        <p:blipFill>
+          <a:blip r:embed="rId4">
+            <a:extLst>
+              <a:ext uri="{28A0092B-C50C-407E-A947-70E740481C1C}">
+                <a14:useLocalDpi xmlns:a14="http://schemas.microsoft.com/office/drawing/2010/main" val="0"/>
+              </a:ext>
+            </a:extLst>
+          </a:blip>
+          <a:stretch>
+            <a:fillRect/>
+          </a:stretch>
+        </p:blipFill>
+        <p:spPr>
+          <a:xfrm>
+            <a:off x="8973573" y="2058200"/>
+            <a:ext cx="1753274" cy="955625"/>
+          </a:xfrm>
+          <a:prstGeom prst="rect">
+            <a:avLst/>
+          </a:prstGeom>
+        </p:spPr>
+      </p:pic>
+      <p:pic>
+        <p:nvPicPr>
+          <p:cNvPr id="14" name="Imagem 13">
+            <a:extLst>
+              <a:ext uri="{FF2B5EF4-FFF2-40B4-BE49-F238E27FC236}">
+                <a16:creationId xmlns:a16="http://schemas.microsoft.com/office/drawing/2014/main" id="{FAD5121C-4B26-9F8A-2A08-4E3404F4A302}"/>
+              </a:ext>
+            </a:extLst>
+          </p:cNvPr>
+          <p:cNvPicPr>
+            <a:picLocks noChangeAspect="1"/>
+          </p:cNvPicPr>
+          <p:nvPr/>
+        </p:nvPicPr>
+        <p:blipFill>
+          <a:blip r:embed="rId5"/>
+          <a:stretch>
+            <a:fillRect/>
+          </a:stretch>
+        </p:blipFill>
+        <p:spPr>
+          <a:xfrm>
+            <a:off x="929371" y="3609325"/>
+            <a:ext cx="2824839" cy="2520000"/>
+          </a:xfrm>
+          <a:prstGeom prst="rect">
+            <a:avLst/>
+          </a:prstGeom>
+        </p:spPr>
+      </p:pic>
+      <p:pic>
+        <p:nvPicPr>
+          <p:cNvPr id="16" name="Imagem 15">
+            <a:extLst>
+              <a:ext uri="{FF2B5EF4-FFF2-40B4-BE49-F238E27FC236}">
+                <a16:creationId xmlns:a16="http://schemas.microsoft.com/office/drawing/2014/main" id="{32EF091A-43FA-B78B-A18D-25CB3776504E}"/>
+              </a:ext>
+            </a:extLst>
+          </p:cNvPr>
+          <p:cNvPicPr>
+            <a:picLocks noChangeAspect="1"/>
+          </p:cNvPicPr>
+          <p:nvPr/>
+        </p:nvPicPr>
+        <p:blipFill>
+          <a:blip r:embed="rId6"/>
+          <a:stretch>
+            <a:fillRect/>
+          </a:stretch>
+        </p:blipFill>
+        <p:spPr>
+          <a:xfrm>
+            <a:off x="4683581" y="3609325"/>
+            <a:ext cx="2824839" cy="2520000"/>
+          </a:xfrm>
+          <a:prstGeom prst="rect">
+            <a:avLst/>
+          </a:prstGeom>
+        </p:spPr>
+      </p:pic>
+      <p:pic>
+        <p:nvPicPr>
+          <p:cNvPr id="18" name="Imagem 17">
+            <a:extLst>
+              <a:ext uri="{FF2B5EF4-FFF2-40B4-BE49-F238E27FC236}">
+                <a16:creationId xmlns:a16="http://schemas.microsoft.com/office/drawing/2014/main" id="{A1ED3618-19A2-37CF-A676-8196FEC1630F}"/>
+              </a:ext>
+            </a:extLst>
+          </p:cNvPr>
+          <p:cNvPicPr>
+            <a:picLocks noChangeAspect="1"/>
+          </p:cNvPicPr>
+          <p:nvPr/>
+        </p:nvPicPr>
+        <p:blipFill>
+          <a:blip r:embed="rId7"/>
+          <a:stretch>
+            <a:fillRect/>
+          </a:stretch>
+        </p:blipFill>
+        <p:spPr>
+          <a:xfrm>
+            <a:off x="8437791" y="3609325"/>
+            <a:ext cx="2824839" cy="2520000"/>
+          </a:xfrm>
+          <a:prstGeom prst="rect">
+            <a:avLst/>
+          </a:prstGeom>
+        </p:spPr>
+      </p:pic>
+    </p:spTree>
+    <p:extLst>
+      <p:ext uri="{BB962C8B-B14F-4D97-AF65-F5344CB8AC3E}">
+        <p14:creationId xmlns:p14="http://schemas.microsoft.com/office/powerpoint/2010/main" val="673589541"/>
+      </p:ext>
+    </p:extLst>
+  </p:cSld>
+  <p:clrMapOvr>
+    <a:masterClrMapping/>
+  </p:clrMapOvr>
+</p:sld>
+</file>
+
+<file path=ppt/slides/slide4.xml><?xml version="1.0" encoding="utf-8"?>
+<p:sld xmlns:a="http://schemas.openxmlformats.org/drawingml/2006/main" xmlns:r="http://schemas.openxmlformats.org/officeDocument/2006/relationships" xmlns:p="http://schemas.openxmlformats.org/presentationml/2006/main">
+  <p:cSld>
+    <p:spTree>
+      <p:nvGrpSpPr>
+        <p:cNvPr id="1" name=""/>
+        <p:cNvGrpSpPr/>
+        <p:nvPr/>
+      </p:nvGrpSpPr>
+      <p:grpSpPr>
+        <a:xfrm>
+          <a:off x="0" y="0"/>
+          <a:ext cx="0" cy="0"/>
+          <a:chOff x="0" y="0"/>
+          <a:chExt cx="0" cy="0"/>
+        </a:xfrm>
+      </p:grpSpPr>
+      <p:sp>
+        <p:nvSpPr>
+          <p:cNvPr id="2" name="Título 1">
+            <a:extLst>
+              <a:ext uri="{FF2B5EF4-FFF2-40B4-BE49-F238E27FC236}">
                 <a16:creationId xmlns:a16="http://schemas.microsoft.com/office/drawing/2014/main" id="{0D84D924-540A-4316-943E-C6BA50E63230}"/>
               </a:ext>
             </a:extLst>
@@ -4478,7 +6404,7 @@
 </p:sld>
 </file>
 
-<file path=ppt/slides/slide3.xml><?xml version="1.0" encoding="utf-8"?>
+<file path=ppt/slides/slide5.xml><?xml version="1.0" encoding="utf-8"?>
 <p:sld xmlns:a="http://schemas.openxmlformats.org/drawingml/2006/main" xmlns:r="http://schemas.openxmlformats.org/officeDocument/2006/relationships" xmlns:p="http://schemas.openxmlformats.org/presentationml/2006/main">
   <p:cSld>
     <p:spTree>
@@ -4763,1256 +6689,6 @@
 </p:sld>
 </file>
 
-<file path=ppt/slides/slide4.xml><?xml version="1.0" encoding="utf-8"?>
-<p:sld xmlns:a="http://schemas.openxmlformats.org/drawingml/2006/main" xmlns:r="http://schemas.openxmlformats.org/officeDocument/2006/relationships" xmlns:p="http://schemas.openxmlformats.org/presentationml/2006/main">
-  <p:cSld>
-    <p:spTree>
-      <p:nvGrpSpPr>
-        <p:cNvPr id="1" name=""/>
-        <p:cNvGrpSpPr/>
-        <p:nvPr/>
-      </p:nvGrpSpPr>
-      <p:grpSpPr>
-        <a:xfrm>
-          <a:off x="0" y="0"/>
-          <a:ext cx="0" cy="0"/>
-          <a:chOff x="0" y="0"/>
-          <a:chExt cx="0" cy="0"/>
-        </a:xfrm>
-      </p:grpSpPr>
-      <p:sp>
-        <p:nvSpPr>
-          <p:cNvPr id="2" name="Título 1">
-            <a:extLst>
-              <a:ext uri="{FF2B5EF4-FFF2-40B4-BE49-F238E27FC236}">
-                <a16:creationId xmlns:a16="http://schemas.microsoft.com/office/drawing/2014/main" id="{13BF5B45-63CF-41F7-8496-D896490AE335}"/>
-              </a:ext>
-            </a:extLst>
-          </p:cNvPr>
-          <p:cNvSpPr>
-            <a:spLocks noGrp="1"/>
-          </p:cNvSpPr>
-          <p:nvPr>
-            <p:ph type="title"/>
-          </p:nvPr>
-        </p:nvSpPr>
-        <p:spPr/>
-        <p:txBody>
-          <a:bodyPr/>
-          <a:lstStyle/>
-          <a:p>
-            <a:r>
-              <a:rPr lang="pt-BR" dirty="0"/>
-              <a:t>Construtor </a:t>
-            </a:r>
-            <a:r>
-              <a:rPr lang="pt-BR" dirty="0" err="1"/>
-              <a:t>Super</a:t>
-            </a:r>
-            <a:r>
-              <a:rPr lang="pt-BR" dirty="0"/>
-              <a:t>()</a:t>
-            </a:r>
-          </a:p>
-        </p:txBody>
-      </p:sp>
-      <p:sp>
-        <p:nvSpPr>
-          <p:cNvPr id="3" name="Espaço Reservado para Conteúdo 2">
-            <a:extLst>
-              <a:ext uri="{FF2B5EF4-FFF2-40B4-BE49-F238E27FC236}">
-                <a16:creationId xmlns:a16="http://schemas.microsoft.com/office/drawing/2014/main" id="{05C539C4-EDD4-414C-ADA6-9C2633603CB2}"/>
-              </a:ext>
-            </a:extLst>
-          </p:cNvPr>
-          <p:cNvSpPr>
-            <a:spLocks noGrp="1"/>
-          </p:cNvSpPr>
-          <p:nvPr>
-            <p:ph idx="1"/>
-          </p:nvPr>
-        </p:nvSpPr>
-        <p:spPr>
-          <a:xfrm>
-            <a:off x="592347" y="1844675"/>
-            <a:ext cx="11007306" cy="1473291"/>
-          </a:xfrm>
-        </p:spPr>
-        <p:txBody>
-          <a:bodyPr/>
-          <a:lstStyle/>
-          <a:p>
-            <a:r>
-              <a:rPr lang="pt-BR" sz="1800" dirty="0"/>
-              <a:t>A palavra-chave </a:t>
-            </a:r>
-            <a:r>
-              <a:rPr lang="pt-BR" sz="1800" dirty="0" err="1"/>
-              <a:t>super</a:t>
-            </a:r>
-            <a:r>
-              <a:rPr lang="pt-BR" sz="1800" dirty="0"/>
-              <a:t> é utilizada para se referir à superclasse (classe pai) de uma classe derivada (classe filha). Ela é especialmente útil quando há a necessidade de reutilizar atributos ou métodos da classe pai, evitando a repetição de código.</a:t>
-            </a:r>
-          </a:p>
-        </p:txBody>
-      </p:sp>
-      <p:sp>
-        <p:nvSpPr>
-          <p:cNvPr id="6" name="CaixaDeTexto 5">
-            <a:extLst>
-              <a:ext uri="{FF2B5EF4-FFF2-40B4-BE49-F238E27FC236}">
-                <a16:creationId xmlns:a16="http://schemas.microsoft.com/office/drawing/2014/main" id="{2B572424-897C-4079-B040-AC0C43E820EC}"/>
-              </a:ext>
-            </a:extLst>
-          </p:cNvPr>
-          <p:cNvSpPr txBox="1"/>
-          <p:nvPr/>
-        </p:nvSpPr>
-        <p:spPr>
-          <a:xfrm>
-            <a:off x="5538260" y="3361405"/>
-            <a:ext cx="1115480" cy="338554"/>
-          </a:xfrm>
-          <a:prstGeom prst="rect">
-            <a:avLst/>
-          </a:prstGeom>
-          <a:noFill/>
-        </p:spPr>
-        <p:txBody>
-          <a:bodyPr wrap="square" rtlCol="0">
-            <a:spAutoFit/>
-          </a:bodyPr>
-          <a:lstStyle/>
-          <a:p>
-            <a:pPr algn="ctr"/>
-            <a:r>
-              <a:rPr lang="pt-BR" sz="1600" dirty="0">
-                <a:latin typeface="Times New Roman" panose="02020603050405020304" pitchFamily="18" charset="0"/>
-                <a:cs typeface="Times New Roman" panose="02020603050405020304" pitchFamily="18" charset="0"/>
-              </a:rPr>
-              <a:t>Classe Pai</a:t>
-            </a:r>
-          </a:p>
-        </p:txBody>
-      </p:sp>
-      <p:sp>
-        <p:nvSpPr>
-          <p:cNvPr id="8" name="Retângulo 7">
-            <a:extLst>
-              <a:ext uri="{FF2B5EF4-FFF2-40B4-BE49-F238E27FC236}">
-                <a16:creationId xmlns:a16="http://schemas.microsoft.com/office/drawing/2014/main" id="{974DDB22-2288-4893-8D35-C51A4D00B151}"/>
-              </a:ext>
-            </a:extLst>
-          </p:cNvPr>
-          <p:cNvSpPr/>
-          <p:nvPr/>
-        </p:nvSpPr>
-        <p:spPr>
-          <a:xfrm>
-            <a:off x="2960279" y="3743397"/>
-            <a:ext cx="6271441" cy="2749471"/>
-          </a:xfrm>
-          <a:prstGeom prst="rect">
-            <a:avLst/>
-          </a:prstGeom>
-        </p:spPr>
-        <p:txBody>
-          <a:bodyPr wrap="square">
-            <a:spAutoFit/>
-          </a:bodyPr>
-          <a:lstStyle/>
-          <a:p>
-            <a:pPr>
-              <a:spcBef>
-                <a:spcPts val="150"/>
-              </a:spcBef>
-              <a:spcAft>
-                <a:spcPts val="150"/>
-              </a:spcAft>
-            </a:pPr>
-            <a:r>
-              <a:rPr lang="pt-BR" sz="1600" b="1" dirty="0" err="1">
-                <a:solidFill>
-                  <a:srgbClr val="7F0055"/>
-                </a:solidFill>
-                <a:latin typeface="Consolas" panose="020B0609020204030204" pitchFamily="49" charset="0"/>
-              </a:rPr>
-              <a:t>public</a:t>
-            </a:r>
-            <a:r>
-              <a:rPr lang="pt-BR" sz="1600" dirty="0">
-                <a:solidFill>
-                  <a:srgbClr val="000000"/>
-                </a:solidFill>
-                <a:latin typeface="Consolas" panose="020B0609020204030204" pitchFamily="49" charset="0"/>
-              </a:rPr>
-              <a:t> </a:t>
-            </a:r>
-            <a:r>
-              <a:rPr lang="pt-BR" sz="1600" b="1" dirty="0" err="1">
-                <a:solidFill>
-                  <a:srgbClr val="7F0055"/>
-                </a:solidFill>
-                <a:latin typeface="Consolas" panose="020B0609020204030204" pitchFamily="49" charset="0"/>
-              </a:rPr>
-              <a:t>class</a:t>
-            </a:r>
-            <a:r>
-              <a:rPr lang="pt-BR" sz="1600" dirty="0">
-                <a:solidFill>
-                  <a:srgbClr val="000000"/>
-                </a:solidFill>
-                <a:latin typeface="Consolas" panose="020B0609020204030204" pitchFamily="49" charset="0"/>
-              </a:rPr>
-              <a:t> </a:t>
-            </a:r>
-            <a:r>
-              <a:rPr lang="pt-BR" sz="1600" dirty="0" err="1">
-                <a:solidFill>
-                  <a:srgbClr val="000000"/>
-                </a:solidFill>
-                <a:latin typeface="Consolas" panose="020B0609020204030204" pitchFamily="49" charset="0"/>
-              </a:rPr>
-              <a:t>Funcionarios</a:t>
-            </a:r>
-            <a:r>
-              <a:rPr lang="pt-BR" sz="1600" dirty="0">
-                <a:solidFill>
-                  <a:srgbClr val="000000"/>
-                </a:solidFill>
-                <a:latin typeface="Consolas" panose="020B0609020204030204" pitchFamily="49" charset="0"/>
-              </a:rPr>
-              <a:t> {</a:t>
-            </a:r>
-          </a:p>
-          <a:p>
-            <a:pPr lvl="1">
-              <a:spcBef>
-                <a:spcPts val="150"/>
-              </a:spcBef>
-              <a:spcAft>
-                <a:spcPts val="150"/>
-              </a:spcAft>
-            </a:pPr>
-            <a:r>
-              <a:rPr lang="pt-BR" sz="1600" b="1" dirty="0" err="1">
-                <a:solidFill>
-                  <a:srgbClr val="7F0055"/>
-                </a:solidFill>
-                <a:latin typeface="Consolas" panose="020B0609020204030204" pitchFamily="49" charset="0"/>
-              </a:rPr>
-              <a:t>private</a:t>
-            </a:r>
-            <a:r>
-              <a:rPr lang="pt-BR" sz="1600" dirty="0">
-                <a:solidFill>
-                  <a:srgbClr val="000000"/>
-                </a:solidFill>
-                <a:latin typeface="Consolas" panose="020B0609020204030204" pitchFamily="49" charset="0"/>
-              </a:rPr>
-              <a:t> String </a:t>
-            </a:r>
-            <a:r>
-              <a:rPr lang="pt-BR" sz="1600" u="sng" dirty="0">
-                <a:solidFill>
-                  <a:srgbClr val="0000C0"/>
-                </a:solidFill>
-                <a:latin typeface="Consolas" panose="020B0609020204030204" pitchFamily="49" charset="0"/>
-              </a:rPr>
-              <a:t>nome</a:t>
-            </a:r>
-            <a:r>
-              <a:rPr lang="pt-BR" sz="1600" dirty="0">
-                <a:solidFill>
-                  <a:srgbClr val="000000"/>
-                </a:solidFill>
-                <a:latin typeface="Consolas" panose="020B0609020204030204" pitchFamily="49" charset="0"/>
-              </a:rPr>
-              <a:t>;</a:t>
-            </a:r>
-          </a:p>
-          <a:p>
-            <a:pPr lvl="1">
-              <a:spcBef>
-                <a:spcPts val="150"/>
-              </a:spcBef>
-              <a:spcAft>
-                <a:spcPts val="150"/>
-              </a:spcAft>
-            </a:pPr>
-            <a:r>
-              <a:rPr lang="pt-BR" sz="1600" b="1" dirty="0" err="1">
-                <a:solidFill>
-                  <a:srgbClr val="7F0055"/>
-                </a:solidFill>
-                <a:latin typeface="Consolas" panose="020B0609020204030204" pitchFamily="49" charset="0"/>
-              </a:rPr>
-              <a:t>private</a:t>
-            </a:r>
-            <a:r>
-              <a:rPr lang="pt-BR" sz="1600" dirty="0">
-                <a:solidFill>
-                  <a:srgbClr val="000000"/>
-                </a:solidFill>
-                <a:latin typeface="Consolas" panose="020B0609020204030204" pitchFamily="49" charset="0"/>
-              </a:rPr>
-              <a:t> </a:t>
-            </a:r>
-            <a:r>
-              <a:rPr lang="pt-BR" sz="1600" b="1" dirty="0">
-                <a:solidFill>
-                  <a:srgbClr val="7F0055"/>
-                </a:solidFill>
-                <a:latin typeface="Consolas" panose="020B0609020204030204" pitchFamily="49" charset="0"/>
-              </a:rPr>
-              <a:t>double</a:t>
-            </a:r>
-            <a:r>
-              <a:rPr lang="pt-BR" sz="1600" dirty="0">
-                <a:solidFill>
-                  <a:srgbClr val="000000"/>
-                </a:solidFill>
-                <a:latin typeface="Consolas" panose="020B0609020204030204" pitchFamily="49" charset="0"/>
-              </a:rPr>
-              <a:t> </a:t>
-            </a:r>
-            <a:r>
-              <a:rPr lang="pt-BR" sz="1600" u="sng" dirty="0">
-                <a:solidFill>
-                  <a:srgbClr val="0000C0"/>
-                </a:solidFill>
-                <a:latin typeface="Consolas" panose="020B0609020204030204" pitchFamily="49" charset="0"/>
-              </a:rPr>
-              <a:t>salario</a:t>
-            </a:r>
-            <a:r>
-              <a:rPr lang="pt-BR" sz="1600" dirty="0">
-                <a:solidFill>
-                  <a:srgbClr val="000000"/>
-                </a:solidFill>
-                <a:latin typeface="Consolas" panose="020B0609020204030204" pitchFamily="49" charset="0"/>
-              </a:rPr>
-              <a:t>;</a:t>
-            </a:r>
-          </a:p>
-          <a:p>
-            <a:pPr lvl="1">
-              <a:spcBef>
-                <a:spcPts val="150"/>
-              </a:spcBef>
-              <a:spcAft>
-                <a:spcPts val="150"/>
-              </a:spcAft>
-            </a:pPr>
-            <a:endParaRPr lang="pt-BR" sz="1600" dirty="0">
-              <a:solidFill>
-                <a:srgbClr val="000000"/>
-              </a:solidFill>
-              <a:latin typeface="Consolas" panose="020B0609020204030204" pitchFamily="49" charset="0"/>
-            </a:endParaRPr>
-          </a:p>
-          <a:p>
-            <a:pPr lvl="1">
-              <a:spcBef>
-                <a:spcPts val="150"/>
-              </a:spcBef>
-              <a:spcAft>
-                <a:spcPts val="150"/>
-              </a:spcAft>
-            </a:pPr>
-            <a:r>
-              <a:rPr lang="pt-BR" sz="1600" b="1" dirty="0" err="1">
-                <a:solidFill>
-                  <a:srgbClr val="7F0055"/>
-                </a:solidFill>
-                <a:latin typeface="Consolas" panose="020B0609020204030204" pitchFamily="49" charset="0"/>
-              </a:rPr>
-              <a:t>public</a:t>
-            </a:r>
-            <a:r>
-              <a:rPr lang="pt-BR" sz="1600" dirty="0">
-                <a:solidFill>
-                  <a:srgbClr val="000000"/>
-                </a:solidFill>
-                <a:latin typeface="Consolas" panose="020B0609020204030204" pitchFamily="49" charset="0"/>
-              </a:rPr>
-              <a:t> </a:t>
-            </a:r>
-            <a:r>
-              <a:rPr lang="pt-BR" sz="1600" dirty="0" err="1">
-                <a:solidFill>
-                  <a:srgbClr val="000000"/>
-                </a:solidFill>
-                <a:latin typeface="Consolas" panose="020B0609020204030204" pitchFamily="49" charset="0"/>
-              </a:rPr>
-              <a:t>Funcionarios</a:t>
-            </a:r>
-            <a:r>
-              <a:rPr lang="pt-BR" sz="1600" dirty="0">
-                <a:solidFill>
-                  <a:srgbClr val="000000"/>
-                </a:solidFill>
-                <a:latin typeface="Consolas" panose="020B0609020204030204" pitchFamily="49" charset="0"/>
-              </a:rPr>
-              <a:t>(String </a:t>
-            </a:r>
-            <a:r>
-              <a:rPr lang="pt-BR" sz="1600" dirty="0">
-                <a:solidFill>
-                  <a:srgbClr val="6A3E3E"/>
-                </a:solidFill>
-                <a:latin typeface="Consolas" panose="020B0609020204030204" pitchFamily="49" charset="0"/>
-              </a:rPr>
-              <a:t>nome</a:t>
-            </a:r>
-            <a:r>
-              <a:rPr lang="pt-BR" sz="1600" dirty="0">
-                <a:solidFill>
-                  <a:srgbClr val="000000"/>
-                </a:solidFill>
-                <a:latin typeface="Consolas" panose="020B0609020204030204" pitchFamily="49" charset="0"/>
-              </a:rPr>
-              <a:t>, </a:t>
-            </a:r>
-            <a:r>
-              <a:rPr lang="pt-BR" sz="1600" b="1" dirty="0">
-                <a:solidFill>
-                  <a:srgbClr val="7F0055"/>
-                </a:solidFill>
-                <a:latin typeface="Consolas" panose="020B0609020204030204" pitchFamily="49" charset="0"/>
-              </a:rPr>
-              <a:t>double</a:t>
-            </a:r>
-            <a:r>
-              <a:rPr lang="pt-BR" sz="1600" dirty="0">
-                <a:solidFill>
-                  <a:srgbClr val="000000"/>
-                </a:solidFill>
-                <a:latin typeface="Consolas" panose="020B0609020204030204" pitchFamily="49" charset="0"/>
-              </a:rPr>
-              <a:t> </a:t>
-            </a:r>
-            <a:r>
-              <a:rPr lang="pt-BR" sz="1600" dirty="0">
-                <a:solidFill>
-                  <a:srgbClr val="6A3E3E"/>
-                </a:solidFill>
-                <a:latin typeface="Consolas" panose="020B0609020204030204" pitchFamily="49" charset="0"/>
-              </a:rPr>
-              <a:t>salario</a:t>
-            </a:r>
-            <a:r>
-              <a:rPr lang="pt-BR" sz="1600" dirty="0">
-                <a:solidFill>
-                  <a:srgbClr val="000000"/>
-                </a:solidFill>
-                <a:latin typeface="Consolas" panose="020B0609020204030204" pitchFamily="49" charset="0"/>
-              </a:rPr>
-              <a:t>) {</a:t>
-            </a:r>
-          </a:p>
-          <a:p>
-            <a:pPr lvl="2">
-              <a:spcBef>
-                <a:spcPts val="150"/>
-              </a:spcBef>
-              <a:spcAft>
-                <a:spcPts val="150"/>
-              </a:spcAft>
-            </a:pPr>
-            <a:r>
-              <a:rPr lang="pt-BR" sz="1600" b="1" dirty="0" err="1">
-                <a:solidFill>
-                  <a:srgbClr val="7F0055"/>
-                </a:solidFill>
-                <a:latin typeface="Consolas" panose="020B0609020204030204" pitchFamily="49" charset="0"/>
-              </a:rPr>
-              <a:t>this</a:t>
-            </a:r>
-            <a:r>
-              <a:rPr lang="pt-BR" sz="1600" dirty="0" err="1">
-                <a:solidFill>
-                  <a:srgbClr val="000000"/>
-                </a:solidFill>
-                <a:latin typeface="Consolas" panose="020B0609020204030204" pitchFamily="49" charset="0"/>
-              </a:rPr>
-              <a:t>.</a:t>
-            </a:r>
-            <a:r>
-              <a:rPr lang="pt-BR" sz="1600" dirty="0" err="1">
-                <a:solidFill>
-                  <a:srgbClr val="0000C0"/>
-                </a:solidFill>
-                <a:latin typeface="Consolas" panose="020B0609020204030204" pitchFamily="49" charset="0"/>
-              </a:rPr>
-              <a:t>nome</a:t>
-            </a:r>
-            <a:r>
-              <a:rPr lang="pt-BR" sz="1600" dirty="0">
-                <a:solidFill>
-                  <a:srgbClr val="000000"/>
-                </a:solidFill>
-                <a:latin typeface="Consolas" panose="020B0609020204030204" pitchFamily="49" charset="0"/>
-              </a:rPr>
-              <a:t> = </a:t>
-            </a:r>
-            <a:r>
-              <a:rPr lang="pt-BR" sz="1600" dirty="0">
-                <a:solidFill>
-                  <a:srgbClr val="6A3E3E"/>
-                </a:solidFill>
-                <a:latin typeface="Consolas" panose="020B0609020204030204" pitchFamily="49" charset="0"/>
-              </a:rPr>
-              <a:t>nome</a:t>
-            </a:r>
-            <a:r>
-              <a:rPr lang="pt-BR" sz="1600" dirty="0">
-                <a:solidFill>
-                  <a:srgbClr val="000000"/>
-                </a:solidFill>
-                <a:latin typeface="Consolas" panose="020B0609020204030204" pitchFamily="49" charset="0"/>
-              </a:rPr>
-              <a:t>;</a:t>
-            </a:r>
-          </a:p>
-          <a:p>
-            <a:pPr lvl="2">
-              <a:spcBef>
-                <a:spcPts val="150"/>
-              </a:spcBef>
-              <a:spcAft>
-                <a:spcPts val="150"/>
-              </a:spcAft>
-            </a:pPr>
-            <a:r>
-              <a:rPr lang="pt-BR" sz="1600" b="1" dirty="0" err="1">
-                <a:solidFill>
-                  <a:srgbClr val="7F0055"/>
-                </a:solidFill>
-                <a:latin typeface="Consolas" panose="020B0609020204030204" pitchFamily="49" charset="0"/>
-              </a:rPr>
-              <a:t>this</a:t>
-            </a:r>
-            <a:r>
-              <a:rPr lang="pt-BR" sz="1600" dirty="0" err="1">
-                <a:solidFill>
-                  <a:srgbClr val="000000"/>
-                </a:solidFill>
-                <a:latin typeface="Consolas" panose="020B0609020204030204" pitchFamily="49" charset="0"/>
-              </a:rPr>
-              <a:t>.</a:t>
-            </a:r>
-            <a:r>
-              <a:rPr lang="pt-BR" sz="1600" dirty="0" err="1">
-                <a:solidFill>
-                  <a:srgbClr val="0000C0"/>
-                </a:solidFill>
-                <a:latin typeface="Consolas" panose="020B0609020204030204" pitchFamily="49" charset="0"/>
-              </a:rPr>
-              <a:t>salario</a:t>
-            </a:r>
-            <a:r>
-              <a:rPr lang="pt-BR" sz="1600" dirty="0">
-                <a:solidFill>
-                  <a:srgbClr val="000000"/>
-                </a:solidFill>
-                <a:latin typeface="Consolas" panose="020B0609020204030204" pitchFamily="49" charset="0"/>
-              </a:rPr>
-              <a:t> = </a:t>
-            </a:r>
-            <a:r>
-              <a:rPr lang="pt-BR" sz="1600" dirty="0">
-                <a:solidFill>
-                  <a:srgbClr val="6A3E3E"/>
-                </a:solidFill>
-                <a:latin typeface="Consolas" panose="020B0609020204030204" pitchFamily="49" charset="0"/>
-              </a:rPr>
-              <a:t>salario</a:t>
-            </a:r>
-            <a:r>
-              <a:rPr lang="pt-BR" sz="1600" dirty="0">
-                <a:solidFill>
-                  <a:srgbClr val="000000"/>
-                </a:solidFill>
-                <a:latin typeface="Consolas" panose="020B0609020204030204" pitchFamily="49" charset="0"/>
-              </a:rPr>
-              <a:t>;</a:t>
-            </a:r>
-          </a:p>
-          <a:p>
-            <a:pPr marL="457200" lvl="2">
-              <a:spcBef>
-                <a:spcPts val="150"/>
-              </a:spcBef>
-              <a:spcAft>
-                <a:spcPts val="150"/>
-              </a:spcAft>
-            </a:pPr>
-            <a:r>
-              <a:rPr lang="pt-BR" sz="1600" dirty="0">
-                <a:solidFill>
-                  <a:srgbClr val="000000"/>
-                </a:solidFill>
-                <a:latin typeface="Consolas" panose="020B0609020204030204" pitchFamily="49" charset="0"/>
-              </a:rPr>
-              <a:t>}</a:t>
-            </a:r>
-          </a:p>
-          <a:p>
-            <a:pPr>
-              <a:spcBef>
-                <a:spcPts val="150"/>
-              </a:spcBef>
-              <a:spcAft>
-                <a:spcPts val="150"/>
-              </a:spcAft>
-            </a:pPr>
-            <a:r>
-              <a:rPr lang="pt-BR" sz="1600" dirty="0">
-                <a:solidFill>
-                  <a:srgbClr val="000000"/>
-                </a:solidFill>
-                <a:latin typeface="Consolas" panose="020B0609020204030204" pitchFamily="49" charset="0"/>
-              </a:rPr>
-              <a:t>}</a:t>
-            </a:r>
-          </a:p>
-        </p:txBody>
-      </p:sp>
-    </p:spTree>
-    <p:extLst>
-      <p:ext uri="{BB962C8B-B14F-4D97-AF65-F5344CB8AC3E}">
-        <p14:creationId xmlns:p14="http://schemas.microsoft.com/office/powerpoint/2010/main" val="229873426"/>
-      </p:ext>
-    </p:extLst>
-  </p:cSld>
-  <p:clrMapOvr>
-    <a:masterClrMapping/>
-  </p:clrMapOvr>
-</p:sld>
-</file>
-
-<file path=ppt/slides/slide5.xml><?xml version="1.0" encoding="utf-8"?>
-<p:sld xmlns:a="http://schemas.openxmlformats.org/drawingml/2006/main" xmlns:r="http://schemas.openxmlformats.org/officeDocument/2006/relationships" xmlns:p="http://schemas.openxmlformats.org/presentationml/2006/main">
-  <p:cSld>
-    <p:spTree>
-      <p:nvGrpSpPr>
-        <p:cNvPr id="1" name=""/>
-        <p:cNvGrpSpPr/>
-        <p:nvPr/>
-      </p:nvGrpSpPr>
-      <p:grpSpPr>
-        <a:xfrm>
-          <a:off x="0" y="0"/>
-          <a:ext cx="0" cy="0"/>
-          <a:chOff x="0" y="0"/>
-          <a:chExt cx="0" cy="0"/>
-        </a:xfrm>
-      </p:grpSpPr>
-      <p:sp>
-        <p:nvSpPr>
-          <p:cNvPr id="2" name="Título 1">
-            <a:extLst>
-              <a:ext uri="{FF2B5EF4-FFF2-40B4-BE49-F238E27FC236}">
-                <a16:creationId xmlns:a16="http://schemas.microsoft.com/office/drawing/2014/main" id="{13BF5B45-63CF-41F7-8496-D896490AE335}"/>
-              </a:ext>
-            </a:extLst>
-          </p:cNvPr>
-          <p:cNvSpPr>
-            <a:spLocks noGrp="1"/>
-          </p:cNvSpPr>
-          <p:nvPr>
-            <p:ph type="title"/>
-          </p:nvPr>
-        </p:nvSpPr>
-        <p:spPr/>
-        <p:txBody>
-          <a:bodyPr/>
-          <a:lstStyle/>
-          <a:p>
-            <a:r>
-              <a:rPr lang="pt-BR" dirty="0"/>
-              <a:t>Construtor </a:t>
-            </a:r>
-            <a:r>
-              <a:rPr lang="pt-BR" dirty="0" err="1"/>
-              <a:t>Super</a:t>
-            </a:r>
-            <a:r>
-              <a:rPr lang="pt-BR" dirty="0"/>
-              <a:t>()</a:t>
-            </a:r>
-          </a:p>
-        </p:txBody>
-      </p:sp>
-      <p:sp>
-        <p:nvSpPr>
-          <p:cNvPr id="3" name="Espaço Reservado para Conteúdo 2">
-            <a:extLst>
-              <a:ext uri="{FF2B5EF4-FFF2-40B4-BE49-F238E27FC236}">
-                <a16:creationId xmlns:a16="http://schemas.microsoft.com/office/drawing/2014/main" id="{05C539C4-EDD4-414C-ADA6-9C2633603CB2}"/>
-              </a:ext>
-            </a:extLst>
-          </p:cNvPr>
-          <p:cNvSpPr>
-            <a:spLocks noGrp="1"/>
-          </p:cNvSpPr>
-          <p:nvPr>
-            <p:ph idx="1"/>
-          </p:nvPr>
-        </p:nvSpPr>
-        <p:spPr>
-          <a:xfrm>
-            <a:off x="592347" y="1844675"/>
-            <a:ext cx="11007306" cy="1473291"/>
-          </a:xfrm>
-        </p:spPr>
-        <p:txBody>
-          <a:bodyPr/>
-          <a:lstStyle/>
-          <a:p>
-            <a:r>
-              <a:rPr lang="pt-BR" sz="1800" dirty="0"/>
-              <a:t>A palavra-chave </a:t>
-            </a:r>
-            <a:r>
-              <a:rPr lang="pt-BR" sz="1800" dirty="0" err="1"/>
-              <a:t>super</a:t>
-            </a:r>
-            <a:r>
-              <a:rPr lang="pt-BR" sz="1800" dirty="0"/>
-              <a:t> é utilizada para se referir à superclasse (classe pai) de uma classe derivada (classe filha). Ela é especialmente útil quando há a necessidade de reutilizar atributos ou métodos da classe pai, evitando a repetição de código.</a:t>
-            </a:r>
-          </a:p>
-        </p:txBody>
-      </p:sp>
-      <p:sp>
-        <p:nvSpPr>
-          <p:cNvPr id="7" name="CaixaDeTexto 6">
-            <a:extLst>
-              <a:ext uri="{FF2B5EF4-FFF2-40B4-BE49-F238E27FC236}">
-                <a16:creationId xmlns:a16="http://schemas.microsoft.com/office/drawing/2014/main" id="{15C42C8B-8DB6-4C73-97AE-4AF8FC519272}"/>
-              </a:ext>
-            </a:extLst>
-          </p:cNvPr>
-          <p:cNvSpPr txBox="1"/>
-          <p:nvPr/>
-        </p:nvSpPr>
-        <p:spPr>
-          <a:xfrm>
-            <a:off x="5503559" y="3520485"/>
-            <a:ext cx="1184883" cy="338554"/>
-          </a:xfrm>
-          <a:prstGeom prst="rect">
-            <a:avLst/>
-          </a:prstGeom>
-          <a:noFill/>
-        </p:spPr>
-        <p:txBody>
-          <a:bodyPr wrap="square" rtlCol="0">
-            <a:spAutoFit/>
-          </a:bodyPr>
-          <a:lstStyle/>
-          <a:p>
-            <a:pPr algn="ctr"/>
-            <a:r>
-              <a:rPr lang="pt-BR" sz="1600" dirty="0">
-                <a:latin typeface="Times New Roman" panose="02020603050405020304" pitchFamily="18" charset="0"/>
-                <a:cs typeface="Times New Roman" panose="02020603050405020304" pitchFamily="18" charset="0"/>
-              </a:rPr>
-              <a:t>Classe Filha</a:t>
-            </a:r>
-          </a:p>
-        </p:txBody>
-      </p:sp>
-      <p:sp>
-        <p:nvSpPr>
-          <p:cNvPr id="4" name="Retângulo 3">
-            <a:extLst>
-              <a:ext uri="{FF2B5EF4-FFF2-40B4-BE49-F238E27FC236}">
-                <a16:creationId xmlns:a16="http://schemas.microsoft.com/office/drawing/2014/main" id="{FFAD0326-5AFB-4F87-8E1F-8F1446812B25}"/>
-              </a:ext>
-            </a:extLst>
-          </p:cNvPr>
-          <p:cNvSpPr/>
-          <p:nvPr/>
-        </p:nvSpPr>
-        <p:spPr>
-          <a:xfrm>
-            <a:off x="1698171" y="4061558"/>
-            <a:ext cx="8795657" cy="2421176"/>
-          </a:xfrm>
-          <a:prstGeom prst="rect">
-            <a:avLst/>
-          </a:prstGeom>
-        </p:spPr>
-        <p:txBody>
-          <a:bodyPr wrap="square">
-            <a:spAutoFit/>
-          </a:bodyPr>
-          <a:lstStyle/>
-          <a:p>
-            <a:pPr>
-              <a:spcBef>
-                <a:spcPts val="150"/>
-              </a:spcBef>
-              <a:spcAft>
-                <a:spcPts val="150"/>
-              </a:spcAft>
-            </a:pPr>
-            <a:r>
-              <a:rPr lang="pt-BR" sz="1600" b="1" dirty="0" err="1">
-                <a:solidFill>
-                  <a:srgbClr val="7F0055"/>
-                </a:solidFill>
-                <a:latin typeface="Consolas" panose="020B0609020204030204" pitchFamily="49" charset="0"/>
-              </a:rPr>
-              <a:t>public</a:t>
-            </a:r>
-            <a:r>
-              <a:rPr lang="pt-BR" sz="1600" dirty="0">
-                <a:solidFill>
-                  <a:srgbClr val="000000"/>
-                </a:solidFill>
-                <a:latin typeface="Consolas" panose="020B0609020204030204" pitchFamily="49" charset="0"/>
-              </a:rPr>
-              <a:t> </a:t>
-            </a:r>
-            <a:r>
-              <a:rPr lang="pt-BR" sz="1600" b="1" dirty="0" err="1">
-                <a:solidFill>
-                  <a:srgbClr val="7F0055"/>
-                </a:solidFill>
-                <a:latin typeface="Consolas" panose="020B0609020204030204" pitchFamily="49" charset="0"/>
-              </a:rPr>
-              <a:t>class</a:t>
-            </a:r>
-            <a:r>
-              <a:rPr lang="pt-BR" sz="1600" dirty="0">
-                <a:solidFill>
-                  <a:srgbClr val="000000"/>
-                </a:solidFill>
-                <a:latin typeface="Consolas" panose="020B0609020204030204" pitchFamily="49" charset="0"/>
-              </a:rPr>
-              <a:t> Gerente </a:t>
-            </a:r>
-            <a:r>
-              <a:rPr lang="pt-BR" sz="1600" b="1" dirty="0" err="1">
-                <a:solidFill>
-                  <a:srgbClr val="7F0055"/>
-                </a:solidFill>
-                <a:latin typeface="Consolas" panose="020B0609020204030204" pitchFamily="49" charset="0"/>
-              </a:rPr>
-              <a:t>extends</a:t>
-            </a:r>
-            <a:r>
-              <a:rPr lang="pt-BR" sz="1600" dirty="0">
-                <a:solidFill>
-                  <a:srgbClr val="000000"/>
-                </a:solidFill>
-                <a:latin typeface="Consolas" panose="020B0609020204030204" pitchFamily="49" charset="0"/>
-              </a:rPr>
-              <a:t> </a:t>
-            </a:r>
-            <a:r>
-              <a:rPr lang="pt-BR" sz="1600" dirty="0" err="1">
-                <a:solidFill>
-                  <a:srgbClr val="000000"/>
-                </a:solidFill>
-                <a:latin typeface="Consolas" panose="020B0609020204030204" pitchFamily="49" charset="0"/>
-              </a:rPr>
-              <a:t>Funcionarios</a:t>
-            </a:r>
-            <a:r>
-              <a:rPr lang="pt-BR" sz="1600" dirty="0">
-                <a:solidFill>
-                  <a:srgbClr val="000000"/>
-                </a:solidFill>
-                <a:latin typeface="Consolas" panose="020B0609020204030204" pitchFamily="49" charset="0"/>
-              </a:rPr>
-              <a:t>{</a:t>
-            </a:r>
-          </a:p>
-          <a:p>
-            <a:pPr lvl="1">
-              <a:spcBef>
-                <a:spcPts val="150"/>
-              </a:spcBef>
-              <a:spcAft>
-                <a:spcPts val="150"/>
-              </a:spcAft>
-            </a:pPr>
-            <a:r>
-              <a:rPr lang="pt-BR" sz="1600" b="1" dirty="0" err="1">
-                <a:solidFill>
-                  <a:srgbClr val="7F0055"/>
-                </a:solidFill>
-                <a:latin typeface="Consolas" panose="020B0609020204030204" pitchFamily="49" charset="0"/>
-              </a:rPr>
-              <a:t>private</a:t>
-            </a:r>
-            <a:r>
-              <a:rPr lang="pt-BR" sz="1600" dirty="0">
-                <a:solidFill>
-                  <a:srgbClr val="000000"/>
-                </a:solidFill>
-                <a:latin typeface="Consolas" panose="020B0609020204030204" pitchFamily="49" charset="0"/>
-              </a:rPr>
-              <a:t> </a:t>
-            </a:r>
-            <a:r>
-              <a:rPr lang="pt-BR" sz="1600" b="1" dirty="0">
-                <a:solidFill>
-                  <a:srgbClr val="7F0055"/>
-                </a:solidFill>
-                <a:latin typeface="Consolas" panose="020B0609020204030204" pitchFamily="49" charset="0"/>
-              </a:rPr>
-              <a:t>double</a:t>
-            </a:r>
-            <a:r>
-              <a:rPr lang="pt-BR" sz="1600" dirty="0">
-                <a:solidFill>
-                  <a:srgbClr val="000000"/>
-                </a:solidFill>
-                <a:latin typeface="Consolas" panose="020B0609020204030204" pitchFamily="49" charset="0"/>
-              </a:rPr>
-              <a:t> </a:t>
-            </a:r>
-            <a:r>
-              <a:rPr lang="pt-BR" sz="1600" dirty="0" err="1">
-                <a:solidFill>
-                  <a:srgbClr val="0000C0"/>
-                </a:solidFill>
-                <a:latin typeface="Consolas" panose="020B0609020204030204" pitchFamily="49" charset="0"/>
-              </a:rPr>
-              <a:t>adicionalGerencia</a:t>
-            </a:r>
-            <a:r>
-              <a:rPr lang="pt-BR" sz="1600" dirty="0">
-                <a:solidFill>
-                  <a:srgbClr val="000000"/>
-                </a:solidFill>
-                <a:latin typeface="Consolas" panose="020B0609020204030204" pitchFamily="49" charset="0"/>
-              </a:rPr>
-              <a:t>;</a:t>
-            </a:r>
-          </a:p>
-          <a:p>
-            <a:pPr lvl="1">
-              <a:spcBef>
-                <a:spcPts val="150"/>
-              </a:spcBef>
-              <a:spcAft>
-                <a:spcPts val="150"/>
-              </a:spcAft>
-            </a:pPr>
-            <a:endParaRPr lang="pt-BR" sz="1600" b="1" dirty="0">
-              <a:solidFill>
-                <a:srgbClr val="7F0055"/>
-              </a:solidFill>
-              <a:latin typeface="Consolas" panose="020B0609020204030204" pitchFamily="49" charset="0"/>
-            </a:endParaRPr>
-          </a:p>
-          <a:p>
-            <a:pPr lvl="1">
-              <a:spcBef>
-                <a:spcPts val="150"/>
-              </a:spcBef>
-              <a:spcAft>
-                <a:spcPts val="150"/>
-              </a:spcAft>
-            </a:pPr>
-            <a:r>
-              <a:rPr lang="pt-BR" sz="1600" b="1" dirty="0" err="1">
-                <a:solidFill>
-                  <a:srgbClr val="7F0055"/>
-                </a:solidFill>
-                <a:latin typeface="Consolas" panose="020B0609020204030204" pitchFamily="49" charset="0"/>
-              </a:rPr>
-              <a:t>public</a:t>
-            </a:r>
-            <a:r>
-              <a:rPr lang="pt-BR" sz="1600" dirty="0">
-                <a:solidFill>
-                  <a:srgbClr val="000000"/>
-                </a:solidFill>
-                <a:latin typeface="Consolas" panose="020B0609020204030204" pitchFamily="49" charset="0"/>
-              </a:rPr>
-              <a:t> Gerente(String </a:t>
-            </a:r>
-            <a:r>
-              <a:rPr lang="pt-BR" sz="1600" dirty="0">
-                <a:solidFill>
-                  <a:srgbClr val="6A3E3E"/>
-                </a:solidFill>
-                <a:latin typeface="Consolas" panose="020B0609020204030204" pitchFamily="49" charset="0"/>
-              </a:rPr>
-              <a:t>nome</a:t>
-            </a:r>
-            <a:r>
-              <a:rPr lang="pt-BR" sz="1600" dirty="0">
-                <a:solidFill>
-                  <a:srgbClr val="000000"/>
-                </a:solidFill>
-                <a:latin typeface="Consolas" panose="020B0609020204030204" pitchFamily="49" charset="0"/>
-              </a:rPr>
-              <a:t>, </a:t>
-            </a:r>
-            <a:r>
-              <a:rPr lang="pt-BR" sz="1600" b="1" dirty="0">
-                <a:solidFill>
-                  <a:srgbClr val="7F0055"/>
-                </a:solidFill>
-                <a:latin typeface="Consolas" panose="020B0609020204030204" pitchFamily="49" charset="0"/>
-              </a:rPr>
-              <a:t>double</a:t>
-            </a:r>
-            <a:r>
-              <a:rPr lang="pt-BR" sz="1600" dirty="0">
-                <a:solidFill>
-                  <a:srgbClr val="000000"/>
-                </a:solidFill>
-                <a:latin typeface="Consolas" panose="020B0609020204030204" pitchFamily="49" charset="0"/>
-              </a:rPr>
-              <a:t> </a:t>
-            </a:r>
-            <a:r>
-              <a:rPr lang="pt-BR" sz="1600" dirty="0">
-                <a:solidFill>
-                  <a:srgbClr val="6A3E3E"/>
-                </a:solidFill>
-                <a:latin typeface="Consolas" panose="020B0609020204030204" pitchFamily="49" charset="0"/>
-              </a:rPr>
-              <a:t>salario</a:t>
-            </a:r>
-            <a:r>
-              <a:rPr lang="pt-BR" sz="1600" dirty="0">
-                <a:solidFill>
-                  <a:srgbClr val="000000"/>
-                </a:solidFill>
-                <a:latin typeface="Consolas" panose="020B0609020204030204" pitchFamily="49" charset="0"/>
-              </a:rPr>
-              <a:t>, </a:t>
-            </a:r>
-            <a:r>
-              <a:rPr lang="pt-BR" sz="1600" b="1" dirty="0">
-                <a:solidFill>
-                  <a:srgbClr val="7F0055"/>
-                </a:solidFill>
-                <a:latin typeface="Consolas" panose="020B0609020204030204" pitchFamily="49" charset="0"/>
-              </a:rPr>
-              <a:t>double</a:t>
-            </a:r>
-            <a:r>
-              <a:rPr lang="pt-BR" sz="1600" dirty="0">
-                <a:solidFill>
-                  <a:srgbClr val="000000"/>
-                </a:solidFill>
-                <a:latin typeface="Consolas" panose="020B0609020204030204" pitchFamily="49" charset="0"/>
-              </a:rPr>
-              <a:t> </a:t>
-            </a:r>
-            <a:r>
-              <a:rPr lang="pt-BR" sz="1600" dirty="0" err="1">
-                <a:solidFill>
-                  <a:srgbClr val="6A3E3E"/>
-                </a:solidFill>
-                <a:latin typeface="Consolas" panose="020B0609020204030204" pitchFamily="49" charset="0"/>
-              </a:rPr>
-              <a:t>adicionalGerencia</a:t>
-            </a:r>
-            <a:r>
-              <a:rPr lang="pt-BR" sz="1600" dirty="0">
-                <a:solidFill>
-                  <a:srgbClr val="000000"/>
-                </a:solidFill>
-                <a:latin typeface="Consolas" panose="020B0609020204030204" pitchFamily="49" charset="0"/>
-              </a:rPr>
-              <a:t>) {</a:t>
-            </a:r>
-          </a:p>
-          <a:p>
-            <a:pPr lvl="2">
-              <a:spcBef>
-                <a:spcPts val="150"/>
-              </a:spcBef>
-              <a:spcAft>
-                <a:spcPts val="150"/>
-              </a:spcAft>
-            </a:pPr>
-            <a:r>
-              <a:rPr lang="pt-BR" sz="1600" b="1" dirty="0" err="1">
-                <a:solidFill>
-                  <a:srgbClr val="7F0055"/>
-                </a:solidFill>
-                <a:latin typeface="Consolas" panose="020B0609020204030204" pitchFamily="49" charset="0"/>
-              </a:rPr>
-              <a:t>super</a:t>
-            </a:r>
-            <a:r>
-              <a:rPr lang="pt-BR" sz="1600" dirty="0">
-                <a:solidFill>
-                  <a:srgbClr val="000000"/>
-                </a:solidFill>
-                <a:latin typeface="Consolas" panose="020B0609020204030204" pitchFamily="49" charset="0"/>
-              </a:rPr>
-              <a:t>(</a:t>
-            </a:r>
-            <a:r>
-              <a:rPr lang="pt-BR" sz="1600" dirty="0">
-                <a:solidFill>
-                  <a:srgbClr val="6A3E3E"/>
-                </a:solidFill>
-                <a:latin typeface="Consolas" panose="020B0609020204030204" pitchFamily="49" charset="0"/>
-              </a:rPr>
-              <a:t>nome</a:t>
-            </a:r>
-            <a:r>
-              <a:rPr lang="pt-BR" sz="1600" dirty="0">
-                <a:solidFill>
-                  <a:srgbClr val="000000"/>
-                </a:solidFill>
-                <a:latin typeface="Consolas" panose="020B0609020204030204" pitchFamily="49" charset="0"/>
-              </a:rPr>
-              <a:t>, </a:t>
-            </a:r>
-            <a:r>
-              <a:rPr lang="pt-BR" sz="1600" dirty="0">
-                <a:solidFill>
-                  <a:srgbClr val="6A3E3E"/>
-                </a:solidFill>
-                <a:latin typeface="Consolas" panose="020B0609020204030204" pitchFamily="49" charset="0"/>
-              </a:rPr>
-              <a:t>salario</a:t>
-            </a:r>
-            <a:r>
-              <a:rPr lang="pt-BR" sz="1600" dirty="0">
-                <a:solidFill>
-                  <a:srgbClr val="000000"/>
-                </a:solidFill>
-                <a:latin typeface="Consolas" panose="020B0609020204030204" pitchFamily="49" charset="0"/>
-              </a:rPr>
-              <a:t>);</a:t>
-            </a:r>
-          </a:p>
-          <a:p>
-            <a:pPr lvl="2">
-              <a:spcBef>
-                <a:spcPts val="150"/>
-              </a:spcBef>
-              <a:spcAft>
-                <a:spcPts val="150"/>
-              </a:spcAft>
-            </a:pPr>
-            <a:r>
-              <a:rPr lang="pt-BR" sz="1600" b="1" dirty="0" err="1">
-                <a:solidFill>
-                  <a:srgbClr val="7F0055"/>
-                </a:solidFill>
-                <a:latin typeface="Consolas" panose="020B0609020204030204" pitchFamily="49" charset="0"/>
-              </a:rPr>
-              <a:t>this</a:t>
-            </a:r>
-            <a:r>
-              <a:rPr lang="pt-BR" sz="1600" dirty="0" err="1">
-                <a:solidFill>
-                  <a:srgbClr val="000000"/>
-                </a:solidFill>
-                <a:latin typeface="Consolas" panose="020B0609020204030204" pitchFamily="49" charset="0"/>
-              </a:rPr>
-              <a:t>.</a:t>
-            </a:r>
-            <a:r>
-              <a:rPr lang="pt-BR" sz="1600" dirty="0" err="1">
-                <a:solidFill>
-                  <a:srgbClr val="0000C0"/>
-                </a:solidFill>
-                <a:latin typeface="Consolas" panose="020B0609020204030204" pitchFamily="49" charset="0"/>
-              </a:rPr>
-              <a:t>adicionalGerencia</a:t>
-            </a:r>
-            <a:r>
-              <a:rPr lang="pt-BR" sz="1600" dirty="0">
-                <a:solidFill>
-                  <a:srgbClr val="000000"/>
-                </a:solidFill>
-                <a:latin typeface="Consolas" panose="020B0609020204030204" pitchFamily="49" charset="0"/>
-              </a:rPr>
-              <a:t> = </a:t>
-            </a:r>
-            <a:r>
-              <a:rPr lang="pt-BR" sz="1600" dirty="0" err="1">
-                <a:solidFill>
-                  <a:srgbClr val="6A3E3E"/>
-                </a:solidFill>
-                <a:latin typeface="Consolas" panose="020B0609020204030204" pitchFamily="49" charset="0"/>
-              </a:rPr>
-              <a:t>adicionalGerencia</a:t>
-            </a:r>
-            <a:r>
-              <a:rPr lang="pt-BR" sz="1600" dirty="0">
-                <a:solidFill>
-                  <a:srgbClr val="000000"/>
-                </a:solidFill>
-                <a:latin typeface="Consolas" panose="020B0609020204030204" pitchFamily="49" charset="0"/>
-              </a:rPr>
-              <a:t>;</a:t>
-            </a:r>
-          </a:p>
-          <a:p>
-            <a:pPr lvl="1">
-              <a:spcBef>
-                <a:spcPts val="150"/>
-              </a:spcBef>
-              <a:spcAft>
-                <a:spcPts val="150"/>
-              </a:spcAft>
-            </a:pPr>
-            <a:r>
-              <a:rPr lang="pt-BR" sz="1600" dirty="0">
-                <a:solidFill>
-                  <a:srgbClr val="000000"/>
-                </a:solidFill>
-                <a:latin typeface="Consolas" panose="020B0609020204030204" pitchFamily="49" charset="0"/>
-              </a:rPr>
-              <a:t>}</a:t>
-            </a:r>
-          </a:p>
-          <a:p>
-            <a:pPr>
-              <a:spcBef>
-                <a:spcPts val="150"/>
-              </a:spcBef>
-              <a:spcAft>
-                <a:spcPts val="150"/>
-              </a:spcAft>
-            </a:pPr>
-            <a:r>
-              <a:rPr lang="pt-BR" sz="1600" dirty="0">
-                <a:solidFill>
-                  <a:srgbClr val="000000"/>
-                </a:solidFill>
-                <a:latin typeface="Consolas" panose="020B0609020204030204" pitchFamily="49" charset="0"/>
-              </a:rPr>
-              <a:t>}</a:t>
-            </a:r>
-          </a:p>
-        </p:txBody>
-      </p:sp>
-    </p:spTree>
-    <p:extLst>
-      <p:ext uri="{BB962C8B-B14F-4D97-AF65-F5344CB8AC3E}">
-        <p14:creationId xmlns:p14="http://schemas.microsoft.com/office/powerpoint/2010/main" val="13419183"/>
-      </p:ext>
-    </p:extLst>
-  </p:cSld>
-  <p:clrMapOvr>
-    <a:masterClrMapping/>
-  </p:clrMapOvr>
-</p:sld>
-</file>
-
 <file path=ppt/slides/slide6.xml><?xml version="1.0" encoding="utf-8"?>
 <p:sld xmlns:a="http://schemas.openxmlformats.org/drawingml/2006/main" xmlns:r="http://schemas.openxmlformats.org/officeDocument/2006/relationships" xmlns:p="http://schemas.openxmlformats.org/presentationml/2006/main">
   <p:cSld>
@@ -6109,10 +6785,10 @@
       </p:sp>
       <p:sp>
         <p:nvSpPr>
-          <p:cNvPr id="7" name="CaixaDeTexto 6">
-            <a:extLst>
-              <a:ext uri="{FF2B5EF4-FFF2-40B4-BE49-F238E27FC236}">
-                <a16:creationId xmlns:a16="http://schemas.microsoft.com/office/drawing/2014/main" id="{15C42C8B-8DB6-4C73-97AE-4AF8FC519272}"/>
+          <p:cNvPr id="6" name="CaixaDeTexto 5">
+            <a:extLst>
+              <a:ext uri="{FF2B5EF4-FFF2-40B4-BE49-F238E27FC236}">
+                <a16:creationId xmlns:a16="http://schemas.microsoft.com/office/drawing/2014/main" id="{2B572424-897C-4079-B040-AC0C43E820EC}"/>
               </a:ext>
             </a:extLst>
           </p:cNvPr>
@@ -6121,8 +6797,8 @@
         </p:nvSpPr>
         <p:spPr>
           <a:xfrm>
-            <a:off x="5503559" y="3520485"/>
-            <a:ext cx="1184883" cy="338554"/>
+            <a:off x="5538260" y="3361405"/>
+            <a:ext cx="1115480" cy="338554"/>
           </a:xfrm>
           <a:prstGeom prst="rect">
             <a:avLst/>
@@ -6141,17 +6817,17 @@
                 <a:latin typeface="Times New Roman" panose="02020603050405020304" pitchFamily="18" charset="0"/>
                 <a:cs typeface="Times New Roman" panose="02020603050405020304" pitchFamily="18" charset="0"/>
               </a:rPr>
-              <a:t>Classe Filha</a:t>
+              <a:t>Classe Pai</a:t>
             </a:r>
           </a:p>
         </p:txBody>
       </p:sp>
       <p:sp>
         <p:nvSpPr>
-          <p:cNvPr id="4" name="Retângulo 3">
-            <a:extLst>
-              <a:ext uri="{FF2B5EF4-FFF2-40B4-BE49-F238E27FC236}">
-                <a16:creationId xmlns:a16="http://schemas.microsoft.com/office/drawing/2014/main" id="{FFAD0326-5AFB-4F87-8E1F-8F1446812B25}"/>
+          <p:cNvPr id="8" name="Retângulo 7">
+            <a:extLst>
+              <a:ext uri="{FF2B5EF4-FFF2-40B4-BE49-F238E27FC236}">
+                <a16:creationId xmlns:a16="http://schemas.microsoft.com/office/drawing/2014/main" id="{974DDB22-2288-4893-8D35-C51A4D00B151}"/>
               </a:ext>
             </a:extLst>
           </p:cNvPr>
@@ -6160,8 +6836,8 @@
         </p:nvSpPr>
         <p:spPr>
           <a:xfrm>
-            <a:off x="1698171" y="4061558"/>
-            <a:ext cx="8795657" cy="2421176"/>
+            <a:off x="2960279" y="3743397"/>
+            <a:ext cx="6271441" cy="2749471"/>
           </a:xfrm>
           <a:prstGeom prst="rect">
             <a:avLst/>
@@ -6215,16 +6891,16 @@
                 </a:solidFill>
                 <a:latin typeface="Consolas" panose="020B0609020204030204" pitchFamily="49" charset="0"/>
               </a:rPr>
-              <a:t> Gerente </a:t>
-            </a:r>
-            <a:r>
-              <a:rPr lang="pt-BR" sz="1600" b="1" dirty="0" err="1">
-                <a:solidFill>
-                  <a:srgbClr val="7F0055"/>
-                </a:solidFill>
-                <a:latin typeface="Consolas" panose="020B0609020204030204" pitchFamily="49" charset="0"/>
-              </a:rPr>
-              <a:t>extends</a:t>
+              <a:t> </a:t>
+            </a:r>
+            <a:r>
+              <a:rPr lang="pt-BR" sz="1600" dirty="0" err="1">
+                <a:solidFill>
+                  <a:srgbClr val="000000"/>
+                </a:solidFill>
+                <a:latin typeface="Consolas" panose="020B0609020204030204" pitchFamily="49" charset="0"/>
+              </a:rPr>
+              <a:t>Funcionarios</a:t>
             </a:r>
             <a:r>
               <a:rPr lang="pt-BR" sz="1600" dirty="0">
@@ -6233,25 +6909,7 @@
                 </a:solidFill>
                 <a:latin typeface="Consolas" panose="020B0609020204030204" pitchFamily="49" charset="0"/>
               </a:rPr>
-              <a:t> </a:t>
-            </a:r>
-            <a:r>
-              <a:rPr lang="pt-BR" sz="1600" dirty="0" err="1">
-                <a:solidFill>
-                  <a:srgbClr val="000000"/>
-                </a:solidFill>
-                <a:latin typeface="Consolas" panose="020B0609020204030204" pitchFamily="49" charset="0"/>
-              </a:rPr>
-              <a:t>Funcionarios</a:t>
-            </a:r>
-            <a:r>
-              <a:rPr lang="pt-BR" sz="1600" dirty="0">
-                <a:solidFill>
-                  <a:srgbClr val="000000"/>
-                </a:solidFill>
-                <a:latin typeface="Consolas" panose="020B0609020204030204" pitchFamily="49" charset="0"/>
-              </a:rPr>
-              <a:t>{</a:t>
+              <a:t> {</a:t>
             </a:r>
           </a:p>
           <a:p>
@@ -6279,34 +6937,16 @@
                 </a:solidFill>
                 <a:latin typeface="Consolas" panose="020B0609020204030204" pitchFamily="49" charset="0"/>
               </a:rPr>
-              <a:t> </a:t>
-            </a:r>
-            <a:r>
-              <a:rPr lang="pt-BR" sz="1600" b="1" dirty="0">
-                <a:solidFill>
-                  <a:srgbClr val="7F0055"/>
-                </a:solidFill>
-                <a:latin typeface="Consolas" panose="020B0609020204030204" pitchFamily="49" charset="0"/>
-              </a:rPr>
-              <a:t>double</a:t>
-            </a:r>
-            <a:r>
-              <a:rPr lang="pt-BR" sz="1600" dirty="0">
-                <a:solidFill>
-                  <a:srgbClr val="000000"/>
-                </a:solidFill>
-                <a:latin typeface="Consolas" panose="020B0609020204030204" pitchFamily="49" charset="0"/>
-              </a:rPr>
-              <a:t> </a:t>
-            </a:r>
-            <a:r>
-              <a:rPr lang="pt-BR" sz="1600" dirty="0" err="1">
+              <a:t> String </a:t>
+            </a:r>
+            <a:r>
+              <a:rPr lang="pt-BR" sz="1600" u="sng" dirty="0">
                 <a:solidFill>
                   <a:srgbClr val="0000C0"/>
                 </a:solidFill>
                 <a:latin typeface="Consolas" panose="020B0609020204030204" pitchFamily="49" charset="0"/>
               </a:rPr>
-              <a:t>adicionalGerencia</a:t>
+              <a:t>nome</a:t>
             </a:r>
             <a:r>
               <a:rPr lang="pt-BR" sz="1600" dirty="0">
@@ -6327,9 +6967,73 @@
                 <a:spcPts val="150"/>
               </a:spcAft>
             </a:pPr>
-            <a:endParaRPr lang="pt-BR" sz="1600" b="1" dirty="0">
+            <a:r>
+              <a:rPr lang="pt-BR" sz="1600" b="1" dirty="0" err="1">
+                <a:solidFill>
+                  <a:srgbClr val="7F0055"/>
+                </a:solidFill>
+                <a:latin typeface="Consolas" panose="020B0609020204030204" pitchFamily="49" charset="0"/>
+              </a:rPr>
+              <a:t>private</a:t>
+            </a:r>
+            <a:r>
+              <a:rPr lang="pt-BR" sz="1600" dirty="0">
+                <a:solidFill>
+                  <a:srgbClr val="000000"/>
+                </a:solidFill>
+                <a:latin typeface="Consolas" panose="020B0609020204030204" pitchFamily="49" charset="0"/>
+              </a:rPr>
+              <a:t> </a:t>
+            </a:r>
+            <a:r>
+              <a:rPr lang="pt-BR" sz="1600" b="1" dirty="0">
+                <a:solidFill>
+                  <a:srgbClr val="7F0055"/>
+                </a:solidFill>
+                <a:latin typeface="Consolas" panose="020B0609020204030204" pitchFamily="49" charset="0"/>
+              </a:rPr>
+              <a:t>double</a:t>
+            </a:r>
+            <a:r>
+              <a:rPr lang="pt-BR" sz="1600" dirty="0">
+                <a:solidFill>
+                  <a:srgbClr val="000000"/>
+                </a:solidFill>
+                <a:latin typeface="Consolas" panose="020B0609020204030204" pitchFamily="49" charset="0"/>
+              </a:rPr>
+              <a:t> </a:t>
+            </a:r>
+            <a:r>
+              <a:rPr lang="pt-BR" sz="1600" u="sng" dirty="0">
+                <a:solidFill>
+                  <a:srgbClr val="0000C0"/>
+                </a:solidFill>
+                <a:latin typeface="Consolas" panose="020B0609020204030204" pitchFamily="49" charset="0"/>
+              </a:rPr>
+              <a:t>salario</a:t>
+            </a:r>
+            <a:r>
+              <a:rPr lang="pt-BR" sz="1600" dirty="0">
+                <a:solidFill>
+                  <a:srgbClr val="000000"/>
+                </a:solidFill>
+                <a:latin typeface="Consolas" panose="020B0609020204030204" pitchFamily="49" charset="0"/>
+              </a:rPr>
+              <a:t>;</a:t>
+            </a:r>
+          </a:p>
+          <a:p>
+            <a:pPr lvl="1">
+              <a:spcBef>
+                <a:spcPts val="150"/>
+              </a:spcBef>
+              <a:spcAft>
+                <a:spcPts val="150"/>
+              </a:spcAft>
+            </a:pPr>
+            <a:endParaRPr lang="pt-BR" sz="1600" dirty="0">
               <a:solidFill>
-                <a:srgbClr val="7F0055"/>
+                <a:srgbClr val="000000"/>
               </a:solidFill>
               <a:latin typeface="Consolas" panose="020B0609020204030204" pitchFamily="49" charset="0"/>
             </a:endParaRPr>
@@ -6359,11 +7063,29 @@
                 </a:solidFill>
                 <a:latin typeface="Consolas" panose="020B0609020204030204" pitchFamily="49" charset="0"/>
               </a:rPr>
-              <a:t> Gerente(String </a:t>
+              <a:t> </a:t>
+            </a:r>
+            <a:r>
+              <a:rPr lang="pt-BR" sz="1600" dirty="0" err="1">
+                <a:solidFill>
+                  <a:srgbClr val="000000"/>
+                </a:solidFill>
+                <a:latin typeface="Consolas" panose="020B0609020204030204" pitchFamily="49" charset="0"/>
+              </a:rPr>
+              <a:t>Funcionarios</a:t>
             </a:r>
             <a:r>
               <a:rPr lang="pt-BR" sz="1600" dirty="0">
                 <a:solidFill>
+                  <a:srgbClr val="000000"/>
+                </a:solidFill>
+                <a:latin typeface="Consolas" panose="020B0609020204030204" pitchFamily="49" charset="0"/>
+              </a:rPr>
+              <a:t>(String </a:t>
+            </a:r>
+            <a:r>
+              <a:rPr lang="pt-BR" sz="1600" dirty="0">
+                <a:solidFill>
                   <a:srgbClr val="6A3E3E"/>
                 </a:solidFill>
                 <a:latin typeface="Consolas" panose="020B0609020204030204" pitchFamily="49" charset="0"/>
@@ -6405,42 +7127,6 @@
                 <a:latin typeface="Consolas" panose="020B0609020204030204" pitchFamily="49" charset="0"/>
               </a:rPr>
               <a:t>salario</a:t>
-            </a:r>
-            <a:r>
-              <a:rPr lang="pt-BR" sz="1600" dirty="0">
-                <a:solidFill>
-                  <a:srgbClr val="000000"/>
-                </a:solidFill>
-                <a:latin typeface="Consolas" panose="020B0609020204030204" pitchFamily="49" charset="0"/>
-              </a:rPr>
-              <a:t>, </a:t>
-            </a:r>
-            <a:r>
-              <a:rPr lang="pt-BR" sz="1600" b="1" dirty="0">
-                <a:solidFill>
-                  <a:srgbClr val="7F0055"/>
-                </a:solidFill>
-                <a:latin typeface="Consolas" panose="020B0609020204030204" pitchFamily="49" charset="0"/>
-              </a:rPr>
-              <a:t>double</a:t>
-            </a:r>
-            <a:r>
-              <a:rPr lang="pt-BR" sz="1600" dirty="0">
-                <a:solidFill>
-                  <a:srgbClr val="000000"/>
-                </a:solidFill>
-                <a:latin typeface="Consolas" panose="020B0609020204030204" pitchFamily="49" charset="0"/>
-              </a:rPr>
-              <a:t> </a:t>
-            </a:r>
-            <a:r>
-              <a:rPr lang="pt-BR" sz="1600" dirty="0" err="1">
-                <a:solidFill>
-                  <a:srgbClr val="6A3E3E"/>
-                </a:solidFill>
-                <a:latin typeface="Consolas" panose="020B0609020204030204" pitchFamily="49" charset="0"/>
-              </a:rPr>
-              <a:t>adicionalGerencia</a:t>
             </a:r>
             <a:r>
               <a:rPr lang="pt-BR" sz="1600" dirty="0">
@@ -6468,7 +7154,25 @@
                 </a:solidFill>
                 <a:latin typeface="Consolas" panose="020B0609020204030204" pitchFamily="49" charset="0"/>
               </a:rPr>
-              <a:t>super</a:t>
+              <a:t>this</a:t>
+            </a:r>
+            <a:r>
+              <a:rPr lang="pt-BR" sz="1600" dirty="0" err="1">
+                <a:solidFill>
+                  <a:srgbClr val="000000"/>
+                </a:solidFill>
+                <a:latin typeface="Consolas" panose="020B0609020204030204" pitchFamily="49" charset="0"/>
+              </a:rPr>
+              <a:t>.</a:t>
+            </a:r>
+            <a:r>
+              <a:rPr lang="pt-BR" sz="1600" dirty="0" err="1">
+                <a:solidFill>
+                  <a:srgbClr val="0000C0"/>
+                </a:solidFill>
+                <a:latin typeface="Consolas" panose="020B0609020204030204" pitchFamily="49" charset="0"/>
+              </a:rPr>
+              <a:t>nome</a:t>
             </a:r>
             <a:r>
               <a:rPr lang="pt-BR" sz="1600" dirty="0">
@@ -6477,7 +7181,7 @@
                 </a:solidFill>
                 <a:latin typeface="Consolas" panose="020B0609020204030204" pitchFamily="49" charset="0"/>
               </a:rPr>
-              <a:t>(</a:t>
+              <a:t> = </a:t>
             </a:r>
             <a:r>
               <a:rPr lang="pt-BR" sz="1600" dirty="0">
@@ -6495,25 +7199,7 @@
                 </a:solidFill>
                 <a:latin typeface="Consolas" panose="020B0609020204030204" pitchFamily="49" charset="0"/>
               </a:rPr>
-              <a:t>, </a:t>
-            </a:r>
-            <a:r>
-              <a:rPr lang="pt-BR" sz="1600" dirty="0">
-                <a:solidFill>
-                  <a:srgbClr val="6A3E3E"/>
-                </a:solidFill>
-                <a:latin typeface="Consolas" panose="020B0609020204030204" pitchFamily="49" charset="0"/>
-              </a:rPr>
-              <a:t>salario</a:t>
-            </a:r>
-            <a:r>
-              <a:rPr lang="pt-BR" sz="1600" dirty="0">
-                <a:solidFill>
-                  <a:srgbClr val="000000"/>
-                </a:solidFill>
-                <a:latin typeface="Consolas" panose="020B0609020204030204" pitchFamily="49" charset="0"/>
-              </a:rPr>
-              <a:t>);</a:t>
+              <a:t>;</a:t>
             </a:r>
           </a:p>
           <a:p>
@@ -6550,7 +7236,7 @@
                 </a:solidFill>
                 <a:latin typeface="Consolas" panose="020B0609020204030204" pitchFamily="49" charset="0"/>
               </a:rPr>
-              <a:t>adicionalGerencia</a:t>
+              <a:t>salario</a:t>
             </a:r>
             <a:r>
               <a:rPr lang="pt-BR" sz="1600" dirty="0">
@@ -6562,13 +7248,13 @@
               <a:t> = </a:t>
             </a:r>
             <a:r>
-              <a:rPr lang="pt-BR" sz="1600" dirty="0" err="1">
+              <a:rPr lang="pt-BR" sz="1600" dirty="0">
                 <a:solidFill>
                   <a:srgbClr val="6A3E3E"/>
                 </a:solidFill>
                 <a:latin typeface="Consolas" panose="020B0609020204030204" pitchFamily="49" charset="0"/>
               </a:rPr>
-              <a:t>adicionalGerencia</a:t>
+              <a:t>salario</a:t>
             </a:r>
             <a:r>
               <a:rPr lang="pt-BR" sz="1600" dirty="0">
@@ -6581,7 +7267,7 @@
             </a:r>
           </a:p>
           <a:p>
-            <a:pPr lvl="1">
+            <a:pPr marL="457200" lvl="2">
               <a:spcBef>
                 <a:spcPts val="150"/>
               </a:spcBef>
@@ -6623,7 +7309,7 @@
     </p:spTree>
     <p:extLst>
       <p:ext uri="{BB962C8B-B14F-4D97-AF65-F5344CB8AC3E}">
-        <p14:creationId xmlns:p14="http://schemas.microsoft.com/office/powerpoint/2010/main" val="3696678201"/>
+        <p14:creationId xmlns:p14="http://schemas.microsoft.com/office/powerpoint/2010/main" val="229873426"/>
       </p:ext>
     </p:extLst>
   </p:cSld>
@@ -6655,7 +7341,7 @@
           <p:cNvPr id="2" name="Título 1">
             <a:extLst>
               <a:ext uri="{FF2B5EF4-FFF2-40B4-BE49-F238E27FC236}">
-                <a16:creationId xmlns:a16="http://schemas.microsoft.com/office/drawing/2014/main" id="{F68281D3-C181-4E1C-B325-E00D3550CEFA}"/>
+                <a16:creationId xmlns:a16="http://schemas.microsoft.com/office/drawing/2014/main" id="{13BF5B45-63CF-41F7-8496-D896490AE335}"/>
               </a:ext>
             </a:extLst>
           </p:cNvPr>
@@ -6672,13 +7358,17 @@
           <a:lstStyle/>
           <a:p>
             <a:r>
-              <a:rPr lang="pt-BR" b="1" dirty="0"/>
-              <a:t>O que é Polimorfismo?</a:t>
-            </a:r>
-            <a:br>
-              <a:rPr lang="pt-BR" b="1" dirty="0"/>
-            </a:br>
-            <a:endParaRPr lang="pt-BR" dirty="0"/>
+              <a:rPr lang="pt-BR" dirty="0"/>
+              <a:t>Construtor </a:t>
+            </a:r>
+            <a:r>
+              <a:rPr lang="pt-BR" dirty="0" err="1"/>
+              <a:t>Super</a:t>
+            </a:r>
+            <a:r>
+              <a:rPr lang="pt-BR" dirty="0"/>
+              <a:t>()</a:t>
+            </a:r>
           </a:p>
         </p:txBody>
       </p:sp>
@@ -6687,7 +7377,7 @@
           <p:cNvPr id="3" name="Espaço Reservado para Conteúdo 2">
             <a:extLst>
               <a:ext uri="{FF2B5EF4-FFF2-40B4-BE49-F238E27FC236}">
-                <a16:creationId xmlns:a16="http://schemas.microsoft.com/office/drawing/2014/main" id="{B58E572E-10D7-43D6-B230-D23680BEFDD1}"/>
+                <a16:creationId xmlns:a16="http://schemas.microsoft.com/office/drawing/2014/main" id="{05C539C4-EDD4-414C-ADA6-9C2633603CB2}"/>
               </a:ext>
             </a:extLst>
           </p:cNvPr>
@@ -6698,47 +7388,540 @@
             <p:ph idx="1"/>
           </p:nvPr>
         </p:nvSpPr>
-        <p:spPr/>
+        <p:spPr>
+          <a:xfrm>
+            <a:off x="592347" y="1844675"/>
+            <a:ext cx="11007306" cy="1473291"/>
+          </a:xfrm>
+        </p:spPr>
         <p:txBody>
           <a:bodyPr/>
           <a:lstStyle/>
           <a:p>
             <a:r>
-              <a:rPr lang="pt-BR" dirty="0"/>
-              <a:t>Polimorfismo é a habilidade de um mesmo objeto executar comportamentos diferentes, dependendo da forma como é utilizado no programa.</a:t>
-            </a:r>
-          </a:p>
-          <a:p>
-            <a:endParaRPr lang="pt-BR" dirty="0"/>
-          </a:p>
-          <a:p>
-            <a:pPr lvl="1"/>
-            <a:r>
-              <a:rPr lang="pt-BR" dirty="0"/>
-              <a:t>Sobrecarga (</a:t>
-            </a:r>
-            <a:r>
-              <a:rPr lang="pt-BR" dirty="0" err="1"/>
-              <a:t>Overloading</a:t>
-            </a:r>
-            <a:r>
-              <a:rPr lang="pt-BR" dirty="0"/>
-              <a:t>):Vários métodos com o mesmo nome, mas com parâmetros diferentes na mesma classe.</a:t>
-            </a:r>
-          </a:p>
-          <a:p>
-            <a:pPr lvl="1"/>
-            <a:r>
-              <a:rPr lang="pt-BR" dirty="0"/>
-              <a:t>Sobrescrita (</a:t>
-            </a:r>
-            <a:r>
-              <a:rPr lang="pt-BR" dirty="0" err="1"/>
-              <a:t>Overriding</a:t>
-            </a:r>
-            <a:r>
-              <a:rPr lang="pt-BR" dirty="0"/>
-              <a:t>):Uma subclasse redefine um método da superclasse, mantendo a mesma assinatura.</a:t>
+              <a:rPr lang="pt-BR" sz="1800" dirty="0"/>
+              <a:t>A palavra-chave </a:t>
+            </a:r>
+            <a:r>
+              <a:rPr lang="pt-BR" sz="1800" dirty="0" err="1"/>
+              <a:t>super</a:t>
+            </a:r>
+            <a:r>
+              <a:rPr lang="pt-BR" sz="1800" dirty="0"/>
+              <a:t> é utilizada para se referir à superclasse (classe pai) de uma classe derivada (classe filha). Ela é especialmente útil quando há a necessidade de reutilizar atributos ou métodos da classe pai, evitando a repetição de código.</a:t>
+            </a:r>
+          </a:p>
+        </p:txBody>
+      </p:sp>
+      <p:sp>
+        <p:nvSpPr>
+          <p:cNvPr id="7" name="CaixaDeTexto 6">
+            <a:extLst>
+              <a:ext uri="{FF2B5EF4-FFF2-40B4-BE49-F238E27FC236}">
+                <a16:creationId xmlns:a16="http://schemas.microsoft.com/office/drawing/2014/main" id="{15C42C8B-8DB6-4C73-97AE-4AF8FC519272}"/>
+              </a:ext>
+            </a:extLst>
+          </p:cNvPr>
+          <p:cNvSpPr txBox="1"/>
+          <p:nvPr/>
+        </p:nvSpPr>
+        <p:spPr>
+          <a:xfrm>
+            <a:off x="5503559" y="3520485"/>
+            <a:ext cx="1184883" cy="338554"/>
+          </a:xfrm>
+          <a:prstGeom prst="rect">
+            <a:avLst/>
+          </a:prstGeom>
+          <a:noFill/>
+        </p:spPr>
+        <p:txBody>
+          <a:bodyPr wrap="square" rtlCol="0">
+            <a:spAutoFit/>
+          </a:bodyPr>
+          <a:lstStyle/>
+          <a:p>
+            <a:pPr algn="ctr"/>
+            <a:r>
+              <a:rPr lang="pt-BR" sz="1600" dirty="0">
+                <a:latin typeface="Times New Roman" panose="02020603050405020304" pitchFamily="18" charset="0"/>
+                <a:cs typeface="Times New Roman" panose="02020603050405020304" pitchFamily="18" charset="0"/>
+              </a:rPr>
+              <a:t>Classe Filha</a:t>
+            </a:r>
+          </a:p>
+        </p:txBody>
+      </p:sp>
+      <p:sp>
+        <p:nvSpPr>
+          <p:cNvPr id="4" name="Retângulo 3">
+            <a:extLst>
+              <a:ext uri="{FF2B5EF4-FFF2-40B4-BE49-F238E27FC236}">
+                <a16:creationId xmlns:a16="http://schemas.microsoft.com/office/drawing/2014/main" id="{FFAD0326-5AFB-4F87-8E1F-8F1446812B25}"/>
+              </a:ext>
+            </a:extLst>
+          </p:cNvPr>
+          <p:cNvSpPr/>
+          <p:nvPr/>
+        </p:nvSpPr>
+        <p:spPr>
+          <a:xfrm>
+            <a:off x="1698171" y="4061558"/>
+            <a:ext cx="8795657" cy="2421176"/>
+          </a:xfrm>
+          <a:prstGeom prst="rect">
+            <a:avLst/>
+          </a:prstGeom>
+        </p:spPr>
+        <p:txBody>
+          <a:bodyPr wrap="square">
+            <a:spAutoFit/>
+          </a:bodyPr>
+          <a:lstStyle/>
+          <a:p>
+            <a:pPr>
+              <a:spcBef>
+                <a:spcPts val="150"/>
+              </a:spcBef>
+              <a:spcAft>
+                <a:spcPts val="150"/>
+              </a:spcAft>
+            </a:pPr>
+            <a:r>
+              <a:rPr lang="pt-BR" sz="1600" b="1" dirty="0" err="1">
+                <a:solidFill>
+                  <a:srgbClr val="7F0055"/>
+                </a:solidFill>
+                <a:latin typeface="Consolas" panose="020B0609020204030204" pitchFamily="49" charset="0"/>
+              </a:rPr>
+              <a:t>public</a:t>
+            </a:r>
+            <a:r>
+              <a:rPr lang="pt-BR" sz="1600" dirty="0">
+                <a:solidFill>
+                  <a:srgbClr val="000000"/>
+                </a:solidFill>
+                <a:latin typeface="Consolas" panose="020B0609020204030204" pitchFamily="49" charset="0"/>
+              </a:rPr>
+              <a:t> </a:t>
+            </a:r>
+            <a:r>
+              <a:rPr lang="pt-BR" sz="1600" b="1" dirty="0" err="1">
+                <a:solidFill>
+                  <a:srgbClr val="7F0055"/>
+                </a:solidFill>
+                <a:latin typeface="Consolas" panose="020B0609020204030204" pitchFamily="49" charset="0"/>
+              </a:rPr>
+              <a:t>class</a:t>
+            </a:r>
+            <a:r>
+              <a:rPr lang="pt-BR" sz="1600" dirty="0">
+                <a:solidFill>
+                  <a:srgbClr val="000000"/>
+                </a:solidFill>
+                <a:latin typeface="Consolas" panose="020B0609020204030204" pitchFamily="49" charset="0"/>
+              </a:rPr>
+              <a:t> Gerente </a:t>
+            </a:r>
+            <a:r>
+              <a:rPr lang="pt-BR" sz="1600" b="1" dirty="0" err="1">
+                <a:solidFill>
+                  <a:srgbClr val="7F0055"/>
+                </a:solidFill>
+                <a:latin typeface="Consolas" panose="020B0609020204030204" pitchFamily="49" charset="0"/>
+              </a:rPr>
+              <a:t>extends</a:t>
+            </a:r>
+            <a:r>
+              <a:rPr lang="pt-BR" sz="1600" dirty="0">
+                <a:solidFill>
+                  <a:srgbClr val="000000"/>
+                </a:solidFill>
+                <a:latin typeface="Consolas" panose="020B0609020204030204" pitchFamily="49" charset="0"/>
+              </a:rPr>
+              <a:t> </a:t>
+            </a:r>
+            <a:r>
+              <a:rPr lang="pt-BR" sz="1600" dirty="0" err="1">
+                <a:solidFill>
+                  <a:srgbClr val="000000"/>
+                </a:solidFill>
+                <a:latin typeface="Consolas" panose="020B0609020204030204" pitchFamily="49" charset="0"/>
+              </a:rPr>
+              <a:t>Funcionarios</a:t>
+            </a:r>
+            <a:r>
+              <a:rPr lang="pt-BR" sz="1600" dirty="0">
+                <a:solidFill>
+                  <a:srgbClr val="000000"/>
+                </a:solidFill>
+                <a:latin typeface="Consolas" panose="020B0609020204030204" pitchFamily="49" charset="0"/>
+              </a:rPr>
+              <a:t>{</a:t>
+            </a:r>
+          </a:p>
+          <a:p>
+            <a:pPr lvl="1">
+              <a:spcBef>
+                <a:spcPts val="150"/>
+              </a:spcBef>
+              <a:spcAft>
+                <a:spcPts val="150"/>
+              </a:spcAft>
+            </a:pPr>
+            <a:r>
+              <a:rPr lang="pt-BR" sz="1600" b="1" dirty="0" err="1">
+                <a:solidFill>
+                  <a:srgbClr val="7F0055"/>
+                </a:solidFill>
+                <a:latin typeface="Consolas" panose="020B0609020204030204" pitchFamily="49" charset="0"/>
+              </a:rPr>
+              <a:t>private</a:t>
+            </a:r>
+            <a:r>
+              <a:rPr lang="pt-BR" sz="1600" dirty="0">
+                <a:solidFill>
+                  <a:srgbClr val="000000"/>
+                </a:solidFill>
+                <a:latin typeface="Consolas" panose="020B0609020204030204" pitchFamily="49" charset="0"/>
+              </a:rPr>
+              <a:t> </a:t>
+            </a:r>
+            <a:r>
+              <a:rPr lang="pt-BR" sz="1600" b="1" dirty="0">
+                <a:solidFill>
+                  <a:srgbClr val="7F0055"/>
+                </a:solidFill>
+                <a:latin typeface="Consolas" panose="020B0609020204030204" pitchFamily="49" charset="0"/>
+              </a:rPr>
+              <a:t>double</a:t>
+            </a:r>
+            <a:r>
+              <a:rPr lang="pt-BR" sz="1600" dirty="0">
+                <a:solidFill>
+                  <a:srgbClr val="000000"/>
+                </a:solidFill>
+                <a:latin typeface="Consolas" panose="020B0609020204030204" pitchFamily="49" charset="0"/>
+              </a:rPr>
+              <a:t> </a:t>
+            </a:r>
+            <a:r>
+              <a:rPr lang="pt-BR" sz="1600" dirty="0" err="1">
+                <a:solidFill>
+                  <a:srgbClr val="0000C0"/>
+                </a:solidFill>
+                <a:latin typeface="Consolas" panose="020B0609020204030204" pitchFamily="49" charset="0"/>
+              </a:rPr>
+              <a:t>adicionalGerencia</a:t>
+            </a:r>
+            <a:r>
+              <a:rPr lang="pt-BR" sz="1600" dirty="0">
+                <a:solidFill>
+                  <a:srgbClr val="000000"/>
+                </a:solidFill>
+                <a:latin typeface="Consolas" panose="020B0609020204030204" pitchFamily="49" charset="0"/>
+              </a:rPr>
+              <a:t>;</a:t>
+            </a:r>
+          </a:p>
+          <a:p>
+            <a:pPr lvl="1">
+              <a:spcBef>
+                <a:spcPts val="150"/>
+              </a:spcBef>
+              <a:spcAft>
+                <a:spcPts val="150"/>
+              </a:spcAft>
+            </a:pPr>
+            <a:endParaRPr lang="pt-BR" sz="1600" b="1" dirty="0">
+              <a:solidFill>
+                <a:srgbClr val="7F0055"/>
+              </a:solidFill>
+              <a:latin typeface="Consolas" panose="020B0609020204030204" pitchFamily="49" charset="0"/>
+            </a:endParaRPr>
+          </a:p>
+          <a:p>
+            <a:pPr lvl="1">
+              <a:spcBef>
+                <a:spcPts val="150"/>
+              </a:spcBef>
+              <a:spcAft>
+                <a:spcPts val="150"/>
+              </a:spcAft>
+            </a:pPr>
+            <a:r>
+              <a:rPr lang="pt-BR" sz="1600" b="1" dirty="0" err="1">
+                <a:solidFill>
+                  <a:srgbClr val="7F0055"/>
+                </a:solidFill>
+                <a:latin typeface="Consolas" panose="020B0609020204030204" pitchFamily="49" charset="0"/>
+              </a:rPr>
+              <a:t>public</a:t>
+            </a:r>
+            <a:r>
+              <a:rPr lang="pt-BR" sz="1600" dirty="0">
+                <a:solidFill>
+                  <a:srgbClr val="000000"/>
+                </a:solidFill>
+                <a:latin typeface="Consolas" panose="020B0609020204030204" pitchFamily="49" charset="0"/>
+              </a:rPr>
+              <a:t> Gerente(String </a:t>
+            </a:r>
+            <a:r>
+              <a:rPr lang="pt-BR" sz="1600" dirty="0">
+                <a:solidFill>
+                  <a:srgbClr val="6A3E3E"/>
+                </a:solidFill>
+                <a:latin typeface="Consolas" panose="020B0609020204030204" pitchFamily="49" charset="0"/>
+              </a:rPr>
+              <a:t>nome</a:t>
+            </a:r>
+            <a:r>
+              <a:rPr lang="pt-BR" sz="1600" dirty="0">
+                <a:solidFill>
+                  <a:srgbClr val="000000"/>
+                </a:solidFill>
+                <a:latin typeface="Consolas" panose="020B0609020204030204" pitchFamily="49" charset="0"/>
+              </a:rPr>
+              <a:t>, </a:t>
+            </a:r>
+            <a:r>
+              <a:rPr lang="pt-BR" sz="1600" b="1" dirty="0">
+                <a:solidFill>
+                  <a:srgbClr val="7F0055"/>
+                </a:solidFill>
+                <a:latin typeface="Consolas" panose="020B0609020204030204" pitchFamily="49" charset="0"/>
+              </a:rPr>
+              <a:t>double</a:t>
+            </a:r>
+            <a:r>
+              <a:rPr lang="pt-BR" sz="1600" dirty="0">
+                <a:solidFill>
+                  <a:srgbClr val="000000"/>
+                </a:solidFill>
+                <a:latin typeface="Consolas" panose="020B0609020204030204" pitchFamily="49" charset="0"/>
+              </a:rPr>
+              <a:t> </a:t>
+            </a:r>
+            <a:r>
+              <a:rPr lang="pt-BR" sz="1600" dirty="0">
+                <a:solidFill>
+                  <a:srgbClr val="6A3E3E"/>
+                </a:solidFill>
+                <a:latin typeface="Consolas" panose="020B0609020204030204" pitchFamily="49" charset="0"/>
+              </a:rPr>
+              <a:t>salario</a:t>
+            </a:r>
+            <a:r>
+              <a:rPr lang="pt-BR" sz="1600" dirty="0">
+                <a:solidFill>
+                  <a:srgbClr val="000000"/>
+                </a:solidFill>
+                <a:latin typeface="Consolas" panose="020B0609020204030204" pitchFamily="49" charset="0"/>
+              </a:rPr>
+              <a:t>, </a:t>
+            </a:r>
+            <a:r>
+              <a:rPr lang="pt-BR" sz="1600" b="1" dirty="0">
+                <a:solidFill>
+                  <a:srgbClr val="7F0055"/>
+                </a:solidFill>
+                <a:latin typeface="Consolas" panose="020B0609020204030204" pitchFamily="49" charset="0"/>
+              </a:rPr>
+              <a:t>double</a:t>
+            </a:r>
+            <a:r>
+              <a:rPr lang="pt-BR" sz="1600" dirty="0">
+                <a:solidFill>
+                  <a:srgbClr val="000000"/>
+                </a:solidFill>
+                <a:latin typeface="Consolas" panose="020B0609020204030204" pitchFamily="49" charset="0"/>
+              </a:rPr>
+              <a:t> </a:t>
+            </a:r>
+            <a:r>
+              <a:rPr lang="pt-BR" sz="1600" dirty="0" err="1">
+                <a:solidFill>
+                  <a:srgbClr val="6A3E3E"/>
+                </a:solidFill>
+                <a:latin typeface="Consolas" panose="020B0609020204030204" pitchFamily="49" charset="0"/>
+              </a:rPr>
+              <a:t>adicionalGerencia</a:t>
+            </a:r>
+            <a:r>
+              <a:rPr lang="pt-BR" sz="1600" dirty="0">
+                <a:solidFill>
+                  <a:srgbClr val="000000"/>
+                </a:solidFill>
+                <a:latin typeface="Consolas" panose="020B0609020204030204" pitchFamily="49" charset="0"/>
+              </a:rPr>
+              <a:t>) {</a:t>
+            </a:r>
+          </a:p>
+          <a:p>
+            <a:pPr lvl="2">
+              <a:spcBef>
+                <a:spcPts val="150"/>
+              </a:spcBef>
+              <a:spcAft>
+                <a:spcPts val="150"/>
+              </a:spcAft>
+            </a:pPr>
+            <a:r>
+              <a:rPr lang="pt-BR" sz="1600" b="1" dirty="0" err="1">
+                <a:solidFill>
+                  <a:srgbClr val="7F0055"/>
+                </a:solidFill>
+                <a:latin typeface="Consolas" panose="020B0609020204030204" pitchFamily="49" charset="0"/>
+              </a:rPr>
+              <a:t>super</a:t>
+            </a:r>
+            <a:r>
+              <a:rPr lang="pt-BR" sz="1600" dirty="0">
+                <a:solidFill>
+                  <a:srgbClr val="000000"/>
+                </a:solidFill>
+                <a:latin typeface="Consolas" panose="020B0609020204030204" pitchFamily="49" charset="0"/>
+              </a:rPr>
+              <a:t>(</a:t>
+            </a:r>
+            <a:r>
+              <a:rPr lang="pt-BR" sz="1600" dirty="0">
+                <a:solidFill>
+                  <a:srgbClr val="6A3E3E"/>
+                </a:solidFill>
+                <a:latin typeface="Consolas" panose="020B0609020204030204" pitchFamily="49" charset="0"/>
+              </a:rPr>
+              <a:t>nome</a:t>
+            </a:r>
+            <a:r>
+              <a:rPr lang="pt-BR" sz="1600" dirty="0">
+                <a:solidFill>
+                  <a:srgbClr val="000000"/>
+                </a:solidFill>
+                <a:latin typeface="Consolas" panose="020B0609020204030204" pitchFamily="49" charset="0"/>
+              </a:rPr>
+              <a:t>, </a:t>
+            </a:r>
+            <a:r>
+              <a:rPr lang="pt-BR" sz="1600" dirty="0">
+                <a:solidFill>
+                  <a:srgbClr val="6A3E3E"/>
+                </a:solidFill>
+                <a:latin typeface="Consolas" panose="020B0609020204030204" pitchFamily="49" charset="0"/>
+              </a:rPr>
+              <a:t>salario</a:t>
+            </a:r>
+            <a:r>
+              <a:rPr lang="pt-BR" sz="1600" dirty="0">
+                <a:solidFill>
+                  <a:srgbClr val="000000"/>
+                </a:solidFill>
+                <a:latin typeface="Consolas" panose="020B0609020204030204" pitchFamily="49" charset="0"/>
+              </a:rPr>
+              <a:t>);</a:t>
+            </a:r>
+          </a:p>
+          <a:p>
+            <a:pPr lvl="2">
+              <a:spcBef>
+                <a:spcPts val="150"/>
+              </a:spcBef>
+              <a:spcAft>
+                <a:spcPts val="150"/>
+              </a:spcAft>
+            </a:pPr>
+            <a:r>
+              <a:rPr lang="pt-BR" sz="1600" b="1" dirty="0" err="1">
+                <a:solidFill>
+                  <a:srgbClr val="7F0055"/>
+                </a:solidFill>
+                <a:latin typeface="Consolas" panose="020B0609020204030204" pitchFamily="49" charset="0"/>
+              </a:rPr>
+              <a:t>this</a:t>
+            </a:r>
+            <a:r>
+              <a:rPr lang="pt-BR" sz="1600" dirty="0" err="1">
+                <a:solidFill>
+                  <a:srgbClr val="000000"/>
+                </a:solidFill>
+                <a:latin typeface="Consolas" panose="020B0609020204030204" pitchFamily="49" charset="0"/>
+              </a:rPr>
+              <a:t>.</a:t>
+            </a:r>
+            <a:r>
+              <a:rPr lang="pt-BR" sz="1600" dirty="0" err="1">
+                <a:solidFill>
+                  <a:srgbClr val="0000C0"/>
+                </a:solidFill>
+                <a:latin typeface="Consolas" panose="020B0609020204030204" pitchFamily="49" charset="0"/>
+              </a:rPr>
+              <a:t>adicionalGerencia</a:t>
+            </a:r>
+            <a:r>
+              <a:rPr lang="pt-BR" sz="1600" dirty="0">
+                <a:solidFill>
+                  <a:srgbClr val="000000"/>
+                </a:solidFill>
+                <a:latin typeface="Consolas" panose="020B0609020204030204" pitchFamily="49" charset="0"/>
+              </a:rPr>
+              <a:t> = </a:t>
+            </a:r>
+            <a:r>
+              <a:rPr lang="pt-BR" sz="1600" dirty="0" err="1">
+                <a:solidFill>
+                  <a:srgbClr val="6A3E3E"/>
+                </a:solidFill>
+                <a:latin typeface="Consolas" panose="020B0609020204030204" pitchFamily="49" charset="0"/>
+              </a:rPr>
+              <a:t>adicionalGerencia</a:t>
+            </a:r>
+            <a:r>
+              <a:rPr lang="pt-BR" sz="1600" dirty="0">
+                <a:solidFill>
+                  <a:srgbClr val="000000"/>
+                </a:solidFill>
+                <a:latin typeface="Consolas" panose="020B0609020204030204" pitchFamily="49" charset="0"/>
+              </a:rPr>
+              <a:t>;</a:t>
+            </a:r>
+          </a:p>
+          <a:p>
+            <a:pPr lvl="1">
+              <a:spcBef>
+                <a:spcPts val="150"/>
+              </a:spcBef>
+              <a:spcAft>
+                <a:spcPts val="150"/>
+              </a:spcAft>
+            </a:pPr>
+            <a:r>
+              <a:rPr lang="pt-BR" sz="1600" dirty="0">
+                <a:solidFill>
+                  <a:srgbClr val="000000"/>
+                </a:solidFill>
+                <a:latin typeface="Consolas" panose="020B0609020204030204" pitchFamily="49" charset="0"/>
+              </a:rPr>
+              <a:t>}</a:t>
+            </a:r>
+          </a:p>
+          <a:p>
+            <a:pPr>
+              <a:spcBef>
+                <a:spcPts val="150"/>
+              </a:spcBef>
+              <a:spcAft>
+                <a:spcPts val="150"/>
+              </a:spcAft>
+            </a:pPr>
+            <a:r>
+              <a:rPr lang="pt-BR" sz="1600" dirty="0">
+                <a:solidFill>
+                  <a:srgbClr val="000000"/>
+                </a:solidFill>
+                <a:latin typeface="Consolas" panose="020B0609020204030204" pitchFamily="49" charset="0"/>
+              </a:rPr>
+              <a:t>}</a:t>
             </a:r>
           </a:p>
         </p:txBody>
@@ -6746,7 +7929,7 @@
     </p:spTree>
     <p:extLst>
       <p:ext uri="{BB962C8B-B14F-4D97-AF65-F5344CB8AC3E}">
-        <p14:creationId xmlns:p14="http://schemas.microsoft.com/office/powerpoint/2010/main" val="3973512991"/>
+        <p14:creationId xmlns:p14="http://schemas.microsoft.com/office/powerpoint/2010/main" val="13419183"/>
       </p:ext>
     </p:extLst>
   </p:cSld>
@@ -6778,7 +7961,7 @@
           <p:cNvPr id="2" name="Título 1">
             <a:extLst>
               <a:ext uri="{FF2B5EF4-FFF2-40B4-BE49-F238E27FC236}">
-                <a16:creationId xmlns:a16="http://schemas.microsoft.com/office/drawing/2014/main" id="{4A744C23-AA41-4EE5-936C-BE42F1928F7C}"/>
+                <a16:creationId xmlns:a16="http://schemas.microsoft.com/office/drawing/2014/main" id="{13BF5B45-63CF-41F7-8496-D896490AE335}"/>
               </a:ext>
             </a:extLst>
           </p:cNvPr>
@@ -6796,767 +7979,66 @@
           <a:p>
             <a:r>
               <a:rPr lang="pt-BR" dirty="0"/>
-              <a:t>Exemplo de Polimorfismo</a:t>
+              <a:t>Construtor </a:t>
+            </a:r>
+            <a:r>
+              <a:rPr lang="pt-BR" dirty="0" err="1"/>
+              <a:t>Super</a:t>
+            </a:r>
+            <a:r>
+              <a:rPr lang="pt-BR" dirty="0"/>
+              <a:t>()</a:t>
             </a:r>
           </a:p>
         </p:txBody>
       </p:sp>
       <p:sp>
         <p:nvSpPr>
-          <p:cNvPr id="4" name="Retângulo 3">
-            <a:extLst>
-              <a:ext uri="{FF2B5EF4-FFF2-40B4-BE49-F238E27FC236}">
-                <a16:creationId xmlns:a16="http://schemas.microsoft.com/office/drawing/2014/main" id="{A9C127C7-5E90-4A82-86A4-C9E34D1D6277}"/>
-              </a:ext>
-            </a:extLst>
-          </p:cNvPr>
-          <p:cNvSpPr/>
-          <p:nvPr/>
+          <p:cNvPr id="3" name="Espaço Reservado para Conteúdo 2">
+            <a:extLst>
+              <a:ext uri="{FF2B5EF4-FFF2-40B4-BE49-F238E27FC236}">
+                <a16:creationId xmlns:a16="http://schemas.microsoft.com/office/drawing/2014/main" id="{05C539C4-EDD4-414C-ADA6-9C2633603CB2}"/>
+              </a:ext>
+            </a:extLst>
+          </p:cNvPr>
+          <p:cNvSpPr>
+            <a:spLocks noGrp="1"/>
+          </p:cNvSpPr>
+          <p:nvPr>
+            <p:ph idx="1"/>
+          </p:nvPr>
         </p:nvSpPr>
         <p:spPr>
           <a:xfrm>
-            <a:off x="852311" y="3028407"/>
-            <a:ext cx="4698999" cy="2975173"/>
+            <a:off x="592347" y="1844675"/>
+            <a:ext cx="11007306" cy="1473291"/>
           </a:xfrm>
-          <a:prstGeom prst="rect">
-            <a:avLst/>
-          </a:prstGeom>
         </p:spPr>
         <p:txBody>
-          <a:bodyPr wrap="square">
-            <a:spAutoFit/>
-          </a:bodyPr>
+          <a:bodyPr/>
           <a:lstStyle/>
           <a:p>
-            <a:pPr>
-              <a:spcBef>
-                <a:spcPts val="150"/>
-              </a:spcBef>
-              <a:spcAft>
-                <a:spcPts val="150"/>
-              </a:spcAft>
-            </a:pPr>
-            <a:r>
-              <a:rPr lang="pt-BR" sz="1400" b="1" dirty="0" err="1">
-                <a:solidFill>
-                  <a:srgbClr val="7F0055"/>
-                </a:solidFill>
-                <a:latin typeface="Consolas" panose="020B0609020204030204" pitchFamily="49" charset="0"/>
-              </a:rPr>
-              <a:t>public</a:t>
-            </a:r>
-            <a:r>
-              <a:rPr lang="pt-BR" sz="1400" dirty="0">
-                <a:solidFill>
-                  <a:srgbClr val="000000"/>
-                </a:solidFill>
-                <a:latin typeface="Consolas" panose="020B0609020204030204" pitchFamily="49" charset="0"/>
-              </a:rPr>
-              <a:t> </a:t>
-            </a:r>
-            <a:r>
-              <a:rPr lang="pt-BR" sz="1400" b="1" dirty="0" err="1">
-                <a:solidFill>
-                  <a:srgbClr val="7F0055"/>
-                </a:solidFill>
-                <a:latin typeface="Consolas" panose="020B0609020204030204" pitchFamily="49" charset="0"/>
-              </a:rPr>
-              <a:t>class</a:t>
-            </a:r>
-            <a:r>
-              <a:rPr lang="pt-BR" sz="1400" dirty="0">
-                <a:solidFill>
-                  <a:srgbClr val="000000"/>
-                </a:solidFill>
-                <a:latin typeface="Consolas" panose="020B0609020204030204" pitchFamily="49" charset="0"/>
-              </a:rPr>
-              <a:t> Calculadora {</a:t>
-            </a:r>
-          </a:p>
-          <a:p>
-            <a:pPr indent="457200">
-              <a:spcBef>
-                <a:spcPts val="150"/>
-              </a:spcBef>
-              <a:spcAft>
-                <a:spcPts val="150"/>
-              </a:spcAft>
-            </a:pPr>
-            <a:r>
-              <a:rPr lang="pt-BR" sz="1400" b="1" dirty="0" err="1">
-                <a:solidFill>
-                  <a:srgbClr val="7F0055"/>
-                </a:solidFill>
-                <a:latin typeface="Consolas" panose="020B0609020204030204" pitchFamily="49" charset="0"/>
-              </a:rPr>
-              <a:t>public</a:t>
-            </a:r>
-            <a:r>
-              <a:rPr lang="pt-BR" sz="1400" dirty="0">
-                <a:solidFill>
-                  <a:srgbClr val="000000"/>
-                </a:solidFill>
-                <a:latin typeface="Consolas" panose="020B0609020204030204" pitchFamily="49" charset="0"/>
-              </a:rPr>
-              <a:t> </a:t>
-            </a:r>
-            <a:r>
-              <a:rPr lang="pt-BR" sz="1400" b="1" dirty="0" err="1">
-                <a:solidFill>
-                  <a:srgbClr val="7F0055"/>
-                </a:solidFill>
-                <a:latin typeface="Consolas" panose="020B0609020204030204" pitchFamily="49" charset="0"/>
-              </a:rPr>
-              <a:t>int</a:t>
-            </a:r>
-            <a:r>
-              <a:rPr lang="pt-BR" sz="1400" dirty="0">
-                <a:solidFill>
-                  <a:srgbClr val="000000"/>
-                </a:solidFill>
-                <a:latin typeface="Consolas" panose="020B0609020204030204" pitchFamily="49" charset="0"/>
-              </a:rPr>
-              <a:t> somar(</a:t>
-            </a:r>
-            <a:r>
-              <a:rPr lang="pt-BR" sz="1400" b="1" dirty="0" err="1">
-                <a:solidFill>
-                  <a:srgbClr val="7F0055"/>
-                </a:solidFill>
-                <a:latin typeface="Consolas" panose="020B0609020204030204" pitchFamily="49" charset="0"/>
-              </a:rPr>
-              <a:t>int</a:t>
-            </a:r>
-            <a:r>
-              <a:rPr lang="pt-BR" sz="1400" dirty="0">
-                <a:solidFill>
-                  <a:srgbClr val="000000"/>
-                </a:solidFill>
-                <a:latin typeface="Consolas" panose="020B0609020204030204" pitchFamily="49" charset="0"/>
-              </a:rPr>
-              <a:t> </a:t>
-            </a:r>
-            <a:r>
-              <a:rPr lang="pt-BR" sz="1400" dirty="0">
-                <a:solidFill>
-                  <a:srgbClr val="6A3E3E"/>
-                </a:solidFill>
-                <a:latin typeface="Consolas" panose="020B0609020204030204" pitchFamily="49" charset="0"/>
-              </a:rPr>
-              <a:t>a</a:t>
-            </a:r>
-            <a:r>
-              <a:rPr lang="pt-BR" sz="1400" dirty="0">
-                <a:solidFill>
-                  <a:srgbClr val="000000"/>
-                </a:solidFill>
-                <a:latin typeface="Consolas" panose="020B0609020204030204" pitchFamily="49" charset="0"/>
-              </a:rPr>
-              <a:t>, </a:t>
-            </a:r>
-            <a:r>
-              <a:rPr lang="pt-BR" sz="1400" b="1" dirty="0" err="1">
-                <a:solidFill>
-                  <a:srgbClr val="7F0055"/>
-                </a:solidFill>
-                <a:latin typeface="Consolas" panose="020B0609020204030204" pitchFamily="49" charset="0"/>
-              </a:rPr>
-              <a:t>int</a:t>
-            </a:r>
-            <a:r>
-              <a:rPr lang="pt-BR" sz="1400" dirty="0">
-                <a:solidFill>
-                  <a:srgbClr val="000000"/>
-                </a:solidFill>
-                <a:latin typeface="Consolas" panose="020B0609020204030204" pitchFamily="49" charset="0"/>
-              </a:rPr>
-              <a:t> </a:t>
-            </a:r>
-            <a:r>
-              <a:rPr lang="pt-BR" sz="1400" dirty="0">
-                <a:solidFill>
-                  <a:srgbClr val="6A3E3E"/>
-                </a:solidFill>
-                <a:latin typeface="Consolas" panose="020B0609020204030204" pitchFamily="49" charset="0"/>
-              </a:rPr>
-              <a:t>b</a:t>
-            </a:r>
-            <a:r>
-              <a:rPr lang="pt-BR" sz="1400" dirty="0">
-                <a:solidFill>
-                  <a:srgbClr val="000000"/>
-                </a:solidFill>
-                <a:latin typeface="Consolas" panose="020B0609020204030204" pitchFamily="49" charset="0"/>
-              </a:rPr>
-              <a:t>) {</a:t>
-            </a:r>
-          </a:p>
-          <a:p>
-            <a:pPr indent="914400">
-              <a:spcBef>
-                <a:spcPts val="150"/>
-              </a:spcBef>
-              <a:spcAft>
-                <a:spcPts val="150"/>
-              </a:spcAft>
-            </a:pPr>
-            <a:r>
-              <a:rPr lang="pt-BR" sz="1400" b="1" dirty="0" err="1">
-                <a:solidFill>
-                  <a:srgbClr val="7F0055"/>
-                </a:solidFill>
-                <a:latin typeface="Consolas" panose="020B0609020204030204" pitchFamily="49" charset="0"/>
-              </a:rPr>
-              <a:t>return</a:t>
-            </a:r>
-            <a:r>
-              <a:rPr lang="pt-BR" sz="1400" dirty="0">
-                <a:solidFill>
-                  <a:srgbClr val="000000"/>
-                </a:solidFill>
-                <a:latin typeface="Consolas" panose="020B0609020204030204" pitchFamily="49" charset="0"/>
-              </a:rPr>
-              <a:t> </a:t>
-            </a:r>
-            <a:r>
-              <a:rPr lang="pt-BR" sz="1400" dirty="0">
-                <a:solidFill>
-                  <a:srgbClr val="6A3E3E"/>
-                </a:solidFill>
-                <a:latin typeface="Consolas" panose="020B0609020204030204" pitchFamily="49" charset="0"/>
-              </a:rPr>
-              <a:t>a</a:t>
-            </a:r>
-            <a:r>
-              <a:rPr lang="pt-BR" sz="1400" dirty="0">
-                <a:solidFill>
-                  <a:srgbClr val="000000"/>
-                </a:solidFill>
-                <a:latin typeface="Consolas" panose="020B0609020204030204" pitchFamily="49" charset="0"/>
-              </a:rPr>
-              <a:t> + </a:t>
-            </a:r>
-            <a:r>
-              <a:rPr lang="pt-BR" sz="1400" dirty="0">
-                <a:solidFill>
-                  <a:srgbClr val="6A3E3E"/>
-                </a:solidFill>
-                <a:latin typeface="Consolas" panose="020B0609020204030204" pitchFamily="49" charset="0"/>
-              </a:rPr>
-              <a:t>b</a:t>
-            </a:r>
-            <a:r>
-              <a:rPr lang="pt-BR" sz="1400" dirty="0">
-                <a:solidFill>
-                  <a:srgbClr val="000000"/>
-                </a:solidFill>
-                <a:latin typeface="Consolas" panose="020B0609020204030204" pitchFamily="49" charset="0"/>
-              </a:rPr>
-              <a:t>;</a:t>
-            </a:r>
-          </a:p>
-          <a:p>
-            <a:pPr indent="457200">
-              <a:spcBef>
-                <a:spcPts val="150"/>
-              </a:spcBef>
-              <a:spcAft>
-                <a:spcPts val="150"/>
-              </a:spcAft>
-            </a:pPr>
-            <a:r>
-              <a:rPr lang="pt-BR" sz="1400" dirty="0">
-                <a:solidFill>
-                  <a:srgbClr val="000000"/>
-                </a:solidFill>
-                <a:latin typeface="Consolas" panose="020B0609020204030204" pitchFamily="49" charset="0"/>
-              </a:rPr>
-              <a:t>}</a:t>
-            </a:r>
-          </a:p>
-          <a:p>
-            <a:pPr indent="457200">
-              <a:spcBef>
-                <a:spcPts val="150"/>
-              </a:spcBef>
-              <a:spcAft>
-                <a:spcPts val="150"/>
-              </a:spcAft>
-            </a:pPr>
-            <a:r>
-              <a:rPr lang="pt-BR" sz="1400" b="1" dirty="0" err="1">
-                <a:solidFill>
-                  <a:srgbClr val="7F0055"/>
-                </a:solidFill>
-                <a:latin typeface="Consolas" panose="020B0609020204030204" pitchFamily="49" charset="0"/>
-              </a:rPr>
-              <a:t>public</a:t>
-            </a:r>
-            <a:r>
-              <a:rPr lang="pt-BR" sz="1400" dirty="0">
-                <a:solidFill>
-                  <a:srgbClr val="000000"/>
-                </a:solidFill>
-                <a:latin typeface="Consolas" panose="020B0609020204030204" pitchFamily="49" charset="0"/>
-              </a:rPr>
-              <a:t> </a:t>
-            </a:r>
-            <a:r>
-              <a:rPr lang="pt-BR" sz="1400" b="1" dirty="0" err="1">
-                <a:solidFill>
-                  <a:srgbClr val="7F0055"/>
-                </a:solidFill>
-                <a:latin typeface="Consolas" panose="020B0609020204030204" pitchFamily="49" charset="0"/>
-              </a:rPr>
-              <a:t>double</a:t>
-            </a:r>
-            <a:r>
-              <a:rPr lang="pt-BR" sz="1400" dirty="0">
-                <a:solidFill>
-                  <a:srgbClr val="000000"/>
-                </a:solidFill>
-                <a:latin typeface="Consolas" panose="020B0609020204030204" pitchFamily="49" charset="0"/>
-              </a:rPr>
-              <a:t> somar(</a:t>
-            </a:r>
-            <a:r>
-              <a:rPr lang="pt-BR" sz="1400" b="1" dirty="0" err="1">
-                <a:solidFill>
-                  <a:srgbClr val="7F0055"/>
-                </a:solidFill>
-                <a:latin typeface="Consolas" panose="020B0609020204030204" pitchFamily="49" charset="0"/>
-              </a:rPr>
-              <a:t>double</a:t>
-            </a:r>
-            <a:r>
-              <a:rPr lang="pt-BR" sz="1400" dirty="0">
-                <a:solidFill>
-                  <a:srgbClr val="000000"/>
-                </a:solidFill>
-                <a:latin typeface="Consolas" panose="020B0609020204030204" pitchFamily="49" charset="0"/>
-              </a:rPr>
-              <a:t> </a:t>
-            </a:r>
-            <a:r>
-              <a:rPr lang="pt-BR" sz="1400" dirty="0">
-                <a:solidFill>
-                  <a:srgbClr val="6A3E3E"/>
-                </a:solidFill>
-                <a:latin typeface="Consolas" panose="020B0609020204030204" pitchFamily="49" charset="0"/>
-              </a:rPr>
-              <a:t>a</a:t>
-            </a:r>
-            <a:r>
-              <a:rPr lang="pt-BR" sz="1400" dirty="0">
-                <a:solidFill>
-                  <a:srgbClr val="000000"/>
-                </a:solidFill>
-                <a:latin typeface="Consolas" panose="020B0609020204030204" pitchFamily="49" charset="0"/>
-              </a:rPr>
-              <a:t>, </a:t>
-            </a:r>
-            <a:r>
-              <a:rPr lang="pt-BR" sz="1400" b="1" dirty="0" err="1">
-                <a:solidFill>
-                  <a:srgbClr val="7F0055"/>
-                </a:solidFill>
-                <a:latin typeface="Consolas" panose="020B0609020204030204" pitchFamily="49" charset="0"/>
-              </a:rPr>
-              <a:t>double</a:t>
-            </a:r>
-            <a:r>
-              <a:rPr lang="pt-BR" sz="1400" dirty="0">
-                <a:solidFill>
-                  <a:srgbClr val="000000"/>
-                </a:solidFill>
-                <a:latin typeface="Consolas" panose="020B0609020204030204" pitchFamily="49" charset="0"/>
-              </a:rPr>
-              <a:t> </a:t>
-            </a:r>
-            <a:r>
-              <a:rPr lang="pt-BR" sz="1400" dirty="0">
-                <a:solidFill>
-                  <a:srgbClr val="6A3E3E"/>
-                </a:solidFill>
-                <a:latin typeface="Consolas" panose="020B0609020204030204" pitchFamily="49" charset="0"/>
-              </a:rPr>
-              <a:t>b</a:t>
-            </a:r>
-            <a:r>
-              <a:rPr lang="pt-BR" sz="1400" dirty="0">
-                <a:solidFill>
-                  <a:srgbClr val="000000"/>
-                </a:solidFill>
-                <a:latin typeface="Consolas" panose="020B0609020204030204" pitchFamily="49" charset="0"/>
-              </a:rPr>
-              <a:t>) {</a:t>
-            </a:r>
-          </a:p>
-          <a:p>
-            <a:pPr indent="914400">
-              <a:spcBef>
-                <a:spcPts val="150"/>
-              </a:spcBef>
-              <a:spcAft>
-                <a:spcPts val="150"/>
-              </a:spcAft>
-            </a:pPr>
-            <a:r>
-              <a:rPr lang="pt-BR" sz="1400" b="1" dirty="0" err="1">
-                <a:solidFill>
-                  <a:srgbClr val="7F0055"/>
-                </a:solidFill>
-                <a:latin typeface="Consolas" panose="020B0609020204030204" pitchFamily="49" charset="0"/>
-              </a:rPr>
-              <a:t>return</a:t>
-            </a:r>
-            <a:r>
-              <a:rPr lang="pt-BR" sz="1400" dirty="0">
-                <a:solidFill>
-                  <a:srgbClr val="000000"/>
-                </a:solidFill>
-                <a:latin typeface="Consolas" panose="020B0609020204030204" pitchFamily="49" charset="0"/>
-              </a:rPr>
-              <a:t> </a:t>
-            </a:r>
-            <a:r>
-              <a:rPr lang="pt-BR" sz="1400" dirty="0">
-                <a:solidFill>
-                  <a:srgbClr val="6A3E3E"/>
-                </a:solidFill>
-                <a:latin typeface="Consolas" panose="020B0609020204030204" pitchFamily="49" charset="0"/>
-              </a:rPr>
-              <a:t>a</a:t>
-            </a:r>
-            <a:r>
-              <a:rPr lang="pt-BR" sz="1400" dirty="0">
-                <a:solidFill>
-                  <a:srgbClr val="000000"/>
-                </a:solidFill>
-                <a:latin typeface="Consolas" panose="020B0609020204030204" pitchFamily="49" charset="0"/>
-              </a:rPr>
-              <a:t> + </a:t>
-            </a:r>
-            <a:r>
-              <a:rPr lang="pt-BR" sz="1400" dirty="0">
-                <a:solidFill>
-                  <a:srgbClr val="6A3E3E"/>
-                </a:solidFill>
-                <a:latin typeface="Consolas" panose="020B0609020204030204" pitchFamily="49" charset="0"/>
-              </a:rPr>
-              <a:t>b</a:t>
-            </a:r>
-            <a:r>
-              <a:rPr lang="pt-BR" sz="1400" dirty="0">
-                <a:solidFill>
-                  <a:srgbClr val="000000"/>
-                </a:solidFill>
-                <a:latin typeface="Consolas" panose="020B0609020204030204" pitchFamily="49" charset="0"/>
-              </a:rPr>
-              <a:t>;</a:t>
-            </a:r>
-          </a:p>
-          <a:p>
-            <a:pPr indent="457200">
-              <a:spcBef>
-                <a:spcPts val="150"/>
-              </a:spcBef>
-              <a:spcAft>
-                <a:spcPts val="150"/>
-              </a:spcAft>
-            </a:pPr>
-            <a:r>
-              <a:rPr lang="pt-BR" sz="1400" dirty="0">
-                <a:solidFill>
-                  <a:srgbClr val="000000"/>
-                </a:solidFill>
-                <a:latin typeface="Consolas" panose="020B0609020204030204" pitchFamily="49" charset="0"/>
-              </a:rPr>
-              <a:t>}</a:t>
-            </a:r>
-          </a:p>
-          <a:p>
-            <a:pPr indent="457200">
-              <a:spcBef>
-                <a:spcPts val="150"/>
-              </a:spcBef>
-              <a:spcAft>
-                <a:spcPts val="150"/>
-              </a:spcAft>
-            </a:pPr>
-            <a:r>
-              <a:rPr lang="pt-BR" sz="1400" b="1" dirty="0" err="1">
-                <a:solidFill>
-                  <a:srgbClr val="7F0055"/>
-                </a:solidFill>
-                <a:latin typeface="Consolas" panose="020B0609020204030204" pitchFamily="49" charset="0"/>
-              </a:rPr>
-              <a:t>public</a:t>
-            </a:r>
-            <a:r>
-              <a:rPr lang="pt-BR" sz="1400" dirty="0">
-                <a:solidFill>
-                  <a:srgbClr val="000000"/>
-                </a:solidFill>
-                <a:latin typeface="Consolas" panose="020B0609020204030204" pitchFamily="49" charset="0"/>
-              </a:rPr>
-              <a:t> </a:t>
-            </a:r>
-            <a:r>
-              <a:rPr lang="pt-BR" sz="1400" b="1" dirty="0" err="1">
-                <a:solidFill>
-                  <a:srgbClr val="7F0055"/>
-                </a:solidFill>
-                <a:latin typeface="Consolas" panose="020B0609020204030204" pitchFamily="49" charset="0"/>
-              </a:rPr>
-              <a:t>int</a:t>
-            </a:r>
-            <a:r>
-              <a:rPr lang="pt-BR" sz="1400" dirty="0">
-                <a:solidFill>
-                  <a:srgbClr val="000000"/>
-                </a:solidFill>
-                <a:latin typeface="Consolas" panose="020B0609020204030204" pitchFamily="49" charset="0"/>
-              </a:rPr>
-              <a:t> somar(</a:t>
-            </a:r>
-            <a:r>
-              <a:rPr lang="pt-BR" sz="1400" b="1" dirty="0" err="1">
-                <a:solidFill>
-                  <a:srgbClr val="7F0055"/>
-                </a:solidFill>
-                <a:latin typeface="Consolas" panose="020B0609020204030204" pitchFamily="49" charset="0"/>
-              </a:rPr>
-              <a:t>int</a:t>
-            </a:r>
-            <a:r>
-              <a:rPr lang="pt-BR" sz="1400" dirty="0">
-                <a:solidFill>
-                  <a:srgbClr val="000000"/>
-                </a:solidFill>
-                <a:latin typeface="Consolas" panose="020B0609020204030204" pitchFamily="49" charset="0"/>
-              </a:rPr>
-              <a:t> </a:t>
-            </a:r>
-            <a:r>
-              <a:rPr lang="pt-BR" sz="1400" dirty="0">
-                <a:solidFill>
-                  <a:srgbClr val="6A3E3E"/>
-                </a:solidFill>
-                <a:latin typeface="Consolas" panose="020B0609020204030204" pitchFamily="49" charset="0"/>
-              </a:rPr>
-              <a:t>a</a:t>
-            </a:r>
-            <a:r>
-              <a:rPr lang="pt-BR" sz="1400" dirty="0">
-                <a:solidFill>
-                  <a:srgbClr val="000000"/>
-                </a:solidFill>
-                <a:latin typeface="Consolas" panose="020B0609020204030204" pitchFamily="49" charset="0"/>
-              </a:rPr>
-              <a:t>, </a:t>
-            </a:r>
-            <a:r>
-              <a:rPr lang="pt-BR" sz="1400" b="1" dirty="0" err="1">
-                <a:solidFill>
-                  <a:srgbClr val="7F0055"/>
-                </a:solidFill>
-                <a:latin typeface="Consolas" panose="020B0609020204030204" pitchFamily="49" charset="0"/>
-              </a:rPr>
-              <a:t>int</a:t>
-            </a:r>
-            <a:r>
-              <a:rPr lang="pt-BR" sz="1400" dirty="0">
-                <a:solidFill>
-                  <a:srgbClr val="000000"/>
-                </a:solidFill>
-                <a:latin typeface="Consolas" panose="020B0609020204030204" pitchFamily="49" charset="0"/>
-              </a:rPr>
-              <a:t> </a:t>
-            </a:r>
-            <a:r>
-              <a:rPr lang="pt-BR" sz="1400" dirty="0">
-                <a:solidFill>
-                  <a:srgbClr val="6A3E3E"/>
-                </a:solidFill>
-                <a:latin typeface="Consolas" panose="020B0609020204030204" pitchFamily="49" charset="0"/>
-              </a:rPr>
-              <a:t>b</a:t>
-            </a:r>
-            <a:r>
-              <a:rPr lang="pt-BR" sz="1400" dirty="0">
-                <a:solidFill>
-                  <a:srgbClr val="000000"/>
-                </a:solidFill>
-                <a:latin typeface="Consolas" panose="020B0609020204030204" pitchFamily="49" charset="0"/>
-              </a:rPr>
-              <a:t>, </a:t>
-            </a:r>
-            <a:r>
-              <a:rPr lang="pt-BR" sz="1400" b="1" dirty="0" err="1">
-                <a:solidFill>
-                  <a:srgbClr val="7F0055"/>
-                </a:solidFill>
-                <a:latin typeface="Consolas" panose="020B0609020204030204" pitchFamily="49" charset="0"/>
-              </a:rPr>
-              <a:t>int</a:t>
-            </a:r>
-            <a:r>
-              <a:rPr lang="pt-BR" sz="1400" dirty="0">
-                <a:solidFill>
-                  <a:srgbClr val="000000"/>
-                </a:solidFill>
-                <a:latin typeface="Consolas" panose="020B0609020204030204" pitchFamily="49" charset="0"/>
-              </a:rPr>
-              <a:t> </a:t>
-            </a:r>
-            <a:r>
-              <a:rPr lang="pt-BR" sz="1400" dirty="0">
-                <a:solidFill>
-                  <a:srgbClr val="6A3E3E"/>
-                </a:solidFill>
-                <a:latin typeface="Consolas" panose="020B0609020204030204" pitchFamily="49" charset="0"/>
-              </a:rPr>
-              <a:t>c</a:t>
-            </a:r>
-            <a:r>
-              <a:rPr lang="pt-BR" sz="1400" dirty="0">
-                <a:solidFill>
-                  <a:srgbClr val="000000"/>
-                </a:solidFill>
-                <a:latin typeface="Consolas" panose="020B0609020204030204" pitchFamily="49" charset="0"/>
-              </a:rPr>
-              <a:t>) {</a:t>
-            </a:r>
-          </a:p>
-          <a:p>
-            <a:pPr indent="914400">
-              <a:spcBef>
-                <a:spcPts val="150"/>
-              </a:spcBef>
-              <a:spcAft>
-                <a:spcPts val="150"/>
-              </a:spcAft>
-            </a:pPr>
-            <a:r>
-              <a:rPr lang="pt-BR" sz="1400" b="1" dirty="0" err="1">
-                <a:solidFill>
-                  <a:srgbClr val="7F0055"/>
-                </a:solidFill>
-                <a:latin typeface="Consolas" panose="020B0609020204030204" pitchFamily="49" charset="0"/>
-              </a:rPr>
-              <a:t>return</a:t>
-            </a:r>
-            <a:r>
-              <a:rPr lang="pt-BR" sz="1400" dirty="0">
-                <a:solidFill>
-                  <a:srgbClr val="000000"/>
-                </a:solidFill>
-                <a:latin typeface="Consolas" panose="020B0609020204030204" pitchFamily="49" charset="0"/>
-              </a:rPr>
-              <a:t> </a:t>
-            </a:r>
-            <a:r>
-              <a:rPr lang="pt-BR" sz="1400" dirty="0">
-                <a:solidFill>
-                  <a:srgbClr val="6A3E3E"/>
-                </a:solidFill>
-                <a:latin typeface="Consolas" panose="020B0609020204030204" pitchFamily="49" charset="0"/>
-              </a:rPr>
-              <a:t>a</a:t>
-            </a:r>
-            <a:r>
-              <a:rPr lang="pt-BR" sz="1400" dirty="0">
-                <a:solidFill>
-                  <a:srgbClr val="000000"/>
-                </a:solidFill>
-                <a:latin typeface="Consolas" panose="020B0609020204030204" pitchFamily="49" charset="0"/>
-              </a:rPr>
-              <a:t> + </a:t>
-            </a:r>
-            <a:r>
-              <a:rPr lang="pt-BR" sz="1400" dirty="0">
-                <a:solidFill>
-                  <a:srgbClr val="6A3E3E"/>
-                </a:solidFill>
-                <a:latin typeface="Consolas" panose="020B0609020204030204" pitchFamily="49" charset="0"/>
-              </a:rPr>
-              <a:t>b</a:t>
-            </a:r>
-            <a:r>
-              <a:rPr lang="pt-BR" sz="1400" dirty="0">
-                <a:solidFill>
-                  <a:srgbClr val="000000"/>
-                </a:solidFill>
-                <a:latin typeface="Consolas" panose="020B0609020204030204" pitchFamily="49" charset="0"/>
-              </a:rPr>
-              <a:t> + </a:t>
-            </a:r>
-            <a:r>
-              <a:rPr lang="pt-BR" sz="1400" dirty="0">
-                <a:solidFill>
-                  <a:srgbClr val="6A3E3E"/>
-                </a:solidFill>
-                <a:latin typeface="Consolas" panose="020B0609020204030204" pitchFamily="49" charset="0"/>
-              </a:rPr>
-              <a:t>c</a:t>
-            </a:r>
-            <a:r>
-              <a:rPr lang="pt-BR" sz="1400" dirty="0">
-                <a:solidFill>
-                  <a:srgbClr val="000000"/>
-                </a:solidFill>
-                <a:latin typeface="Consolas" panose="020B0609020204030204" pitchFamily="49" charset="0"/>
-              </a:rPr>
-              <a:t>;</a:t>
-            </a:r>
-          </a:p>
-          <a:p>
-            <a:pPr indent="457200">
-              <a:spcBef>
-                <a:spcPts val="150"/>
-              </a:spcBef>
-              <a:spcAft>
-                <a:spcPts val="150"/>
-              </a:spcAft>
-            </a:pPr>
-            <a:r>
-              <a:rPr lang="pt-BR" sz="1400" dirty="0">
-                <a:solidFill>
-                  <a:srgbClr val="000000"/>
-                </a:solidFill>
-                <a:latin typeface="Consolas" panose="020B0609020204030204" pitchFamily="49" charset="0"/>
-              </a:rPr>
-              <a:t>}</a:t>
-            </a:r>
-          </a:p>
-          <a:p>
-            <a:pPr>
-              <a:spcBef>
-                <a:spcPts val="150"/>
-              </a:spcBef>
-              <a:spcAft>
-                <a:spcPts val="150"/>
-              </a:spcAft>
-            </a:pPr>
-            <a:r>
-              <a:rPr lang="pt-BR" sz="1400" dirty="0">
-                <a:solidFill>
-                  <a:srgbClr val="000000"/>
-                </a:solidFill>
-                <a:latin typeface="Consolas" panose="020B0609020204030204" pitchFamily="49" charset="0"/>
-              </a:rPr>
-              <a:t>}</a:t>
+            <a:r>
+              <a:rPr lang="pt-BR" sz="1800" dirty="0"/>
+              <a:t>A palavra-chave </a:t>
+            </a:r>
+            <a:r>
+              <a:rPr lang="pt-BR" sz="1800" dirty="0" err="1"/>
+              <a:t>super</a:t>
+            </a:r>
+            <a:r>
+              <a:rPr lang="pt-BR" sz="1800" dirty="0"/>
+              <a:t> é utilizada para se referir à superclasse (classe pai) de uma classe derivada (classe filha). Ela é especialmente útil quando há a necessidade de reutilizar atributos ou métodos da classe pai, evitando a repetição de código.</a:t>
             </a:r>
           </a:p>
         </p:txBody>
       </p:sp>
       <p:sp>
         <p:nvSpPr>
-          <p:cNvPr id="5" name="CaixaDeTexto 4">
-            <a:extLst>
-              <a:ext uri="{FF2B5EF4-FFF2-40B4-BE49-F238E27FC236}">
-                <a16:creationId xmlns:a16="http://schemas.microsoft.com/office/drawing/2014/main" id="{84F9EC0C-06FF-4414-87FA-9B60D0B83818}"/>
+          <p:cNvPr id="7" name="CaixaDeTexto 6">
+            <a:extLst>
+              <a:ext uri="{FF2B5EF4-FFF2-40B4-BE49-F238E27FC236}">
+                <a16:creationId xmlns:a16="http://schemas.microsoft.com/office/drawing/2014/main" id="{15C42C8B-8DB6-4C73-97AE-4AF8FC519272}"/>
               </a:ext>
             </a:extLst>
           </p:cNvPr>
@@ -7565,8 +8047,8 @@
         </p:nvSpPr>
         <p:spPr>
           <a:xfrm>
-            <a:off x="1897943" y="2514600"/>
-            <a:ext cx="2607734" cy="369332"/>
+            <a:off x="5503559" y="3520485"/>
+            <a:ext cx="1184883" cy="338554"/>
           </a:xfrm>
           <a:prstGeom prst="rect">
             <a:avLst/>
@@ -7581,21 +8063,21 @@
           <a:p>
             <a:pPr algn="ctr"/>
             <a:r>
-              <a:rPr lang="pt-BR" dirty="0">
+              <a:rPr lang="pt-BR" sz="1600" dirty="0">
                 <a:latin typeface="Times New Roman" panose="02020603050405020304" pitchFamily="18" charset="0"/>
                 <a:cs typeface="Times New Roman" panose="02020603050405020304" pitchFamily="18" charset="0"/>
               </a:rPr>
-              <a:t>Sobrecarga</a:t>
+              <a:t>Classe Filha</a:t>
             </a:r>
           </a:p>
         </p:txBody>
       </p:sp>
       <p:sp>
         <p:nvSpPr>
-          <p:cNvPr id="6" name="Retângulo 5">
-            <a:extLst>
-              <a:ext uri="{FF2B5EF4-FFF2-40B4-BE49-F238E27FC236}">
-                <a16:creationId xmlns:a16="http://schemas.microsoft.com/office/drawing/2014/main" id="{92256B6E-0262-418B-82DC-A9263E124FF3}"/>
+          <p:cNvPr id="4" name="Retângulo 3">
+            <a:extLst>
+              <a:ext uri="{FF2B5EF4-FFF2-40B4-BE49-F238E27FC236}">
+                <a16:creationId xmlns:a16="http://schemas.microsoft.com/office/drawing/2014/main" id="{FFAD0326-5AFB-4F87-8E1F-8F1446812B25}"/>
               </a:ext>
             </a:extLst>
           </p:cNvPr>
@@ -7604,8 +8086,8 @@
         </p:nvSpPr>
         <p:spPr>
           <a:xfrm>
-            <a:off x="6403622" y="3028407"/>
-            <a:ext cx="4936067" cy="3241913"/>
+            <a:off x="1698171" y="4061558"/>
+            <a:ext cx="8795657" cy="2421176"/>
           </a:xfrm>
           <a:prstGeom prst="rect">
             <a:avLst/>
@@ -7626,26 +8108,80 @@
               </a:spcAft>
             </a:pPr>
             <a:r>
-              <a:rPr lang="pt-BR" sz="1400" b="1" dirty="0" err="1">
+              <a:rPr lang="pt-BR" sz="1600" b="1" dirty="0" err="1">
                 <a:solidFill>
                   <a:srgbClr val="7F0055"/>
                 </a:solidFill>
                 <a:latin typeface="Consolas" panose="020B0609020204030204" pitchFamily="49" charset="0"/>
               </a:rPr>
+              <a:t>public</a:t>
+            </a:r>
+            <a:r>
+              <a:rPr lang="pt-BR" sz="1600" dirty="0">
+                <a:solidFill>
+                  <a:srgbClr val="000000"/>
+                </a:solidFill>
+                <a:latin typeface="Consolas" panose="020B0609020204030204" pitchFamily="49" charset="0"/>
+              </a:rPr>
+              <a:t> </a:t>
+            </a:r>
+            <a:r>
+              <a:rPr lang="pt-BR" sz="1600" b="1" dirty="0" err="1">
+                <a:solidFill>
+                  <a:srgbClr val="7F0055"/>
+                </a:solidFill>
+                <a:latin typeface="Consolas" panose="020B0609020204030204" pitchFamily="49" charset="0"/>
+              </a:rPr>
               <a:t>class</a:t>
             </a:r>
             <a:r>
-              <a:rPr lang="pt-BR" sz="1400" dirty="0">
-                <a:solidFill>
-                  <a:srgbClr val="000000"/>
-                </a:solidFill>
-                <a:latin typeface="Consolas" panose="020B0609020204030204" pitchFamily="49" charset="0"/>
-              </a:rPr>
-              <a:t> Animal {</a:t>
-            </a:r>
-          </a:p>
-          <a:p>
-            <a:pPr indent="457200">
+              <a:rPr lang="pt-BR" sz="1600" dirty="0">
+                <a:solidFill>
+                  <a:srgbClr val="000000"/>
+                </a:solidFill>
+                <a:latin typeface="Consolas" panose="020B0609020204030204" pitchFamily="49" charset="0"/>
+              </a:rPr>
+              <a:t> Gerente </a:t>
+            </a:r>
+            <a:r>
+              <a:rPr lang="pt-BR" sz="1600" b="1" dirty="0" err="1">
+                <a:solidFill>
+                  <a:srgbClr val="7F0055"/>
+                </a:solidFill>
+                <a:latin typeface="Consolas" panose="020B0609020204030204" pitchFamily="49" charset="0"/>
+              </a:rPr>
+              <a:t>extends</a:t>
+            </a:r>
+            <a:r>
+              <a:rPr lang="pt-BR" sz="1600" dirty="0">
+                <a:solidFill>
+                  <a:srgbClr val="000000"/>
+                </a:solidFill>
+                <a:latin typeface="Consolas" panose="020B0609020204030204" pitchFamily="49" charset="0"/>
+              </a:rPr>
+              <a:t> </a:t>
+            </a:r>
+            <a:r>
+              <a:rPr lang="pt-BR" sz="1600" dirty="0" err="1">
+                <a:solidFill>
+                  <a:srgbClr val="000000"/>
+                </a:solidFill>
+                <a:latin typeface="Consolas" panose="020B0609020204030204" pitchFamily="49" charset="0"/>
+              </a:rPr>
+              <a:t>Funcionarios</a:t>
+            </a:r>
+            <a:r>
+              <a:rPr lang="pt-BR" sz="1600" dirty="0">
+                <a:solidFill>
+                  <a:srgbClr val="000000"/>
+                </a:solidFill>
+                <a:latin typeface="Consolas" panose="020B0609020204030204" pitchFamily="49" charset="0"/>
+              </a:rPr>
+              <a:t>{</a:t>
+            </a:r>
+          </a:p>
+          <a:p>
+            <a:pPr lvl="1">
               <a:spcBef>
                 <a:spcPts val="150"/>
               </a:spcBef>
@@ -7654,16 +8190,16 @@
               </a:spcAft>
             </a:pPr>
             <a:r>
-              <a:rPr lang="pt-BR" sz="1400" b="1" dirty="0" err="1">
+              <a:rPr lang="pt-BR" sz="1600" b="1" dirty="0" err="1">
                 <a:solidFill>
                   <a:srgbClr val="7F0055"/>
                 </a:solidFill>
                 <a:latin typeface="Consolas" panose="020B0609020204030204" pitchFamily="49" charset="0"/>
               </a:rPr>
-              <a:t>public</a:t>
-            </a:r>
-            <a:r>
-              <a:rPr lang="pt-BR" sz="1400" dirty="0">
+              <a:t>private</a:t>
+            </a:r>
+            <a:r>
+              <a:rPr lang="pt-BR" sz="1600" dirty="0">
                 <a:solidFill>
                   <a:srgbClr val="000000"/>
                 </a:solidFill>
@@ -7672,16 +8208,16 @@
               <a:t> </a:t>
             </a:r>
             <a:r>
-              <a:rPr lang="pt-BR" sz="1400" b="1" dirty="0" err="1">
+              <a:rPr lang="pt-BR" sz="1600" b="1" dirty="0">
                 <a:solidFill>
                   <a:srgbClr val="7F0055"/>
                 </a:solidFill>
                 <a:latin typeface="Consolas" panose="020B0609020204030204" pitchFamily="49" charset="0"/>
               </a:rPr>
-              <a:t>void</a:t>
-            </a:r>
-            <a:r>
-              <a:rPr lang="pt-BR" sz="1400" dirty="0">
+              <a:t>double</a:t>
+            </a:r>
+            <a:r>
+              <a:rPr lang="pt-BR" sz="1600" dirty="0">
                 <a:solidFill>
                   <a:srgbClr val="000000"/>
                 </a:solidFill>
@@ -7690,26 +8226,26 @@
               <a:t> </a:t>
             </a:r>
             <a:r>
-              <a:rPr lang="pt-BR" sz="1400" dirty="0" err="1">
-                <a:solidFill>
-                  <a:srgbClr val="000000"/>
-                </a:solidFill>
-                <a:latin typeface="Consolas" panose="020B0609020204030204" pitchFamily="49" charset="0"/>
-              </a:rPr>
-              <a:t>emitirSom</a:t>
-            </a:r>
-            <a:r>
-              <a:rPr lang="pt-BR" sz="1400" dirty="0">
-                <a:solidFill>
-                  <a:srgbClr val="000000"/>
-                </a:solidFill>
-                <a:latin typeface="Consolas" panose="020B0609020204030204" pitchFamily="49" charset="0"/>
-              </a:rPr>
-              <a:t>() {</a:t>
-            </a:r>
-          </a:p>
-          <a:p>
-            <a:pPr indent="914400">
+              <a:rPr lang="pt-BR" sz="1600" dirty="0" err="1">
+                <a:solidFill>
+                  <a:srgbClr val="0000C0"/>
+                </a:solidFill>
+                <a:latin typeface="Consolas" panose="020B0609020204030204" pitchFamily="49" charset="0"/>
+              </a:rPr>
+              <a:t>adicionalGerencia</a:t>
+            </a:r>
+            <a:r>
+              <a:rPr lang="pt-BR" sz="1600" dirty="0">
+                <a:solidFill>
+                  <a:srgbClr val="000000"/>
+                </a:solidFill>
+                <a:latin typeface="Consolas" panose="020B0609020204030204" pitchFamily="49" charset="0"/>
+              </a:rPr>
+              <a:t>;</a:t>
+            </a:r>
+          </a:p>
+          <a:p>
+            <a:pPr lvl="1">
               <a:spcBef>
                 <a:spcPts val="150"/>
               </a:spcBef>
@@ -7717,116 +8253,279 @@
                 <a:spcPts val="150"/>
               </a:spcAft>
             </a:pPr>
-            <a:r>
-              <a:rPr lang="pt-BR" sz="1400" dirty="0" err="1">
-                <a:solidFill>
-                  <a:srgbClr val="000000"/>
-                </a:solidFill>
-                <a:latin typeface="Consolas" panose="020B0609020204030204" pitchFamily="49" charset="0"/>
-              </a:rPr>
-              <a:t>System.</a:t>
-            </a:r>
-            <a:r>
-              <a:rPr lang="pt-BR" sz="1400" b="1" i="1" dirty="0" err="1">
-                <a:solidFill>
-                  <a:srgbClr val="0000C0"/>
-                </a:solidFill>
-                <a:latin typeface="Consolas" panose="020B0609020204030204" pitchFamily="49" charset="0"/>
-              </a:rPr>
-              <a:t>out</a:t>
-            </a:r>
-            <a:r>
-              <a:rPr lang="pt-BR" sz="1400" dirty="0" err="1">
-                <a:solidFill>
-                  <a:srgbClr val="000000"/>
-                </a:solidFill>
-                <a:latin typeface="Consolas" panose="020B0609020204030204" pitchFamily="49" charset="0"/>
-              </a:rPr>
-              <a:t>.println</a:t>
-            </a:r>
-            <a:r>
-              <a:rPr lang="pt-BR" sz="1400" dirty="0">
-                <a:solidFill>
-                  <a:srgbClr val="000000"/>
-                </a:solidFill>
-                <a:latin typeface="Consolas" panose="020B0609020204030204" pitchFamily="49" charset="0"/>
-              </a:rPr>
-              <a:t>(</a:t>
-            </a:r>
-            <a:r>
-              <a:rPr lang="pt-BR" sz="1400" dirty="0">
-                <a:solidFill>
-                  <a:srgbClr val="2A00FF"/>
-                </a:solidFill>
-                <a:latin typeface="Consolas" panose="020B0609020204030204" pitchFamily="49" charset="0"/>
-              </a:rPr>
-              <a:t>"Animal faz som"</a:t>
-            </a:r>
-            <a:r>
-              <a:rPr lang="pt-BR" sz="1400" dirty="0">
-                <a:solidFill>
-                  <a:srgbClr val="000000"/>
-                </a:solidFill>
-                <a:latin typeface="Consolas" panose="020B0609020204030204" pitchFamily="49" charset="0"/>
-              </a:rPr>
-              <a:t>);</a:t>
-            </a:r>
-          </a:p>
-          <a:p>
-            <a:pPr indent="457200">
-              <a:spcBef>
-                <a:spcPts val="150"/>
-              </a:spcBef>
-              <a:spcAft>
-                <a:spcPts val="150"/>
-              </a:spcAft>
-            </a:pPr>
-            <a:r>
-              <a:rPr lang="pt-BR" sz="1400" dirty="0">
-                <a:solidFill>
-                  <a:srgbClr val="000000"/>
-                </a:solidFill>
-                <a:latin typeface="Consolas" panose="020B0609020204030204" pitchFamily="49" charset="0"/>
-              </a:rPr>
-              <a:t>}</a:t>
-            </a:r>
-          </a:p>
-          <a:p>
-            <a:pPr>
-              <a:spcBef>
-                <a:spcPts val="150"/>
-              </a:spcBef>
-              <a:spcAft>
-                <a:spcPts val="150"/>
-              </a:spcAft>
-            </a:pPr>
-            <a:r>
-              <a:rPr lang="pt-BR" sz="1400" dirty="0">
-                <a:solidFill>
-                  <a:srgbClr val="000000"/>
-                </a:solidFill>
-                <a:latin typeface="Consolas" panose="020B0609020204030204" pitchFamily="49" charset="0"/>
-              </a:rPr>
-              <a:t>}</a:t>
-            </a:r>
-          </a:p>
-          <a:p>
-            <a:pPr>
-              <a:spcBef>
-                <a:spcPts val="150"/>
-              </a:spcBef>
-              <a:spcAft>
-                <a:spcPts val="150"/>
-              </a:spcAft>
-            </a:pPr>
-            <a:endParaRPr lang="pt-BR" sz="1400" dirty="0">
+            <a:endParaRPr lang="pt-BR" sz="1600" b="1" dirty="0">
               <a:solidFill>
-                <a:srgbClr val="000000"/>
+                <a:srgbClr val="7F0055"/>
               </a:solidFill>
               <a:latin typeface="Consolas" panose="020B0609020204030204" pitchFamily="49" charset="0"/>
             </a:endParaRPr>
           </a:p>
           <a:p>
+            <a:pPr lvl="1">
+              <a:spcBef>
+                <a:spcPts val="150"/>
+              </a:spcBef>
+              <a:spcAft>
+                <a:spcPts val="150"/>
+              </a:spcAft>
+            </a:pPr>
+            <a:r>
+              <a:rPr lang="pt-BR" sz="1600" b="1" dirty="0" err="1">
+                <a:solidFill>
+                  <a:srgbClr val="7F0055"/>
+                </a:solidFill>
+                <a:latin typeface="Consolas" panose="020B0609020204030204" pitchFamily="49" charset="0"/>
+              </a:rPr>
+              <a:t>public</a:t>
+            </a:r>
+            <a:r>
+              <a:rPr lang="pt-BR" sz="1600" dirty="0">
+                <a:solidFill>
+                  <a:srgbClr val="000000"/>
+                </a:solidFill>
+                <a:latin typeface="Consolas" panose="020B0609020204030204" pitchFamily="49" charset="0"/>
+              </a:rPr>
+              <a:t> Gerente(String </a:t>
+            </a:r>
+            <a:r>
+              <a:rPr lang="pt-BR" sz="1600" dirty="0">
+                <a:solidFill>
+                  <a:srgbClr val="6A3E3E"/>
+                </a:solidFill>
+                <a:latin typeface="Consolas" panose="020B0609020204030204" pitchFamily="49" charset="0"/>
+              </a:rPr>
+              <a:t>nome</a:t>
+            </a:r>
+            <a:r>
+              <a:rPr lang="pt-BR" sz="1600" dirty="0">
+                <a:solidFill>
+                  <a:srgbClr val="000000"/>
+                </a:solidFill>
+                <a:latin typeface="Consolas" panose="020B0609020204030204" pitchFamily="49" charset="0"/>
+              </a:rPr>
+              <a:t>, </a:t>
+            </a:r>
+            <a:r>
+              <a:rPr lang="pt-BR" sz="1600" b="1" dirty="0">
+                <a:solidFill>
+                  <a:srgbClr val="7F0055"/>
+                </a:solidFill>
+                <a:latin typeface="Consolas" panose="020B0609020204030204" pitchFamily="49" charset="0"/>
+              </a:rPr>
+              <a:t>double</a:t>
+            </a:r>
+            <a:r>
+              <a:rPr lang="pt-BR" sz="1600" dirty="0">
+                <a:solidFill>
+                  <a:srgbClr val="000000"/>
+                </a:solidFill>
+                <a:latin typeface="Consolas" panose="020B0609020204030204" pitchFamily="49" charset="0"/>
+              </a:rPr>
+              <a:t> </a:t>
+            </a:r>
+            <a:r>
+              <a:rPr lang="pt-BR" sz="1600" dirty="0">
+                <a:solidFill>
+                  <a:srgbClr val="6A3E3E"/>
+                </a:solidFill>
+                <a:latin typeface="Consolas" panose="020B0609020204030204" pitchFamily="49" charset="0"/>
+              </a:rPr>
+              <a:t>salario</a:t>
+            </a:r>
+            <a:r>
+              <a:rPr lang="pt-BR" sz="1600" dirty="0">
+                <a:solidFill>
+                  <a:srgbClr val="000000"/>
+                </a:solidFill>
+                <a:latin typeface="Consolas" panose="020B0609020204030204" pitchFamily="49" charset="0"/>
+              </a:rPr>
+              <a:t>, </a:t>
+            </a:r>
+            <a:r>
+              <a:rPr lang="pt-BR" sz="1600" b="1" dirty="0">
+                <a:solidFill>
+                  <a:srgbClr val="7F0055"/>
+                </a:solidFill>
+                <a:latin typeface="Consolas" panose="020B0609020204030204" pitchFamily="49" charset="0"/>
+              </a:rPr>
+              <a:t>double</a:t>
+            </a:r>
+            <a:r>
+              <a:rPr lang="pt-BR" sz="1600" dirty="0">
+                <a:solidFill>
+                  <a:srgbClr val="000000"/>
+                </a:solidFill>
+                <a:latin typeface="Consolas" panose="020B0609020204030204" pitchFamily="49" charset="0"/>
+              </a:rPr>
+              <a:t> </a:t>
+            </a:r>
+            <a:r>
+              <a:rPr lang="pt-BR" sz="1600" dirty="0" err="1">
+                <a:solidFill>
+                  <a:srgbClr val="6A3E3E"/>
+                </a:solidFill>
+                <a:latin typeface="Consolas" panose="020B0609020204030204" pitchFamily="49" charset="0"/>
+              </a:rPr>
+              <a:t>adicionalGerencia</a:t>
+            </a:r>
+            <a:r>
+              <a:rPr lang="pt-BR" sz="1600" dirty="0">
+                <a:solidFill>
+                  <a:srgbClr val="000000"/>
+                </a:solidFill>
+                <a:latin typeface="Consolas" panose="020B0609020204030204" pitchFamily="49" charset="0"/>
+              </a:rPr>
+              <a:t>) {</a:t>
+            </a:r>
+          </a:p>
+          <a:p>
+            <a:pPr lvl="2">
+              <a:spcBef>
+                <a:spcPts val="150"/>
+              </a:spcBef>
+              <a:spcAft>
+                <a:spcPts val="150"/>
+              </a:spcAft>
+            </a:pPr>
+            <a:r>
+              <a:rPr lang="pt-BR" sz="1600" b="1" dirty="0" err="1">
+                <a:solidFill>
+                  <a:srgbClr val="7F0055"/>
+                </a:solidFill>
+                <a:latin typeface="Consolas" panose="020B0609020204030204" pitchFamily="49" charset="0"/>
+              </a:rPr>
+              <a:t>super</a:t>
+            </a:r>
+            <a:r>
+              <a:rPr lang="pt-BR" sz="1600" dirty="0">
+                <a:solidFill>
+                  <a:srgbClr val="000000"/>
+                </a:solidFill>
+                <a:latin typeface="Consolas" panose="020B0609020204030204" pitchFamily="49" charset="0"/>
+              </a:rPr>
+              <a:t>(</a:t>
+            </a:r>
+            <a:r>
+              <a:rPr lang="pt-BR" sz="1600" dirty="0">
+                <a:solidFill>
+                  <a:srgbClr val="6A3E3E"/>
+                </a:solidFill>
+                <a:latin typeface="Consolas" panose="020B0609020204030204" pitchFamily="49" charset="0"/>
+              </a:rPr>
+              <a:t>nome</a:t>
+            </a:r>
+            <a:r>
+              <a:rPr lang="pt-BR" sz="1600" dirty="0">
+                <a:solidFill>
+                  <a:srgbClr val="000000"/>
+                </a:solidFill>
+                <a:latin typeface="Consolas" panose="020B0609020204030204" pitchFamily="49" charset="0"/>
+              </a:rPr>
+              <a:t>, </a:t>
+            </a:r>
+            <a:r>
+              <a:rPr lang="pt-BR" sz="1600" dirty="0">
+                <a:solidFill>
+                  <a:srgbClr val="6A3E3E"/>
+                </a:solidFill>
+                <a:latin typeface="Consolas" panose="020B0609020204030204" pitchFamily="49" charset="0"/>
+              </a:rPr>
+              <a:t>salario</a:t>
+            </a:r>
+            <a:r>
+              <a:rPr lang="pt-BR" sz="1600" dirty="0">
+                <a:solidFill>
+                  <a:srgbClr val="000000"/>
+                </a:solidFill>
+                <a:latin typeface="Consolas" panose="020B0609020204030204" pitchFamily="49" charset="0"/>
+              </a:rPr>
+              <a:t>);</a:t>
+            </a:r>
+          </a:p>
+          <a:p>
+            <a:pPr lvl="2">
+              <a:spcBef>
+                <a:spcPts val="150"/>
+              </a:spcBef>
+              <a:spcAft>
+                <a:spcPts val="150"/>
+              </a:spcAft>
+            </a:pPr>
+            <a:r>
+              <a:rPr lang="pt-BR" sz="1600" b="1" dirty="0" err="1">
+                <a:solidFill>
+                  <a:srgbClr val="7F0055"/>
+                </a:solidFill>
+                <a:latin typeface="Consolas" panose="020B0609020204030204" pitchFamily="49" charset="0"/>
+              </a:rPr>
+              <a:t>this</a:t>
+            </a:r>
+            <a:r>
+              <a:rPr lang="pt-BR" sz="1600" dirty="0" err="1">
+                <a:solidFill>
+                  <a:srgbClr val="000000"/>
+                </a:solidFill>
+                <a:latin typeface="Consolas" panose="020B0609020204030204" pitchFamily="49" charset="0"/>
+              </a:rPr>
+              <a:t>.</a:t>
+            </a:r>
+            <a:r>
+              <a:rPr lang="pt-BR" sz="1600" dirty="0" err="1">
+                <a:solidFill>
+                  <a:srgbClr val="0000C0"/>
+                </a:solidFill>
+                <a:latin typeface="Consolas" panose="020B0609020204030204" pitchFamily="49" charset="0"/>
+              </a:rPr>
+              <a:t>adicionalGerencia</a:t>
+            </a:r>
+            <a:r>
+              <a:rPr lang="pt-BR" sz="1600" dirty="0">
+                <a:solidFill>
+                  <a:srgbClr val="000000"/>
+                </a:solidFill>
+                <a:latin typeface="Consolas" panose="020B0609020204030204" pitchFamily="49" charset="0"/>
+              </a:rPr>
+              <a:t> = </a:t>
+            </a:r>
+            <a:r>
+              <a:rPr lang="pt-BR" sz="1600" dirty="0" err="1">
+                <a:solidFill>
+                  <a:srgbClr val="6A3E3E"/>
+                </a:solidFill>
+                <a:latin typeface="Consolas" panose="020B0609020204030204" pitchFamily="49" charset="0"/>
+              </a:rPr>
+              <a:t>adicionalGerencia</a:t>
+            </a:r>
+            <a:r>
+              <a:rPr lang="pt-BR" sz="1600" dirty="0">
+                <a:solidFill>
+                  <a:srgbClr val="000000"/>
+                </a:solidFill>
+                <a:latin typeface="Consolas" panose="020B0609020204030204" pitchFamily="49" charset="0"/>
+              </a:rPr>
+              <a:t>;</a:t>
+            </a:r>
+          </a:p>
+          <a:p>
+            <a:pPr lvl="1">
+              <a:spcBef>
+                <a:spcPts val="150"/>
+              </a:spcBef>
+              <a:spcAft>
+                <a:spcPts val="150"/>
+              </a:spcAft>
+            </a:pPr>
+            <a:r>
+              <a:rPr lang="pt-BR" sz="1600" dirty="0">
+                <a:solidFill>
+                  <a:srgbClr val="000000"/>
+                </a:solidFill>
+                <a:latin typeface="Consolas" panose="020B0609020204030204" pitchFamily="49" charset="0"/>
+              </a:rPr>
+              <a:t>}</a:t>
+            </a:r>
+          </a:p>
+          <a:p>
             <a:pPr>
               <a:spcBef>
                 <a:spcPts val="150"/>
@@ -7836,279 +8535,13 @@
               </a:spcAft>
             </a:pPr>
             <a:r>
-              <a:rPr lang="pt-BR" sz="1400" b="1" dirty="0" err="1">
-                <a:solidFill>
-                  <a:srgbClr val="7F0055"/>
-                </a:solidFill>
-                <a:latin typeface="Consolas" panose="020B0609020204030204" pitchFamily="49" charset="0"/>
-              </a:rPr>
-              <a:t>class</a:t>
-            </a:r>
-            <a:r>
-              <a:rPr lang="pt-BR" sz="1400" dirty="0">
-                <a:solidFill>
-                  <a:srgbClr val="000000"/>
-                </a:solidFill>
-                <a:latin typeface="Consolas" panose="020B0609020204030204" pitchFamily="49" charset="0"/>
-              </a:rPr>
-              <a:t> Gato </a:t>
-            </a:r>
-            <a:r>
-              <a:rPr lang="pt-BR" sz="1400" b="1" dirty="0" err="1">
-                <a:solidFill>
-                  <a:srgbClr val="7F0055"/>
-                </a:solidFill>
-                <a:latin typeface="Consolas" panose="020B0609020204030204" pitchFamily="49" charset="0"/>
-              </a:rPr>
-              <a:t>extends</a:t>
-            </a:r>
-            <a:r>
-              <a:rPr lang="pt-BR" sz="1400" dirty="0">
-                <a:solidFill>
-                  <a:srgbClr val="000000"/>
-                </a:solidFill>
-                <a:latin typeface="Consolas" panose="020B0609020204030204" pitchFamily="49" charset="0"/>
-              </a:rPr>
-              <a:t> Animal {</a:t>
-            </a:r>
-          </a:p>
-          <a:p>
-            <a:pPr indent="457200">
-              <a:spcBef>
-                <a:spcPts val="150"/>
-              </a:spcBef>
-              <a:spcAft>
-                <a:spcPts val="150"/>
-              </a:spcAft>
-            </a:pPr>
-            <a:r>
-              <a:rPr lang="pt-BR" sz="1400" dirty="0">
-                <a:solidFill>
-                  <a:srgbClr val="646464"/>
-                </a:solidFill>
-                <a:latin typeface="Consolas" panose="020B0609020204030204" pitchFamily="49" charset="0"/>
-              </a:rPr>
-              <a:t>@</a:t>
-            </a:r>
-            <a:r>
-              <a:rPr lang="pt-BR" sz="1400" dirty="0" err="1">
-                <a:solidFill>
-                  <a:srgbClr val="646464"/>
-                </a:solidFill>
-                <a:latin typeface="Consolas" panose="020B0609020204030204" pitchFamily="49" charset="0"/>
-              </a:rPr>
-              <a:t>Override</a:t>
-            </a:r>
-            <a:endParaRPr lang="pt-BR" sz="1400" dirty="0">
-              <a:solidFill>
-                <a:srgbClr val="000000"/>
-              </a:solidFill>
-              <a:latin typeface="Consolas" panose="020B0609020204030204" pitchFamily="49" charset="0"/>
-            </a:endParaRPr>
-          </a:p>
-          <a:p>
-            <a:pPr indent="457200">
-              <a:spcBef>
-                <a:spcPts val="150"/>
-              </a:spcBef>
-              <a:spcAft>
-                <a:spcPts val="150"/>
-              </a:spcAft>
-            </a:pPr>
-            <a:r>
-              <a:rPr lang="pt-BR" sz="1400" b="1" dirty="0" err="1">
-                <a:solidFill>
-                  <a:srgbClr val="7F0055"/>
-                </a:solidFill>
-                <a:latin typeface="Consolas" panose="020B0609020204030204" pitchFamily="49" charset="0"/>
-              </a:rPr>
-              <a:t>public</a:t>
-            </a:r>
-            <a:r>
-              <a:rPr lang="pt-BR" sz="1400" dirty="0">
-                <a:solidFill>
-                  <a:srgbClr val="000000"/>
-                </a:solidFill>
-                <a:latin typeface="Consolas" panose="020B0609020204030204" pitchFamily="49" charset="0"/>
-              </a:rPr>
-              <a:t> </a:t>
-            </a:r>
-            <a:r>
-              <a:rPr lang="pt-BR" sz="1400" b="1" dirty="0" err="1">
-                <a:solidFill>
-                  <a:srgbClr val="7F0055"/>
-                </a:solidFill>
-                <a:latin typeface="Consolas" panose="020B0609020204030204" pitchFamily="49" charset="0"/>
-              </a:rPr>
-              <a:t>void</a:t>
-            </a:r>
-            <a:r>
-              <a:rPr lang="pt-BR" sz="1400" dirty="0">
-                <a:solidFill>
-                  <a:srgbClr val="000000"/>
-                </a:solidFill>
-                <a:latin typeface="Consolas" panose="020B0609020204030204" pitchFamily="49" charset="0"/>
-              </a:rPr>
-              <a:t> </a:t>
-            </a:r>
-            <a:r>
-              <a:rPr lang="pt-BR" sz="1400" dirty="0" err="1">
-                <a:solidFill>
-                  <a:srgbClr val="000000"/>
-                </a:solidFill>
-                <a:latin typeface="Consolas" panose="020B0609020204030204" pitchFamily="49" charset="0"/>
-              </a:rPr>
-              <a:t>emitirSom</a:t>
-            </a:r>
-            <a:r>
-              <a:rPr lang="pt-BR" sz="1400" dirty="0">
-                <a:solidFill>
-                  <a:srgbClr val="000000"/>
-                </a:solidFill>
-                <a:latin typeface="Consolas" panose="020B0609020204030204" pitchFamily="49" charset="0"/>
-              </a:rPr>
-              <a:t>() {</a:t>
-            </a:r>
-          </a:p>
-          <a:p>
-            <a:pPr indent="914400">
-              <a:spcBef>
-                <a:spcPts val="150"/>
-              </a:spcBef>
-              <a:spcAft>
-                <a:spcPts val="150"/>
-              </a:spcAft>
-            </a:pPr>
-            <a:r>
-              <a:rPr lang="pt-BR" sz="1400" dirty="0" err="1">
-                <a:solidFill>
-                  <a:srgbClr val="000000"/>
-                </a:solidFill>
-                <a:latin typeface="Consolas" panose="020B0609020204030204" pitchFamily="49" charset="0"/>
-              </a:rPr>
-              <a:t>System.</a:t>
-            </a:r>
-            <a:r>
-              <a:rPr lang="pt-BR" sz="1400" b="1" i="1" dirty="0" err="1">
-                <a:solidFill>
-                  <a:srgbClr val="0000C0"/>
-                </a:solidFill>
-                <a:latin typeface="Consolas" panose="020B0609020204030204" pitchFamily="49" charset="0"/>
-              </a:rPr>
-              <a:t>out</a:t>
-            </a:r>
-            <a:r>
-              <a:rPr lang="pt-BR" sz="1400" dirty="0" err="1">
-                <a:solidFill>
-                  <a:srgbClr val="000000"/>
-                </a:solidFill>
-                <a:latin typeface="Consolas" panose="020B0609020204030204" pitchFamily="49" charset="0"/>
-              </a:rPr>
-              <a:t>.println</a:t>
-            </a:r>
-            <a:r>
-              <a:rPr lang="pt-BR" sz="1400" dirty="0">
-                <a:solidFill>
-                  <a:srgbClr val="000000"/>
-                </a:solidFill>
-                <a:latin typeface="Consolas" panose="020B0609020204030204" pitchFamily="49" charset="0"/>
-              </a:rPr>
-              <a:t>(</a:t>
-            </a:r>
-            <a:r>
-              <a:rPr lang="pt-BR" sz="1400" dirty="0">
-                <a:solidFill>
-                  <a:srgbClr val="2A00FF"/>
-                </a:solidFill>
-                <a:latin typeface="Consolas" panose="020B0609020204030204" pitchFamily="49" charset="0"/>
-              </a:rPr>
-              <a:t>"Gato mia"</a:t>
-            </a:r>
-            <a:r>
-              <a:rPr lang="pt-BR" sz="1400" dirty="0">
-                <a:solidFill>
-                  <a:srgbClr val="000000"/>
-                </a:solidFill>
-                <a:latin typeface="Consolas" panose="020B0609020204030204" pitchFamily="49" charset="0"/>
-              </a:rPr>
-              <a:t>);</a:t>
-            </a:r>
-          </a:p>
-          <a:p>
-            <a:pPr indent="457200">
-              <a:spcBef>
-                <a:spcPts val="150"/>
-              </a:spcBef>
-              <a:spcAft>
-                <a:spcPts val="150"/>
-              </a:spcAft>
-            </a:pPr>
-            <a:r>
-              <a:rPr lang="pt-BR" sz="1400" dirty="0">
+              <a:rPr lang="pt-BR" sz="1600" dirty="0">
                 <a:solidFill>
                   <a:srgbClr val="000000"/>
                 </a:solidFill>
                 <a:latin typeface="Consolas" panose="020B0609020204030204" pitchFamily="49" charset="0"/>
               </a:rPr>
               <a:t>}</a:t>
-            </a:r>
-          </a:p>
-          <a:p>
-            <a:pPr>
-              <a:spcBef>
-                <a:spcPts val="150"/>
-              </a:spcBef>
-              <a:spcAft>
-                <a:spcPts val="150"/>
-              </a:spcAft>
-            </a:pPr>
-            <a:r>
-              <a:rPr lang="pt-BR" sz="1400" dirty="0">
-                <a:solidFill>
-                  <a:srgbClr val="000000"/>
-                </a:solidFill>
-                <a:latin typeface="Consolas" panose="020B0609020204030204" pitchFamily="49" charset="0"/>
-              </a:rPr>
-              <a:t>}</a:t>
-            </a:r>
-          </a:p>
-        </p:txBody>
-      </p:sp>
-      <p:sp>
-        <p:nvSpPr>
-          <p:cNvPr id="7" name="CaixaDeTexto 6">
-            <a:extLst>
-              <a:ext uri="{FF2B5EF4-FFF2-40B4-BE49-F238E27FC236}">
-                <a16:creationId xmlns:a16="http://schemas.microsoft.com/office/drawing/2014/main" id="{EB5AEC25-BA37-441D-87EC-8DE38AED57BF}"/>
-              </a:ext>
-            </a:extLst>
-          </p:cNvPr>
-          <p:cNvSpPr txBox="1"/>
-          <p:nvPr/>
-        </p:nvSpPr>
-        <p:spPr>
-          <a:xfrm>
-            <a:off x="7567788" y="2514600"/>
-            <a:ext cx="2607734" cy="369332"/>
-          </a:xfrm>
-          <a:prstGeom prst="rect">
-            <a:avLst/>
-          </a:prstGeom>
-          <a:noFill/>
-        </p:spPr>
-        <p:txBody>
-          <a:bodyPr wrap="square" rtlCol="0">
-            <a:spAutoFit/>
-          </a:bodyPr>
-          <a:lstStyle/>
-          <a:p>
-            <a:pPr algn="ctr"/>
-            <a:r>
-              <a:rPr lang="pt-BR" dirty="0">
-                <a:latin typeface="Times New Roman" panose="02020603050405020304" pitchFamily="18" charset="0"/>
-                <a:cs typeface="Times New Roman" panose="02020603050405020304" pitchFamily="18" charset="0"/>
-              </a:rPr>
-              <a:t>Sobrescrita</a:t>
             </a:r>
           </a:p>
         </p:txBody>
@@ -8116,7 +8549,7 @@
     </p:spTree>
     <p:extLst>
       <p:ext uri="{BB962C8B-B14F-4D97-AF65-F5344CB8AC3E}">
-        <p14:creationId xmlns:p14="http://schemas.microsoft.com/office/powerpoint/2010/main" val="2967410373"/>
+        <p14:creationId xmlns:p14="http://schemas.microsoft.com/office/powerpoint/2010/main" val="3696678201"/>
       </p:ext>
     </p:extLst>
   </p:cSld>
@@ -8148,7 +8581,7 @@
           <p:cNvPr id="2" name="Título 1">
             <a:extLst>
               <a:ext uri="{FF2B5EF4-FFF2-40B4-BE49-F238E27FC236}">
-                <a16:creationId xmlns:a16="http://schemas.microsoft.com/office/drawing/2014/main" id="{98F55CF7-7DD5-478F-8B89-574E79ED855F}"/>
+                <a16:creationId xmlns:a16="http://schemas.microsoft.com/office/drawing/2014/main" id="{F68281D3-C181-4E1C-B325-E00D3550CEFA}"/>
               </a:ext>
             </a:extLst>
           </p:cNvPr>
@@ -8165,9 +8598,13 @@
           <a:lstStyle/>
           <a:p>
             <a:r>
-              <a:rPr lang="pt-BR" dirty="0"/>
-              <a:t>Projeto: Sistema para Locadora de Veículos</a:t>
-            </a:r>
+              <a:rPr lang="pt-BR" b="1" dirty="0"/>
+              <a:t>O que é Polimorfismo?</a:t>
+            </a:r>
+            <a:br>
+              <a:rPr lang="pt-BR" b="1" dirty="0"/>
+            </a:br>
+            <a:endParaRPr lang="pt-BR" dirty="0"/>
           </a:p>
         </p:txBody>
       </p:sp>
@@ -8176,7 +8613,7 @@
           <p:cNvPr id="3" name="Espaço Reservado para Conteúdo 2">
             <a:extLst>
               <a:ext uri="{FF2B5EF4-FFF2-40B4-BE49-F238E27FC236}">
-                <a16:creationId xmlns:a16="http://schemas.microsoft.com/office/drawing/2014/main" id="{EA887720-5C48-4CFE-9800-78B1959096A9}"/>
+                <a16:creationId xmlns:a16="http://schemas.microsoft.com/office/drawing/2014/main" id="{B58E572E-10D7-43D6-B230-D23680BEFDD1}"/>
               </a:ext>
             </a:extLst>
           </p:cNvPr>
@@ -8194,35 +8631,40 @@
           <a:p>
             <a:r>
               <a:rPr lang="pt-BR" dirty="0"/>
-              <a:t>O projeto consiste em um sistema que gerencia os veículos disponíveis para aluguel em uma locadora. Cada veículo pode ter características específicas, como tipo (carro, moto ou caminhão), capacidade de passageiros, valor da diária, entre outros. O sistema deve permitir:</a:t>
-            </a:r>
-          </a:p>
-          <a:p>
-            <a:pPr marL="1028700" lvl="1" indent="-342900"/>
+              <a:t>Polimorfismo é a habilidade de um mesmo objeto executar comportamentos diferentes, dependendo da forma como é utilizado no programa.</a:t>
+            </a:r>
+          </a:p>
+          <a:p>
+            <a:endParaRPr lang="pt-BR" dirty="0"/>
+          </a:p>
+          <a:p>
+            <a:pPr lvl="1"/>
             <a:r>
               <a:rPr lang="pt-BR" dirty="0"/>
-              <a:t>Cadastro de diferentes tipos de veículos</a:t>
-            </a:r>
-          </a:p>
-          <a:p>
-            <a:pPr marL="1028700" lvl="1" indent="-342900"/>
+              <a:t>Sobrecarga (</a:t>
+            </a:r>
+            <a:r>
+              <a:rPr lang="pt-BR" dirty="0" err="1"/>
+              <a:t>Overloading</a:t>
+            </a:r>
             <a:r>
               <a:rPr lang="pt-BR" dirty="0"/>
-              <a:t>Cálculo automático do valor do aluguel com base no tipo do veículo e na quantidade de dias</a:t>
-            </a:r>
-          </a:p>
-          <a:p>
-            <a:pPr marL="1028700" lvl="1" indent="-342900"/>
+              <a:t>):Vários métodos com o mesmo nome, mas com parâmetros diferentes na mesma classe.</a:t>
+            </a:r>
+          </a:p>
+          <a:p>
+            <a:pPr lvl="1"/>
             <a:r>
               <a:rPr lang="pt-BR" dirty="0"/>
-              <a:t>Aplicação de taxas adicionais específicas por tipo de veículo</a:t>
-            </a:r>
-          </a:p>
-          <a:p>
-            <a:pPr marL="1028700" lvl="1" indent="-342900"/>
+              <a:t>Sobrescrita (</a:t>
+            </a:r>
+            <a:r>
+              <a:rPr lang="pt-BR" dirty="0" err="1"/>
+              <a:t>Overriding</a:t>
+            </a:r>
             <a:r>
               <a:rPr lang="pt-BR" dirty="0"/>
-              <a:t>Exibição de detalhes dos veículos cadastrados</a:t>
+              <a:t>):Uma subclasse redefine um método da superclasse, mantendo a mesma assinatura.</a:t>
             </a:r>
           </a:p>
         </p:txBody>
@@ -8230,7 +8672,7 @@
     </p:spTree>
     <p:extLst>
       <p:ext uri="{BB962C8B-B14F-4D97-AF65-F5344CB8AC3E}">
-        <p14:creationId xmlns:p14="http://schemas.microsoft.com/office/powerpoint/2010/main" val="294714244"/>
+        <p14:creationId xmlns:p14="http://schemas.microsoft.com/office/powerpoint/2010/main" val="3973512991"/>
       </p:ext>
     </p:extLst>
   </p:cSld>

--- a/Projeto de Software e Segurança da Informação - 2026/Projeto de Software/Aula07-HerançaPolimorfismo/Herança e Porlimosfismo.pptx
+++ b/Projeto de Software e Segurança da Informação - 2026/Projeto de Software/Aula07-HerançaPolimorfismo/Herança e Porlimosfismo.pptx
@@ -5,21 +5,24 @@
     <p:sldMasterId id="2147483677" r:id="rId1"/>
   </p:sldMasterIdLst>
   <p:notesMasterIdLst>
-    <p:notesMasterId r:id="rId14"/>
+    <p:notesMasterId r:id="rId17"/>
   </p:notesMasterIdLst>
   <p:sldIdLst>
     <p:sldId id="256" r:id="rId2"/>
     <p:sldId id="266" r:id="rId3"/>
     <p:sldId id="267" r:id="rId4"/>
-    <p:sldId id="257" r:id="rId5"/>
-    <p:sldId id="258" r:id="rId6"/>
-    <p:sldId id="259" r:id="rId7"/>
-    <p:sldId id="260" r:id="rId8"/>
-    <p:sldId id="261" r:id="rId9"/>
-    <p:sldId id="264" r:id="rId10"/>
-    <p:sldId id="265" r:id="rId11"/>
-    <p:sldId id="262" r:id="rId12"/>
-    <p:sldId id="263" r:id="rId13"/>
+    <p:sldId id="268" r:id="rId5"/>
+    <p:sldId id="269" r:id="rId6"/>
+    <p:sldId id="270" r:id="rId7"/>
+    <p:sldId id="257" r:id="rId8"/>
+    <p:sldId id="258" r:id="rId9"/>
+    <p:sldId id="259" r:id="rId10"/>
+    <p:sldId id="260" r:id="rId11"/>
+    <p:sldId id="261" r:id="rId12"/>
+    <p:sldId id="264" r:id="rId13"/>
+    <p:sldId id="265" r:id="rId14"/>
+    <p:sldId id="262" r:id="rId15"/>
+    <p:sldId id="263" r:id="rId16"/>
   </p:sldIdLst>
   <p:sldSz cx="12192000" cy="6858000"/>
   <p:notesSz cx="6858000" cy="9144000"/>
@@ -3791,7 +3794,7 @@
           <p:cNvPr id="2" name="Título 1">
             <a:extLst>
               <a:ext uri="{FF2B5EF4-FFF2-40B4-BE49-F238E27FC236}">
-                <a16:creationId xmlns:a16="http://schemas.microsoft.com/office/drawing/2014/main" id="{4A744C23-AA41-4EE5-936C-BE42F1928F7C}"/>
+                <a16:creationId xmlns:a16="http://schemas.microsoft.com/office/drawing/2014/main" id="{13BF5B45-63CF-41F7-8496-D896490AE335}"/>
               </a:ext>
             </a:extLst>
           </p:cNvPr>
@@ -3809,767 +3812,66 @@
           <a:p>
             <a:r>
               <a:rPr lang="pt-BR" dirty="0"/>
-              <a:t>Exemplo de Polimorfismo</a:t>
+              <a:t>Construtor </a:t>
+            </a:r>
+            <a:r>
+              <a:rPr lang="pt-BR" dirty="0" err="1"/>
+              <a:t>Super</a:t>
+            </a:r>
+            <a:r>
+              <a:rPr lang="pt-BR" dirty="0"/>
+              <a:t>()</a:t>
             </a:r>
           </a:p>
         </p:txBody>
       </p:sp>
       <p:sp>
         <p:nvSpPr>
-          <p:cNvPr id="4" name="Retângulo 3">
-            <a:extLst>
-              <a:ext uri="{FF2B5EF4-FFF2-40B4-BE49-F238E27FC236}">
-                <a16:creationId xmlns:a16="http://schemas.microsoft.com/office/drawing/2014/main" id="{A9C127C7-5E90-4A82-86A4-C9E34D1D6277}"/>
-              </a:ext>
-            </a:extLst>
-          </p:cNvPr>
-          <p:cNvSpPr/>
-          <p:nvPr/>
+          <p:cNvPr id="3" name="Espaço Reservado para Conteúdo 2">
+            <a:extLst>
+              <a:ext uri="{FF2B5EF4-FFF2-40B4-BE49-F238E27FC236}">
+                <a16:creationId xmlns:a16="http://schemas.microsoft.com/office/drawing/2014/main" id="{05C539C4-EDD4-414C-ADA6-9C2633603CB2}"/>
+              </a:ext>
+            </a:extLst>
+          </p:cNvPr>
+          <p:cNvSpPr>
+            <a:spLocks noGrp="1"/>
+          </p:cNvSpPr>
+          <p:nvPr>
+            <p:ph idx="1"/>
+          </p:nvPr>
         </p:nvSpPr>
         <p:spPr>
           <a:xfrm>
-            <a:off x="852311" y="3028407"/>
-            <a:ext cx="4698999" cy="2975173"/>
+            <a:off x="592347" y="1844675"/>
+            <a:ext cx="11007306" cy="1473291"/>
           </a:xfrm>
-          <a:prstGeom prst="rect">
-            <a:avLst/>
-          </a:prstGeom>
         </p:spPr>
         <p:txBody>
-          <a:bodyPr wrap="square">
-            <a:spAutoFit/>
-          </a:bodyPr>
+          <a:bodyPr/>
           <a:lstStyle/>
           <a:p>
-            <a:pPr>
-              <a:spcBef>
-                <a:spcPts val="150"/>
-              </a:spcBef>
-              <a:spcAft>
-                <a:spcPts val="150"/>
-              </a:spcAft>
-            </a:pPr>
-            <a:r>
-              <a:rPr lang="pt-BR" sz="1400" b="1" dirty="0" err="1">
-                <a:solidFill>
-                  <a:srgbClr val="7F0055"/>
-                </a:solidFill>
-                <a:latin typeface="Consolas" panose="020B0609020204030204" pitchFamily="49" charset="0"/>
-              </a:rPr>
-              <a:t>public</a:t>
-            </a:r>
-            <a:r>
-              <a:rPr lang="pt-BR" sz="1400" dirty="0">
-                <a:solidFill>
-                  <a:srgbClr val="000000"/>
-                </a:solidFill>
-                <a:latin typeface="Consolas" panose="020B0609020204030204" pitchFamily="49" charset="0"/>
-              </a:rPr>
-              <a:t> </a:t>
-            </a:r>
-            <a:r>
-              <a:rPr lang="pt-BR" sz="1400" b="1" dirty="0" err="1">
-                <a:solidFill>
-                  <a:srgbClr val="7F0055"/>
-                </a:solidFill>
-                <a:latin typeface="Consolas" panose="020B0609020204030204" pitchFamily="49" charset="0"/>
-              </a:rPr>
-              <a:t>class</a:t>
-            </a:r>
-            <a:r>
-              <a:rPr lang="pt-BR" sz="1400" dirty="0">
-                <a:solidFill>
-                  <a:srgbClr val="000000"/>
-                </a:solidFill>
-                <a:latin typeface="Consolas" panose="020B0609020204030204" pitchFamily="49" charset="0"/>
-              </a:rPr>
-              <a:t> Calculadora {</a:t>
-            </a:r>
-          </a:p>
-          <a:p>
-            <a:pPr indent="457200">
-              <a:spcBef>
-                <a:spcPts val="150"/>
-              </a:spcBef>
-              <a:spcAft>
-                <a:spcPts val="150"/>
-              </a:spcAft>
-            </a:pPr>
-            <a:r>
-              <a:rPr lang="pt-BR" sz="1400" b="1" dirty="0" err="1">
-                <a:solidFill>
-                  <a:srgbClr val="7F0055"/>
-                </a:solidFill>
-                <a:latin typeface="Consolas" panose="020B0609020204030204" pitchFamily="49" charset="0"/>
-              </a:rPr>
-              <a:t>public</a:t>
-            </a:r>
-            <a:r>
-              <a:rPr lang="pt-BR" sz="1400" dirty="0">
-                <a:solidFill>
-                  <a:srgbClr val="000000"/>
-                </a:solidFill>
-                <a:latin typeface="Consolas" panose="020B0609020204030204" pitchFamily="49" charset="0"/>
-              </a:rPr>
-              <a:t> </a:t>
-            </a:r>
-            <a:r>
-              <a:rPr lang="pt-BR" sz="1400" b="1" dirty="0" err="1">
-                <a:solidFill>
-                  <a:srgbClr val="7F0055"/>
-                </a:solidFill>
-                <a:latin typeface="Consolas" panose="020B0609020204030204" pitchFamily="49" charset="0"/>
-              </a:rPr>
-              <a:t>int</a:t>
-            </a:r>
-            <a:r>
-              <a:rPr lang="pt-BR" sz="1400" dirty="0">
-                <a:solidFill>
-                  <a:srgbClr val="000000"/>
-                </a:solidFill>
-                <a:latin typeface="Consolas" panose="020B0609020204030204" pitchFamily="49" charset="0"/>
-              </a:rPr>
-              <a:t> somar(</a:t>
-            </a:r>
-            <a:r>
-              <a:rPr lang="pt-BR" sz="1400" b="1" dirty="0" err="1">
-                <a:solidFill>
-                  <a:srgbClr val="7F0055"/>
-                </a:solidFill>
-                <a:latin typeface="Consolas" panose="020B0609020204030204" pitchFamily="49" charset="0"/>
-              </a:rPr>
-              <a:t>int</a:t>
-            </a:r>
-            <a:r>
-              <a:rPr lang="pt-BR" sz="1400" dirty="0">
-                <a:solidFill>
-                  <a:srgbClr val="000000"/>
-                </a:solidFill>
-                <a:latin typeface="Consolas" panose="020B0609020204030204" pitchFamily="49" charset="0"/>
-              </a:rPr>
-              <a:t> </a:t>
-            </a:r>
-            <a:r>
-              <a:rPr lang="pt-BR" sz="1400" dirty="0">
-                <a:solidFill>
-                  <a:srgbClr val="6A3E3E"/>
-                </a:solidFill>
-                <a:latin typeface="Consolas" panose="020B0609020204030204" pitchFamily="49" charset="0"/>
-              </a:rPr>
-              <a:t>a</a:t>
-            </a:r>
-            <a:r>
-              <a:rPr lang="pt-BR" sz="1400" dirty="0">
-                <a:solidFill>
-                  <a:srgbClr val="000000"/>
-                </a:solidFill>
-                <a:latin typeface="Consolas" panose="020B0609020204030204" pitchFamily="49" charset="0"/>
-              </a:rPr>
-              <a:t>, </a:t>
-            </a:r>
-            <a:r>
-              <a:rPr lang="pt-BR" sz="1400" b="1" dirty="0" err="1">
-                <a:solidFill>
-                  <a:srgbClr val="7F0055"/>
-                </a:solidFill>
-                <a:latin typeface="Consolas" panose="020B0609020204030204" pitchFamily="49" charset="0"/>
-              </a:rPr>
-              <a:t>int</a:t>
-            </a:r>
-            <a:r>
-              <a:rPr lang="pt-BR" sz="1400" dirty="0">
-                <a:solidFill>
-                  <a:srgbClr val="000000"/>
-                </a:solidFill>
-                <a:latin typeface="Consolas" panose="020B0609020204030204" pitchFamily="49" charset="0"/>
-              </a:rPr>
-              <a:t> </a:t>
-            </a:r>
-            <a:r>
-              <a:rPr lang="pt-BR" sz="1400" dirty="0">
-                <a:solidFill>
-                  <a:srgbClr val="6A3E3E"/>
-                </a:solidFill>
-                <a:latin typeface="Consolas" panose="020B0609020204030204" pitchFamily="49" charset="0"/>
-              </a:rPr>
-              <a:t>b</a:t>
-            </a:r>
-            <a:r>
-              <a:rPr lang="pt-BR" sz="1400" dirty="0">
-                <a:solidFill>
-                  <a:srgbClr val="000000"/>
-                </a:solidFill>
-                <a:latin typeface="Consolas" panose="020B0609020204030204" pitchFamily="49" charset="0"/>
-              </a:rPr>
-              <a:t>) {</a:t>
-            </a:r>
-          </a:p>
-          <a:p>
-            <a:pPr indent="914400">
-              <a:spcBef>
-                <a:spcPts val="150"/>
-              </a:spcBef>
-              <a:spcAft>
-                <a:spcPts val="150"/>
-              </a:spcAft>
-            </a:pPr>
-            <a:r>
-              <a:rPr lang="pt-BR" sz="1400" b="1" dirty="0" err="1">
-                <a:solidFill>
-                  <a:srgbClr val="7F0055"/>
-                </a:solidFill>
-                <a:latin typeface="Consolas" panose="020B0609020204030204" pitchFamily="49" charset="0"/>
-              </a:rPr>
-              <a:t>return</a:t>
-            </a:r>
-            <a:r>
-              <a:rPr lang="pt-BR" sz="1400" dirty="0">
-                <a:solidFill>
-                  <a:srgbClr val="000000"/>
-                </a:solidFill>
-                <a:latin typeface="Consolas" panose="020B0609020204030204" pitchFamily="49" charset="0"/>
-              </a:rPr>
-              <a:t> </a:t>
-            </a:r>
-            <a:r>
-              <a:rPr lang="pt-BR" sz="1400" dirty="0">
-                <a:solidFill>
-                  <a:srgbClr val="6A3E3E"/>
-                </a:solidFill>
-                <a:latin typeface="Consolas" panose="020B0609020204030204" pitchFamily="49" charset="0"/>
-              </a:rPr>
-              <a:t>a</a:t>
-            </a:r>
-            <a:r>
-              <a:rPr lang="pt-BR" sz="1400" dirty="0">
-                <a:solidFill>
-                  <a:srgbClr val="000000"/>
-                </a:solidFill>
-                <a:latin typeface="Consolas" panose="020B0609020204030204" pitchFamily="49" charset="0"/>
-              </a:rPr>
-              <a:t> + </a:t>
-            </a:r>
-            <a:r>
-              <a:rPr lang="pt-BR" sz="1400" dirty="0">
-                <a:solidFill>
-                  <a:srgbClr val="6A3E3E"/>
-                </a:solidFill>
-                <a:latin typeface="Consolas" panose="020B0609020204030204" pitchFamily="49" charset="0"/>
-              </a:rPr>
-              <a:t>b</a:t>
-            </a:r>
-            <a:r>
-              <a:rPr lang="pt-BR" sz="1400" dirty="0">
-                <a:solidFill>
-                  <a:srgbClr val="000000"/>
-                </a:solidFill>
-                <a:latin typeface="Consolas" panose="020B0609020204030204" pitchFamily="49" charset="0"/>
-              </a:rPr>
-              <a:t>;</a:t>
-            </a:r>
-          </a:p>
-          <a:p>
-            <a:pPr indent="457200">
-              <a:spcBef>
-                <a:spcPts val="150"/>
-              </a:spcBef>
-              <a:spcAft>
-                <a:spcPts val="150"/>
-              </a:spcAft>
-            </a:pPr>
-            <a:r>
-              <a:rPr lang="pt-BR" sz="1400" dirty="0">
-                <a:solidFill>
-                  <a:srgbClr val="000000"/>
-                </a:solidFill>
-                <a:latin typeface="Consolas" panose="020B0609020204030204" pitchFamily="49" charset="0"/>
-              </a:rPr>
-              <a:t>}</a:t>
-            </a:r>
-          </a:p>
-          <a:p>
-            <a:pPr indent="457200">
-              <a:spcBef>
-                <a:spcPts val="150"/>
-              </a:spcBef>
-              <a:spcAft>
-                <a:spcPts val="150"/>
-              </a:spcAft>
-            </a:pPr>
-            <a:r>
-              <a:rPr lang="pt-BR" sz="1400" b="1" dirty="0" err="1">
-                <a:solidFill>
-                  <a:srgbClr val="7F0055"/>
-                </a:solidFill>
-                <a:latin typeface="Consolas" panose="020B0609020204030204" pitchFamily="49" charset="0"/>
-              </a:rPr>
-              <a:t>public</a:t>
-            </a:r>
-            <a:r>
-              <a:rPr lang="pt-BR" sz="1400" dirty="0">
-                <a:solidFill>
-                  <a:srgbClr val="000000"/>
-                </a:solidFill>
-                <a:latin typeface="Consolas" panose="020B0609020204030204" pitchFamily="49" charset="0"/>
-              </a:rPr>
-              <a:t> </a:t>
-            </a:r>
-            <a:r>
-              <a:rPr lang="pt-BR" sz="1400" b="1" dirty="0" err="1">
-                <a:solidFill>
-                  <a:srgbClr val="7F0055"/>
-                </a:solidFill>
-                <a:latin typeface="Consolas" panose="020B0609020204030204" pitchFamily="49" charset="0"/>
-              </a:rPr>
-              <a:t>double</a:t>
-            </a:r>
-            <a:r>
-              <a:rPr lang="pt-BR" sz="1400" dirty="0">
-                <a:solidFill>
-                  <a:srgbClr val="000000"/>
-                </a:solidFill>
-                <a:latin typeface="Consolas" panose="020B0609020204030204" pitchFamily="49" charset="0"/>
-              </a:rPr>
-              <a:t> somar(</a:t>
-            </a:r>
-            <a:r>
-              <a:rPr lang="pt-BR" sz="1400" b="1" dirty="0" err="1">
-                <a:solidFill>
-                  <a:srgbClr val="7F0055"/>
-                </a:solidFill>
-                <a:latin typeface="Consolas" panose="020B0609020204030204" pitchFamily="49" charset="0"/>
-              </a:rPr>
-              <a:t>double</a:t>
-            </a:r>
-            <a:r>
-              <a:rPr lang="pt-BR" sz="1400" dirty="0">
-                <a:solidFill>
-                  <a:srgbClr val="000000"/>
-                </a:solidFill>
-                <a:latin typeface="Consolas" panose="020B0609020204030204" pitchFamily="49" charset="0"/>
-              </a:rPr>
-              <a:t> </a:t>
-            </a:r>
-            <a:r>
-              <a:rPr lang="pt-BR" sz="1400" dirty="0">
-                <a:solidFill>
-                  <a:srgbClr val="6A3E3E"/>
-                </a:solidFill>
-                <a:latin typeface="Consolas" panose="020B0609020204030204" pitchFamily="49" charset="0"/>
-              </a:rPr>
-              <a:t>a</a:t>
-            </a:r>
-            <a:r>
-              <a:rPr lang="pt-BR" sz="1400" dirty="0">
-                <a:solidFill>
-                  <a:srgbClr val="000000"/>
-                </a:solidFill>
-                <a:latin typeface="Consolas" panose="020B0609020204030204" pitchFamily="49" charset="0"/>
-              </a:rPr>
-              <a:t>, </a:t>
-            </a:r>
-            <a:r>
-              <a:rPr lang="pt-BR" sz="1400" b="1" dirty="0" err="1">
-                <a:solidFill>
-                  <a:srgbClr val="7F0055"/>
-                </a:solidFill>
-                <a:latin typeface="Consolas" panose="020B0609020204030204" pitchFamily="49" charset="0"/>
-              </a:rPr>
-              <a:t>double</a:t>
-            </a:r>
-            <a:r>
-              <a:rPr lang="pt-BR" sz="1400" dirty="0">
-                <a:solidFill>
-                  <a:srgbClr val="000000"/>
-                </a:solidFill>
-                <a:latin typeface="Consolas" panose="020B0609020204030204" pitchFamily="49" charset="0"/>
-              </a:rPr>
-              <a:t> </a:t>
-            </a:r>
-            <a:r>
-              <a:rPr lang="pt-BR" sz="1400" dirty="0">
-                <a:solidFill>
-                  <a:srgbClr val="6A3E3E"/>
-                </a:solidFill>
-                <a:latin typeface="Consolas" panose="020B0609020204030204" pitchFamily="49" charset="0"/>
-              </a:rPr>
-              <a:t>b</a:t>
-            </a:r>
-            <a:r>
-              <a:rPr lang="pt-BR" sz="1400" dirty="0">
-                <a:solidFill>
-                  <a:srgbClr val="000000"/>
-                </a:solidFill>
-                <a:latin typeface="Consolas" panose="020B0609020204030204" pitchFamily="49" charset="0"/>
-              </a:rPr>
-              <a:t>) {</a:t>
-            </a:r>
-          </a:p>
-          <a:p>
-            <a:pPr indent="914400">
-              <a:spcBef>
-                <a:spcPts val="150"/>
-              </a:spcBef>
-              <a:spcAft>
-                <a:spcPts val="150"/>
-              </a:spcAft>
-            </a:pPr>
-            <a:r>
-              <a:rPr lang="pt-BR" sz="1400" b="1" dirty="0" err="1">
-                <a:solidFill>
-                  <a:srgbClr val="7F0055"/>
-                </a:solidFill>
-                <a:latin typeface="Consolas" panose="020B0609020204030204" pitchFamily="49" charset="0"/>
-              </a:rPr>
-              <a:t>return</a:t>
-            </a:r>
-            <a:r>
-              <a:rPr lang="pt-BR" sz="1400" dirty="0">
-                <a:solidFill>
-                  <a:srgbClr val="000000"/>
-                </a:solidFill>
-                <a:latin typeface="Consolas" panose="020B0609020204030204" pitchFamily="49" charset="0"/>
-              </a:rPr>
-              <a:t> </a:t>
-            </a:r>
-            <a:r>
-              <a:rPr lang="pt-BR" sz="1400" dirty="0">
-                <a:solidFill>
-                  <a:srgbClr val="6A3E3E"/>
-                </a:solidFill>
-                <a:latin typeface="Consolas" panose="020B0609020204030204" pitchFamily="49" charset="0"/>
-              </a:rPr>
-              <a:t>a</a:t>
-            </a:r>
-            <a:r>
-              <a:rPr lang="pt-BR" sz="1400" dirty="0">
-                <a:solidFill>
-                  <a:srgbClr val="000000"/>
-                </a:solidFill>
-                <a:latin typeface="Consolas" panose="020B0609020204030204" pitchFamily="49" charset="0"/>
-              </a:rPr>
-              <a:t> + </a:t>
-            </a:r>
-            <a:r>
-              <a:rPr lang="pt-BR" sz="1400" dirty="0">
-                <a:solidFill>
-                  <a:srgbClr val="6A3E3E"/>
-                </a:solidFill>
-                <a:latin typeface="Consolas" panose="020B0609020204030204" pitchFamily="49" charset="0"/>
-              </a:rPr>
-              <a:t>b</a:t>
-            </a:r>
-            <a:r>
-              <a:rPr lang="pt-BR" sz="1400" dirty="0">
-                <a:solidFill>
-                  <a:srgbClr val="000000"/>
-                </a:solidFill>
-                <a:latin typeface="Consolas" panose="020B0609020204030204" pitchFamily="49" charset="0"/>
-              </a:rPr>
-              <a:t>;</a:t>
-            </a:r>
-          </a:p>
-          <a:p>
-            <a:pPr indent="457200">
-              <a:spcBef>
-                <a:spcPts val="150"/>
-              </a:spcBef>
-              <a:spcAft>
-                <a:spcPts val="150"/>
-              </a:spcAft>
-            </a:pPr>
-            <a:r>
-              <a:rPr lang="pt-BR" sz="1400" dirty="0">
-                <a:solidFill>
-                  <a:srgbClr val="000000"/>
-                </a:solidFill>
-                <a:latin typeface="Consolas" panose="020B0609020204030204" pitchFamily="49" charset="0"/>
-              </a:rPr>
-              <a:t>}</a:t>
-            </a:r>
-          </a:p>
-          <a:p>
-            <a:pPr indent="457200">
-              <a:spcBef>
-                <a:spcPts val="150"/>
-              </a:spcBef>
-              <a:spcAft>
-                <a:spcPts val="150"/>
-              </a:spcAft>
-            </a:pPr>
-            <a:r>
-              <a:rPr lang="pt-BR" sz="1400" b="1" dirty="0" err="1">
-                <a:solidFill>
-                  <a:srgbClr val="7F0055"/>
-                </a:solidFill>
-                <a:latin typeface="Consolas" panose="020B0609020204030204" pitchFamily="49" charset="0"/>
-              </a:rPr>
-              <a:t>public</a:t>
-            </a:r>
-            <a:r>
-              <a:rPr lang="pt-BR" sz="1400" dirty="0">
-                <a:solidFill>
-                  <a:srgbClr val="000000"/>
-                </a:solidFill>
-                <a:latin typeface="Consolas" panose="020B0609020204030204" pitchFamily="49" charset="0"/>
-              </a:rPr>
-              <a:t> </a:t>
-            </a:r>
-            <a:r>
-              <a:rPr lang="pt-BR" sz="1400" b="1" dirty="0" err="1">
-                <a:solidFill>
-                  <a:srgbClr val="7F0055"/>
-                </a:solidFill>
-                <a:latin typeface="Consolas" panose="020B0609020204030204" pitchFamily="49" charset="0"/>
-              </a:rPr>
-              <a:t>int</a:t>
-            </a:r>
-            <a:r>
-              <a:rPr lang="pt-BR" sz="1400" dirty="0">
-                <a:solidFill>
-                  <a:srgbClr val="000000"/>
-                </a:solidFill>
-                <a:latin typeface="Consolas" panose="020B0609020204030204" pitchFamily="49" charset="0"/>
-              </a:rPr>
-              <a:t> somar(</a:t>
-            </a:r>
-            <a:r>
-              <a:rPr lang="pt-BR" sz="1400" b="1" dirty="0" err="1">
-                <a:solidFill>
-                  <a:srgbClr val="7F0055"/>
-                </a:solidFill>
-                <a:latin typeface="Consolas" panose="020B0609020204030204" pitchFamily="49" charset="0"/>
-              </a:rPr>
-              <a:t>int</a:t>
-            </a:r>
-            <a:r>
-              <a:rPr lang="pt-BR" sz="1400" dirty="0">
-                <a:solidFill>
-                  <a:srgbClr val="000000"/>
-                </a:solidFill>
-                <a:latin typeface="Consolas" panose="020B0609020204030204" pitchFamily="49" charset="0"/>
-              </a:rPr>
-              <a:t> </a:t>
-            </a:r>
-            <a:r>
-              <a:rPr lang="pt-BR" sz="1400" dirty="0">
-                <a:solidFill>
-                  <a:srgbClr val="6A3E3E"/>
-                </a:solidFill>
-                <a:latin typeface="Consolas" panose="020B0609020204030204" pitchFamily="49" charset="0"/>
-              </a:rPr>
-              <a:t>a</a:t>
-            </a:r>
-            <a:r>
-              <a:rPr lang="pt-BR" sz="1400" dirty="0">
-                <a:solidFill>
-                  <a:srgbClr val="000000"/>
-                </a:solidFill>
-                <a:latin typeface="Consolas" panose="020B0609020204030204" pitchFamily="49" charset="0"/>
-              </a:rPr>
-              <a:t>, </a:t>
-            </a:r>
-            <a:r>
-              <a:rPr lang="pt-BR" sz="1400" b="1" dirty="0" err="1">
-                <a:solidFill>
-                  <a:srgbClr val="7F0055"/>
-                </a:solidFill>
-                <a:latin typeface="Consolas" panose="020B0609020204030204" pitchFamily="49" charset="0"/>
-              </a:rPr>
-              <a:t>int</a:t>
-            </a:r>
-            <a:r>
-              <a:rPr lang="pt-BR" sz="1400" dirty="0">
-                <a:solidFill>
-                  <a:srgbClr val="000000"/>
-                </a:solidFill>
-                <a:latin typeface="Consolas" panose="020B0609020204030204" pitchFamily="49" charset="0"/>
-              </a:rPr>
-              <a:t> </a:t>
-            </a:r>
-            <a:r>
-              <a:rPr lang="pt-BR" sz="1400" dirty="0">
-                <a:solidFill>
-                  <a:srgbClr val="6A3E3E"/>
-                </a:solidFill>
-                <a:latin typeface="Consolas" panose="020B0609020204030204" pitchFamily="49" charset="0"/>
-              </a:rPr>
-              <a:t>b</a:t>
-            </a:r>
-            <a:r>
-              <a:rPr lang="pt-BR" sz="1400" dirty="0">
-                <a:solidFill>
-                  <a:srgbClr val="000000"/>
-                </a:solidFill>
-                <a:latin typeface="Consolas" panose="020B0609020204030204" pitchFamily="49" charset="0"/>
-              </a:rPr>
-              <a:t>, </a:t>
-            </a:r>
-            <a:r>
-              <a:rPr lang="pt-BR" sz="1400" b="1" dirty="0" err="1">
-                <a:solidFill>
-                  <a:srgbClr val="7F0055"/>
-                </a:solidFill>
-                <a:latin typeface="Consolas" panose="020B0609020204030204" pitchFamily="49" charset="0"/>
-              </a:rPr>
-              <a:t>int</a:t>
-            </a:r>
-            <a:r>
-              <a:rPr lang="pt-BR" sz="1400" dirty="0">
-                <a:solidFill>
-                  <a:srgbClr val="000000"/>
-                </a:solidFill>
-                <a:latin typeface="Consolas" panose="020B0609020204030204" pitchFamily="49" charset="0"/>
-              </a:rPr>
-              <a:t> </a:t>
-            </a:r>
-            <a:r>
-              <a:rPr lang="pt-BR" sz="1400" dirty="0">
-                <a:solidFill>
-                  <a:srgbClr val="6A3E3E"/>
-                </a:solidFill>
-                <a:latin typeface="Consolas" panose="020B0609020204030204" pitchFamily="49" charset="0"/>
-              </a:rPr>
-              <a:t>c</a:t>
-            </a:r>
-            <a:r>
-              <a:rPr lang="pt-BR" sz="1400" dirty="0">
-                <a:solidFill>
-                  <a:srgbClr val="000000"/>
-                </a:solidFill>
-                <a:latin typeface="Consolas" panose="020B0609020204030204" pitchFamily="49" charset="0"/>
-              </a:rPr>
-              <a:t>) {</a:t>
-            </a:r>
-          </a:p>
-          <a:p>
-            <a:pPr indent="914400">
-              <a:spcBef>
-                <a:spcPts val="150"/>
-              </a:spcBef>
-              <a:spcAft>
-                <a:spcPts val="150"/>
-              </a:spcAft>
-            </a:pPr>
-            <a:r>
-              <a:rPr lang="pt-BR" sz="1400" b="1" dirty="0" err="1">
-                <a:solidFill>
-                  <a:srgbClr val="7F0055"/>
-                </a:solidFill>
-                <a:latin typeface="Consolas" panose="020B0609020204030204" pitchFamily="49" charset="0"/>
-              </a:rPr>
-              <a:t>return</a:t>
-            </a:r>
-            <a:r>
-              <a:rPr lang="pt-BR" sz="1400" dirty="0">
-                <a:solidFill>
-                  <a:srgbClr val="000000"/>
-                </a:solidFill>
-                <a:latin typeface="Consolas" panose="020B0609020204030204" pitchFamily="49" charset="0"/>
-              </a:rPr>
-              <a:t> </a:t>
-            </a:r>
-            <a:r>
-              <a:rPr lang="pt-BR" sz="1400" dirty="0">
-                <a:solidFill>
-                  <a:srgbClr val="6A3E3E"/>
-                </a:solidFill>
-                <a:latin typeface="Consolas" panose="020B0609020204030204" pitchFamily="49" charset="0"/>
-              </a:rPr>
-              <a:t>a</a:t>
-            </a:r>
-            <a:r>
-              <a:rPr lang="pt-BR" sz="1400" dirty="0">
-                <a:solidFill>
-                  <a:srgbClr val="000000"/>
-                </a:solidFill>
-                <a:latin typeface="Consolas" panose="020B0609020204030204" pitchFamily="49" charset="0"/>
-              </a:rPr>
-              <a:t> + </a:t>
-            </a:r>
-            <a:r>
-              <a:rPr lang="pt-BR" sz="1400" dirty="0">
-                <a:solidFill>
-                  <a:srgbClr val="6A3E3E"/>
-                </a:solidFill>
-                <a:latin typeface="Consolas" panose="020B0609020204030204" pitchFamily="49" charset="0"/>
-              </a:rPr>
-              <a:t>b</a:t>
-            </a:r>
-            <a:r>
-              <a:rPr lang="pt-BR" sz="1400" dirty="0">
-                <a:solidFill>
-                  <a:srgbClr val="000000"/>
-                </a:solidFill>
-                <a:latin typeface="Consolas" panose="020B0609020204030204" pitchFamily="49" charset="0"/>
-              </a:rPr>
-              <a:t> + </a:t>
-            </a:r>
-            <a:r>
-              <a:rPr lang="pt-BR" sz="1400" dirty="0">
-                <a:solidFill>
-                  <a:srgbClr val="6A3E3E"/>
-                </a:solidFill>
-                <a:latin typeface="Consolas" panose="020B0609020204030204" pitchFamily="49" charset="0"/>
-              </a:rPr>
-              <a:t>c</a:t>
-            </a:r>
-            <a:r>
-              <a:rPr lang="pt-BR" sz="1400" dirty="0">
-                <a:solidFill>
-                  <a:srgbClr val="000000"/>
-                </a:solidFill>
-                <a:latin typeface="Consolas" panose="020B0609020204030204" pitchFamily="49" charset="0"/>
-              </a:rPr>
-              <a:t>;</a:t>
-            </a:r>
-          </a:p>
-          <a:p>
-            <a:pPr indent="457200">
-              <a:spcBef>
-                <a:spcPts val="150"/>
-              </a:spcBef>
-              <a:spcAft>
-                <a:spcPts val="150"/>
-              </a:spcAft>
-            </a:pPr>
-            <a:r>
-              <a:rPr lang="pt-BR" sz="1400" dirty="0">
-                <a:solidFill>
-                  <a:srgbClr val="000000"/>
-                </a:solidFill>
-                <a:latin typeface="Consolas" panose="020B0609020204030204" pitchFamily="49" charset="0"/>
-              </a:rPr>
-              <a:t>}</a:t>
-            </a:r>
-          </a:p>
-          <a:p>
-            <a:pPr>
-              <a:spcBef>
-                <a:spcPts val="150"/>
-              </a:spcBef>
-              <a:spcAft>
-                <a:spcPts val="150"/>
-              </a:spcAft>
-            </a:pPr>
-            <a:r>
-              <a:rPr lang="pt-BR" sz="1400" dirty="0">
-                <a:solidFill>
-                  <a:srgbClr val="000000"/>
-                </a:solidFill>
-                <a:latin typeface="Consolas" panose="020B0609020204030204" pitchFamily="49" charset="0"/>
-              </a:rPr>
-              <a:t>}</a:t>
+            <a:r>
+              <a:rPr lang="pt-BR" sz="1800" dirty="0"/>
+              <a:t>A palavra-chave </a:t>
+            </a:r>
+            <a:r>
+              <a:rPr lang="pt-BR" sz="1800" dirty="0" err="1"/>
+              <a:t>super</a:t>
+            </a:r>
+            <a:r>
+              <a:rPr lang="pt-BR" sz="1800" dirty="0"/>
+              <a:t> é utilizada para se referir à superclasse (classe pai) de uma classe derivada (classe filha). Ela é especialmente útil quando há a necessidade de reutilizar atributos ou métodos da classe pai, evitando a repetição de código.</a:t>
             </a:r>
           </a:p>
         </p:txBody>
       </p:sp>
       <p:sp>
         <p:nvSpPr>
-          <p:cNvPr id="5" name="CaixaDeTexto 4">
-            <a:extLst>
-              <a:ext uri="{FF2B5EF4-FFF2-40B4-BE49-F238E27FC236}">
-                <a16:creationId xmlns:a16="http://schemas.microsoft.com/office/drawing/2014/main" id="{84F9EC0C-06FF-4414-87FA-9B60D0B83818}"/>
+          <p:cNvPr id="7" name="CaixaDeTexto 6">
+            <a:extLst>
+              <a:ext uri="{FF2B5EF4-FFF2-40B4-BE49-F238E27FC236}">
+                <a16:creationId xmlns:a16="http://schemas.microsoft.com/office/drawing/2014/main" id="{15C42C8B-8DB6-4C73-97AE-4AF8FC519272}"/>
               </a:ext>
             </a:extLst>
           </p:cNvPr>
@@ -4578,8 +3880,8 @@
         </p:nvSpPr>
         <p:spPr>
           <a:xfrm>
-            <a:off x="1897943" y="2514600"/>
-            <a:ext cx="2607734" cy="369332"/>
+            <a:off x="5503559" y="3520485"/>
+            <a:ext cx="1184883" cy="338554"/>
           </a:xfrm>
           <a:prstGeom prst="rect">
             <a:avLst/>
@@ -4594,21 +3896,21 @@
           <a:p>
             <a:pPr algn="ctr"/>
             <a:r>
-              <a:rPr lang="pt-BR" dirty="0">
+              <a:rPr lang="pt-BR" sz="1600" dirty="0">
                 <a:latin typeface="Times New Roman" panose="02020603050405020304" pitchFamily="18" charset="0"/>
                 <a:cs typeface="Times New Roman" panose="02020603050405020304" pitchFamily="18" charset="0"/>
               </a:rPr>
-              <a:t>Sobrecarga</a:t>
+              <a:t>Classe Filha</a:t>
             </a:r>
           </a:p>
         </p:txBody>
       </p:sp>
       <p:sp>
         <p:nvSpPr>
-          <p:cNvPr id="6" name="Retângulo 5">
-            <a:extLst>
-              <a:ext uri="{FF2B5EF4-FFF2-40B4-BE49-F238E27FC236}">
-                <a16:creationId xmlns:a16="http://schemas.microsoft.com/office/drawing/2014/main" id="{92256B6E-0262-418B-82DC-A9263E124FF3}"/>
+          <p:cNvPr id="4" name="Retângulo 3">
+            <a:extLst>
+              <a:ext uri="{FF2B5EF4-FFF2-40B4-BE49-F238E27FC236}">
+                <a16:creationId xmlns:a16="http://schemas.microsoft.com/office/drawing/2014/main" id="{FFAD0326-5AFB-4F87-8E1F-8F1446812B25}"/>
               </a:ext>
             </a:extLst>
           </p:cNvPr>
@@ -4617,8 +3919,8 @@
         </p:nvSpPr>
         <p:spPr>
           <a:xfrm>
-            <a:off x="6403622" y="3028407"/>
-            <a:ext cx="4936067" cy="3241913"/>
+            <a:off x="1698171" y="4061558"/>
+            <a:ext cx="8795657" cy="2421176"/>
           </a:xfrm>
           <a:prstGeom prst="rect">
             <a:avLst/>
@@ -4639,26 +3941,80 @@
               </a:spcAft>
             </a:pPr>
             <a:r>
-              <a:rPr lang="pt-BR" sz="1400" b="1" dirty="0" err="1">
+              <a:rPr lang="pt-BR" sz="1600" b="1" dirty="0" err="1">
                 <a:solidFill>
                   <a:srgbClr val="7F0055"/>
                 </a:solidFill>
                 <a:latin typeface="Consolas" panose="020B0609020204030204" pitchFamily="49" charset="0"/>
               </a:rPr>
+              <a:t>public</a:t>
+            </a:r>
+            <a:r>
+              <a:rPr lang="pt-BR" sz="1600" dirty="0">
+                <a:solidFill>
+                  <a:srgbClr val="000000"/>
+                </a:solidFill>
+                <a:latin typeface="Consolas" panose="020B0609020204030204" pitchFamily="49" charset="0"/>
+              </a:rPr>
+              <a:t> </a:t>
+            </a:r>
+            <a:r>
+              <a:rPr lang="pt-BR" sz="1600" b="1" dirty="0" err="1">
+                <a:solidFill>
+                  <a:srgbClr val="7F0055"/>
+                </a:solidFill>
+                <a:latin typeface="Consolas" panose="020B0609020204030204" pitchFamily="49" charset="0"/>
+              </a:rPr>
               <a:t>class</a:t>
             </a:r>
             <a:r>
-              <a:rPr lang="pt-BR" sz="1400" dirty="0">
-                <a:solidFill>
-                  <a:srgbClr val="000000"/>
-                </a:solidFill>
-                <a:latin typeface="Consolas" panose="020B0609020204030204" pitchFamily="49" charset="0"/>
-              </a:rPr>
-              <a:t> Animal {</a:t>
-            </a:r>
-          </a:p>
-          <a:p>
-            <a:pPr indent="457200">
+              <a:rPr lang="pt-BR" sz="1600" dirty="0">
+                <a:solidFill>
+                  <a:srgbClr val="000000"/>
+                </a:solidFill>
+                <a:latin typeface="Consolas" panose="020B0609020204030204" pitchFamily="49" charset="0"/>
+              </a:rPr>
+              <a:t> Gerente </a:t>
+            </a:r>
+            <a:r>
+              <a:rPr lang="pt-BR" sz="1600" b="1" dirty="0" err="1">
+                <a:solidFill>
+                  <a:srgbClr val="7F0055"/>
+                </a:solidFill>
+                <a:latin typeface="Consolas" panose="020B0609020204030204" pitchFamily="49" charset="0"/>
+              </a:rPr>
+              <a:t>extends</a:t>
+            </a:r>
+            <a:r>
+              <a:rPr lang="pt-BR" sz="1600" dirty="0">
+                <a:solidFill>
+                  <a:srgbClr val="000000"/>
+                </a:solidFill>
+                <a:latin typeface="Consolas" panose="020B0609020204030204" pitchFamily="49" charset="0"/>
+              </a:rPr>
+              <a:t> </a:t>
+            </a:r>
+            <a:r>
+              <a:rPr lang="pt-BR" sz="1600" dirty="0" err="1">
+                <a:solidFill>
+                  <a:srgbClr val="000000"/>
+                </a:solidFill>
+                <a:latin typeface="Consolas" panose="020B0609020204030204" pitchFamily="49" charset="0"/>
+              </a:rPr>
+              <a:t>Funcionarios</a:t>
+            </a:r>
+            <a:r>
+              <a:rPr lang="pt-BR" sz="1600" dirty="0">
+                <a:solidFill>
+                  <a:srgbClr val="000000"/>
+                </a:solidFill>
+                <a:latin typeface="Consolas" panose="020B0609020204030204" pitchFamily="49" charset="0"/>
+              </a:rPr>
+              <a:t>{</a:t>
+            </a:r>
+          </a:p>
+          <a:p>
+            <a:pPr lvl="1">
               <a:spcBef>
                 <a:spcPts val="150"/>
               </a:spcBef>
@@ -4667,16 +4023,16 @@
               </a:spcAft>
             </a:pPr>
             <a:r>
-              <a:rPr lang="pt-BR" sz="1400" b="1" dirty="0" err="1">
+              <a:rPr lang="pt-BR" sz="1600" b="1" dirty="0" err="1">
                 <a:solidFill>
                   <a:srgbClr val="7F0055"/>
                 </a:solidFill>
                 <a:latin typeface="Consolas" panose="020B0609020204030204" pitchFamily="49" charset="0"/>
               </a:rPr>
-              <a:t>public</a:t>
-            </a:r>
-            <a:r>
-              <a:rPr lang="pt-BR" sz="1400" dirty="0">
+              <a:t>private</a:t>
+            </a:r>
+            <a:r>
+              <a:rPr lang="pt-BR" sz="1600" dirty="0">
                 <a:solidFill>
                   <a:srgbClr val="000000"/>
                 </a:solidFill>
@@ -4685,16 +4041,16 @@
               <a:t> </a:t>
             </a:r>
             <a:r>
-              <a:rPr lang="pt-BR" sz="1400" b="1" dirty="0" err="1">
+              <a:rPr lang="pt-BR" sz="1600" b="1" dirty="0">
                 <a:solidFill>
                   <a:srgbClr val="7F0055"/>
                 </a:solidFill>
                 <a:latin typeface="Consolas" panose="020B0609020204030204" pitchFamily="49" charset="0"/>
               </a:rPr>
-              <a:t>void</a:t>
-            </a:r>
-            <a:r>
-              <a:rPr lang="pt-BR" sz="1400" dirty="0">
+              <a:t>double</a:t>
+            </a:r>
+            <a:r>
+              <a:rPr lang="pt-BR" sz="1600" dirty="0">
                 <a:solidFill>
                   <a:srgbClr val="000000"/>
                 </a:solidFill>
@@ -4703,26 +4059,26 @@
               <a:t> </a:t>
             </a:r>
             <a:r>
-              <a:rPr lang="pt-BR" sz="1400" dirty="0" err="1">
-                <a:solidFill>
-                  <a:srgbClr val="000000"/>
-                </a:solidFill>
-                <a:latin typeface="Consolas" panose="020B0609020204030204" pitchFamily="49" charset="0"/>
-              </a:rPr>
-              <a:t>emitirSom</a:t>
-            </a:r>
-            <a:r>
-              <a:rPr lang="pt-BR" sz="1400" dirty="0">
-                <a:solidFill>
-                  <a:srgbClr val="000000"/>
-                </a:solidFill>
-                <a:latin typeface="Consolas" panose="020B0609020204030204" pitchFamily="49" charset="0"/>
-              </a:rPr>
-              <a:t>() {</a:t>
-            </a:r>
-          </a:p>
-          <a:p>
-            <a:pPr indent="914400">
+              <a:rPr lang="pt-BR" sz="1600" dirty="0" err="1">
+                <a:solidFill>
+                  <a:srgbClr val="0000C0"/>
+                </a:solidFill>
+                <a:latin typeface="Consolas" panose="020B0609020204030204" pitchFamily="49" charset="0"/>
+              </a:rPr>
+              <a:t>adicionalGerencia</a:t>
+            </a:r>
+            <a:r>
+              <a:rPr lang="pt-BR" sz="1600" dirty="0">
+                <a:solidFill>
+                  <a:srgbClr val="000000"/>
+                </a:solidFill>
+                <a:latin typeface="Consolas" panose="020B0609020204030204" pitchFamily="49" charset="0"/>
+              </a:rPr>
+              <a:t>;</a:t>
+            </a:r>
+          </a:p>
+          <a:p>
+            <a:pPr lvl="1">
               <a:spcBef>
                 <a:spcPts val="150"/>
               </a:spcBef>
@@ -4730,63 +4086,15 @@
                 <a:spcPts val="150"/>
               </a:spcAft>
             </a:pPr>
-            <a:r>
-              <a:rPr lang="pt-BR" sz="1400" dirty="0" err="1">
-                <a:solidFill>
-                  <a:srgbClr val="000000"/>
-                </a:solidFill>
-                <a:latin typeface="Consolas" panose="020B0609020204030204" pitchFamily="49" charset="0"/>
-              </a:rPr>
-              <a:t>System.</a:t>
-            </a:r>
-            <a:r>
-              <a:rPr lang="pt-BR" sz="1400" b="1" i="1" dirty="0" err="1">
-                <a:solidFill>
-                  <a:srgbClr val="0000C0"/>
-                </a:solidFill>
-                <a:latin typeface="Consolas" panose="020B0609020204030204" pitchFamily="49" charset="0"/>
-              </a:rPr>
-              <a:t>out</a:t>
-            </a:r>
-            <a:r>
-              <a:rPr lang="pt-BR" sz="1400" dirty="0" err="1">
-                <a:solidFill>
-                  <a:srgbClr val="000000"/>
-                </a:solidFill>
-                <a:latin typeface="Consolas" panose="020B0609020204030204" pitchFamily="49" charset="0"/>
-              </a:rPr>
-              <a:t>.println</a:t>
-            </a:r>
-            <a:r>
-              <a:rPr lang="pt-BR" sz="1400" dirty="0">
-                <a:solidFill>
-                  <a:srgbClr val="000000"/>
-                </a:solidFill>
-                <a:latin typeface="Consolas" panose="020B0609020204030204" pitchFamily="49" charset="0"/>
-              </a:rPr>
-              <a:t>(</a:t>
-            </a:r>
-            <a:r>
-              <a:rPr lang="pt-BR" sz="1400" dirty="0">
-                <a:solidFill>
-                  <a:srgbClr val="2A00FF"/>
-                </a:solidFill>
-                <a:latin typeface="Consolas" panose="020B0609020204030204" pitchFamily="49" charset="0"/>
-              </a:rPr>
-              <a:t>"Animal faz som"</a:t>
-            </a:r>
-            <a:r>
-              <a:rPr lang="pt-BR" sz="1400" dirty="0">
-                <a:solidFill>
-                  <a:srgbClr val="000000"/>
-                </a:solidFill>
-                <a:latin typeface="Consolas" panose="020B0609020204030204" pitchFamily="49" charset="0"/>
-              </a:rPr>
-              <a:t>);</a:t>
-            </a:r>
-          </a:p>
-          <a:p>
-            <a:pPr indent="457200">
+            <a:endParaRPr lang="pt-BR" sz="1600" b="1" dirty="0">
+              <a:solidFill>
+                <a:srgbClr val="7F0055"/>
+              </a:solidFill>
+              <a:latin typeface="Consolas" panose="020B0609020204030204" pitchFamily="49" charset="0"/>
+            </a:endParaRPr>
+          </a:p>
+          <a:p>
+            <a:pPr lvl="1">
               <a:spcBef>
                 <a:spcPts val="150"/>
               </a:spcBef>
@@ -4795,7 +4103,253 @@
               </a:spcAft>
             </a:pPr>
             <a:r>
-              <a:rPr lang="pt-BR" sz="1400" dirty="0">
+              <a:rPr lang="pt-BR" sz="1600" b="1" dirty="0" err="1">
+                <a:solidFill>
+                  <a:srgbClr val="7F0055"/>
+                </a:solidFill>
+                <a:latin typeface="Consolas" panose="020B0609020204030204" pitchFamily="49" charset="0"/>
+              </a:rPr>
+              <a:t>public</a:t>
+            </a:r>
+            <a:r>
+              <a:rPr lang="pt-BR" sz="1600" dirty="0">
+                <a:solidFill>
+                  <a:srgbClr val="000000"/>
+                </a:solidFill>
+                <a:latin typeface="Consolas" panose="020B0609020204030204" pitchFamily="49" charset="0"/>
+              </a:rPr>
+              <a:t> Gerente(String </a:t>
+            </a:r>
+            <a:r>
+              <a:rPr lang="pt-BR" sz="1600" dirty="0">
+                <a:solidFill>
+                  <a:srgbClr val="6A3E3E"/>
+                </a:solidFill>
+                <a:latin typeface="Consolas" panose="020B0609020204030204" pitchFamily="49" charset="0"/>
+              </a:rPr>
+              <a:t>nome</a:t>
+            </a:r>
+            <a:r>
+              <a:rPr lang="pt-BR" sz="1600" dirty="0">
+                <a:solidFill>
+                  <a:srgbClr val="000000"/>
+                </a:solidFill>
+                <a:latin typeface="Consolas" panose="020B0609020204030204" pitchFamily="49" charset="0"/>
+              </a:rPr>
+              <a:t>, </a:t>
+            </a:r>
+            <a:r>
+              <a:rPr lang="pt-BR" sz="1600" b="1" dirty="0">
+                <a:solidFill>
+                  <a:srgbClr val="7F0055"/>
+                </a:solidFill>
+                <a:latin typeface="Consolas" panose="020B0609020204030204" pitchFamily="49" charset="0"/>
+              </a:rPr>
+              <a:t>double</a:t>
+            </a:r>
+            <a:r>
+              <a:rPr lang="pt-BR" sz="1600" dirty="0">
+                <a:solidFill>
+                  <a:srgbClr val="000000"/>
+                </a:solidFill>
+                <a:latin typeface="Consolas" panose="020B0609020204030204" pitchFamily="49" charset="0"/>
+              </a:rPr>
+              <a:t> </a:t>
+            </a:r>
+            <a:r>
+              <a:rPr lang="pt-BR" sz="1600" dirty="0">
+                <a:solidFill>
+                  <a:srgbClr val="6A3E3E"/>
+                </a:solidFill>
+                <a:latin typeface="Consolas" panose="020B0609020204030204" pitchFamily="49" charset="0"/>
+              </a:rPr>
+              <a:t>salario</a:t>
+            </a:r>
+            <a:r>
+              <a:rPr lang="pt-BR" sz="1600" dirty="0">
+                <a:solidFill>
+                  <a:srgbClr val="000000"/>
+                </a:solidFill>
+                <a:latin typeface="Consolas" panose="020B0609020204030204" pitchFamily="49" charset="0"/>
+              </a:rPr>
+              <a:t>, </a:t>
+            </a:r>
+            <a:r>
+              <a:rPr lang="pt-BR" sz="1600" b="1" dirty="0">
+                <a:solidFill>
+                  <a:srgbClr val="7F0055"/>
+                </a:solidFill>
+                <a:latin typeface="Consolas" panose="020B0609020204030204" pitchFamily="49" charset="0"/>
+              </a:rPr>
+              <a:t>double</a:t>
+            </a:r>
+            <a:r>
+              <a:rPr lang="pt-BR" sz="1600" dirty="0">
+                <a:solidFill>
+                  <a:srgbClr val="000000"/>
+                </a:solidFill>
+                <a:latin typeface="Consolas" panose="020B0609020204030204" pitchFamily="49" charset="0"/>
+              </a:rPr>
+              <a:t> </a:t>
+            </a:r>
+            <a:r>
+              <a:rPr lang="pt-BR" sz="1600" dirty="0" err="1">
+                <a:solidFill>
+                  <a:srgbClr val="6A3E3E"/>
+                </a:solidFill>
+                <a:latin typeface="Consolas" panose="020B0609020204030204" pitchFamily="49" charset="0"/>
+              </a:rPr>
+              <a:t>adicionalGerencia</a:t>
+            </a:r>
+            <a:r>
+              <a:rPr lang="pt-BR" sz="1600" dirty="0">
+                <a:solidFill>
+                  <a:srgbClr val="000000"/>
+                </a:solidFill>
+                <a:latin typeface="Consolas" panose="020B0609020204030204" pitchFamily="49" charset="0"/>
+              </a:rPr>
+              <a:t>) {</a:t>
+            </a:r>
+          </a:p>
+          <a:p>
+            <a:pPr lvl="2">
+              <a:spcBef>
+                <a:spcPts val="150"/>
+              </a:spcBef>
+              <a:spcAft>
+                <a:spcPts val="150"/>
+              </a:spcAft>
+            </a:pPr>
+            <a:r>
+              <a:rPr lang="pt-BR" sz="1600" b="1" dirty="0" err="1">
+                <a:solidFill>
+                  <a:srgbClr val="7F0055"/>
+                </a:solidFill>
+                <a:latin typeface="Consolas" panose="020B0609020204030204" pitchFamily="49" charset="0"/>
+              </a:rPr>
+              <a:t>super</a:t>
+            </a:r>
+            <a:r>
+              <a:rPr lang="pt-BR" sz="1600" dirty="0">
+                <a:solidFill>
+                  <a:srgbClr val="000000"/>
+                </a:solidFill>
+                <a:latin typeface="Consolas" panose="020B0609020204030204" pitchFamily="49" charset="0"/>
+              </a:rPr>
+              <a:t>(</a:t>
+            </a:r>
+            <a:r>
+              <a:rPr lang="pt-BR" sz="1600" dirty="0">
+                <a:solidFill>
+                  <a:srgbClr val="6A3E3E"/>
+                </a:solidFill>
+                <a:latin typeface="Consolas" panose="020B0609020204030204" pitchFamily="49" charset="0"/>
+              </a:rPr>
+              <a:t>nome</a:t>
+            </a:r>
+            <a:r>
+              <a:rPr lang="pt-BR" sz="1600" dirty="0">
+                <a:solidFill>
+                  <a:srgbClr val="000000"/>
+                </a:solidFill>
+                <a:latin typeface="Consolas" panose="020B0609020204030204" pitchFamily="49" charset="0"/>
+              </a:rPr>
+              <a:t>, </a:t>
+            </a:r>
+            <a:r>
+              <a:rPr lang="pt-BR" sz="1600" dirty="0">
+                <a:solidFill>
+                  <a:srgbClr val="6A3E3E"/>
+                </a:solidFill>
+                <a:latin typeface="Consolas" panose="020B0609020204030204" pitchFamily="49" charset="0"/>
+              </a:rPr>
+              <a:t>salario</a:t>
+            </a:r>
+            <a:r>
+              <a:rPr lang="pt-BR" sz="1600" dirty="0">
+                <a:solidFill>
+                  <a:srgbClr val="000000"/>
+                </a:solidFill>
+                <a:latin typeface="Consolas" panose="020B0609020204030204" pitchFamily="49" charset="0"/>
+              </a:rPr>
+              <a:t>);</a:t>
+            </a:r>
+          </a:p>
+          <a:p>
+            <a:pPr lvl="2">
+              <a:spcBef>
+                <a:spcPts val="150"/>
+              </a:spcBef>
+              <a:spcAft>
+                <a:spcPts val="150"/>
+              </a:spcAft>
+            </a:pPr>
+            <a:r>
+              <a:rPr lang="pt-BR" sz="1600" b="1" dirty="0" err="1">
+                <a:solidFill>
+                  <a:srgbClr val="7F0055"/>
+                </a:solidFill>
+                <a:latin typeface="Consolas" panose="020B0609020204030204" pitchFamily="49" charset="0"/>
+              </a:rPr>
+              <a:t>this</a:t>
+            </a:r>
+            <a:r>
+              <a:rPr lang="pt-BR" sz="1600" dirty="0" err="1">
+                <a:solidFill>
+                  <a:srgbClr val="000000"/>
+                </a:solidFill>
+                <a:latin typeface="Consolas" panose="020B0609020204030204" pitchFamily="49" charset="0"/>
+              </a:rPr>
+              <a:t>.</a:t>
+            </a:r>
+            <a:r>
+              <a:rPr lang="pt-BR" sz="1600" dirty="0" err="1">
+                <a:solidFill>
+                  <a:srgbClr val="0000C0"/>
+                </a:solidFill>
+                <a:latin typeface="Consolas" panose="020B0609020204030204" pitchFamily="49" charset="0"/>
+              </a:rPr>
+              <a:t>adicionalGerencia</a:t>
+            </a:r>
+            <a:r>
+              <a:rPr lang="pt-BR" sz="1600" dirty="0">
+                <a:solidFill>
+                  <a:srgbClr val="000000"/>
+                </a:solidFill>
+                <a:latin typeface="Consolas" panose="020B0609020204030204" pitchFamily="49" charset="0"/>
+              </a:rPr>
+              <a:t> = </a:t>
+            </a:r>
+            <a:r>
+              <a:rPr lang="pt-BR" sz="1600" dirty="0" err="1">
+                <a:solidFill>
+                  <a:srgbClr val="6A3E3E"/>
+                </a:solidFill>
+                <a:latin typeface="Consolas" panose="020B0609020204030204" pitchFamily="49" charset="0"/>
+              </a:rPr>
+              <a:t>adicionalGerencia</a:t>
+            </a:r>
+            <a:r>
+              <a:rPr lang="pt-BR" sz="1600" dirty="0">
+                <a:solidFill>
+                  <a:srgbClr val="000000"/>
+                </a:solidFill>
+                <a:latin typeface="Consolas" panose="020B0609020204030204" pitchFamily="49" charset="0"/>
+              </a:rPr>
+              <a:t>;</a:t>
+            </a:r>
+          </a:p>
+          <a:p>
+            <a:pPr lvl="1">
+              <a:spcBef>
+                <a:spcPts val="150"/>
+              </a:spcBef>
+              <a:spcAft>
+                <a:spcPts val="150"/>
+              </a:spcAft>
+            </a:pPr>
+            <a:r>
+              <a:rPr lang="pt-BR" sz="1600" dirty="0">
                 <a:solidFill>
                   <a:srgbClr val="000000"/>
                 </a:solidFill>
@@ -4814,314 +4368,13 @@
               </a:spcAft>
             </a:pPr>
             <a:r>
-              <a:rPr lang="pt-BR" sz="1400" dirty="0">
+              <a:rPr lang="pt-BR" sz="1600" dirty="0">
                 <a:solidFill>
                   <a:srgbClr val="000000"/>
                 </a:solidFill>
                 <a:latin typeface="Consolas" panose="020B0609020204030204" pitchFamily="49" charset="0"/>
               </a:rPr>
               <a:t>}</a:t>
-            </a:r>
-          </a:p>
-          <a:p>
-            <a:pPr>
-              <a:spcBef>
-                <a:spcPts val="150"/>
-              </a:spcBef>
-              <a:spcAft>
-                <a:spcPts val="150"/>
-              </a:spcAft>
-            </a:pPr>
-            <a:endParaRPr lang="pt-BR" sz="1400" dirty="0">
-              <a:solidFill>
-                <a:srgbClr val="000000"/>
-              </a:solidFill>
-              <a:latin typeface="Consolas" panose="020B0609020204030204" pitchFamily="49" charset="0"/>
-            </a:endParaRPr>
-          </a:p>
-          <a:p>
-            <a:pPr>
-              <a:spcBef>
-                <a:spcPts val="150"/>
-              </a:spcBef>
-              <a:spcAft>
-                <a:spcPts val="150"/>
-              </a:spcAft>
-            </a:pPr>
-            <a:r>
-              <a:rPr lang="pt-BR" sz="1400" b="1" dirty="0" err="1">
-                <a:solidFill>
-                  <a:srgbClr val="7F0055"/>
-                </a:solidFill>
-                <a:latin typeface="Consolas" panose="020B0609020204030204" pitchFamily="49" charset="0"/>
-              </a:rPr>
-              <a:t>class</a:t>
-            </a:r>
-            <a:r>
-              <a:rPr lang="pt-BR" sz="1400" dirty="0">
-                <a:solidFill>
-                  <a:srgbClr val="000000"/>
-                </a:solidFill>
-                <a:latin typeface="Consolas" panose="020B0609020204030204" pitchFamily="49" charset="0"/>
-              </a:rPr>
-              <a:t> Gato </a:t>
-            </a:r>
-            <a:r>
-              <a:rPr lang="pt-BR" sz="1400" b="1" dirty="0" err="1">
-                <a:solidFill>
-                  <a:srgbClr val="7F0055"/>
-                </a:solidFill>
-                <a:latin typeface="Consolas" panose="020B0609020204030204" pitchFamily="49" charset="0"/>
-              </a:rPr>
-              <a:t>extends</a:t>
-            </a:r>
-            <a:r>
-              <a:rPr lang="pt-BR" sz="1400" dirty="0">
-                <a:solidFill>
-                  <a:srgbClr val="000000"/>
-                </a:solidFill>
-                <a:latin typeface="Consolas" panose="020B0609020204030204" pitchFamily="49" charset="0"/>
-              </a:rPr>
-              <a:t> Animal {</a:t>
-            </a:r>
-          </a:p>
-          <a:p>
-            <a:pPr indent="457200">
-              <a:spcBef>
-                <a:spcPts val="150"/>
-              </a:spcBef>
-              <a:spcAft>
-                <a:spcPts val="150"/>
-              </a:spcAft>
-            </a:pPr>
-            <a:r>
-              <a:rPr lang="pt-BR" sz="1400" dirty="0">
-                <a:solidFill>
-                  <a:srgbClr val="646464"/>
-                </a:solidFill>
-                <a:latin typeface="Consolas" panose="020B0609020204030204" pitchFamily="49" charset="0"/>
-              </a:rPr>
-              <a:t>@</a:t>
-            </a:r>
-            <a:r>
-              <a:rPr lang="pt-BR" sz="1400" dirty="0" err="1">
-                <a:solidFill>
-                  <a:srgbClr val="646464"/>
-                </a:solidFill>
-                <a:latin typeface="Consolas" panose="020B0609020204030204" pitchFamily="49" charset="0"/>
-              </a:rPr>
-              <a:t>Override</a:t>
-            </a:r>
-            <a:endParaRPr lang="pt-BR" sz="1400" dirty="0">
-              <a:solidFill>
-                <a:srgbClr val="000000"/>
-              </a:solidFill>
-              <a:latin typeface="Consolas" panose="020B0609020204030204" pitchFamily="49" charset="0"/>
-            </a:endParaRPr>
-          </a:p>
-          <a:p>
-            <a:pPr indent="457200">
-              <a:spcBef>
-                <a:spcPts val="150"/>
-              </a:spcBef>
-              <a:spcAft>
-                <a:spcPts val="150"/>
-              </a:spcAft>
-            </a:pPr>
-            <a:r>
-              <a:rPr lang="pt-BR" sz="1400" b="1" dirty="0" err="1">
-                <a:solidFill>
-                  <a:srgbClr val="7F0055"/>
-                </a:solidFill>
-                <a:latin typeface="Consolas" panose="020B0609020204030204" pitchFamily="49" charset="0"/>
-              </a:rPr>
-              <a:t>public</a:t>
-            </a:r>
-            <a:r>
-              <a:rPr lang="pt-BR" sz="1400" dirty="0">
-                <a:solidFill>
-                  <a:srgbClr val="000000"/>
-                </a:solidFill>
-                <a:latin typeface="Consolas" panose="020B0609020204030204" pitchFamily="49" charset="0"/>
-              </a:rPr>
-              <a:t> </a:t>
-            </a:r>
-            <a:r>
-              <a:rPr lang="pt-BR" sz="1400" b="1" dirty="0" err="1">
-                <a:solidFill>
-                  <a:srgbClr val="7F0055"/>
-                </a:solidFill>
-                <a:latin typeface="Consolas" panose="020B0609020204030204" pitchFamily="49" charset="0"/>
-              </a:rPr>
-              <a:t>void</a:t>
-            </a:r>
-            <a:r>
-              <a:rPr lang="pt-BR" sz="1400" dirty="0">
-                <a:solidFill>
-                  <a:srgbClr val="000000"/>
-                </a:solidFill>
-                <a:latin typeface="Consolas" panose="020B0609020204030204" pitchFamily="49" charset="0"/>
-              </a:rPr>
-              <a:t> </a:t>
-            </a:r>
-            <a:r>
-              <a:rPr lang="pt-BR" sz="1400" dirty="0" err="1">
-                <a:solidFill>
-                  <a:srgbClr val="000000"/>
-                </a:solidFill>
-                <a:latin typeface="Consolas" panose="020B0609020204030204" pitchFamily="49" charset="0"/>
-              </a:rPr>
-              <a:t>emitirSom</a:t>
-            </a:r>
-            <a:r>
-              <a:rPr lang="pt-BR" sz="1400" dirty="0">
-                <a:solidFill>
-                  <a:srgbClr val="000000"/>
-                </a:solidFill>
-                <a:latin typeface="Consolas" panose="020B0609020204030204" pitchFamily="49" charset="0"/>
-              </a:rPr>
-              <a:t>() {</a:t>
-            </a:r>
-          </a:p>
-          <a:p>
-            <a:pPr indent="914400">
-              <a:spcBef>
-                <a:spcPts val="150"/>
-              </a:spcBef>
-              <a:spcAft>
-                <a:spcPts val="150"/>
-              </a:spcAft>
-            </a:pPr>
-            <a:r>
-              <a:rPr lang="pt-BR" sz="1400" dirty="0" err="1">
-                <a:solidFill>
-                  <a:srgbClr val="000000"/>
-                </a:solidFill>
-                <a:latin typeface="Consolas" panose="020B0609020204030204" pitchFamily="49" charset="0"/>
-              </a:rPr>
-              <a:t>System.</a:t>
-            </a:r>
-            <a:r>
-              <a:rPr lang="pt-BR" sz="1400" b="1" i="1" dirty="0" err="1">
-                <a:solidFill>
-                  <a:srgbClr val="0000C0"/>
-                </a:solidFill>
-                <a:latin typeface="Consolas" panose="020B0609020204030204" pitchFamily="49" charset="0"/>
-              </a:rPr>
-              <a:t>out</a:t>
-            </a:r>
-            <a:r>
-              <a:rPr lang="pt-BR" sz="1400" dirty="0" err="1">
-                <a:solidFill>
-                  <a:srgbClr val="000000"/>
-                </a:solidFill>
-                <a:latin typeface="Consolas" panose="020B0609020204030204" pitchFamily="49" charset="0"/>
-              </a:rPr>
-              <a:t>.println</a:t>
-            </a:r>
-            <a:r>
-              <a:rPr lang="pt-BR" sz="1400" dirty="0">
-                <a:solidFill>
-                  <a:srgbClr val="000000"/>
-                </a:solidFill>
-                <a:latin typeface="Consolas" panose="020B0609020204030204" pitchFamily="49" charset="0"/>
-              </a:rPr>
-              <a:t>(</a:t>
-            </a:r>
-            <a:r>
-              <a:rPr lang="pt-BR" sz="1400" dirty="0">
-                <a:solidFill>
-                  <a:srgbClr val="2A00FF"/>
-                </a:solidFill>
-                <a:latin typeface="Consolas" panose="020B0609020204030204" pitchFamily="49" charset="0"/>
-              </a:rPr>
-              <a:t>"Gato mia"</a:t>
-            </a:r>
-            <a:r>
-              <a:rPr lang="pt-BR" sz="1400" dirty="0">
-                <a:solidFill>
-                  <a:srgbClr val="000000"/>
-                </a:solidFill>
-                <a:latin typeface="Consolas" panose="020B0609020204030204" pitchFamily="49" charset="0"/>
-              </a:rPr>
-              <a:t>);</a:t>
-            </a:r>
-          </a:p>
-          <a:p>
-            <a:pPr indent="457200">
-              <a:spcBef>
-                <a:spcPts val="150"/>
-              </a:spcBef>
-              <a:spcAft>
-                <a:spcPts val="150"/>
-              </a:spcAft>
-            </a:pPr>
-            <a:r>
-              <a:rPr lang="pt-BR" sz="1400" dirty="0">
-                <a:solidFill>
-                  <a:srgbClr val="000000"/>
-                </a:solidFill>
-                <a:latin typeface="Consolas" panose="020B0609020204030204" pitchFamily="49" charset="0"/>
-              </a:rPr>
-              <a:t>}</a:t>
-            </a:r>
-          </a:p>
-          <a:p>
-            <a:pPr>
-              <a:spcBef>
-                <a:spcPts val="150"/>
-              </a:spcBef>
-              <a:spcAft>
-                <a:spcPts val="150"/>
-              </a:spcAft>
-            </a:pPr>
-            <a:r>
-              <a:rPr lang="pt-BR" sz="1400" dirty="0">
-                <a:solidFill>
-                  <a:srgbClr val="000000"/>
-                </a:solidFill>
-                <a:latin typeface="Consolas" panose="020B0609020204030204" pitchFamily="49" charset="0"/>
-              </a:rPr>
-              <a:t>}</a:t>
-            </a:r>
-          </a:p>
-        </p:txBody>
-      </p:sp>
-      <p:sp>
-        <p:nvSpPr>
-          <p:cNvPr id="7" name="CaixaDeTexto 6">
-            <a:extLst>
-              <a:ext uri="{FF2B5EF4-FFF2-40B4-BE49-F238E27FC236}">
-                <a16:creationId xmlns:a16="http://schemas.microsoft.com/office/drawing/2014/main" id="{EB5AEC25-BA37-441D-87EC-8DE38AED57BF}"/>
-              </a:ext>
-            </a:extLst>
-          </p:cNvPr>
-          <p:cNvSpPr txBox="1"/>
-          <p:nvPr/>
-        </p:nvSpPr>
-        <p:spPr>
-          <a:xfrm>
-            <a:off x="7567788" y="2514600"/>
-            <a:ext cx="2607734" cy="369332"/>
-          </a:xfrm>
-          <a:prstGeom prst="rect">
-            <a:avLst/>
-          </a:prstGeom>
-          <a:noFill/>
-        </p:spPr>
-        <p:txBody>
-          <a:bodyPr wrap="square" rtlCol="0">
-            <a:spAutoFit/>
-          </a:bodyPr>
-          <a:lstStyle/>
-          <a:p>
-            <a:pPr algn="ctr"/>
-            <a:r>
-              <a:rPr lang="pt-BR" dirty="0">
-                <a:latin typeface="Times New Roman" panose="02020603050405020304" pitchFamily="18" charset="0"/>
-                <a:cs typeface="Times New Roman" panose="02020603050405020304" pitchFamily="18" charset="0"/>
-              </a:rPr>
-              <a:t>Sobrescrita</a:t>
             </a:r>
           </a:p>
         </p:txBody>
@@ -5129,7 +4382,7 @@
     </p:spTree>
     <p:extLst>
       <p:ext uri="{BB962C8B-B14F-4D97-AF65-F5344CB8AC3E}">
-        <p14:creationId xmlns:p14="http://schemas.microsoft.com/office/powerpoint/2010/main" val="2967410373"/>
+        <p14:creationId xmlns:p14="http://schemas.microsoft.com/office/powerpoint/2010/main" val="13419183"/>
       </p:ext>
     </p:extLst>
   </p:cSld>
@@ -5161,6 +4414,2119 @@
           <p:cNvPr id="2" name="Título 1">
             <a:extLst>
               <a:ext uri="{FF2B5EF4-FFF2-40B4-BE49-F238E27FC236}">
+                <a16:creationId xmlns:a16="http://schemas.microsoft.com/office/drawing/2014/main" id="{13BF5B45-63CF-41F7-8496-D896490AE335}"/>
+              </a:ext>
+            </a:extLst>
+          </p:cNvPr>
+          <p:cNvSpPr>
+            <a:spLocks noGrp="1"/>
+          </p:cNvSpPr>
+          <p:nvPr>
+            <p:ph type="title"/>
+          </p:nvPr>
+        </p:nvSpPr>
+        <p:spPr/>
+        <p:txBody>
+          <a:bodyPr/>
+          <a:lstStyle/>
+          <a:p>
+            <a:r>
+              <a:rPr lang="pt-BR" dirty="0"/>
+              <a:t>Construtor </a:t>
+            </a:r>
+            <a:r>
+              <a:rPr lang="pt-BR" dirty="0" err="1"/>
+              <a:t>Super</a:t>
+            </a:r>
+            <a:r>
+              <a:rPr lang="pt-BR" dirty="0"/>
+              <a:t>()</a:t>
+            </a:r>
+          </a:p>
+        </p:txBody>
+      </p:sp>
+      <p:sp>
+        <p:nvSpPr>
+          <p:cNvPr id="3" name="Espaço Reservado para Conteúdo 2">
+            <a:extLst>
+              <a:ext uri="{FF2B5EF4-FFF2-40B4-BE49-F238E27FC236}">
+                <a16:creationId xmlns:a16="http://schemas.microsoft.com/office/drawing/2014/main" id="{05C539C4-EDD4-414C-ADA6-9C2633603CB2}"/>
+              </a:ext>
+            </a:extLst>
+          </p:cNvPr>
+          <p:cNvSpPr>
+            <a:spLocks noGrp="1"/>
+          </p:cNvSpPr>
+          <p:nvPr>
+            <p:ph idx="1"/>
+          </p:nvPr>
+        </p:nvSpPr>
+        <p:spPr>
+          <a:xfrm>
+            <a:off x="592347" y="1844675"/>
+            <a:ext cx="11007306" cy="1473291"/>
+          </a:xfrm>
+        </p:spPr>
+        <p:txBody>
+          <a:bodyPr/>
+          <a:lstStyle/>
+          <a:p>
+            <a:r>
+              <a:rPr lang="pt-BR" sz="1800" dirty="0"/>
+              <a:t>A palavra-chave </a:t>
+            </a:r>
+            <a:r>
+              <a:rPr lang="pt-BR" sz="1800" dirty="0" err="1"/>
+              <a:t>super</a:t>
+            </a:r>
+            <a:r>
+              <a:rPr lang="pt-BR" sz="1800" dirty="0"/>
+              <a:t> é utilizada para se referir à superclasse (classe pai) de uma classe derivada (classe filha). Ela é especialmente útil quando há a necessidade de reutilizar atributos ou métodos da classe pai, evitando a repetição de código.</a:t>
+            </a:r>
+          </a:p>
+        </p:txBody>
+      </p:sp>
+      <p:sp>
+        <p:nvSpPr>
+          <p:cNvPr id="7" name="CaixaDeTexto 6">
+            <a:extLst>
+              <a:ext uri="{FF2B5EF4-FFF2-40B4-BE49-F238E27FC236}">
+                <a16:creationId xmlns:a16="http://schemas.microsoft.com/office/drawing/2014/main" id="{15C42C8B-8DB6-4C73-97AE-4AF8FC519272}"/>
+              </a:ext>
+            </a:extLst>
+          </p:cNvPr>
+          <p:cNvSpPr txBox="1"/>
+          <p:nvPr/>
+        </p:nvSpPr>
+        <p:spPr>
+          <a:xfrm>
+            <a:off x="5503559" y="3520485"/>
+            <a:ext cx="1184883" cy="338554"/>
+          </a:xfrm>
+          <a:prstGeom prst="rect">
+            <a:avLst/>
+          </a:prstGeom>
+          <a:noFill/>
+        </p:spPr>
+        <p:txBody>
+          <a:bodyPr wrap="square" rtlCol="0">
+            <a:spAutoFit/>
+          </a:bodyPr>
+          <a:lstStyle/>
+          <a:p>
+            <a:pPr algn="ctr"/>
+            <a:r>
+              <a:rPr lang="pt-BR" sz="1600" dirty="0">
+                <a:latin typeface="Times New Roman" panose="02020603050405020304" pitchFamily="18" charset="0"/>
+                <a:cs typeface="Times New Roman" panose="02020603050405020304" pitchFamily="18" charset="0"/>
+              </a:rPr>
+              <a:t>Classe Filha</a:t>
+            </a:r>
+          </a:p>
+        </p:txBody>
+      </p:sp>
+      <p:sp>
+        <p:nvSpPr>
+          <p:cNvPr id="4" name="Retângulo 3">
+            <a:extLst>
+              <a:ext uri="{FF2B5EF4-FFF2-40B4-BE49-F238E27FC236}">
+                <a16:creationId xmlns:a16="http://schemas.microsoft.com/office/drawing/2014/main" id="{FFAD0326-5AFB-4F87-8E1F-8F1446812B25}"/>
+              </a:ext>
+            </a:extLst>
+          </p:cNvPr>
+          <p:cNvSpPr/>
+          <p:nvPr/>
+        </p:nvSpPr>
+        <p:spPr>
+          <a:xfrm>
+            <a:off x="1698171" y="4061558"/>
+            <a:ext cx="8795657" cy="2421176"/>
+          </a:xfrm>
+          <a:prstGeom prst="rect">
+            <a:avLst/>
+          </a:prstGeom>
+        </p:spPr>
+        <p:txBody>
+          <a:bodyPr wrap="square">
+            <a:spAutoFit/>
+          </a:bodyPr>
+          <a:lstStyle/>
+          <a:p>
+            <a:pPr>
+              <a:spcBef>
+                <a:spcPts val="150"/>
+              </a:spcBef>
+              <a:spcAft>
+                <a:spcPts val="150"/>
+              </a:spcAft>
+            </a:pPr>
+            <a:r>
+              <a:rPr lang="pt-BR" sz="1600" b="1" dirty="0" err="1">
+                <a:solidFill>
+                  <a:srgbClr val="7F0055"/>
+                </a:solidFill>
+                <a:latin typeface="Consolas" panose="020B0609020204030204" pitchFamily="49" charset="0"/>
+              </a:rPr>
+              <a:t>public</a:t>
+            </a:r>
+            <a:r>
+              <a:rPr lang="pt-BR" sz="1600" dirty="0">
+                <a:solidFill>
+                  <a:srgbClr val="000000"/>
+                </a:solidFill>
+                <a:latin typeface="Consolas" panose="020B0609020204030204" pitchFamily="49" charset="0"/>
+              </a:rPr>
+              <a:t> </a:t>
+            </a:r>
+            <a:r>
+              <a:rPr lang="pt-BR" sz="1600" b="1" dirty="0" err="1">
+                <a:solidFill>
+                  <a:srgbClr val="7F0055"/>
+                </a:solidFill>
+                <a:latin typeface="Consolas" panose="020B0609020204030204" pitchFamily="49" charset="0"/>
+              </a:rPr>
+              <a:t>class</a:t>
+            </a:r>
+            <a:r>
+              <a:rPr lang="pt-BR" sz="1600" dirty="0">
+                <a:solidFill>
+                  <a:srgbClr val="000000"/>
+                </a:solidFill>
+                <a:latin typeface="Consolas" panose="020B0609020204030204" pitchFamily="49" charset="0"/>
+              </a:rPr>
+              <a:t> Gerente </a:t>
+            </a:r>
+            <a:r>
+              <a:rPr lang="pt-BR" sz="1600" b="1" dirty="0" err="1">
+                <a:solidFill>
+                  <a:srgbClr val="7F0055"/>
+                </a:solidFill>
+                <a:latin typeface="Consolas" panose="020B0609020204030204" pitchFamily="49" charset="0"/>
+              </a:rPr>
+              <a:t>extends</a:t>
+            </a:r>
+            <a:r>
+              <a:rPr lang="pt-BR" sz="1600" dirty="0">
+                <a:solidFill>
+                  <a:srgbClr val="000000"/>
+                </a:solidFill>
+                <a:latin typeface="Consolas" panose="020B0609020204030204" pitchFamily="49" charset="0"/>
+              </a:rPr>
+              <a:t> </a:t>
+            </a:r>
+            <a:r>
+              <a:rPr lang="pt-BR" sz="1600" dirty="0" err="1">
+                <a:solidFill>
+                  <a:srgbClr val="000000"/>
+                </a:solidFill>
+                <a:latin typeface="Consolas" panose="020B0609020204030204" pitchFamily="49" charset="0"/>
+              </a:rPr>
+              <a:t>Funcionarios</a:t>
+            </a:r>
+            <a:r>
+              <a:rPr lang="pt-BR" sz="1600" dirty="0">
+                <a:solidFill>
+                  <a:srgbClr val="000000"/>
+                </a:solidFill>
+                <a:latin typeface="Consolas" panose="020B0609020204030204" pitchFamily="49" charset="0"/>
+              </a:rPr>
+              <a:t>{</a:t>
+            </a:r>
+          </a:p>
+          <a:p>
+            <a:pPr lvl="1">
+              <a:spcBef>
+                <a:spcPts val="150"/>
+              </a:spcBef>
+              <a:spcAft>
+                <a:spcPts val="150"/>
+              </a:spcAft>
+            </a:pPr>
+            <a:r>
+              <a:rPr lang="pt-BR" sz="1600" b="1" dirty="0" err="1">
+                <a:solidFill>
+                  <a:srgbClr val="7F0055"/>
+                </a:solidFill>
+                <a:latin typeface="Consolas" panose="020B0609020204030204" pitchFamily="49" charset="0"/>
+              </a:rPr>
+              <a:t>private</a:t>
+            </a:r>
+            <a:r>
+              <a:rPr lang="pt-BR" sz="1600" dirty="0">
+                <a:solidFill>
+                  <a:srgbClr val="000000"/>
+                </a:solidFill>
+                <a:latin typeface="Consolas" panose="020B0609020204030204" pitchFamily="49" charset="0"/>
+              </a:rPr>
+              <a:t> </a:t>
+            </a:r>
+            <a:r>
+              <a:rPr lang="pt-BR" sz="1600" b="1" dirty="0">
+                <a:solidFill>
+                  <a:srgbClr val="7F0055"/>
+                </a:solidFill>
+                <a:latin typeface="Consolas" panose="020B0609020204030204" pitchFamily="49" charset="0"/>
+              </a:rPr>
+              <a:t>double</a:t>
+            </a:r>
+            <a:r>
+              <a:rPr lang="pt-BR" sz="1600" dirty="0">
+                <a:solidFill>
+                  <a:srgbClr val="000000"/>
+                </a:solidFill>
+                <a:latin typeface="Consolas" panose="020B0609020204030204" pitchFamily="49" charset="0"/>
+              </a:rPr>
+              <a:t> </a:t>
+            </a:r>
+            <a:r>
+              <a:rPr lang="pt-BR" sz="1600" dirty="0" err="1">
+                <a:solidFill>
+                  <a:srgbClr val="0000C0"/>
+                </a:solidFill>
+                <a:latin typeface="Consolas" panose="020B0609020204030204" pitchFamily="49" charset="0"/>
+              </a:rPr>
+              <a:t>adicionalGerencia</a:t>
+            </a:r>
+            <a:r>
+              <a:rPr lang="pt-BR" sz="1600" dirty="0">
+                <a:solidFill>
+                  <a:srgbClr val="000000"/>
+                </a:solidFill>
+                <a:latin typeface="Consolas" panose="020B0609020204030204" pitchFamily="49" charset="0"/>
+              </a:rPr>
+              <a:t>;</a:t>
+            </a:r>
+          </a:p>
+          <a:p>
+            <a:pPr lvl="1">
+              <a:spcBef>
+                <a:spcPts val="150"/>
+              </a:spcBef>
+              <a:spcAft>
+                <a:spcPts val="150"/>
+              </a:spcAft>
+            </a:pPr>
+            <a:endParaRPr lang="pt-BR" sz="1600" b="1" dirty="0">
+              <a:solidFill>
+                <a:srgbClr val="7F0055"/>
+              </a:solidFill>
+              <a:latin typeface="Consolas" panose="020B0609020204030204" pitchFamily="49" charset="0"/>
+            </a:endParaRPr>
+          </a:p>
+          <a:p>
+            <a:pPr lvl="1">
+              <a:spcBef>
+                <a:spcPts val="150"/>
+              </a:spcBef>
+              <a:spcAft>
+                <a:spcPts val="150"/>
+              </a:spcAft>
+            </a:pPr>
+            <a:r>
+              <a:rPr lang="pt-BR" sz="1600" b="1" dirty="0" err="1">
+                <a:solidFill>
+                  <a:srgbClr val="7F0055"/>
+                </a:solidFill>
+                <a:latin typeface="Consolas" panose="020B0609020204030204" pitchFamily="49" charset="0"/>
+              </a:rPr>
+              <a:t>public</a:t>
+            </a:r>
+            <a:r>
+              <a:rPr lang="pt-BR" sz="1600" dirty="0">
+                <a:solidFill>
+                  <a:srgbClr val="000000"/>
+                </a:solidFill>
+                <a:latin typeface="Consolas" panose="020B0609020204030204" pitchFamily="49" charset="0"/>
+              </a:rPr>
+              <a:t> Gerente(String </a:t>
+            </a:r>
+            <a:r>
+              <a:rPr lang="pt-BR" sz="1600" dirty="0">
+                <a:solidFill>
+                  <a:srgbClr val="6A3E3E"/>
+                </a:solidFill>
+                <a:latin typeface="Consolas" panose="020B0609020204030204" pitchFamily="49" charset="0"/>
+              </a:rPr>
+              <a:t>nome</a:t>
+            </a:r>
+            <a:r>
+              <a:rPr lang="pt-BR" sz="1600" dirty="0">
+                <a:solidFill>
+                  <a:srgbClr val="000000"/>
+                </a:solidFill>
+                <a:latin typeface="Consolas" panose="020B0609020204030204" pitchFamily="49" charset="0"/>
+              </a:rPr>
+              <a:t>, </a:t>
+            </a:r>
+            <a:r>
+              <a:rPr lang="pt-BR" sz="1600" b="1" dirty="0">
+                <a:solidFill>
+                  <a:srgbClr val="7F0055"/>
+                </a:solidFill>
+                <a:latin typeface="Consolas" panose="020B0609020204030204" pitchFamily="49" charset="0"/>
+              </a:rPr>
+              <a:t>double</a:t>
+            </a:r>
+            <a:r>
+              <a:rPr lang="pt-BR" sz="1600" dirty="0">
+                <a:solidFill>
+                  <a:srgbClr val="000000"/>
+                </a:solidFill>
+                <a:latin typeface="Consolas" panose="020B0609020204030204" pitchFamily="49" charset="0"/>
+              </a:rPr>
+              <a:t> </a:t>
+            </a:r>
+            <a:r>
+              <a:rPr lang="pt-BR" sz="1600" dirty="0">
+                <a:solidFill>
+                  <a:srgbClr val="6A3E3E"/>
+                </a:solidFill>
+                <a:latin typeface="Consolas" panose="020B0609020204030204" pitchFamily="49" charset="0"/>
+              </a:rPr>
+              <a:t>salario</a:t>
+            </a:r>
+            <a:r>
+              <a:rPr lang="pt-BR" sz="1600" dirty="0">
+                <a:solidFill>
+                  <a:srgbClr val="000000"/>
+                </a:solidFill>
+                <a:latin typeface="Consolas" panose="020B0609020204030204" pitchFamily="49" charset="0"/>
+              </a:rPr>
+              <a:t>, </a:t>
+            </a:r>
+            <a:r>
+              <a:rPr lang="pt-BR" sz="1600" b="1" dirty="0">
+                <a:solidFill>
+                  <a:srgbClr val="7F0055"/>
+                </a:solidFill>
+                <a:latin typeface="Consolas" panose="020B0609020204030204" pitchFamily="49" charset="0"/>
+              </a:rPr>
+              <a:t>double</a:t>
+            </a:r>
+            <a:r>
+              <a:rPr lang="pt-BR" sz="1600" dirty="0">
+                <a:solidFill>
+                  <a:srgbClr val="000000"/>
+                </a:solidFill>
+                <a:latin typeface="Consolas" panose="020B0609020204030204" pitchFamily="49" charset="0"/>
+              </a:rPr>
+              <a:t> </a:t>
+            </a:r>
+            <a:r>
+              <a:rPr lang="pt-BR" sz="1600" dirty="0" err="1">
+                <a:solidFill>
+                  <a:srgbClr val="6A3E3E"/>
+                </a:solidFill>
+                <a:latin typeface="Consolas" panose="020B0609020204030204" pitchFamily="49" charset="0"/>
+              </a:rPr>
+              <a:t>adicionalGerencia</a:t>
+            </a:r>
+            <a:r>
+              <a:rPr lang="pt-BR" sz="1600" dirty="0">
+                <a:solidFill>
+                  <a:srgbClr val="000000"/>
+                </a:solidFill>
+                <a:latin typeface="Consolas" panose="020B0609020204030204" pitchFamily="49" charset="0"/>
+              </a:rPr>
+              <a:t>) {</a:t>
+            </a:r>
+          </a:p>
+          <a:p>
+            <a:pPr lvl="2">
+              <a:spcBef>
+                <a:spcPts val="150"/>
+              </a:spcBef>
+              <a:spcAft>
+                <a:spcPts val="150"/>
+              </a:spcAft>
+            </a:pPr>
+            <a:r>
+              <a:rPr lang="pt-BR" sz="1600" b="1" dirty="0" err="1">
+                <a:solidFill>
+                  <a:srgbClr val="7F0055"/>
+                </a:solidFill>
+                <a:latin typeface="Consolas" panose="020B0609020204030204" pitchFamily="49" charset="0"/>
+              </a:rPr>
+              <a:t>super</a:t>
+            </a:r>
+            <a:r>
+              <a:rPr lang="pt-BR" sz="1600" dirty="0">
+                <a:solidFill>
+                  <a:srgbClr val="000000"/>
+                </a:solidFill>
+                <a:latin typeface="Consolas" panose="020B0609020204030204" pitchFamily="49" charset="0"/>
+              </a:rPr>
+              <a:t>(</a:t>
+            </a:r>
+            <a:r>
+              <a:rPr lang="pt-BR" sz="1600" dirty="0">
+                <a:solidFill>
+                  <a:srgbClr val="6A3E3E"/>
+                </a:solidFill>
+                <a:latin typeface="Consolas" panose="020B0609020204030204" pitchFamily="49" charset="0"/>
+              </a:rPr>
+              <a:t>nome</a:t>
+            </a:r>
+            <a:r>
+              <a:rPr lang="pt-BR" sz="1600" dirty="0">
+                <a:solidFill>
+                  <a:srgbClr val="000000"/>
+                </a:solidFill>
+                <a:latin typeface="Consolas" panose="020B0609020204030204" pitchFamily="49" charset="0"/>
+              </a:rPr>
+              <a:t>, </a:t>
+            </a:r>
+            <a:r>
+              <a:rPr lang="pt-BR" sz="1600" dirty="0">
+                <a:solidFill>
+                  <a:srgbClr val="6A3E3E"/>
+                </a:solidFill>
+                <a:latin typeface="Consolas" panose="020B0609020204030204" pitchFamily="49" charset="0"/>
+              </a:rPr>
+              <a:t>salario</a:t>
+            </a:r>
+            <a:r>
+              <a:rPr lang="pt-BR" sz="1600" dirty="0">
+                <a:solidFill>
+                  <a:srgbClr val="000000"/>
+                </a:solidFill>
+                <a:latin typeface="Consolas" panose="020B0609020204030204" pitchFamily="49" charset="0"/>
+              </a:rPr>
+              <a:t>);</a:t>
+            </a:r>
+          </a:p>
+          <a:p>
+            <a:pPr lvl="2">
+              <a:spcBef>
+                <a:spcPts val="150"/>
+              </a:spcBef>
+              <a:spcAft>
+                <a:spcPts val="150"/>
+              </a:spcAft>
+            </a:pPr>
+            <a:r>
+              <a:rPr lang="pt-BR" sz="1600" b="1" dirty="0" err="1">
+                <a:solidFill>
+                  <a:srgbClr val="7F0055"/>
+                </a:solidFill>
+                <a:latin typeface="Consolas" panose="020B0609020204030204" pitchFamily="49" charset="0"/>
+              </a:rPr>
+              <a:t>this</a:t>
+            </a:r>
+            <a:r>
+              <a:rPr lang="pt-BR" sz="1600" dirty="0" err="1">
+                <a:solidFill>
+                  <a:srgbClr val="000000"/>
+                </a:solidFill>
+                <a:latin typeface="Consolas" panose="020B0609020204030204" pitchFamily="49" charset="0"/>
+              </a:rPr>
+              <a:t>.</a:t>
+            </a:r>
+            <a:r>
+              <a:rPr lang="pt-BR" sz="1600" dirty="0" err="1">
+                <a:solidFill>
+                  <a:srgbClr val="0000C0"/>
+                </a:solidFill>
+                <a:latin typeface="Consolas" panose="020B0609020204030204" pitchFamily="49" charset="0"/>
+              </a:rPr>
+              <a:t>adicionalGerencia</a:t>
+            </a:r>
+            <a:r>
+              <a:rPr lang="pt-BR" sz="1600" dirty="0">
+                <a:solidFill>
+                  <a:srgbClr val="000000"/>
+                </a:solidFill>
+                <a:latin typeface="Consolas" panose="020B0609020204030204" pitchFamily="49" charset="0"/>
+              </a:rPr>
+              <a:t> = </a:t>
+            </a:r>
+            <a:r>
+              <a:rPr lang="pt-BR" sz="1600" dirty="0" err="1">
+                <a:solidFill>
+                  <a:srgbClr val="6A3E3E"/>
+                </a:solidFill>
+                <a:latin typeface="Consolas" panose="020B0609020204030204" pitchFamily="49" charset="0"/>
+              </a:rPr>
+              <a:t>adicionalGerencia</a:t>
+            </a:r>
+            <a:r>
+              <a:rPr lang="pt-BR" sz="1600" dirty="0">
+                <a:solidFill>
+                  <a:srgbClr val="000000"/>
+                </a:solidFill>
+                <a:latin typeface="Consolas" panose="020B0609020204030204" pitchFamily="49" charset="0"/>
+              </a:rPr>
+              <a:t>;</a:t>
+            </a:r>
+          </a:p>
+          <a:p>
+            <a:pPr lvl="1">
+              <a:spcBef>
+                <a:spcPts val="150"/>
+              </a:spcBef>
+              <a:spcAft>
+                <a:spcPts val="150"/>
+              </a:spcAft>
+            </a:pPr>
+            <a:r>
+              <a:rPr lang="pt-BR" sz="1600" dirty="0">
+                <a:solidFill>
+                  <a:srgbClr val="000000"/>
+                </a:solidFill>
+                <a:latin typeface="Consolas" panose="020B0609020204030204" pitchFamily="49" charset="0"/>
+              </a:rPr>
+              <a:t>}</a:t>
+            </a:r>
+          </a:p>
+          <a:p>
+            <a:pPr>
+              <a:spcBef>
+                <a:spcPts val="150"/>
+              </a:spcBef>
+              <a:spcAft>
+                <a:spcPts val="150"/>
+              </a:spcAft>
+            </a:pPr>
+            <a:r>
+              <a:rPr lang="pt-BR" sz="1600" dirty="0">
+                <a:solidFill>
+                  <a:srgbClr val="000000"/>
+                </a:solidFill>
+                <a:latin typeface="Consolas" panose="020B0609020204030204" pitchFamily="49" charset="0"/>
+              </a:rPr>
+              <a:t>}</a:t>
+            </a:r>
+          </a:p>
+        </p:txBody>
+      </p:sp>
+    </p:spTree>
+    <p:extLst>
+      <p:ext uri="{BB962C8B-B14F-4D97-AF65-F5344CB8AC3E}">
+        <p14:creationId xmlns:p14="http://schemas.microsoft.com/office/powerpoint/2010/main" val="3696678201"/>
+      </p:ext>
+    </p:extLst>
+  </p:cSld>
+  <p:clrMapOvr>
+    <a:masterClrMapping/>
+  </p:clrMapOvr>
+</p:sld>
+</file>
+
+<file path=ppt/slides/slide12.xml><?xml version="1.0" encoding="utf-8"?>
+<p:sld xmlns:a="http://schemas.openxmlformats.org/drawingml/2006/main" xmlns:r="http://schemas.openxmlformats.org/officeDocument/2006/relationships" xmlns:p="http://schemas.openxmlformats.org/presentationml/2006/main">
+  <p:cSld>
+    <p:spTree>
+      <p:nvGrpSpPr>
+        <p:cNvPr id="1" name=""/>
+        <p:cNvGrpSpPr/>
+        <p:nvPr/>
+      </p:nvGrpSpPr>
+      <p:grpSpPr>
+        <a:xfrm>
+          <a:off x="0" y="0"/>
+          <a:ext cx="0" cy="0"/>
+          <a:chOff x="0" y="0"/>
+          <a:chExt cx="0" cy="0"/>
+        </a:xfrm>
+      </p:grpSpPr>
+      <p:sp>
+        <p:nvSpPr>
+          <p:cNvPr id="2" name="Título 1">
+            <a:extLst>
+              <a:ext uri="{FF2B5EF4-FFF2-40B4-BE49-F238E27FC236}">
+                <a16:creationId xmlns:a16="http://schemas.microsoft.com/office/drawing/2014/main" id="{F68281D3-C181-4E1C-B325-E00D3550CEFA}"/>
+              </a:ext>
+            </a:extLst>
+          </p:cNvPr>
+          <p:cNvSpPr>
+            <a:spLocks noGrp="1"/>
+          </p:cNvSpPr>
+          <p:nvPr>
+            <p:ph type="title"/>
+          </p:nvPr>
+        </p:nvSpPr>
+        <p:spPr/>
+        <p:txBody>
+          <a:bodyPr/>
+          <a:lstStyle/>
+          <a:p>
+            <a:r>
+              <a:rPr lang="pt-BR" b="1" dirty="0"/>
+              <a:t>O que é Polimorfismo?</a:t>
+            </a:r>
+            <a:br>
+              <a:rPr lang="pt-BR" b="1" dirty="0"/>
+            </a:br>
+            <a:endParaRPr lang="pt-BR" dirty="0"/>
+          </a:p>
+        </p:txBody>
+      </p:sp>
+      <p:sp>
+        <p:nvSpPr>
+          <p:cNvPr id="3" name="Espaço Reservado para Conteúdo 2">
+            <a:extLst>
+              <a:ext uri="{FF2B5EF4-FFF2-40B4-BE49-F238E27FC236}">
+                <a16:creationId xmlns:a16="http://schemas.microsoft.com/office/drawing/2014/main" id="{B58E572E-10D7-43D6-B230-D23680BEFDD1}"/>
+              </a:ext>
+            </a:extLst>
+          </p:cNvPr>
+          <p:cNvSpPr>
+            <a:spLocks noGrp="1"/>
+          </p:cNvSpPr>
+          <p:nvPr>
+            <p:ph idx="1"/>
+          </p:nvPr>
+        </p:nvSpPr>
+        <p:spPr/>
+        <p:txBody>
+          <a:bodyPr/>
+          <a:lstStyle/>
+          <a:p>
+            <a:r>
+              <a:rPr lang="pt-BR" dirty="0"/>
+              <a:t>Polimorfismo é a habilidade de um mesmo objeto executar comportamentos diferentes, dependendo da forma como é utilizado no programa.</a:t>
+            </a:r>
+          </a:p>
+          <a:p>
+            <a:endParaRPr lang="pt-BR" dirty="0"/>
+          </a:p>
+          <a:p>
+            <a:pPr lvl="1"/>
+            <a:r>
+              <a:rPr lang="pt-BR" dirty="0"/>
+              <a:t>Sobrecarga (</a:t>
+            </a:r>
+            <a:r>
+              <a:rPr lang="pt-BR" dirty="0" err="1"/>
+              <a:t>Overloading</a:t>
+            </a:r>
+            <a:r>
+              <a:rPr lang="pt-BR" dirty="0"/>
+              <a:t>):Vários métodos com o mesmo nome, mas com parâmetros diferentes na mesma classe.</a:t>
+            </a:r>
+          </a:p>
+          <a:p>
+            <a:pPr lvl="1"/>
+            <a:r>
+              <a:rPr lang="pt-BR" dirty="0"/>
+              <a:t>Sobrescrita (</a:t>
+            </a:r>
+            <a:r>
+              <a:rPr lang="pt-BR" dirty="0" err="1"/>
+              <a:t>Overriding</a:t>
+            </a:r>
+            <a:r>
+              <a:rPr lang="pt-BR" dirty="0"/>
+              <a:t>):Uma subclasse redefine um método da superclasse, mantendo a mesma assinatura.</a:t>
+            </a:r>
+          </a:p>
+        </p:txBody>
+      </p:sp>
+    </p:spTree>
+    <p:extLst>
+      <p:ext uri="{BB962C8B-B14F-4D97-AF65-F5344CB8AC3E}">
+        <p14:creationId xmlns:p14="http://schemas.microsoft.com/office/powerpoint/2010/main" val="3973512991"/>
+      </p:ext>
+    </p:extLst>
+  </p:cSld>
+  <p:clrMapOvr>
+    <a:masterClrMapping/>
+  </p:clrMapOvr>
+</p:sld>
+</file>
+
+<file path=ppt/slides/slide13.xml><?xml version="1.0" encoding="utf-8"?>
+<p:sld xmlns:a="http://schemas.openxmlformats.org/drawingml/2006/main" xmlns:r="http://schemas.openxmlformats.org/officeDocument/2006/relationships" xmlns:p="http://schemas.openxmlformats.org/presentationml/2006/main">
+  <p:cSld>
+    <p:spTree>
+      <p:nvGrpSpPr>
+        <p:cNvPr id="1" name=""/>
+        <p:cNvGrpSpPr/>
+        <p:nvPr/>
+      </p:nvGrpSpPr>
+      <p:grpSpPr>
+        <a:xfrm>
+          <a:off x="0" y="0"/>
+          <a:ext cx="0" cy="0"/>
+          <a:chOff x="0" y="0"/>
+          <a:chExt cx="0" cy="0"/>
+        </a:xfrm>
+      </p:grpSpPr>
+      <p:sp>
+        <p:nvSpPr>
+          <p:cNvPr id="2" name="Título 1">
+            <a:extLst>
+              <a:ext uri="{FF2B5EF4-FFF2-40B4-BE49-F238E27FC236}">
+                <a16:creationId xmlns:a16="http://schemas.microsoft.com/office/drawing/2014/main" id="{4A744C23-AA41-4EE5-936C-BE42F1928F7C}"/>
+              </a:ext>
+            </a:extLst>
+          </p:cNvPr>
+          <p:cNvSpPr>
+            <a:spLocks noGrp="1"/>
+          </p:cNvSpPr>
+          <p:nvPr>
+            <p:ph type="title"/>
+          </p:nvPr>
+        </p:nvSpPr>
+        <p:spPr/>
+        <p:txBody>
+          <a:bodyPr/>
+          <a:lstStyle/>
+          <a:p>
+            <a:r>
+              <a:rPr lang="pt-BR" dirty="0"/>
+              <a:t>Exemplo de Polimorfismo</a:t>
+            </a:r>
+          </a:p>
+        </p:txBody>
+      </p:sp>
+      <p:sp>
+        <p:nvSpPr>
+          <p:cNvPr id="4" name="Retângulo 3">
+            <a:extLst>
+              <a:ext uri="{FF2B5EF4-FFF2-40B4-BE49-F238E27FC236}">
+                <a16:creationId xmlns:a16="http://schemas.microsoft.com/office/drawing/2014/main" id="{A9C127C7-5E90-4A82-86A4-C9E34D1D6277}"/>
+              </a:ext>
+            </a:extLst>
+          </p:cNvPr>
+          <p:cNvSpPr/>
+          <p:nvPr/>
+        </p:nvSpPr>
+        <p:spPr>
+          <a:xfrm>
+            <a:off x="852311" y="3028407"/>
+            <a:ext cx="4698999" cy="2975173"/>
+          </a:xfrm>
+          <a:prstGeom prst="rect">
+            <a:avLst/>
+          </a:prstGeom>
+        </p:spPr>
+        <p:txBody>
+          <a:bodyPr wrap="square">
+            <a:spAutoFit/>
+          </a:bodyPr>
+          <a:lstStyle/>
+          <a:p>
+            <a:pPr>
+              <a:spcBef>
+                <a:spcPts val="150"/>
+              </a:spcBef>
+              <a:spcAft>
+                <a:spcPts val="150"/>
+              </a:spcAft>
+            </a:pPr>
+            <a:r>
+              <a:rPr lang="pt-BR" sz="1400" b="1" dirty="0" err="1">
+                <a:solidFill>
+                  <a:srgbClr val="7F0055"/>
+                </a:solidFill>
+                <a:latin typeface="Consolas" panose="020B0609020204030204" pitchFamily="49" charset="0"/>
+              </a:rPr>
+              <a:t>public</a:t>
+            </a:r>
+            <a:r>
+              <a:rPr lang="pt-BR" sz="1400" dirty="0">
+                <a:solidFill>
+                  <a:srgbClr val="000000"/>
+                </a:solidFill>
+                <a:latin typeface="Consolas" panose="020B0609020204030204" pitchFamily="49" charset="0"/>
+              </a:rPr>
+              <a:t> </a:t>
+            </a:r>
+            <a:r>
+              <a:rPr lang="pt-BR" sz="1400" b="1" dirty="0" err="1">
+                <a:solidFill>
+                  <a:srgbClr val="7F0055"/>
+                </a:solidFill>
+                <a:latin typeface="Consolas" panose="020B0609020204030204" pitchFamily="49" charset="0"/>
+              </a:rPr>
+              <a:t>class</a:t>
+            </a:r>
+            <a:r>
+              <a:rPr lang="pt-BR" sz="1400" dirty="0">
+                <a:solidFill>
+                  <a:srgbClr val="000000"/>
+                </a:solidFill>
+                <a:latin typeface="Consolas" panose="020B0609020204030204" pitchFamily="49" charset="0"/>
+              </a:rPr>
+              <a:t> Calculadora {</a:t>
+            </a:r>
+          </a:p>
+          <a:p>
+            <a:pPr indent="457200">
+              <a:spcBef>
+                <a:spcPts val="150"/>
+              </a:spcBef>
+              <a:spcAft>
+                <a:spcPts val="150"/>
+              </a:spcAft>
+            </a:pPr>
+            <a:r>
+              <a:rPr lang="pt-BR" sz="1400" b="1" dirty="0" err="1">
+                <a:solidFill>
+                  <a:srgbClr val="7F0055"/>
+                </a:solidFill>
+                <a:latin typeface="Consolas" panose="020B0609020204030204" pitchFamily="49" charset="0"/>
+              </a:rPr>
+              <a:t>public</a:t>
+            </a:r>
+            <a:r>
+              <a:rPr lang="pt-BR" sz="1400" dirty="0">
+                <a:solidFill>
+                  <a:srgbClr val="000000"/>
+                </a:solidFill>
+                <a:latin typeface="Consolas" panose="020B0609020204030204" pitchFamily="49" charset="0"/>
+              </a:rPr>
+              <a:t> </a:t>
+            </a:r>
+            <a:r>
+              <a:rPr lang="pt-BR" sz="1400" b="1" dirty="0" err="1">
+                <a:solidFill>
+                  <a:srgbClr val="7F0055"/>
+                </a:solidFill>
+                <a:latin typeface="Consolas" panose="020B0609020204030204" pitchFamily="49" charset="0"/>
+              </a:rPr>
+              <a:t>int</a:t>
+            </a:r>
+            <a:r>
+              <a:rPr lang="pt-BR" sz="1400" dirty="0">
+                <a:solidFill>
+                  <a:srgbClr val="000000"/>
+                </a:solidFill>
+                <a:latin typeface="Consolas" panose="020B0609020204030204" pitchFamily="49" charset="0"/>
+              </a:rPr>
+              <a:t> somar(</a:t>
+            </a:r>
+            <a:r>
+              <a:rPr lang="pt-BR" sz="1400" b="1" dirty="0" err="1">
+                <a:solidFill>
+                  <a:srgbClr val="7F0055"/>
+                </a:solidFill>
+                <a:latin typeface="Consolas" panose="020B0609020204030204" pitchFamily="49" charset="0"/>
+              </a:rPr>
+              <a:t>int</a:t>
+            </a:r>
+            <a:r>
+              <a:rPr lang="pt-BR" sz="1400" dirty="0">
+                <a:solidFill>
+                  <a:srgbClr val="000000"/>
+                </a:solidFill>
+                <a:latin typeface="Consolas" panose="020B0609020204030204" pitchFamily="49" charset="0"/>
+              </a:rPr>
+              <a:t> </a:t>
+            </a:r>
+            <a:r>
+              <a:rPr lang="pt-BR" sz="1400" dirty="0">
+                <a:solidFill>
+                  <a:srgbClr val="6A3E3E"/>
+                </a:solidFill>
+                <a:latin typeface="Consolas" panose="020B0609020204030204" pitchFamily="49" charset="0"/>
+              </a:rPr>
+              <a:t>a</a:t>
+            </a:r>
+            <a:r>
+              <a:rPr lang="pt-BR" sz="1400" dirty="0">
+                <a:solidFill>
+                  <a:srgbClr val="000000"/>
+                </a:solidFill>
+                <a:latin typeface="Consolas" panose="020B0609020204030204" pitchFamily="49" charset="0"/>
+              </a:rPr>
+              <a:t>, </a:t>
+            </a:r>
+            <a:r>
+              <a:rPr lang="pt-BR" sz="1400" b="1" dirty="0" err="1">
+                <a:solidFill>
+                  <a:srgbClr val="7F0055"/>
+                </a:solidFill>
+                <a:latin typeface="Consolas" panose="020B0609020204030204" pitchFamily="49" charset="0"/>
+              </a:rPr>
+              <a:t>int</a:t>
+            </a:r>
+            <a:r>
+              <a:rPr lang="pt-BR" sz="1400" dirty="0">
+                <a:solidFill>
+                  <a:srgbClr val="000000"/>
+                </a:solidFill>
+                <a:latin typeface="Consolas" panose="020B0609020204030204" pitchFamily="49" charset="0"/>
+              </a:rPr>
+              <a:t> </a:t>
+            </a:r>
+            <a:r>
+              <a:rPr lang="pt-BR" sz="1400" dirty="0">
+                <a:solidFill>
+                  <a:srgbClr val="6A3E3E"/>
+                </a:solidFill>
+                <a:latin typeface="Consolas" panose="020B0609020204030204" pitchFamily="49" charset="0"/>
+              </a:rPr>
+              <a:t>b</a:t>
+            </a:r>
+            <a:r>
+              <a:rPr lang="pt-BR" sz="1400" dirty="0">
+                <a:solidFill>
+                  <a:srgbClr val="000000"/>
+                </a:solidFill>
+                <a:latin typeface="Consolas" panose="020B0609020204030204" pitchFamily="49" charset="0"/>
+              </a:rPr>
+              <a:t>) {</a:t>
+            </a:r>
+          </a:p>
+          <a:p>
+            <a:pPr indent="914400">
+              <a:spcBef>
+                <a:spcPts val="150"/>
+              </a:spcBef>
+              <a:spcAft>
+                <a:spcPts val="150"/>
+              </a:spcAft>
+            </a:pPr>
+            <a:r>
+              <a:rPr lang="pt-BR" sz="1400" b="1" dirty="0" err="1">
+                <a:solidFill>
+                  <a:srgbClr val="7F0055"/>
+                </a:solidFill>
+                <a:latin typeface="Consolas" panose="020B0609020204030204" pitchFamily="49" charset="0"/>
+              </a:rPr>
+              <a:t>return</a:t>
+            </a:r>
+            <a:r>
+              <a:rPr lang="pt-BR" sz="1400" dirty="0">
+                <a:solidFill>
+                  <a:srgbClr val="000000"/>
+                </a:solidFill>
+                <a:latin typeface="Consolas" panose="020B0609020204030204" pitchFamily="49" charset="0"/>
+              </a:rPr>
+              <a:t> </a:t>
+            </a:r>
+            <a:r>
+              <a:rPr lang="pt-BR" sz="1400" dirty="0">
+                <a:solidFill>
+                  <a:srgbClr val="6A3E3E"/>
+                </a:solidFill>
+                <a:latin typeface="Consolas" panose="020B0609020204030204" pitchFamily="49" charset="0"/>
+              </a:rPr>
+              <a:t>a</a:t>
+            </a:r>
+            <a:r>
+              <a:rPr lang="pt-BR" sz="1400" dirty="0">
+                <a:solidFill>
+                  <a:srgbClr val="000000"/>
+                </a:solidFill>
+                <a:latin typeface="Consolas" panose="020B0609020204030204" pitchFamily="49" charset="0"/>
+              </a:rPr>
+              <a:t> + </a:t>
+            </a:r>
+            <a:r>
+              <a:rPr lang="pt-BR" sz="1400" dirty="0">
+                <a:solidFill>
+                  <a:srgbClr val="6A3E3E"/>
+                </a:solidFill>
+                <a:latin typeface="Consolas" panose="020B0609020204030204" pitchFamily="49" charset="0"/>
+              </a:rPr>
+              <a:t>b</a:t>
+            </a:r>
+            <a:r>
+              <a:rPr lang="pt-BR" sz="1400" dirty="0">
+                <a:solidFill>
+                  <a:srgbClr val="000000"/>
+                </a:solidFill>
+                <a:latin typeface="Consolas" panose="020B0609020204030204" pitchFamily="49" charset="0"/>
+              </a:rPr>
+              <a:t>;</a:t>
+            </a:r>
+          </a:p>
+          <a:p>
+            <a:pPr indent="457200">
+              <a:spcBef>
+                <a:spcPts val="150"/>
+              </a:spcBef>
+              <a:spcAft>
+                <a:spcPts val="150"/>
+              </a:spcAft>
+            </a:pPr>
+            <a:r>
+              <a:rPr lang="pt-BR" sz="1400" dirty="0">
+                <a:solidFill>
+                  <a:srgbClr val="000000"/>
+                </a:solidFill>
+                <a:latin typeface="Consolas" panose="020B0609020204030204" pitchFamily="49" charset="0"/>
+              </a:rPr>
+              <a:t>}</a:t>
+            </a:r>
+          </a:p>
+          <a:p>
+            <a:pPr indent="457200">
+              <a:spcBef>
+                <a:spcPts val="150"/>
+              </a:spcBef>
+              <a:spcAft>
+                <a:spcPts val="150"/>
+              </a:spcAft>
+            </a:pPr>
+            <a:r>
+              <a:rPr lang="pt-BR" sz="1400" b="1" dirty="0" err="1">
+                <a:solidFill>
+                  <a:srgbClr val="7F0055"/>
+                </a:solidFill>
+                <a:latin typeface="Consolas" panose="020B0609020204030204" pitchFamily="49" charset="0"/>
+              </a:rPr>
+              <a:t>public</a:t>
+            </a:r>
+            <a:r>
+              <a:rPr lang="pt-BR" sz="1400" dirty="0">
+                <a:solidFill>
+                  <a:srgbClr val="000000"/>
+                </a:solidFill>
+                <a:latin typeface="Consolas" panose="020B0609020204030204" pitchFamily="49" charset="0"/>
+              </a:rPr>
+              <a:t> </a:t>
+            </a:r>
+            <a:r>
+              <a:rPr lang="pt-BR" sz="1400" b="1" dirty="0" err="1">
+                <a:solidFill>
+                  <a:srgbClr val="7F0055"/>
+                </a:solidFill>
+                <a:latin typeface="Consolas" panose="020B0609020204030204" pitchFamily="49" charset="0"/>
+              </a:rPr>
+              <a:t>double</a:t>
+            </a:r>
+            <a:r>
+              <a:rPr lang="pt-BR" sz="1400" dirty="0">
+                <a:solidFill>
+                  <a:srgbClr val="000000"/>
+                </a:solidFill>
+                <a:latin typeface="Consolas" panose="020B0609020204030204" pitchFamily="49" charset="0"/>
+              </a:rPr>
+              <a:t> somar(</a:t>
+            </a:r>
+            <a:r>
+              <a:rPr lang="pt-BR" sz="1400" b="1" dirty="0" err="1">
+                <a:solidFill>
+                  <a:srgbClr val="7F0055"/>
+                </a:solidFill>
+                <a:latin typeface="Consolas" panose="020B0609020204030204" pitchFamily="49" charset="0"/>
+              </a:rPr>
+              <a:t>double</a:t>
+            </a:r>
+            <a:r>
+              <a:rPr lang="pt-BR" sz="1400" dirty="0">
+                <a:solidFill>
+                  <a:srgbClr val="000000"/>
+                </a:solidFill>
+                <a:latin typeface="Consolas" panose="020B0609020204030204" pitchFamily="49" charset="0"/>
+              </a:rPr>
+              <a:t> </a:t>
+            </a:r>
+            <a:r>
+              <a:rPr lang="pt-BR" sz="1400" dirty="0">
+                <a:solidFill>
+                  <a:srgbClr val="6A3E3E"/>
+                </a:solidFill>
+                <a:latin typeface="Consolas" panose="020B0609020204030204" pitchFamily="49" charset="0"/>
+              </a:rPr>
+              <a:t>a</a:t>
+            </a:r>
+            <a:r>
+              <a:rPr lang="pt-BR" sz="1400" dirty="0">
+                <a:solidFill>
+                  <a:srgbClr val="000000"/>
+                </a:solidFill>
+                <a:latin typeface="Consolas" panose="020B0609020204030204" pitchFamily="49" charset="0"/>
+              </a:rPr>
+              <a:t>, </a:t>
+            </a:r>
+            <a:r>
+              <a:rPr lang="pt-BR" sz="1400" b="1" dirty="0" err="1">
+                <a:solidFill>
+                  <a:srgbClr val="7F0055"/>
+                </a:solidFill>
+                <a:latin typeface="Consolas" panose="020B0609020204030204" pitchFamily="49" charset="0"/>
+              </a:rPr>
+              <a:t>double</a:t>
+            </a:r>
+            <a:r>
+              <a:rPr lang="pt-BR" sz="1400" dirty="0">
+                <a:solidFill>
+                  <a:srgbClr val="000000"/>
+                </a:solidFill>
+                <a:latin typeface="Consolas" panose="020B0609020204030204" pitchFamily="49" charset="0"/>
+              </a:rPr>
+              <a:t> </a:t>
+            </a:r>
+            <a:r>
+              <a:rPr lang="pt-BR" sz="1400" dirty="0">
+                <a:solidFill>
+                  <a:srgbClr val="6A3E3E"/>
+                </a:solidFill>
+                <a:latin typeface="Consolas" panose="020B0609020204030204" pitchFamily="49" charset="0"/>
+              </a:rPr>
+              <a:t>b</a:t>
+            </a:r>
+            <a:r>
+              <a:rPr lang="pt-BR" sz="1400" dirty="0">
+                <a:solidFill>
+                  <a:srgbClr val="000000"/>
+                </a:solidFill>
+                <a:latin typeface="Consolas" panose="020B0609020204030204" pitchFamily="49" charset="0"/>
+              </a:rPr>
+              <a:t>) {</a:t>
+            </a:r>
+          </a:p>
+          <a:p>
+            <a:pPr indent="914400">
+              <a:spcBef>
+                <a:spcPts val="150"/>
+              </a:spcBef>
+              <a:spcAft>
+                <a:spcPts val="150"/>
+              </a:spcAft>
+            </a:pPr>
+            <a:r>
+              <a:rPr lang="pt-BR" sz="1400" b="1" dirty="0" err="1">
+                <a:solidFill>
+                  <a:srgbClr val="7F0055"/>
+                </a:solidFill>
+                <a:latin typeface="Consolas" panose="020B0609020204030204" pitchFamily="49" charset="0"/>
+              </a:rPr>
+              <a:t>return</a:t>
+            </a:r>
+            <a:r>
+              <a:rPr lang="pt-BR" sz="1400" dirty="0">
+                <a:solidFill>
+                  <a:srgbClr val="000000"/>
+                </a:solidFill>
+                <a:latin typeface="Consolas" panose="020B0609020204030204" pitchFamily="49" charset="0"/>
+              </a:rPr>
+              <a:t> </a:t>
+            </a:r>
+            <a:r>
+              <a:rPr lang="pt-BR" sz="1400" dirty="0">
+                <a:solidFill>
+                  <a:srgbClr val="6A3E3E"/>
+                </a:solidFill>
+                <a:latin typeface="Consolas" panose="020B0609020204030204" pitchFamily="49" charset="0"/>
+              </a:rPr>
+              <a:t>a</a:t>
+            </a:r>
+            <a:r>
+              <a:rPr lang="pt-BR" sz="1400" dirty="0">
+                <a:solidFill>
+                  <a:srgbClr val="000000"/>
+                </a:solidFill>
+                <a:latin typeface="Consolas" panose="020B0609020204030204" pitchFamily="49" charset="0"/>
+              </a:rPr>
+              <a:t> + </a:t>
+            </a:r>
+            <a:r>
+              <a:rPr lang="pt-BR" sz="1400" dirty="0">
+                <a:solidFill>
+                  <a:srgbClr val="6A3E3E"/>
+                </a:solidFill>
+                <a:latin typeface="Consolas" panose="020B0609020204030204" pitchFamily="49" charset="0"/>
+              </a:rPr>
+              <a:t>b</a:t>
+            </a:r>
+            <a:r>
+              <a:rPr lang="pt-BR" sz="1400" dirty="0">
+                <a:solidFill>
+                  <a:srgbClr val="000000"/>
+                </a:solidFill>
+                <a:latin typeface="Consolas" panose="020B0609020204030204" pitchFamily="49" charset="0"/>
+              </a:rPr>
+              <a:t>;</a:t>
+            </a:r>
+          </a:p>
+          <a:p>
+            <a:pPr indent="457200">
+              <a:spcBef>
+                <a:spcPts val="150"/>
+              </a:spcBef>
+              <a:spcAft>
+                <a:spcPts val="150"/>
+              </a:spcAft>
+            </a:pPr>
+            <a:r>
+              <a:rPr lang="pt-BR" sz="1400" dirty="0">
+                <a:solidFill>
+                  <a:srgbClr val="000000"/>
+                </a:solidFill>
+                <a:latin typeface="Consolas" panose="020B0609020204030204" pitchFamily="49" charset="0"/>
+              </a:rPr>
+              <a:t>}</a:t>
+            </a:r>
+          </a:p>
+          <a:p>
+            <a:pPr indent="457200">
+              <a:spcBef>
+                <a:spcPts val="150"/>
+              </a:spcBef>
+              <a:spcAft>
+                <a:spcPts val="150"/>
+              </a:spcAft>
+            </a:pPr>
+            <a:r>
+              <a:rPr lang="pt-BR" sz="1400" b="1" dirty="0" err="1">
+                <a:solidFill>
+                  <a:srgbClr val="7F0055"/>
+                </a:solidFill>
+                <a:latin typeface="Consolas" panose="020B0609020204030204" pitchFamily="49" charset="0"/>
+              </a:rPr>
+              <a:t>public</a:t>
+            </a:r>
+            <a:r>
+              <a:rPr lang="pt-BR" sz="1400" dirty="0">
+                <a:solidFill>
+                  <a:srgbClr val="000000"/>
+                </a:solidFill>
+                <a:latin typeface="Consolas" panose="020B0609020204030204" pitchFamily="49" charset="0"/>
+              </a:rPr>
+              <a:t> </a:t>
+            </a:r>
+            <a:r>
+              <a:rPr lang="pt-BR" sz="1400" b="1" dirty="0" err="1">
+                <a:solidFill>
+                  <a:srgbClr val="7F0055"/>
+                </a:solidFill>
+                <a:latin typeface="Consolas" panose="020B0609020204030204" pitchFamily="49" charset="0"/>
+              </a:rPr>
+              <a:t>int</a:t>
+            </a:r>
+            <a:r>
+              <a:rPr lang="pt-BR" sz="1400" dirty="0">
+                <a:solidFill>
+                  <a:srgbClr val="000000"/>
+                </a:solidFill>
+                <a:latin typeface="Consolas" panose="020B0609020204030204" pitchFamily="49" charset="0"/>
+              </a:rPr>
+              <a:t> somar(</a:t>
+            </a:r>
+            <a:r>
+              <a:rPr lang="pt-BR" sz="1400" b="1" dirty="0" err="1">
+                <a:solidFill>
+                  <a:srgbClr val="7F0055"/>
+                </a:solidFill>
+                <a:latin typeface="Consolas" panose="020B0609020204030204" pitchFamily="49" charset="0"/>
+              </a:rPr>
+              <a:t>int</a:t>
+            </a:r>
+            <a:r>
+              <a:rPr lang="pt-BR" sz="1400" dirty="0">
+                <a:solidFill>
+                  <a:srgbClr val="000000"/>
+                </a:solidFill>
+                <a:latin typeface="Consolas" panose="020B0609020204030204" pitchFamily="49" charset="0"/>
+              </a:rPr>
+              <a:t> </a:t>
+            </a:r>
+            <a:r>
+              <a:rPr lang="pt-BR" sz="1400" dirty="0">
+                <a:solidFill>
+                  <a:srgbClr val="6A3E3E"/>
+                </a:solidFill>
+                <a:latin typeface="Consolas" panose="020B0609020204030204" pitchFamily="49" charset="0"/>
+              </a:rPr>
+              <a:t>a</a:t>
+            </a:r>
+            <a:r>
+              <a:rPr lang="pt-BR" sz="1400" dirty="0">
+                <a:solidFill>
+                  <a:srgbClr val="000000"/>
+                </a:solidFill>
+                <a:latin typeface="Consolas" panose="020B0609020204030204" pitchFamily="49" charset="0"/>
+              </a:rPr>
+              <a:t>, </a:t>
+            </a:r>
+            <a:r>
+              <a:rPr lang="pt-BR" sz="1400" b="1" dirty="0" err="1">
+                <a:solidFill>
+                  <a:srgbClr val="7F0055"/>
+                </a:solidFill>
+                <a:latin typeface="Consolas" panose="020B0609020204030204" pitchFamily="49" charset="0"/>
+              </a:rPr>
+              <a:t>int</a:t>
+            </a:r>
+            <a:r>
+              <a:rPr lang="pt-BR" sz="1400" dirty="0">
+                <a:solidFill>
+                  <a:srgbClr val="000000"/>
+                </a:solidFill>
+                <a:latin typeface="Consolas" panose="020B0609020204030204" pitchFamily="49" charset="0"/>
+              </a:rPr>
+              <a:t> </a:t>
+            </a:r>
+            <a:r>
+              <a:rPr lang="pt-BR" sz="1400" dirty="0">
+                <a:solidFill>
+                  <a:srgbClr val="6A3E3E"/>
+                </a:solidFill>
+                <a:latin typeface="Consolas" panose="020B0609020204030204" pitchFamily="49" charset="0"/>
+              </a:rPr>
+              <a:t>b</a:t>
+            </a:r>
+            <a:r>
+              <a:rPr lang="pt-BR" sz="1400" dirty="0">
+                <a:solidFill>
+                  <a:srgbClr val="000000"/>
+                </a:solidFill>
+                <a:latin typeface="Consolas" panose="020B0609020204030204" pitchFamily="49" charset="0"/>
+              </a:rPr>
+              <a:t>, </a:t>
+            </a:r>
+            <a:r>
+              <a:rPr lang="pt-BR" sz="1400" b="1" dirty="0" err="1">
+                <a:solidFill>
+                  <a:srgbClr val="7F0055"/>
+                </a:solidFill>
+                <a:latin typeface="Consolas" panose="020B0609020204030204" pitchFamily="49" charset="0"/>
+              </a:rPr>
+              <a:t>int</a:t>
+            </a:r>
+            <a:r>
+              <a:rPr lang="pt-BR" sz="1400" dirty="0">
+                <a:solidFill>
+                  <a:srgbClr val="000000"/>
+                </a:solidFill>
+                <a:latin typeface="Consolas" panose="020B0609020204030204" pitchFamily="49" charset="0"/>
+              </a:rPr>
+              <a:t> </a:t>
+            </a:r>
+            <a:r>
+              <a:rPr lang="pt-BR" sz="1400" dirty="0">
+                <a:solidFill>
+                  <a:srgbClr val="6A3E3E"/>
+                </a:solidFill>
+                <a:latin typeface="Consolas" panose="020B0609020204030204" pitchFamily="49" charset="0"/>
+              </a:rPr>
+              <a:t>c</a:t>
+            </a:r>
+            <a:r>
+              <a:rPr lang="pt-BR" sz="1400" dirty="0">
+                <a:solidFill>
+                  <a:srgbClr val="000000"/>
+                </a:solidFill>
+                <a:latin typeface="Consolas" panose="020B0609020204030204" pitchFamily="49" charset="0"/>
+              </a:rPr>
+              <a:t>) {</a:t>
+            </a:r>
+          </a:p>
+          <a:p>
+            <a:pPr indent="914400">
+              <a:spcBef>
+                <a:spcPts val="150"/>
+              </a:spcBef>
+              <a:spcAft>
+                <a:spcPts val="150"/>
+              </a:spcAft>
+            </a:pPr>
+            <a:r>
+              <a:rPr lang="pt-BR" sz="1400" b="1" dirty="0" err="1">
+                <a:solidFill>
+                  <a:srgbClr val="7F0055"/>
+                </a:solidFill>
+                <a:latin typeface="Consolas" panose="020B0609020204030204" pitchFamily="49" charset="0"/>
+              </a:rPr>
+              <a:t>return</a:t>
+            </a:r>
+            <a:r>
+              <a:rPr lang="pt-BR" sz="1400" dirty="0">
+                <a:solidFill>
+                  <a:srgbClr val="000000"/>
+                </a:solidFill>
+                <a:latin typeface="Consolas" panose="020B0609020204030204" pitchFamily="49" charset="0"/>
+              </a:rPr>
+              <a:t> </a:t>
+            </a:r>
+            <a:r>
+              <a:rPr lang="pt-BR" sz="1400" dirty="0">
+                <a:solidFill>
+                  <a:srgbClr val="6A3E3E"/>
+                </a:solidFill>
+                <a:latin typeface="Consolas" panose="020B0609020204030204" pitchFamily="49" charset="0"/>
+              </a:rPr>
+              <a:t>a</a:t>
+            </a:r>
+            <a:r>
+              <a:rPr lang="pt-BR" sz="1400" dirty="0">
+                <a:solidFill>
+                  <a:srgbClr val="000000"/>
+                </a:solidFill>
+                <a:latin typeface="Consolas" panose="020B0609020204030204" pitchFamily="49" charset="0"/>
+              </a:rPr>
+              <a:t> + </a:t>
+            </a:r>
+            <a:r>
+              <a:rPr lang="pt-BR" sz="1400" dirty="0">
+                <a:solidFill>
+                  <a:srgbClr val="6A3E3E"/>
+                </a:solidFill>
+                <a:latin typeface="Consolas" panose="020B0609020204030204" pitchFamily="49" charset="0"/>
+              </a:rPr>
+              <a:t>b</a:t>
+            </a:r>
+            <a:r>
+              <a:rPr lang="pt-BR" sz="1400" dirty="0">
+                <a:solidFill>
+                  <a:srgbClr val="000000"/>
+                </a:solidFill>
+                <a:latin typeface="Consolas" panose="020B0609020204030204" pitchFamily="49" charset="0"/>
+              </a:rPr>
+              <a:t> + </a:t>
+            </a:r>
+            <a:r>
+              <a:rPr lang="pt-BR" sz="1400" dirty="0">
+                <a:solidFill>
+                  <a:srgbClr val="6A3E3E"/>
+                </a:solidFill>
+                <a:latin typeface="Consolas" panose="020B0609020204030204" pitchFamily="49" charset="0"/>
+              </a:rPr>
+              <a:t>c</a:t>
+            </a:r>
+            <a:r>
+              <a:rPr lang="pt-BR" sz="1400" dirty="0">
+                <a:solidFill>
+                  <a:srgbClr val="000000"/>
+                </a:solidFill>
+                <a:latin typeface="Consolas" panose="020B0609020204030204" pitchFamily="49" charset="0"/>
+              </a:rPr>
+              <a:t>;</a:t>
+            </a:r>
+          </a:p>
+          <a:p>
+            <a:pPr indent="457200">
+              <a:spcBef>
+                <a:spcPts val="150"/>
+              </a:spcBef>
+              <a:spcAft>
+                <a:spcPts val="150"/>
+              </a:spcAft>
+            </a:pPr>
+            <a:r>
+              <a:rPr lang="pt-BR" sz="1400" dirty="0">
+                <a:solidFill>
+                  <a:srgbClr val="000000"/>
+                </a:solidFill>
+                <a:latin typeface="Consolas" panose="020B0609020204030204" pitchFamily="49" charset="0"/>
+              </a:rPr>
+              <a:t>}</a:t>
+            </a:r>
+          </a:p>
+          <a:p>
+            <a:pPr>
+              <a:spcBef>
+                <a:spcPts val="150"/>
+              </a:spcBef>
+              <a:spcAft>
+                <a:spcPts val="150"/>
+              </a:spcAft>
+            </a:pPr>
+            <a:r>
+              <a:rPr lang="pt-BR" sz="1400" dirty="0">
+                <a:solidFill>
+                  <a:srgbClr val="000000"/>
+                </a:solidFill>
+                <a:latin typeface="Consolas" panose="020B0609020204030204" pitchFamily="49" charset="0"/>
+              </a:rPr>
+              <a:t>}</a:t>
+            </a:r>
+          </a:p>
+        </p:txBody>
+      </p:sp>
+      <p:sp>
+        <p:nvSpPr>
+          <p:cNvPr id="5" name="CaixaDeTexto 4">
+            <a:extLst>
+              <a:ext uri="{FF2B5EF4-FFF2-40B4-BE49-F238E27FC236}">
+                <a16:creationId xmlns:a16="http://schemas.microsoft.com/office/drawing/2014/main" id="{84F9EC0C-06FF-4414-87FA-9B60D0B83818}"/>
+              </a:ext>
+            </a:extLst>
+          </p:cNvPr>
+          <p:cNvSpPr txBox="1"/>
+          <p:nvPr/>
+        </p:nvSpPr>
+        <p:spPr>
+          <a:xfrm>
+            <a:off x="1897943" y="2514600"/>
+            <a:ext cx="2607734" cy="369332"/>
+          </a:xfrm>
+          <a:prstGeom prst="rect">
+            <a:avLst/>
+          </a:prstGeom>
+          <a:noFill/>
+        </p:spPr>
+        <p:txBody>
+          <a:bodyPr wrap="square" rtlCol="0">
+            <a:spAutoFit/>
+          </a:bodyPr>
+          <a:lstStyle/>
+          <a:p>
+            <a:pPr algn="ctr"/>
+            <a:r>
+              <a:rPr lang="pt-BR" dirty="0">
+                <a:latin typeface="Times New Roman" panose="02020603050405020304" pitchFamily="18" charset="0"/>
+                <a:cs typeface="Times New Roman" panose="02020603050405020304" pitchFamily="18" charset="0"/>
+              </a:rPr>
+              <a:t>Sobrecarga</a:t>
+            </a:r>
+          </a:p>
+        </p:txBody>
+      </p:sp>
+      <p:sp>
+        <p:nvSpPr>
+          <p:cNvPr id="6" name="Retângulo 5">
+            <a:extLst>
+              <a:ext uri="{FF2B5EF4-FFF2-40B4-BE49-F238E27FC236}">
+                <a16:creationId xmlns:a16="http://schemas.microsoft.com/office/drawing/2014/main" id="{92256B6E-0262-418B-82DC-A9263E124FF3}"/>
+              </a:ext>
+            </a:extLst>
+          </p:cNvPr>
+          <p:cNvSpPr/>
+          <p:nvPr/>
+        </p:nvSpPr>
+        <p:spPr>
+          <a:xfrm>
+            <a:off x="6403622" y="3028407"/>
+            <a:ext cx="4936067" cy="3241913"/>
+          </a:xfrm>
+          <a:prstGeom prst="rect">
+            <a:avLst/>
+          </a:prstGeom>
+        </p:spPr>
+        <p:txBody>
+          <a:bodyPr wrap="square">
+            <a:spAutoFit/>
+          </a:bodyPr>
+          <a:lstStyle/>
+          <a:p>
+            <a:pPr>
+              <a:spcBef>
+                <a:spcPts val="150"/>
+              </a:spcBef>
+              <a:spcAft>
+                <a:spcPts val="150"/>
+              </a:spcAft>
+            </a:pPr>
+            <a:r>
+              <a:rPr lang="pt-BR" sz="1400" b="1" dirty="0" err="1">
+                <a:solidFill>
+                  <a:srgbClr val="7F0055"/>
+                </a:solidFill>
+                <a:latin typeface="Consolas" panose="020B0609020204030204" pitchFamily="49" charset="0"/>
+              </a:rPr>
+              <a:t>class</a:t>
+            </a:r>
+            <a:r>
+              <a:rPr lang="pt-BR" sz="1400" dirty="0">
+                <a:solidFill>
+                  <a:srgbClr val="000000"/>
+                </a:solidFill>
+                <a:latin typeface="Consolas" panose="020B0609020204030204" pitchFamily="49" charset="0"/>
+              </a:rPr>
+              <a:t> Animal {</a:t>
+            </a:r>
+          </a:p>
+          <a:p>
+            <a:pPr indent="457200">
+              <a:spcBef>
+                <a:spcPts val="150"/>
+              </a:spcBef>
+              <a:spcAft>
+                <a:spcPts val="150"/>
+              </a:spcAft>
+            </a:pPr>
+            <a:r>
+              <a:rPr lang="pt-BR" sz="1400" b="1" dirty="0" err="1">
+                <a:solidFill>
+                  <a:srgbClr val="7F0055"/>
+                </a:solidFill>
+                <a:latin typeface="Consolas" panose="020B0609020204030204" pitchFamily="49" charset="0"/>
+              </a:rPr>
+              <a:t>public</a:t>
+            </a:r>
+            <a:r>
+              <a:rPr lang="pt-BR" sz="1400" dirty="0">
+                <a:solidFill>
+                  <a:srgbClr val="000000"/>
+                </a:solidFill>
+                <a:latin typeface="Consolas" panose="020B0609020204030204" pitchFamily="49" charset="0"/>
+              </a:rPr>
+              <a:t> </a:t>
+            </a:r>
+            <a:r>
+              <a:rPr lang="pt-BR" sz="1400" b="1" dirty="0" err="1">
+                <a:solidFill>
+                  <a:srgbClr val="7F0055"/>
+                </a:solidFill>
+                <a:latin typeface="Consolas" panose="020B0609020204030204" pitchFamily="49" charset="0"/>
+              </a:rPr>
+              <a:t>void</a:t>
+            </a:r>
+            <a:r>
+              <a:rPr lang="pt-BR" sz="1400" dirty="0">
+                <a:solidFill>
+                  <a:srgbClr val="000000"/>
+                </a:solidFill>
+                <a:latin typeface="Consolas" panose="020B0609020204030204" pitchFamily="49" charset="0"/>
+              </a:rPr>
+              <a:t> </a:t>
+            </a:r>
+            <a:r>
+              <a:rPr lang="pt-BR" sz="1400" dirty="0" err="1">
+                <a:solidFill>
+                  <a:srgbClr val="000000"/>
+                </a:solidFill>
+                <a:latin typeface="Consolas" panose="020B0609020204030204" pitchFamily="49" charset="0"/>
+              </a:rPr>
+              <a:t>emitirSom</a:t>
+            </a:r>
+            <a:r>
+              <a:rPr lang="pt-BR" sz="1400" dirty="0">
+                <a:solidFill>
+                  <a:srgbClr val="000000"/>
+                </a:solidFill>
+                <a:latin typeface="Consolas" panose="020B0609020204030204" pitchFamily="49" charset="0"/>
+              </a:rPr>
+              <a:t>() {</a:t>
+            </a:r>
+          </a:p>
+          <a:p>
+            <a:pPr indent="914400">
+              <a:spcBef>
+                <a:spcPts val="150"/>
+              </a:spcBef>
+              <a:spcAft>
+                <a:spcPts val="150"/>
+              </a:spcAft>
+            </a:pPr>
+            <a:r>
+              <a:rPr lang="pt-BR" sz="1400" dirty="0" err="1">
+                <a:solidFill>
+                  <a:srgbClr val="000000"/>
+                </a:solidFill>
+                <a:latin typeface="Consolas" panose="020B0609020204030204" pitchFamily="49" charset="0"/>
+              </a:rPr>
+              <a:t>System.</a:t>
+            </a:r>
+            <a:r>
+              <a:rPr lang="pt-BR" sz="1400" b="1" i="1" dirty="0" err="1">
+                <a:solidFill>
+                  <a:srgbClr val="0000C0"/>
+                </a:solidFill>
+                <a:latin typeface="Consolas" panose="020B0609020204030204" pitchFamily="49" charset="0"/>
+              </a:rPr>
+              <a:t>out</a:t>
+            </a:r>
+            <a:r>
+              <a:rPr lang="pt-BR" sz="1400" dirty="0" err="1">
+                <a:solidFill>
+                  <a:srgbClr val="000000"/>
+                </a:solidFill>
+                <a:latin typeface="Consolas" panose="020B0609020204030204" pitchFamily="49" charset="0"/>
+              </a:rPr>
+              <a:t>.println</a:t>
+            </a:r>
+            <a:r>
+              <a:rPr lang="pt-BR" sz="1400" dirty="0">
+                <a:solidFill>
+                  <a:srgbClr val="000000"/>
+                </a:solidFill>
+                <a:latin typeface="Consolas" panose="020B0609020204030204" pitchFamily="49" charset="0"/>
+              </a:rPr>
+              <a:t>(</a:t>
+            </a:r>
+            <a:r>
+              <a:rPr lang="pt-BR" sz="1400" dirty="0">
+                <a:solidFill>
+                  <a:srgbClr val="2A00FF"/>
+                </a:solidFill>
+                <a:latin typeface="Consolas" panose="020B0609020204030204" pitchFamily="49" charset="0"/>
+              </a:rPr>
+              <a:t>"Animal faz som"</a:t>
+            </a:r>
+            <a:r>
+              <a:rPr lang="pt-BR" sz="1400" dirty="0">
+                <a:solidFill>
+                  <a:srgbClr val="000000"/>
+                </a:solidFill>
+                <a:latin typeface="Consolas" panose="020B0609020204030204" pitchFamily="49" charset="0"/>
+              </a:rPr>
+              <a:t>);</a:t>
+            </a:r>
+          </a:p>
+          <a:p>
+            <a:pPr indent="457200">
+              <a:spcBef>
+                <a:spcPts val="150"/>
+              </a:spcBef>
+              <a:spcAft>
+                <a:spcPts val="150"/>
+              </a:spcAft>
+            </a:pPr>
+            <a:r>
+              <a:rPr lang="pt-BR" sz="1400" dirty="0">
+                <a:solidFill>
+                  <a:srgbClr val="000000"/>
+                </a:solidFill>
+                <a:latin typeface="Consolas" panose="020B0609020204030204" pitchFamily="49" charset="0"/>
+              </a:rPr>
+              <a:t>}</a:t>
+            </a:r>
+          </a:p>
+          <a:p>
+            <a:pPr>
+              <a:spcBef>
+                <a:spcPts val="150"/>
+              </a:spcBef>
+              <a:spcAft>
+                <a:spcPts val="150"/>
+              </a:spcAft>
+            </a:pPr>
+            <a:r>
+              <a:rPr lang="pt-BR" sz="1400" dirty="0">
+                <a:solidFill>
+                  <a:srgbClr val="000000"/>
+                </a:solidFill>
+                <a:latin typeface="Consolas" panose="020B0609020204030204" pitchFamily="49" charset="0"/>
+              </a:rPr>
+              <a:t>}</a:t>
+            </a:r>
+          </a:p>
+          <a:p>
+            <a:pPr>
+              <a:spcBef>
+                <a:spcPts val="150"/>
+              </a:spcBef>
+              <a:spcAft>
+                <a:spcPts val="150"/>
+              </a:spcAft>
+            </a:pPr>
+            <a:endParaRPr lang="pt-BR" sz="1400" dirty="0">
+              <a:solidFill>
+                <a:srgbClr val="000000"/>
+              </a:solidFill>
+              <a:latin typeface="Consolas" panose="020B0609020204030204" pitchFamily="49" charset="0"/>
+            </a:endParaRPr>
+          </a:p>
+          <a:p>
+            <a:pPr>
+              <a:spcBef>
+                <a:spcPts val="150"/>
+              </a:spcBef>
+              <a:spcAft>
+                <a:spcPts val="150"/>
+              </a:spcAft>
+            </a:pPr>
+            <a:r>
+              <a:rPr lang="pt-BR" sz="1400" b="1" dirty="0" err="1">
+                <a:solidFill>
+                  <a:srgbClr val="7F0055"/>
+                </a:solidFill>
+                <a:latin typeface="Consolas" panose="020B0609020204030204" pitchFamily="49" charset="0"/>
+              </a:rPr>
+              <a:t>class</a:t>
+            </a:r>
+            <a:r>
+              <a:rPr lang="pt-BR" sz="1400" dirty="0">
+                <a:solidFill>
+                  <a:srgbClr val="000000"/>
+                </a:solidFill>
+                <a:latin typeface="Consolas" panose="020B0609020204030204" pitchFamily="49" charset="0"/>
+              </a:rPr>
+              <a:t> Gato </a:t>
+            </a:r>
+            <a:r>
+              <a:rPr lang="pt-BR" sz="1400" b="1" dirty="0" err="1">
+                <a:solidFill>
+                  <a:srgbClr val="7F0055"/>
+                </a:solidFill>
+                <a:latin typeface="Consolas" panose="020B0609020204030204" pitchFamily="49" charset="0"/>
+              </a:rPr>
+              <a:t>extends</a:t>
+            </a:r>
+            <a:r>
+              <a:rPr lang="pt-BR" sz="1400" dirty="0">
+                <a:solidFill>
+                  <a:srgbClr val="000000"/>
+                </a:solidFill>
+                <a:latin typeface="Consolas" panose="020B0609020204030204" pitchFamily="49" charset="0"/>
+              </a:rPr>
+              <a:t> Animal {</a:t>
+            </a:r>
+          </a:p>
+          <a:p>
+            <a:pPr indent="457200">
+              <a:spcBef>
+                <a:spcPts val="150"/>
+              </a:spcBef>
+              <a:spcAft>
+                <a:spcPts val="150"/>
+              </a:spcAft>
+            </a:pPr>
+            <a:r>
+              <a:rPr lang="pt-BR" sz="1400" dirty="0">
+                <a:solidFill>
+                  <a:srgbClr val="646464"/>
+                </a:solidFill>
+                <a:latin typeface="Consolas" panose="020B0609020204030204" pitchFamily="49" charset="0"/>
+              </a:rPr>
+              <a:t>@</a:t>
+            </a:r>
+            <a:r>
+              <a:rPr lang="pt-BR" sz="1400" dirty="0" err="1">
+                <a:solidFill>
+                  <a:srgbClr val="646464"/>
+                </a:solidFill>
+                <a:latin typeface="Consolas" panose="020B0609020204030204" pitchFamily="49" charset="0"/>
+              </a:rPr>
+              <a:t>Override</a:t>
+            </a:r>
+            <a:endParaRPr lang="pt-BR" sz="1400" dirty="0">
+              <a:solidFill>
+                <a:srgbClr val="000000"/>
+              </a:solidFill>
+              <a:latin typeface="Consolas" panose="020B0609020204030204" pitchFamily="49" charset="0"/>
+            </a:endParaRPr>
+          </a:p>
+          <a:p>
+            <a:pPr indent="457200">
+              <a:spcBef>
+                <a:spcPts val="150"/>
+              </a:spcBef>
+              <a:spcAft>
+                <a:spcPts val="150"/>
+              </a:spcAft>
+            </a:pPr>
+            <a:r>
+              <a:rPr lang="pt-BR" sz="1400" b="1" dirty="0" err="1">
+                <a:solidFill>
+                  <a:srgbClr val="7F0055"/>
+                </a:solidFill>
+                <a:latin typeface="Consolas" panose="020B0609020204030204" pitchFamily="49" charset="0"/>
+              </a:rPr>
+              <a:t>public</a:t>
+            </a:r>
+            <a:r>
+              <a:rPr lang="pt-BR" sz="1400" dirty="0">
+                <a:solidFill>
+                  <a:srgbClr val="000000"/>
+                </a:solidFill>
+                <a:latin typeface="Consolas" panose="020B0609020204030204" pitchFamily="49" charset="0"/>
+              </a:rPr>
+              <a:t> </a:t>
+            </a:r>
+            <a:r>
+              <a:rPr lang="pt-BR" sz="1400" b="1" dirty="0" err="1">
+                <a:solidFill>
+                  <a:srgbClr val="7F0055"/>
+                </a:solidFill>
+                <a:latin typeface="Consolas" panose="020B0609020204030204" pitchFamily="49" charset="0"/>
+              </a:rPr>
+              <a:t>void</a:t>
+            </a:r>
+            <a:r>
+              <a:rPr lang="pt-BR" sz="1400" dirty="0">
+                <a:solidFill>
+                  <a:srgbClr val="000000"/>
+                </a:solidFill>
+                <a:latin typeface="Consolas" panose="020B0609020204030204" pitchFamily="49" charset="0"/>
+              </a:rPr>
+              <a:t> </a:t>
+            </a:r>
+            <a:r>
+              <a:rPr lang="pt-BR" sz="1400" dirty="0" err="1">
+                <a:solidFill>
+                  <a:srgbClr val="000000"/>
+                </a:solidFill>
+                <a:latin typeface="Consolas" panose="020B0609020204030204" pitchFamily="49" charset="0"/>
+              </a:rPr>
+              <a:t>emitirSom</a:t>
+            </a:r>
+            <a:r>
+              <a:rPr lang="pt-BR" sz="1400" dirty="0">
+                <a:solidFill>
+                  <a:srgbClr val="000000"/>
+                </a:solidFill>
+                <a:latin typeface="Consolas" panose="020B0609020204030204" pitchFamily="49" charset="0"/>
+              </a:rPr>
+              <a:t>() {</a:t>
+            </a:r>
+          </a:p>
+          <a:p>
+            <a:pPr indent="914400">
+              <a:spcBef>
+                <a:spcPts val="150"/>
+              </a:spcBef>
+              <a:spcAft>
+                <a:spcPts val="150"/>
+              </a:spcAft>
+            </a:pPr>
+            <a:r>
+              <a:rPr lang="pt-BR" sz="1400" dirty="0" err="1">
+                <a:solidFill>
+                  <a:srgbClr val="000000"/>
+                </a:solidFill>
+                <a:latin typeface="Consolas" panose="020B0609020204030204" pitchFamily="49" charset="0"/>
+              </a:rPr>
+              <a:t>System.</a:t>
+            </a:r>
+            <a:r>
+              <a:rPr lang="pt-BR" sz="1400" b="1" i="1" dirty="0" err="1">
+                <a:solidFill>
+                  <a:srgbClr val="0000C0"/>
+                </a:solidFill>
+                <a:latin typeface="Consolas" panose="020B0609020204030204" pitchFamily="49" charset="0"/>
+              </a:rPr>
+              <a:t>out</a:t>
+            </a:r>
+            <a:r>
+              <a:rPr lang="pt-BR" sz="1400" dirty="0" err="1">
+                <a:solidFill>
+                  <a:srgbClr val="000000"/>
+                </a:solidFill>
+                <a:latin typeface="Consolas" panose="020B0609020204030204" pitchFamily="49" charset="0"/>
+              </a:rPr>
+              <a:t>.println</a:t>
+            </a:r>
+            <a:r>
+              <a:rPr lang="pt-BR" sz="1400" dirty="0">
+                <a:solidFill>
+                  <a:srgbClr val="000000"/>
+                </a:solidFill>
+                <a:latin typeface="Consolas" panose="020B0609020204030204" pitchFamily="49" charset="0"/>
+              </a:rPr>
+              <a:t>(</a:t>
+            </a:r>
+            <a:r>
+              <a:rPr lang="pt-BR" sz="1400" dirty="0">
+                <a:solidFill>
+                  <a:srgbClr val="2A00FF"/>
+                </a:solidFill>
+                <a:latin typeface="Consolas" panose="020B0609020204030204" pitchFamily="49" charset="0"/>
+              </a:rPr>
+              <a:t>"Gato mia"</a:t>
+            </a:r>
+            <a:r>
+              <a:rPr lang="pt-BR" sz="1400" dirty="0">
+                <a:solidFill>
+                  <a:srgbClr val="000000"/>
+                </a:solidFill>
+                <a:latin typeface="Consolas" panose="020B0609020204030204" pitchFamily="49" charset="0"/>
+              </a:rPr>
+              <a:t>);</a:t>
+            </a:r>
+          </a:p>
+          <a:p>
+            <a:pPr indent="457200">
+              <a:spcBef>
+                <a:spcPts val="150"/>
+              </a:spcBef>
+              <a:spcAft>
+                <a:spcPts val="150"/>
+              </a:spcAft>
+            </a:pPr>
+            <a:r>
+              <a:rPr lang="pt-BR" sz="1400" dirty="0">
+                <a:solidFill>
+                  <a:srgbClr val="000000"/>
+                </a:solidFill>
+                <a:latin typeface="Consolas" panose="020B0609020204030204" pitchFamily="49" charset="0"/>
+              </a:rPr>
+              <a:t>}</a:t>
+            </a:r>
+          </a:p>
+          <a:p>
+            <a:pPr>
+              <a:spcBef>
+                <a:spcPts val="150"/>
+              </a:spcBef>
+              <a:spcAft>
+                <a:spcPts val="150"/>
+              </a:spcAft>
+            </a:pPr>
+            <a:r>
+              <a:rPr lang="pt-BR" sz="1400" dirty="0">
+                <a:solidFill>
+                  <a:srgbClr val="000000"/>
+                </a:solidFill>
+                <a:latin typeface="Consolas" panose="020B0609020204030204" pitchFamily="49" charset="0"/>
+              </a:rPr>
+              <a:t>}</a:t>
+            </a:r>
+          </a:p>
+        </p:txBody>
+      </p:sp>
+      <p:sp>
+        <p:nvSpPr>
+          <p:cNvPr id="7" name="CaixaDeTexto 6">
+            <a:extLst>
+              <a:ext uri="{FF2B5EF4-FFF2-40B4-BE49-F238E27FC236}">
+                <a16:creationId xmlns:a16="http://schemas.microsoft.com/office/drawing/2014/main" id="{EB5AEC25-BA37-441D-87EC-8DE38AED57BF}"/>
+              </a:ext>
+            </a:extLst>
+          </p:cNvPr>
+          <p:cNvSpPr txBox="1"/>
+          <p:nvPr/>
+        </p:nvSpPr>
+        <p:spPr>
+          <a:xfrm>
+            <a:off x="7567788" y="2514600"/>
+            <a:ext cx="2607734" cy="369332"/>
+          </a:xfrm>
+          <a:prstGeom prst="rect">
+            <a:avLst/>
+          </a:prstGeom>
+          <a:noFill/>
+        </p:spPr>
+        <p:txBody>
+          <a:bodyPr wrap="square" rtlCol="0">
+            <a:spAutoFit/>
+          </a:bodyPr>
+          <a:lstStyle/>
+          <a:p>
+            <a:pPr algn="ctr"/>
+            <a:r>
+              <a:rPr lang="pt-BR" dirty="0">
+                <a:latin typeface="Times New Roman" panose="02020603050405020304" pitchFamily="18" charset="0"/>
+                <a:cs typeface="Times New Roman" panose="02020603050405020304" pitchFamily="18" charset="0"/>
+              </a:rPr>
+              <a:t>Sobrescrita</a:t>
+            </a:r>
+          </a:p>
+        </p:txBody>
+      </p:sp>
+    </p:spTree>
+    <p:extLst>
+      <p:ext uri="{BB962C8B-B14F-4D97-AF65-F5344CB8AC3E}">
+        <p14:creationId xmlns:p14="http://schemas.microsoft.com/office/powerpoint/2010/main" val="2967410373"/>
+      </p:ext>
+    </p:extLst>
+  </p:cSld>
+  <p:clrMapOvr>
+    <a:masterClrMapping/>
+  </p:clrMapOvr>
+</p:sld>
+</file>
+
+<file path=ppt/slides/slide14.xml><?xml version="1.0" encoding="utf-8"?>
+<p:sld xmlns:a="http://schemas.openxmlformats.org/drawingml/2006/main" xmlns:r="http://schemas.openxmlformats.org/officeDocument/2006/relationships" xmlns:p="http://schemas.openxmlformats.org/presentationml/2006/main">
+  <p:cSld>
+    <p:spTree>
+      <p:nvGrpSpPr>
+        <p:cNvPr id="1" name=""/>
+        <p:cNvGrpSpPr/>
+        <p:nvPr/>
+      </p:nvGrpSpPr>
+      <p:grpSpPr>
+        <a:xfrm>
+          <a:off x="0" y="0"/>
+          <a:ext cx="0" cy="0"/>
+          <a:chOff x="0" y="0"/>
+          <a:chExt cx="0" cy="0"/>
+        </a:xfrm>
+      </p:grpSpPr>
+      <p:sp>
+        <p:nvSpPr>
+          <p:cNvPr id="2" name="Título 1">
+            <a:extLst>
+              <a:ext uri="{FF2B5EF4-FFF2-40B4-BE49-F238E27FC236}">
                 <a16:creationId xmlns:a16="http://schemas.microsoft.com/office/drawing/2014/main" id="{98F55CF7-7DD5-478F-8B89-574E79ED855F}"/>
               </a:ext>
             </a:extLst>
@@ -5253,7 +6619,7 @@
 </p:sld>
 </file>
 
-<file path=ppt/slides/slide12.xml><?xml version="1.0" encoding="utf-8"?>
+<file path=ppt/slides/slide15.xml><?xml version="1.0" encoding="utf-8"?>
 <p:sld xmlns:a="http://schemas.openxmlformats.org/drawingml/2006/main" xmlns:r="http://schemas.openxmlformats.org/officeDocument/2006/relationships" xmlns:p="http://schemas.openxmlformats.org/presentationml/2006/main">
   <p:cSld>
     <p:spTree>
@@ -5636,8 +7002,13 @@
           <a:p>
             <a:r>
               <a:rPr lang="pt-BR" dirty="0"/>
-              <a:t>Herança</a:t>
-            </a:r>
+              <a:t>Projeto </a:t>
+            </a:r>
+            <a:r>
+              <a:rPr lang="pt-BR" dirty="0" err="1"/>
+              <a:t>PetShop</a:t>
+            </a:r>
+            <a:endParaRPr lang="pt-BR" dirty="0"/>
           </a:p>
         </p:txBody>
       </p:sp>
@@ -6058,6 +7429,332 @@
           <p:cNvPr id="2" name="Título 1">
             <a:extLst>
               <a:ext uri="{FF2B5EF4-FFF2-40B4-BE49-F238E27FC236}">
+                <a16:creationId xmlns:a16="http://schemas.microsoft.com/office/drawing/2014/main" id="{C7C6DDAD-D8D2-9F2E-7451-BA09B0212C1E}"/>
+              </a:ext>
+            </a:extLst>
+          </p:cNvPr>
+          <p:cNvSpPr>
+            <a:spLocks noGrp="1"/>
+          </p:cNvSpPr>
+          <p:nvPr>
+            <p:ph type="title"/>
+          </p:nvPr>
+        </p:nvSpPr>
+        <p:spPr>
+          <a:xfrm>
+            <a:off x="749185" y="854420"/>
+            <a:ext cx="3944113" cy="448573"/>
+          </a:xfrm>
+        </p:spPr>
+        <p:txBody>
+          <a:bodyPr/>
+          <a:lstStyle/>
+          <a:p>
+            <a:r>
+              <a:rPr lang="pt-BR" dirty="0"/>
+              <a:t>Refletindo sobre o código</a:t>
+            </a:r>
+          </a:p>
+        </p:txBody>
+      </p:sp>
+      <p:sp>
+        <p:nvSpPr>
+          <p:cNvPr id="7" name="Espaço Reservado para Conteúdo 6">
+            <a:extLst>
+              <a:ext uri="{FF2B5EF4-FFF2-40B4-BE49-F238E27FC236}">
+                <a16:creationId xmlns:a16="http://schemas.microsoft.com/office/drawing/2014/main" id="{ECB123AA-9823-208E-5A53-59B81AC51F0C}"/>
+              </a:ext>
+            </a:extLst>
+          </p:cNvPr>
+          <p:cNvSpPr>
+            <a:spLocks noGrp="1"/>
+          </p:cNvSpPr>
+          <p:nvPr>
+            <p:ph idx="1"/>
+          </p:nvPr>
+        </p:nvSpPr>
+        <p:spPr/>
+        <p:txBody>
+          <a:bodyPr/>
+          <a:lstStyle/>
+          <a:p>
+            <a:r>
+              <a:rPr lang="pt-BR" dirty="0"/>
+              <a:t>Agora que temos o sistema funcionando, vamos refletir um pouco sobre o código que escrevemos.</a:t>
+            </a:r>
+          </a:p>
+          <a:p>
+            <a:endParaRPr lang="pt-BR" dirty="0"/>
+          </a:p>
+          <a:p>
+            <a:r>
+              <a:rPr lang="pt-BR" dirty="0"/>
+              <a:t>Percebam que nas três classes — Cachorro, Gato e Peixe — os atributos nome, idade e peso aparecem repetidos. O mesmo acontece com o método </a:t>
+            </a:r>
+            <a:r>
+              <a:rPr lang="pt-BR" dirty="0" err="1"/>
+              <a:t>exibirInfo</a:t>
+            </a:r>
+            <a:r>
+              <a:rPr lang="pt-BR" dirty="0"/>
+              <a:t>(), onde as linhas que exibem nome, idade e peso são praticamente idênticas nas três classes.</a:t>
+            </a:r>
+          </a:p>
+          <a:p>
+            <a:endParaRPr lang="pt-BR" dirty="0"/>
+          </a:p>
+          <a:p>
+            <a:r>
+              <a:rPr lang="pt-BR" dirty="0"/>
+              <a:t>Isso nos leva a uma pergunta importante: </a:t>
+            </a:r>
+            <a:r>
+              <a:rPr lang="pt-BR" b="1" dirty="0"/>
+              <a:t>existe uma forma melhor de organizar esse código?</a:t>
+            </a:r>
+            <a:endParaRPr lang="pt-BR" dirty="0"/>
+          </a:p>
+        </p:txBody>
+      </p:sp>
+      <p:pic>
+        <p:nvPicPr>
+          <p:cNvPr id="10" name="Imagem 9" descr="Ícone&#10;&#10;O conteúdo gerado por IA pode estar incorreto.">
+            <a:extLst>
+              <a:ext uri="{FF2B5EF4-FFF2-40B4-BE49-F238E27FC236}">
+                <a16:creationId xmlns:a16="http://schemas.microsoft.com/office/drawing/2014/main" id="{C8A9B681-A213-1D63-102F-A6588D09840B}"/>
+              </a:ext>
+            </a:extLst>
+          </p:cNvPr>
+          <p:cNvPicPr>
+            <a:picLocks noChangeAspect="1"/>
+          </p:cNvPicPr>
+          <p:nvPr/>
+        </p:nvPicPr>
+        <p:blipFill>
+          <a:blip r:embed="rId2">
+            <a:extLst>
+              <a:ext uri="{28A0092B-C50C-407E-A947-70E740481C1C}">
+                <a14:useLocalDpi xmlns:a14="http://schemas.microsoft.com/office/drawing/2010/main" val="0"/>
+              </a:ext>
+            </a:extLst>
+          </a:blip>
+          <a:stretch>
+            <a:fillRect/>
+          </a:stretch>
+        </p:blipFill>
+        <p:spPr>
+          <a:xfrm>
+            <a:off x="10277211" y="5131302"/>
+            <a:ext cx="1322442" cy="1322442"/>
+          </a:xfrm>
+          <a:prstGeom prst="rect">
+            <a:avLst/>
+          </a:prstGeom>
+        </p:spPr>
+      </p:pic>
+    </p:spTree>
+    <p:extLst>
+      <p:ext uri="{BB962C8B-B14F-4D97-AF65-F5344CB8AC3E}">
+        <p14:creationId xmlns:p14="http://schemas.microsoft.com/office/powerpoint/2010/main" val="4064300428"/>
+      </p:ext>
+    </p:extLst>
+  </p:cSld>
+  <p:clrMapOvr>
+    <a:masterClrMapping/>
+  </p:clrMapOvr>
+</p:sld>
+</file>
+
+<file path=ppt/slides/slide5.xml><?xml version="1.0" encoding="utf-8"?>
+<p:sld xmlns:a="http://schemas.openxmlformats.org/drawingml/2006/main" xmlns:r="http://schemas.openxmlformats.org/officeDocument/2006/relationships" xmlns:p="http://schemas.openxmlformats.org/presentationml/2006/main">
+  <p:cSld>
+    <p:spTree>
+      <p:nvGrpSpPr>
+        <p:cNvPr id="1" name=""/>
+        <p:cNvGrpSpPr/>
+        <p:nvPr/>
+      </p:nvGrpSpPr>
+      <p:grpSpPr>
+        <a:xfrm>
+          <a:off x="0" y="0"/>
+          <a:ext cx="0" cy="0"/>
+          <a:chOff x="0" y="0"/>
+          <a:chExt cx="0" cy="0"/>
+        </a:xfrm>
+      </p:grpSpPr>
+      <p:sp>
+        <p:nvSpPr>
+          <p:cNvPr id="2" name="Título 1">
+            <a:extLst>
+              <a:ext uri="{FF2B5EF4-FFF2-40B4-BE49-F238E27FC236}">
+                <a16:creationId xmlns:a16="http://schemas.microsoft.com/office/drawing/2014/main" id="{61230A2D-9D47-D7F2-956C-821760FCB6DA}"/>
+              </a:ext>
+            </a:extLst>
+          </p:cNvPr>
+          <p:cNvSpPr>
+            <a:spLocks noGrp="1"/>
+          </p:cNvSpPr>
+          <p:nvPr>
+            <p:ph type="title"/>
+          </p:nvPr>
+        </p:nvSpPr>
+        <p:spPr/>
+        <p:txBody>
+          <a:bodyPr/>
+          <a:lstStyle/>
+          <a:p>
+            <a:r>
+              <a:rPr lang="pt-BR" dirty="0"/>
+              <a:t>Podemos melhorar isso?</a:t>
+            </a:r>
+          </a:p>
+        </p:txBody>
+      </p:sp>
+      <p:sp>
+        <p:nvSpPr>
+          <p:cNvPr id="3" name="Espaço Reservado para Conteúdo 2">
+            <a:extLst>
+              <a:ext uri="{FF2B5EF4-FFF2-40B4-BE49-F238E27FC236}">
+                <a16:creationId xmlns:a16="http://schemas.microsoft.com/office/drawing/2014/main" id="{0D2CEFC1-099D-3C45-733B-E3B41045F9B6}"/>
+              </a:ext>
+            </a:extLst>
+          </p:cNvPr>
+          <p:cNvSpPr>
+            <a:spLocks noGrp="1"/>
+          </p:cNvSpPr>
+          <p:nvPr>
+            <p:ph idx="1"/>
+          </p:nvPr>
+        </p:nvSpPr>
+        <p:spPr/>
+        <p:txBody>
+          <a:bodyPr/>
+          <a:lstStyle/>
+          <a:p>
+            <a:r>
+              <a:rPr lang="pt-BR" dirty="0"/>
+              <a:t>Sim, existe. E é exatamente aqui que entra a herança.</a:t>
+            </a:r>
+          </a:p>
+          <a:p>
+            <a:endParaRPr lang="pt-BR" dirty="0"/>
+          </a:p>
+          <a:p>
+            <a:r>
+              <a:rPr lang="pt-BR" dirty="0"/>
+              <a:t>A herança nos permite identificar o que é comum entre as classes e mover esses atributos e métodos para um único lugar — a superclasse. As subclasses herdam tudo isso automaticamente, sem precisar repetir nada, e definem apenas o que é exclusivo delas.</a:t>
+            </a:r>
+          </a:p>
+          <a:p>
+            <a:endParaRPr lang="pt-BR" dirty="0"/>
+          </a:p>
+          <a:p>
+            <a:r>
+              <a:rPr lang="pt-BR" dirty="0"/>
+              <a:t>No nosso caso, Cachorro, Gato e Peixe são todos animais. Faz todo sentido criar uma classe Animal com os atributos em comum, e deixar cada subclasse com apenas o que é seu — raça para o Cachorro, cor para o Gato e espécie para o Peixe.</a:t>
+            </a:r>
+          </a:p>
+        </p:txBody>
+      </p:sp>
+    </p:spTree>
+    <p:extLst>
+      <p:ext uri="{BB962C8B-B14F-4D97-AF65-F5344CB8AC3E}">
+        <p14:creationId xmlns:p14="http://schemas.microsoft.com/office/powerpoint/2010/main" val="2529941980"/>
+      </p:ext>
+    </p:extLst>
+  </p:cSld>
+  <p:clrMapOvr>
+    <a:masterClrMapping/>
+  </p:clrMapOvr>
+</p:sld>
+</file>
+
+<file path=ppt/slides/slide6.xml><?xml version="1.0" encoding="utf-8"?>
+<p:sld xmlns:a="http://schemas.openxmlformats.org/drawingml/2006/main" xmlns:r="http://schemas.openxmlformats.org/officeDocument/2006/relationships" xmlns:p="http://schemas.openxmlformats.org/presentationml/2006/main">
+  <p:cSld>
+    <p:spTree>
+      <p:nvGrpSpPr>
+        <p:cNvPr id="1" name="">
+          <a:extLst>
+            <a:ext uri="{FF2B5EF4-FFF2-40B4-BE49-F238E27FC236}">
+              <a16:creationId xmlns:a16="http://schemas.microsoft.com/office/drawing/2014/main" id="{42F5E181-8722-C5FC-12C0-99072E52F1AE}"/>
+            </a:ext>
+          </a:extLst>
+        </p:cNvPr>
+        <p:cNvGrpSpPr/>
+        <p:nvPr/>
+      </p:nvGrpSpPr>
+      <p:grpSpPr>
+        <a:xfrm>
+          <a:off x="0" y="0"/>
+          <a:ext cx="0" cy="0"/>
+          <a:chOff x="0" y="0"/>
+          <a:chExt cx="0" cy="0"/>
+        </a:xfrm>
+      </p:grpSpPr>
+      <p:sp>
+        <p:nvSpPr>
+          <p:cNvPr id="2" name="Título 1">
+            <a:extLst>
+              <a:ext uri="{FF2B5EF4-FFF2-40B4-BE49-F238E27FC236}">
+                <a16:creationId xmlns:a16="http://schemas.microsoft.com/office/drawing/2014/main" id="{DDBEF1DF-A2C5-0E02-6035-07349361421D}"/>
+              </a:ext>
+            </a:extLst>
+          </p:cNvPr>
+          <p:cNvSpPr>
+            <a:spLocks noGrp="1"/>
+          </p:cNvSpPr>
+          <p:nvPr>
+            <p:ph type="title"/>
+          </p:nvPr>
+        </p:nvSpPr>
+        <p:spPr/>
+        <p:txBody>
+          <a:bodyPr/>
+          <a:lstStyle/>
+          <a:p>
+            <a:r>
+              <a:rPr lang="pt-BR" dirty="0"/>
+              <a:t>Atributos e Métodos com Herança</a:t>
+            </a:r>
+          </a:p>
+        </p:txBody>
+      </p:sp>
+    </p:spTree>
+    <p:extLst>
+      <p:ext uri="{BB962C8B-B14F-4D97-AF65-F5344CB8AC3E}">
+        <p14:creationId xmlns:p14="http://schemas.microsoft.com/office/powerpoint/2010/main" val="386633516"/>
+      </p:ext>
+    </p:extLst>
+  </p:cSld>
+  <p:clrMapOvr>
+    <a:masterClrMapping/>
+  </p:clrMapOvr>
+</p:sld>
+</file>
+
+<file path=ppt/slides/slide7.xml><?xml version="1.0" encoding="utf-8"?>
+<p:sld xmlns:a="http://schemas.openxmlformats.org/drawingml/2006/main" xmlns:r="http://schemas.openxmlformats.org/officeDocument/2006/relationships" xmlns:p="http://schemas.openxmlformats.org/presentationml/2006/main">
+  <p:cSld>
+    <p:spTree>
+      <p:nvGrpSpPr>
+        <p:cNvPr id="1" name=""/>
+        <p:cNvGrpSpPr/>
+        <p:nvPr/>
+      </p:nvGrpSpPr>
+      <p:grpSpPr>
+        <a:xfrm>
+          <a:off x="0" y="0"/>
+          <a:ext cx="0" cy="0"/>
+          <a:chOff x="0" y="0"/>
+          <a:chExt cx="0" cy="0"/>
+        </a:xfrm>
+      </p:grpSpPr>
+      <p:sp>
+        <p:nvSpPr>
+          <p:cNvPr id="2" name="Título 1">
+            <a:extLst>
+              <a:ext uri="{FF2B5EF4-FFF2-40B4-BE49-F238E27FC236}">
                 <a16:creationId xmlns:a16="http://schemas.microsoft.com/office/drawing/2014/main" id="{0D84D924-540A-4316-943E-C6BA50E63230}"/>
               </a:ext>
             </a:extLst>
@@ -6404,7 +8101,7 @@
 </p:sld>
 </file>
 
-<file path=ppt/slides/slide5.xml><?xml version="1.0" encoding="utf-8"?>
+<file path=ppt/slides/slide8.xml><?xml version="1.0" encoding="utf-8"?>
 <p:sld xmlns:a="http://schemas.openxmlformats.org/drawingml/2006/main" xmlns:r="http://schemas.openxmlformats.org/officeDocument/2006/relationships" xmlns:p="http://schemas.openxmlformats.org/presentationml/2006/main">
   <p:cSld>
     <p:spTree>
@@ -6689,1876 +8386,6 @@
 </p:sld>
 </file>
 
-<file path=ppt/slides/slide6.xml><?xml version="1.0" encoding="utf-8"?>
-<p:sld xmlns:a="http://schemas.openxmlformats.org/drawingml/2006/main" xmlns:r="http://schemas.openxmlformats.org/officeDocument/2006/relationships" xmlns:p="http://schemas.openxmlformats.org/presentationml/2006/main">
-  <p:cSld>
-    <p:spTree>
-      <p:nvGrpSpPr>
-        <p:cNvPr id="1" name=""/>
-        <p:cNvGrpSpPr/>
-        <p:nvPr/>
-      </p:nvGrpSpPr>
-      <p:grpSpPr>
-        <a:xfrm>
-          <a:off x="0" y="0"/>
-          <a:ext cx="0" cy="0"/>
-          <a:chOff x="0" y="0"/>
-          <a:chExt cx="0" cy="0"/>
-        </a:xfrm>
-      </p:grpSpPr>
-      <p:sp>
-        <p:nvSpPr>
-          <p:cNvPr id="2" name="Título 1">
-            <a:extLst>
-              <a:ext uri="{FF2B5EF4-FFF2-40B4-BE49-F238E27FC236}">
-                <a16:creationId xmlns:a16="http://schemas.microsoft.com/office/drawing/2014/main" id="{13BF5B45-63CF-41F7-8496-D896490AE335}"/>
-              </a:ext>
-            </a:extLst>
-          </p:cNvPr>
-          <p:cNvSpPr>
-            <a:spLocks noGrp="1"/>
-          </p:cNvSpPr>
-          <p:nvPr>
-            <p:ph type="title"/>
-          </p:nvPr>
-        </p:nvSpPr>
-        <p:spPr/>
-        <p:txBody>
-          <a:bodyPr/>
-          <a:lstStyle/>
-          <a:p>
-            <a:r>
-              <a:rPr lang="pt-BR" dirty="0"/>
-              <a:t>Construtor </a:t>
-            </a:r>
-            <a:r>
-              <a:rPr lang="pt-BR" dirty="0" err="1"/>
-              <a:t>Super</a:t>
-            </a:r>
-            <a:r>
-              <a:rPr lang="pt-BR" dirty="0"/>
-              <a:t>()</a:t>
-            </a:r>
-          </a:p>
-        </p:txBody>
-      </p:sp>
-      <p:sp>
-        <p:nvSpPr>
-          <p:cNvPr id="3" name="Espaço Reservado para Conteúdo 2">
-            <a:extLst>
-              <a:ext uri="{FF2B5EF4-FFF2-40B4-BE49-F238E27FC236}">
-                <a16:creationId xmlns:a16="http://schemas.microsoft.com/office/drawing/2014/main" id="{05C539C4-EDD4-414C-ADA6-9C2633603CB2}"/>
-              </a:ext>
-            </a:extLst>
-          </p:cNvPr>
-          <p:cNvSpPr>
-            <a:spLocks noGrp="1"/>
-          </p:cNvSpPr>
-          <p:nvPr>
-            <p:ph idx="1"/>
-          </p:nvPr>
-        </p:nvSpPr>
-        <p:spPr>
-          <a:xfrm>
-            <a:off x="592347" y="1844675"/>
-            <a:ext cx="11007306" cy="1473291"/>
-          </a:xfrm>
-        </p:spPr>
-        <p:txBody>
-          <a:bodyPr/>
-          <a:lstStyle/>
-          <a:p>
-            <a:r>
-              <a:rPr lang="pt-BR" sz="1800" dirty="0"/>
-              <a:t>A palavra-chave </a:t>
-            </a:r>
-            <a:r>
-              <a:rPr lang="pt-BR" sz="1800" dirty="0" err="1"/>
-              <a:t>super</a:t>
-            </a:r>
-            <a:r>
-              <a:rPr lang="pt-BR" sz="1800" dirty="0"/>
-              <a:t> é utilizada para se referir à superclasse (classe pai) de uma classe derivada (classe filha). Ela é especialmente útil quando há a necessidade de reutilizar atributos ou métodos da classe pai, evitando a repetição de código.</a:t>
-            </a:r>
-          </a:p>
-        </p:txBody>
-      </p:sp>
-      <p:sp>
-        <p:nvSpPr>
-          <p:cNvPr id="6" name="CaixaDeTexto 5">
-            <a:extLst>
-              <a:ext uri="{FF2B5EF4-FFF2-40B4-BE49-F238E27FC236}">
-                <a16:creationId xmlns:a16="http://schemas.microsoft.com/office/drawing/2014/main" id="{2B572424-897C-4079-B040-AC0C43E820EC}"/>
-              </a:ext>
-            </a:extLst>
-          </p:cNvPr>
-          <p:cNvSpPr txBox="1"/>
-          <p:nvPr/>
-        </p:nvSpPr>
-        <p:spPr>
-          <a:xfrm>
-            <a:off x="5538260" y="3361405"/>
-            <a:ext cx="1115480" cy="338554"/>
-          </a:xfrm>
-          <a:prstGeom prst="rect">
-            <a:avLst/>
-          </a:prstGeom>
-          <a:noFill/>
-        </p:spPr>
-        <p:txBody>
-          <a:bodyPr wrap="square" rtlCol="0">
-            <a:spAutoFit/>
-          </a:bodyPr>
-          <a:lstStyle/>
-          <a:p>
-            <a:pPr algn="ctr"/>
-            <a:r>
-              <a:rPr lang="pt-BR" sz="1600" dirty="0">
-                <a:latin typeface="Times New Roman" panose="02020603050405020304" pitchFamily="18" charset="0"/>
-                <a:cs typeface="Times New Roman" panose="02020603050405020304" pitchFamily="18" charset="0"/>
-              </a:rPr>
-              <a:t>Classe Pai</a:t>
-            </a:r>
-          </a:p>
-        </p:txBody>
-      </p:sp>
-      <p:sp>
-        <p:nvSpPr>
-          <p:cNvPr id="8" name="Retângulo 7">
-            <a:extLst>
-              <a:ext uri="{FF2B5EF4-FFF2-40B4-BE49-F238E27FC236}">
-                <a16:creationId xmlns:a16="http://schemas.microsoft.com/office/drawing/2014/main" id="{974DDB22-2288-4893-8D35-C51A4D00B151}"/>
-              </a:ext>
-            </a:extLst>
-          </p:cNvPr>
-          <p:cNvSpPr/>
-          <p:nvPr/>
-        </p:nvSpPr>
-        <p:spPr>
-          <a:xfrm>
-            <a:off x="2960279" y="3743397"/>
-            <a:ext cx="6271441" cy="2749471"/>
-          </a:xfrm>
-          <a:prstGeom prst="rect">
-            <a:avLst/>
-          </a:prstGeom>
-        </p:spPr>
-        <p:txBody>
-          <a:bodyPr wrap="square">
-            <a:spAutoFit/>
-          </a:bodyPr>
-          <a:lstStyle/>
-          <a:p>
-            <a:pPr>
-              <a:spcBef>
-                <a:spcPts val="150"/>
-              </a:spcBef>
-              <a:spcAft>
-                <a:spcPts val="150"/>
-              </a:spcAft>
-            </a:pPr>
-            <a:r>
-              <a:rPr lang="pt-BR" sz="1600" b="1" dirty="0" err="1">
-                <a:solidFill>
-                  <a:srgbClr val="7F0055"/>
-                </a:solidFill>
-                <a:latin typeface="Consolas" panose="020B0609020204030204" pitchFamily="49" charset="0"/>
-              </a:rPr>
-              <a:t>public</a:t>
-            </a:r>
-            <a:r>
-              <a:rPr lang="pt-BR" sz="1600" dirty="0">
-                <a:solidFill>
-                  <a:srgbClr val="000000"/>
-                </a:solidFill>
-                <a:latin typeface="Consolas" panose="020B0609020204030204" pitchFamily="49" charset="0"/>
-              </a:rPr>
-              <a:t> </a:t>
-            </a:r>
-            <a:r>
-              <a:rPr lang="pt-BR" sz="1600" b="1" dirty="0" err="1">
-                <a:solidFill>
-                  <a:srgbClr val="7F0055"/>
-                </a:solidFill>
-                <a:latin typeface="Consolas" panose="020B0609020204030204" pitchFamily="49" charset="0"/>
-              </a:rPr>
-              <a:t>class</a:t>
-            </a:r>
-            <a:r>
-              <a:rPr lang="pt-BR" sz="1600" dirty="0">
-                <a:solidFill>
-                  <a:srgbClr val="000000"/>
-                </a:solidFill>
-                <a:latin typeface="Consolas" panose="020B0609020204030204" pitchFamily="49" charset="0"/>
-              </a:rPr>
-              <a:t> </a:t>
-            </a:r>
-            <a:r>
-              <a:rPr lang="pt-BR" sz="1600" dirty="0" err="1">
-                <a:solidFill>
-                  <a:srgbClr val="000000"/>
-                </a:solidFill>
-                <a:latin typeface="Consolas" panose="020B0609020204030204" pitchFamily="49" charset="0"/>
-              </a:rPr>
-              <a:t>Funcionarios</a:t>
-            </a:r>
-            <a:r>
-              <a:rPr lang="pt-BR" sz="1600" dirty="0">
-                <a:solidFill>
-                  <a:srgbClr val="000000"/>
-                </a:solidFill>
-                <a:latin typeface="Consolas" panose="020B0609020204030204" pitchFamily="49" charset="0"/>
-              </a:rPr>
-              <a:t> {</a:t>
-            </a:r>
-          </a:p>
-          <a:p>
-            <a:pPr lvl="1">
-              <a:spcBef>
-                <a:spcPts val="150"/>
-              </a:spcBef>
-              <a:spcAft>
-                <a:spcPts val="150"/>
-              </a:spcAft>
-            </a:pPr>
-            <a:r>
-              <a:rPr lang="pt-BR" sz="1600" b="1" dirty="0" err="1">
-                <a:solidFill>
-                  <a:srgbClr val="7F0055"/>
-                </a:solidFill>
-                <a:latin typeface="Consolas" panose="020B0609020204030204" pitchFamily="49" charset="0"/>
-              </a:rPr>
-              <a:t>private</a:t>
-            </a:r>
-            <a:r>
-              <a:rPr lang="pt-BR" sz="1600" dirty="0">
-                <a:solidFill>
-                  <a:srgbClr val="000000"/>
-                </a:solidFill>
-                <a:latin typeface="Consolas" panose="020B0609020204030204" pitchFamily="49" charset="0"/>
-              </a:rPr>
-              <a:t> String </a:t>
-            </a:r>
-            <a:r>
-              <a:rPr lang="pt-BR" sz="1600" u="sng" dirty="0">
-                <a:solidFill>
-                  <a:srgbClr val="0000C0"/>
-                </a:solidFill>
-                <a:latin typeface="Consolas" panose="020B0609020204030204" pitchFamily="49" charset="0"/>
-              </a:rPr>
-              <a:t>nome</a:t>
-            </a:r>
-            <a:r>
-              <a:rPr lang="pt-BR" sz="1600" dirty="0">
-                <a:solidFill>
-                  <a:srgbClr val="000000"/>
-                </a:solidFill>
-                <a:latin typeface="Consolas" panose="020B0609020204030204" pitchFamily="49" charset="0"/>
-              </a:rPr>
-              <a:t>;</a:t>
-            </a:r>
-          </a:p>
-          <a:p>
-            <a:pPr lvl="1">
-              <a:spcBef>
-                <a:spcPts val="150"/>
-              </a:spcBef>
-              <a:spcAft>
-                <a:spcPts val="150"/>
-              </a:spcAft>
-            </a:pPr>
-            <a:r>
-              <a:rPr lang="pt-BR" sz="1600" b="1" dirty="0" err="1">
-                <a:solidFill>
-                  <a:srgbClr val="7F0055"/>
-                </a:solidFill>
-                <a:latin typeface="Consolas" panose="020B0609020204030204" pitchFamily="49" charset="0"/>
-              </a:rPr>
-              <a:t>private</a:t>
-            </a:r>
-            <a:r>
-              <a:rPr lang="pt-BR" sz="1600" dirty="0">
-                <a:solidFill>
-                  <a:srgbClr val="000000"/>
-                </a:solidFill>
-                <a:latin typeface="Consolas" panose="020B0609020204030204" pitchFamily="49" charset="0"/>
-              </a:rPr>
-              <a:t> </a:t>
-            </a:r>
-            <a:r>
-              <a:rPr lang="pt-BR" sz="1600" b="1" dirty="0">
-                <a:solidFill>
-                  <a:srgbClr val="7F0055"/>
-                </a:solidFill>
-                <a:latin typeface="Consolas" panose="020B0609020204030204" pitchFamily="49" charset="0"/>
-              </a:rPr>
-              <a:t>double</a:t>
-            </a:r>
-            <a:r>
-              <a:rPr lang="pt-BR" sz="1600" dirty="0">
-                <a:solidFill>
-                  <a:srgbClr val="000000"/>
-                </a:solidFill>
-                <a:latin typeface="Consolas" panose="020B0609020204030204" pitchFamily="49" charset="0"/>
-              </a:rPr>
-              <a:t> </a:t>
-            </a:r>
-            <a:r>
-              <a:rPr lang="pt-BR" sz="1600" u="sng" dirty="0">
-                <a:solidFill>
-                  <a:srgbClr val="0000C0"/>
-                </a:solidFill>
-                <a:latin typeface="Consolas" panose="020B0609020204030204" pitchFamily="49" charset="0"/>
-              </a:rPr>
-              <a:t>salario</a:t>
-            </a:r>
-            <a:r>
-              <a:rPr lang="pt-BR" sz="1600" dirty="0">
-                <a:solidFill>
-                  <a:srgbClr val="000000"/>
-                </a:solidFill>
-                <a:latin typeface="Consolas" panose="020B0609020204030204" pitchFamily="49" charset="0"/>
-              </a:rPr>
-              <a:t>;</a:t>
-            </a:r>
-          </a:p>
-          <a:p>
-            <a:pPr lvl="1">
-              <a:spcBef>
-                <a:spcPts val="150"/>
-              </a:spcBef>
-              <a:spcAft>
-                <a:spcPts val="150"/>
-              </a:spcAft>
-            </a:pPr>
-            <a:endParaRPr lang="pt-BR" sz="1600" dirty="0">
-              <a:solidFill>
-                <a:srgbClr val="000000"/>
-              </a:solidFill>
-              <a:latin typeface="Consolas" panose="020B0609020204030204" pitchFamily="49" charset="0"/>
-            </a:endParaRPr>
-          </a:p>
-          <a:p>
-            <a:pPr lvl="1">
-              <a:spcBef>
-                <a:spcPts val="150"/>
-              </a:spcBef>
-              <a:spcAft>
-                <a:spcPts val="150"/>
-              </a:spcAft>
-            </a:pPr>
-            <a:r>
-              <a:rPr lang="pt-BR" sz="1600" b="1" dirty="0" err="1">
-                <a:solidFill>
-                  <a:srgbClr val="7F0055"/>
-                </a:solidFill>
-                <a:latin typeface="Consolas" panose="020B0609020204030204" pitchFamily="49" charset="0"/>
-              </a:rPr>
-              <a:t>public</a:t>
-            </a:r>
-            <a:r>
-              <a:rPr lang="pt-BR" sz="1600" dirty="0">
-                <a:solidFill>
-                  <a:srgbClr val="000000"/>
-                </a:solidFill>
-                <a:latin typeface="Consolas" panose="020B0609020204030204" pitchFamily="49" charset="0"/>
-              </a:rPr>
-              <a:t> </a:t>
-            </a:r>
-            <a:r>
-              <a:rPr lang="pt-BR" sz="1600" dirty="0" err="1">
-                <a:solidFill>
-                  <a:srgbClr val="000000"/>
-                </a:solidFill>
-                <a:latin typeface="Consolas" panose="020B0609020204030204" pitchFamily="49" charset="0"/>
-              </a:rPr>
-              <a:t>Funcionarios</a:t>
-            </a:r>
-            <a:r>
-              <a:rPr lang="pt-BR" sz="1600" dirty="0">
-                <a:solidFill>
-                  <a:srgbClr val="000000"/>
-                </a:solidFill>
-                <a:latin typeface="Consolas" panose="020B0609020204030204" pitchFamily="49" charset="0"/>
-              </a:rPr>
-              <a:t>(String </a:t>
-            </a:r>
-            <a:r>
-              <a:rPr lang="pt-BR" sz="1600" dirty="0">
-                <a:solidFill>
-                  <a:srgbClr val="6A3E3E"/>
-                </a:solidFill>
-                <a:latin typeface="Consolas" panose="020B0609020204030204" pitchFamily="49" charset="0"/>
-              </a:rPr>
-              <a:t>nome</a:t>
-            </a:r>
-            <a:r>
-              <a:rPr lang="pt-BR" sz="1600" dirty="0">
-                <a:solidFill>
-                  <a:srgbClr val="000000"/>
-                </a:solidFill>
-                <a:latin typeface="Consolas" panose="020B0609020204030204" pitchFamily="49" charset="0"/>
-              </a:rPr>
-              <a:t>, </a:t>
-            </a:r>
-            <a:r>
-              <a:rPr lang="pt-BR" sz="1600" b="1" dirty="0">
-                <a:solidFill>
-                  <a:srgbClr val="7F0055"/>
-                </a:solidFill>
-                <a:latin typeface="Consolas" panose="020B0609020204030204" pitchFamily="49" charset="0"/>
-              </a:rPr>
-              <a:t>double</a:t>
-            </a:r>
-            <a:r>
-              <a:rPr lang="pt-BR" sz="1600" dirty="0">
-                <a:solidFill>
-                  <a:srgbClr val="000000"/>
-                </a:solidFill>
-                <a:latin typeface="Consolas" panose="020B0609020204030204" pitchFamily="49" charset="0"/>
-              </a:rPr>
-              <a:t> </a:t>
-            </a:r>
-            <a:r>
-              <a:rPr lang="pt-BR" sz="1600" dirty="0">
-                <a:solidFill>
-                  <a:srgbClr val="6A3E3E"/>
-                </a:solidFill>
-                <a:latin typeface="Consolas" panose="020B0609020204030204" pitchFamily="49" charset="0"/>
-              </a:rPr>
-              <a:t>salario</a:t>
-            </a:r>
-            <a:r>
-              <a:rPr lang="pt-BR" sz="1600" dirty="0">
-                <a:solidFill>
-                  <a:srgbClr val="000000"/>
-                </a:solidFill>
-                <a:latin typeface="Consolas" panose="020B0609020204030204" pitchFamily="49" charset="0"/>
-              </a:rPr>
-              <a:t>) {</a:t>
-            </a:r>
-          </a:p>
-          <a:p>
-            <a:pPr lvl="2">
-              <a:spcBef>
-                <a:spcPts val="150"/>
-              </a:spcBef>
-              <a:spcAft>
-                <a:spcPts val="150"/>
-              </a:spcAft>
-            </a:pPr>
-            <a:r>
-              <a:rPr lang="pt-BR" sz="1600" b="1" dirty="0" err="1">
-                <a:solidFill>
-                  <a:srgbClr val="7F0055"/>
-                </a:solidFill>
-                <a:latin typeface="Consolas" panose="020B0609020204030204" pitchFamily="49" charset="0"/>
-              </a:rPr>
-              <a:t>this</a:t>
-            </a:r>
-            <a:r>
-              <a:rPr lang="pt-BR" sz="1600" dirty="0" err="1">
-                <a:solidFill>
-                  <a:srgbClr val="000000"/>
-                </a:solidFill>
-                <a:latin typeface="Consolas" panose="020B0609020204030204" pitchFamily="49" charset="0"/>
-              </a:rPr>
-              <a:t>.</a:t>
-            </a:r>
-            <a:r>
-              <a:rPr lang="pt-BR" sz="1600" dirty="0" err="1">
-                <a:solidFill>
-                  <a:srgbClr val="0000C0"/>
-                </a:solidFill>
-                <a:latin typeface="Consolas" panose="020B0609020204030204" pitchFamily="49" charset="0"/>
-              </a:rPr>
-              <a:t>nome</a:t>
-            </a:r>
-            <a:r>
-              <a:rPr lang="pt-BR" sz="1600" dirty="0">
-                <a:solidFill>
-                  <a:srgbClr val="000000"/>
-                </a:solidFill>
-                <a:latin typeface="Consolas" panose="020B0609020204030204" pitchFamily="49" charset="0"/>
-              </a:rPr>
-              <a:t> = </a:t>
-            </a:r>
-            <a:r>
-              <a:rPr lang="pt-BR" sz="1600" dirty="0">
-                <a:solidFill>
-                  <a:srgbClr val="6A3E3E"/>
-                </a:solidFill>
-                <a:latin typeface="Consolas" panose="020B0609020204030204" pitchFamily="49" charset="0"/>
-              </a:rPr>
-              <a:t>nome</a:t>
-            </a:r>
-            <a:r>
-              <a:rPr lang="pt-BR" sz="1600" dirty="0">
-                <a:solidFill>
-                  <a:srgbClr val="000000"/>
-                </a:solidFill>
-                <a:latin typeface="Consolas" panose="020B0609020204030204" pitchFamily="49" charset="0"/>
-              </a:rPr>
-              <a:t>;</a:t>
-            </a:r>
-          </a:p>
-          <a:p>
-            <a:pPr lvl="2">
-              <a:spcBef>
-                <a:spcPts val="150"/>
-              </a:spcBef>
-              <a:spcAft>
-                <a:spcPts val="150"/>
-              </a:spcAft>
-            </a:pPr>
-            <a:r>
-              <a:rPr lang="pt-BR" sz="1600" b="1" dirty="0" err="1">
-                <a:solidFill>
-                  <a:srgbClr val="7F0055"/>
-                </a:solidFill>
-                <a:latin typeface="Consolas" panose="020B0609020204030204" pitchFamily="49" charset="0"/>
-              </a:rPr>
-              <a:t>this</a:t>
-            </a:r>
-            <a:r>
-              <a:rPr lang="pt-BR" sz="1600" dirty="0" err="1">
-                <a:solidFill>
-                  <a:srgbClr val="000000"/>
-                </a:solidFill>
-                <a:latin typeface="Consolas" panose="020B0609020204030204" pitchFamily="49" charset="0"/>
-              </a:rPr>
-              <a:t>.</a:t>
-            </a:r>
-            <a:r>
-              <a:rPr lang="pt-BR" sz="1600" dirty="0" err="1">
-                <a:solidFill>
-                  <a:srgbClr val="0000C0"/>
-                </a:solidFill>
-                <a:latin typeface="Consolas" panose="020B0609020204030204" pitchFamily="49" charset="0"/>
-              </a:rPr>
-              <a:t>salario</a:t>
-            </a:r>
-            <a:r>
-              <a:rPr lang="pt-BR" sz="1600" dirty="0">
-                <a:solidFill>
-                  <a:srgbClr val="000000"/>
-                </a:solidFill>
-                <a:latin typeface="Consolas" panose="020B0609020204030204" pitchFamily="49" charset="0"/>
-              </a:rPr>
-              <a:t> = </a:t>
-            </a:r>
-            <a:r>
-              <a:rPr lang="pt-BR" sz="1600" dirty="0">
-                <a:solidFill>
-                  <a:srgbClr val="6A3E3E"/>
-                </a:solidFill>
-                <a:latin typeface="Consolas" panose="020B0609020204030204" pitchFamily="49" charset="0"/>
-              </a:rPr>
-              <a:t>salario</a:t>
-            </a:r>
-            <a:r>
-              <a:rPr lang="pt-BR" sz="1600" dirty="0">
-                <a:solidFill>
-                  <a:srgbClr val="000000"/>
-                </a:solidFill>
-                <a:latin typeface="Consolas" panose="020B0609020204030204" pitchFamily="49" charset="0"/>
-              </a:rPr>
-              <a:t>;</a:t>
-            </a:r>
-          </a:p>
-          <a:p>
-            <a:pPr marL="457200" lvl="2">
-              <a:spcBef>
-                <a:spcPts val="150"/>
-              </a:spcBef>
-              <a:spcAft>
-                <a:spcPts val="150"/>
-              </a:spcAft>
-            </a:pPr>
-            <a:r>
-              <a:rPr lang="pt-BR" sz="1600" dirty="0">
-                <a:solidFill>
-                  <a:srgbClr val="000000"/>
-                </a:solidFill>
-                <a:latin typeface="Consolas" panose="020B0609020204030204" pitchFamily="49" charset="0"/>
-              </a:rPr>
-              <a:t>}</a:t>
-            </a:r>
-          </a:p>
-          <a:p>
-            <a:pPr>
-              <a:spcBef>
-                <a:spcPts val="150"/>
-              </a:spcBef>
-              <a:spcAft>
-                <a:spcPts val="150"/>
-              </a:spcAft>
-            </a:pPr>
-            <a:r>
-              <a:rPr lang="pt-BR" sz="1600" dirty="0">
-                <a:solidFill>
-                  <a:srgbClr val="000000"/>
-                </a:solidFill>
-                <a:latin typeface="Consolas" panose="020B0609020204030204" pitchFamily="49" charset="0"/>
-              </a:rPr>
-              <a:t>}</a:t>
-            </a:r>
-          </a:p>
-        </p:txBody>
-      </p:sp>
-    </p:spTree>
-    <p:extLst>
-      <p:ext uri="{BB962C8B-B14F-4D97-AF65-F5344CB8AC3E}">
-        <p14:creationId xmlns:p14="http://schemas.microsoft.com/office/powerpoint/2010/main" val="229873426"/>
-      </p:ext>
-    </p:extLst>
-  </p:cSld>
-  <p:clrMapOvr>
-    <a:masterClrMapping/>
-  </p:clrMapOvr>
-</p:sld>
-</file>
-
-<file path=ppt/slides/slide7.xml><?xml version="1.0" encoding="utf-8"?>
-<p:sld xmlns:a="http://schemas.openxmlformats.org/drawingml/2006/main" xmlns:r="http://schemas.openxmlformats.org/officeDocument/2006/relationships" xmlns:p="http://schemas.openxmlformats.org/presentationml/2006/main">
-  <p:cSld>
-    <p:spTree>
-      <p:nvGrpSpPr>
-        <p:cNvPr id="1" name=""/>
-        <p:cNvGrpSpPr/>
-        <p:nvPr/>
-      </p:nvGrpSpPr>
-      <p:grpSpPr>
-        <a:xfrm>
-          <a:off x="0" y="0"/>
-          <a:ext cx="0" cy="0"/>
-          <a:chOff x="0" y="0"/>
-          <a:chExt cx="0" cy="0"/>
-        </a:xfrm>
-      </p:grpSpPr>
-      <p:sp>
-        <p:nvSpPr>
-          <p:cNvPr id="2" name="Título 1">
-            <a:extLst>
-              <a:ext uri="{FF2B5EF4-FFF2-40B4-BE49-F238E27FC236}">
-                <a16:creationId xmlns:a16="http://schemas.microsoft.com/office/drawing/2014/main" id="{13BF5B45-63CF-41F7-8496-D896490AE335}"/>
-              </a:ext>
-            </a:extLst>
-          </p:cNvPr>
-          <p:cNvSpPr>
-            <a:spLocks noGrp="1"/>
-          </p:cNvSpPr>
-          <p:nvPr>
-            <p:ph type="title"/>
-          </p:nvPr>
-        </p:nvSpPr>
-        <p:spPr/>
-        <p:txBody>
-          <a:bodyPr/>
-          <a:lstStyle/>
-          <a:p>
-            <a:r>
-              <a:rPr lang="pt-BR" dirty="0"/>
-              <a:t>Construtor </a:t>
-            </a:r>
-            <a:r>
-              <a:rPr lang="pt-BR" dirty="0" err="1"/>
-              <a:t>Super</a:t>
-            </a:r>
-            <a:r>
-              <a:rPr lang="pt-BR" dirty="0"/>
-              <a:t>()</a:t>
-            </a:r>
-          </a:p>
-        </p:txBody>
-      </p:sp>
-      <p:sp>
-        <p:nvSpPr>
-          <p:cNvPr id="3" name="Espaço Reservado para Conteúdo 2">
-            <a:extLst>
-              <a:ext uri="{FF2B5EF4-FFF2-40B4-BE49-F238E27FC236}">
-                <a16:creationId xmlns:a16="http://schemas.microsoft.com/office/drawing/2014/main" id="{05C539C4-EDD4-414C-ADA6-9C2633603CB2}"/>
-              </a:ext>
-            </a:extLst>
-          </p:cNvPr>
-          <p:cNvSpPr>
-            <a:spLocks noGrp="1"/>
-          </p:cNvSpPr>
-          <p:nvPr>
-            <p:ph idx="1"/>
-          </p:nvPr>
-        </p:nvSpPr>
-        <p:spPr>
-          <a:xfrm>
-            <a:off x="592347" y="1844675"/>
-            <a:ext cx="11007306" cy="1473291"/>
-          </a:xfrm>
-        </p:spPr>
-        <p:txBody>
-          <a:bodyPr/>
-          <a:lstStyle/>
-          <a:p>
-            <a:r>
-              <a:rPr lang="pt-BR" sz="1800" dirty="0"/>
-              <a:t>A palavra-chave </a:t>
-            </a:r>
-            <a:r>
-              <a:rPr lang="pt-BR" sz="1800" dirty="0" err="1"/>
-              <a:t>super</a:t>
-            </a:r>
-            <a:r>
-              <a:rPr lang="pt-BR" sz="1800" dirty="0"/>
-              <a:t> é utilizada para se referir à superclasse (classe pai) de uma classe derivada (classe filha). Ela é especialmente útil quando há a necessidade de reutilizar atributos ou métodos da classe pai, evitando a repetição de código.</a:t>
-            </a:r>
-          </a:p>
-        </p:txBody>
-      </p:sp>
-      <p:sp>
-        <p:nvSpPr>
-          <p:cNvPr id="7" name="CaixaDeTexto 6">
-            <a:extLst>
-              <a:ext uri="{FF2B5EF4-FFF2-40B4-BE49-F238E27FC236}">
-                <a16:creationId xmlns:a16="http://schemas.microsoft.com/office/drawing/2014/main" id="{15C42C8B-8DB6-4C73-97AE-4AF8FC519272}"/>
-              </a:ext>
-            </a:extLst>
-          </p:cNvPr>
-          <p:cNvSpPr txBox="1"/>
-          <p:nvPr/>
-        </p:nvSpPr>
-        <p:spPr>
-          <a:xfrm>
-            <a:off x="5503559" y="3520485"/>
-            <a:ext cx="1184883" cy="338554"/>
-          </a:xfrm>
-          <a:prstGeom prst="rect">
-            <a:avLst/>
-          </a:prstGeom>
-          <a:noFill/>
-        </p:spPr>
-        <p:txBody>
-          <a:bodyPr wrap="square" rtlCol="0">
-            <a:spAutoFit/>
-          </a:bodyPr>
-          <a:lstStyle/>
-          <a:p>
-            <a:pPr algn="ctr"/>
-            <a:r>
-              <a:rPr lang="pt-BR" sz="1600" dirty="0">
-                <a:latin typeface="Times New Roman" panose="02020603050405020304" pitchFamily="18" charset="0"/>
-                <a:cs typeface="Times New Roman" panose="02020603050405020304" pitchFamily="18" charset="0"/>
-              </a:rPr>
-              <a:t>Classe Filha</a:t>
-            </a:r>
-          </a:p>
-        </p:txBody>
-      </p:sp>
-      <p:sp>
-        <p:nvSpPr>
-          <p:cNvPr id="4" name="Retângulo 3">
-            <a:extLst>
-              <a:ext uri="{FF2B5EF4-FFF2-40B4-BE49-F238E27FC236}">
-                <a16:creationId xmlns:a16="http://schemas.microsoft.com/office/drawing/2014/main" id="{FFAD0326-5AFB-4F87-8E1F-8F1446812B25}"/>
-              </a:ext>
-            </a:extLst>
-          </p:cNvPr>
-          <p:cNvSpPr/>
-          <p:nvPr/>
-        </p:nvSpPr>
-        <p:spPr>
-          <a:xfrm>
-            <a:off x="1698171" y="4061558"/>
-            <a:ext cx="8795657" cy="2421176"/>
-          </a:xfrm>
-          <a:prstGeom prst="rect">
-            <a:avLst/>
-          </a:prstGeom>
-        </p:spPr>
-        <p:txBody>
-          <a:bodyPr wrap="square">
-            <a:spAutoFit/>
-          </a:bodyPr>
-          <a:lstStyle/>
-          <a:p>
-            <a:pPr>
-              <a:spcBef>
-                <a:spcPts val="150"/>
-              </a:spcBef>
-              <a:spcAft>
-                <a:spcPts val="150"/>
-              </a:spcAft>
-            </a:pPr>
-            <a:r>
-              <a:rPr lang="pt-BR" sz="1600" b="1" dirty="0" err="1">
-                <a:solidFill>
-                  <a:srgbClr val="7F0055"/>
-                </a:solidFill>
-                <a:latin typeface="Consolas" panose="020B0609020204030204" pitchFamily="49" charset="0"/>
-              </a:rPr>
-              <a:t>public</a:t>
-            </a:r>
-            <a:r>
-              <a:rPr lang="pt-BR" sz="1600" dirty="0">
-                <a:solidFill>
-                  <a:srgbClr val="000000"/>
-                </a:solidFill>
-                <a:latin typeface="Consolas" panose="020B0609020204030204" pitchFamily="49" charset="0"/>
-              </a:rPr>
-              <a:t> </a:t>
-            </a:r>
-            <a:r>
-              <a:rPr lang="pt-BR" sz="1600" b="1" dirty="0" err="1">
-                <a:solidFill>
-                  <a:srgbClr val="7F0055"/>
-                </a:solidFill>
-                <a:latin typeface="Consolas" panose="020B0609020204030204" pitchFamily="49" charset="0"/>
-              </a:rPr>
-              <a:t>class</a:t>
-            </a:r>
-            <a:r>
-              <a:rPr lang="pt-BR" sz="1600" dirty="0">
-                <a:solidFill>
-                  <a:srgbClr val="000000"/>
-                </a:solidFill>
-                <a:latin typeface="Consolas" panose="020B0609020204030204" pitchFamily="49" charset="0"/>
-              </a:rPr>
-              <a:t> Gerente </a:t>
-            </a:r>
-            <a:r>
-              <a:rPr lang="pt-BR" sz="1600" b="1" dirty="0" err="1">
-                <a:solidFill>
-                  <a:srgbClr val="7F0055"/>
-                </a:solidFill>
-                <a:latin typeface="Consolas" panose="020B0609020204030204" pitchFamily="49" charset="0"/>
-              </a:rPr>
-              <a:t>extends</a:t>
-            </a:r>
-            <a:r>
-              <a:rPr lang="pt-BR" sz="1600" dirty="0">
-                <a:solidFill>
-                  <a:srgbClr val="000000"/>
-                </a:solidFill>
-                <a:latin typeface="Consolas" panose="020B0609020204030204" pitchFamily="49" charset="0"/>
-              </a:rPr>
-              <a:t> </a:t>
-            </a:r>
-            <a:r>
-              <a:rPr lang="pt-BR" sz="1600" dirty="0" err="1">
-                <a:solidFill>
-                  <a:srgbClr val="000000"/>
-                </a:solidFill>
-                <a:latin typeface="Consolas" panose="020B0609020204030204" pitchFamily="49" charset="0"/>
-              </a:rPr>
-              <a:t>Funcionarios</a:t>
-            </a:r>
-            <a:r>
-              <a:rPr lang="pt-BR" sz="1600" dirty="0">
-                <a:solidFill>
-                  <a:srgbClr val="000000"/>
-                </a:solidFill>
-                <a:latin typeface="Consolas" panose="020B0609020204030204" pitchFamily="49" charset="0"/>
-              </a:rPr>
-              <a:t>{</a:t>
-            </a:r>
-          </a:p>
-          <a:p>
-            <a:pPr lvl="1">
-              <a:spcBef>
-                <a:spcPts val="150"/>
-              </a:spcBef>
-              <a:spcAft>
-                <a:spcPts val="150"/>
-              </a:spcAft>
-            </a:pPr>
-            <a:r>
-              <a:rPr lang="pt-BR" sz="1600" b="1" dirty="0" err="1">
-                <a:solidFill>
-                  <a:srgbClr val="7F0055"/>
-                </a:solidFill>
-                <a:latin typeface="Consolas" panose="020B0609020204030204" pitchFamily="49" charset="0"/>
-              </a:rPr>
-              <a:t>private</a:t>
-            </a:r>
-            <a:r>
-              <a:rPr lang="pt-BR" sz="1600" dirty="0">
-                <a:solidFill>
-                  <a:srgbClr val="000000"/>
-                </a:solidFill>
-                <a:latin typeface="Consolas" panose="020B0609020204030204" pitchFamily="49" charset="0"/>
-              </a:rPr>
-              <a:t> </a:t>
-            </a:r>
-            <a:r>
-              <a:rPr lang="pt-BR" sz="1600" b="1" dirty="0">
-                <a:solidFill>
-                  <a:srgbClr val="7F0055"/>
-                </a:solidFill>
-                <a:latin typeface="Consolas" panose="020B0609020204030204" pitchFamily="49" charset="0"/>
-              </a:rPr>
-              <a:t>double</a:t>
-            </a:r>
-            <a:r>
-              <a:rPr lang="pt-BR" sz="1600" dirty="0">
-                <a:solidFill>
-                  <a:srgbClr val="000000"/>
-                </a:solidFill>
-                <a:latin typeface="Consolas" panose="020B0609020204030204" pitchFamily="49" charset="0"/>
-              </a:rPr>
-              <a:t> </a:t>
-            </a:r>
-            <a:r>
-              <a:rPr lang="pt-BR" sz="1600" dirty="0" err="1">
-                <a:solidFill>
-                  <a:srgbClr val="0000C0"/>
-                </a:solidFill>
-                <a:latin typeface="Consolas" panose="020B0609020204030204" pitchFamily="49" charset="0"/>
-              </a:rPr>
-              <a:t>adicionalGerencia</a:t>
-            </a:r>
-            <a:r>
-              <a:rPr lang="pt-BR" sz="1600" dirty="0">
-                <a:solidFill>
-                  <a:srgbClr val="000000"/>
-                </a:solidFill>
-                <a:latin typeface="Consolas" panose="020B0609020204030204" pitchFamily="49" charset="0"/>
-              </a:rPr>
-              <a:t>;</a:t>
-            </a:r>
-          </a:p>
-          <a:p>
-            <a:pPr lvl="1">
-              <a:spcBef>
-                <a:spcPts val="150"/>
-              </a:spcBef>
-              <a:spcAft>
-                <a:spcPts val="150"/>
-              </a:spcAft>
-            </a:pPr>
-            <a:endParaRPr lang="pt-BR" sz="1600" b="1" dirty="0">
-              <a:solidFill>
-                <a:srgbClr val="7F0055"/>
-              </a:solidFill>
-              <a:latin typeface="Consolas" panose="020B0609020204030204" pitchFamily="49" charset="0"/>
-            </a:endParaRPr>
-          </a:p>
-          <a:p>
-            <a:pPr lvl="1">
-              <a:spcBef>
-                <a:spcPts val="150"/>
-              </a:spcBef>
-              <a:spcAft>
-                <a:spcPts val="150"/>
-              </a:spcAft>
-            </a:pPr>
-            <a:r>
-              <a:rPr lang="pt-BR" sz="1600" b="1" dirty="0" err="1">
-                <a:solidFill>
-                  <a:srgbClr val="7F0055"/>
-                </a:solidFill>
-                <a:latin typeface="Consolas" panose="020B0609020204030204" pitchFamily="49" charset="0"/>
-              </a:rPr>
-              <a:t>public</a:t>
-            </a:r>
-            <a:r>
-              <a:rPr lang="pt-BR" sz="1600" dirty="0">
-                <a:solidFill>
-                  <a:srgbClr val="000000"/>
-                </a:solidFill>
-                <a:latin typeface="Consolas" panose="020B0609020204030204" pitchFamily="49" charset="0"/>
-              </a:rPr>
-              <a:t> Gerente(String </a:t>
-            </a:r>
-            <a:r>
-              <a:rPr lang="pt-BR" sz="1600" dirty="0">
-                <a:solidFill>
-                  <a:srgbClr val="6A3E3E"/>
-                </a:solidFill>
-                <a:latin typeface="Consolas" panose="020B0609020204030204" pitchFamily="49" charset="0"/>
-              </a:rPr>
-              <a:t>nome</a:t>
-            </a:r>
-            <a:r>
-              <a:rPr lang="pt-BR" sz="1600" dirty="0">
-                <a:solidFill>
-                  <a:srgbClr val="000000"/>
-                </a:solidFill>
-                <a:latin typeface="Consolas" panose="020B0609020204030204" pitchFamily="49" charset="0"/>
-              </a:rPr>
-              <a:t>, </a:t>
-            </a:r>
-            <a:r>
-              <a:rPr lang="pt-BR" sz="1600" b="1" dirty="0">
-                <a:solidFill>
-                  <a:srgbClr val="7F0055"/>
-                </a:solidFill>
-                <a:latin typeface="Consolas" panose="020B0609020204030204" pitchFamily="49" charset="0"/>
-              </a:rPr>
-              <a:t>double</a:t>
-            </a:r>
-            <a:r>
-              <a:rPr lang="pt-BR" sz="1600" dirty="0">
-                <a:solidFill>
-                  <a:srgbClr val="000000"/>
-                </a:solidFill>
-                <a:latin typeface="Consolas" panose="020B0609020204030204" pitchFamily="49" charset="0"/>
-              </a:rPr>
-              <a:t> </a:t>
-            </a:r>
-            <a:r>
-              <a:rPr lang="pt-BR" sz="1600" dirty="0">
-                <a:solidFill>
-                  <a:srgbClr val="6A3E3E"/>
-                </a:solidFill>
-                <a:latin typeface="Consolas" panose="020B0609020204030204" pitchFamily="49" charset="0"/>
-              </a:rPr>
-              <a:t>salario</a:t>
-            </a:r>
-            <a:r>
-              <a:rPr lang="pt-BR" sz="1600" dirty="0">
-                <a:solidFill>
-                  <a:srgbClr val="000000"/>
-                </a:solidFill>
-                <a:latin typeface="Consolas" panose="020B0609020204030204" pitchFamily="49" charset="0"/>
-              </a:rPr>
-              <a:t>, </a:t>
-            </a:r>
-            <a:r>
-              <a:rPr lang="pt-BR" sz="1600" b="1" dirty="0">
-                <a:solidFill>
-                  <a:srgbClr val="7F0055"/>
-                </a:solidFill>
-                <a:latin typeface="Consolas" panose="020B0609020204030204" pitchFamily="49" charset="0"/>
-              </a:rPr>
-              <a:t>double</a:t>
-            </a:r>
-            <a:r>
-              <a:rPr lang="pt-BR" sz="1600" dirty="0">
-                <a:solidFill>
-                  <a:srgbClr val="000000"/>
-                </a:solidFill>
-                <a:latin typeface="Consolas" panose="020B0609020204030204" pitchFamily="49" charset="0"/>
-              </a:rPr>
-              <a:t> </a:t>
-            </a:r>
-            <a:r>
-              <a:rPr lang="pt-BR" sz="1600" dirty="0" err="1">
-                <a:solidFill>
-                  <a:srgbClr val="6A3E3E"/>
-                </a:solidFill>
-                <a:latin typeface="Consolas" panose="020B0609020204030204" pitchFamily="49" charset="0"/>
-              </a:rPr>
-              <a:t>adicionalGerencia</a:t>
-            </a:r>
-            <a:r>
-              <a:rPr lang="pt-BR" sz="1600" dirty="0">
-                <a:solidFill>
-                  <a:srgbClr val="000000"/>
-                </a:solidFill>
-                <a:latin typeface="Consolas" panose="020B0609020204030204" pitchFamily="49" charset="0"/>
-              </a:rPr>
-              <a:t>) {</a:t>
-            </a:r>
-          </a:p>
-          <a:p>
-            <a:pPr lvl="2">
-              <a:spcBef>
-                <a:spcPts val="150"/>
-              </a:spcBef>
-              <a:spcAft>
-                <a:spcPts val="150"/>
-              </a:spcAft>
-            </a:pPr>
-            <a:r>
-              <a:rPr lang="pt-BR" sz="1600" b="1" dirty="0" err="1">
-                <a:solidFill>
-                  <a:srgbClr val="7F0055"/>
-                </a:solidFill>
-                <a:latin typeface="Consolas" panose="020B0609020204030204" pitchFamily="49" charset="0"/>
-              </a:rPr>
-              <a:t>super</a:t>
-            </a:r>
-            <a:r>
-              <a:rPr lang="pt-BR" sz="1600" dirty="0">
-                <a:solidFill>
-                  <a:srgbClr val="000000"/>
-                </a:solidFill>
-                <a:latin typeface="Consolas" panose="020B0609020204030204" pitchFamily="49" charset="0"/>
-              </a:rPr>
-              <a:t>(</a:t>
-            </a:r>
-            <a:r>
-              <a:rPr lang="pt-BR" sz="1600" dirty="0">
-                <a:solidFill>
-                  <a:srgbClr val="6A3E3E"/>
-                </a:solidFill>
-                <a:latin typeface="Consolas" panose="020B0609020204030204" pitchFamily="49" charset="0"/>
-              </a:rPr>
-              <a:t>nome</a:t>
-            </a:r>
-            <a:r>
-              <a:rPr lang="pt-BR" sz="1600" dirty="0">
-                <a:solidFill>
-                  <a:srgbClr val="000000"/>
-                </a:solidFill>
-                <a:latin typeface="Consolas" panose="020B0609020204030204" pitchFamily="49" charset="0"/>
-              </a:rPr>
-              <a:t>, </a:t>
-            </a:r>
-            <a:r>
-              <a:rPr lang="pt-BR" sz="1600" dirty="0">
-                <a:solidFill>
-                  <a:srgbClr val="6A3E3E"/>
-                </a:solidFill>
-                <a:latin typeface="Consolas" panose="020B0609020204030204" pitchFamily="49" charset="0"/>
-              </a:rPr>
-              <a:t>salario</a:t>
-            </a:r>
-            <a:r>
-              <a:rPr lang="pt-BR" sz="1600" dirty="0">
-                <a:solidFill>
-                  <a:srgbClr val="000000"/>
-                </a:solidFill>
-                <a:latin typeface="Consolas" panose="020B0609020204030204" pitchFamily="49" charset="0"/>
-              </a:rPr>
-              <a:t>);</a:t>
-            </a:r>
-          </a:p>
-          <a:p>
-            <a:pPr lvl="2">
-              <a:spcBef>
-                <a:spcPts val="150"/>
-              </a:spcBef>
-              <a:spcAft>
-                <a:spcPts val="150"/>
-              </a:spcAft>
-            </a:pPr>
-            <a:r>
-              <a:rPr lang="pt-BR" sz="1600" b="1" dirty="0" err="1">
-                <a:solidFill>
-                  <a:srgbClr val="7F0055"/>
-                </a:solidFill>
-                <a:latin typeface="Consolas" panose="020B0609020204030204" pitchFamily="49" charset="0"/>
-              </a:rPr>
-              <a:t>this</a:t>
-            </a:r>
-            <a:r>
-              <a:rPr lang="pt-BR" sz="1600" dirty="0" err="1">
-                <a:solidFill>
-                  <a:srgbClr val="000000"/>
-                </a:solidFill>
-                <a:latin typeface="Consolas" panose="020B0609020204030204" pitchFamily="49" charset="0"/>
-              </a:rPr>
-              <a:t>.</a:t>
-            </a:r>
-            <a:r>
-              <a:rPr lang="pt-BR" sz="1600" dirty="0" err="1">
-                <a:solidFill>
-                  <a:srgbClr val="0000C0"/>
-                </a:solidFill>
-                <a:latin typeface="Consolas" panose="020B0609020204030204" pitchFamily="49" charset="0"/>
-              </a:rPr>
-              <a:t>adicionalGerencia</a:t>
-            </a:r>
-            <a:r>
-              <a:rPr lang="pt-BR" sz="1600" dirty="0">
-                <a:solidFill>
-                  <a:srgbClr val="000000"/>
-                </a:solidFill>
-                <a:latin typeface="Consolas" panose="020B0609020204030204" pitchFamily="49" charset="0"/>
-              </a:rPr>
-              <a:t> = </a:t>
-            </a:r>
-            <a:r>
-              <a:rPr lang="pt-BR" sz="1600" dirty="0" err="1">
-                <a:solidFill>
-                  <a:srgbClr val="6A3E3E"/>
-                </a:solidFill>
-                <a:latin typeface="Consolas" panose="020B0609020204030204" pitchFamily="49" charset="0"/>
-              </a:rPr>
-              <a:t>adicionalGerencia</a:t>
-            </a:r>
-            <a:r>
-              <a:rPr lang="pt-BR" sz="1600" dirty="0">
-                <a:solidFill>
-                  <a:srgbClr val="000000"/>
-                </a:solidFill>
-                <a:latin typeface="Consolas" panose="020B0609020204030204" pitchFamily="49" charset="0"/>
-              </a:rPr>
-              <a:t>;</a:t>
-            </a:r>
-          </a:p>
-          <a:p>
-            <a:pPr lvl="1">
-              <a:spcBef>
-                <a:spcPts val="150"/>
-              </a:spcBef>
-              <a:spcAft>
-                <a:spcPts val="150"/>
-              </a:spcAft>
-            </a:pPr>
-            <a:r>
-              <a:rPr lang="pt-BR" sz="1600" dirty="0">
-                <a:solidFill>
-                  <a:srgbClr val="000000"/>
-                </a:solidFill>
-                <a:latin typeface="Consolas" panose="020B0609020204030204" pitchFamily="49" charset="0"/>
-              </a:rPr>
-              <a:t>}</a:t>
-            </a:r>
-          </a:p>
-          <a:p>
-            <a:pPr>
-              <a:spcBef>
-                <a:spcPts val="150"/>
-              </a:spcBef>
-              <a:spcAft>
-                <a:spcPts val="150"/>
-              </a:spcAft>
-            </a:pPr>
-            <a:r>
-              <a:rPr lang="pt-BR" sz="1600" dirty="0">
-                <a:solidFill>
-                  <a:srgbClr val="000000"/>
-                </a:solidFill>
-                <a:latin typeface="Consolas" panose="020B0609020204030204" pitchFamily="49" charset="0"/>
-              </a:rPr>
-              <a:t>}</a:t>
-            </a:r>
-          </a:p>
-        </p:txBody>
-      </p:sp>
-    </p:spTree>
-    <p:extLst>
-      <p:ext uri="{BB962C8B-B14F-4D97-AF65-F5344CB8AC3E}">
-        <p14:creationId xmlns:p14="http://schemas.microsoft.com/office/powerpoint/2010/main" val="13419183"/>
-      </p:ext>
-    </p:extLst>
-  </p:cSld>
-  <p:clrMapOvr>
-    <a:masterClrMapping/>
-  </p:clrMapOvr>
-</p:sld>
-</file>
-
-<file path=ppt/slides/slide8.xml><?xml version="1.0" encoding="utf-8"?>
-<p:sld xmlns:a="http://schemas.openxmlformats.org/drawingml/2006/main" xmlns:r="http://schemas.openxmlformats.org/officeDocument/2006/relationships" xmlns:p="http://schemas.openxmlformats.org/presentationml/2006/main">
-  <p:cSld>
-    <p:spTree>
-      <p:nvGrpSpPr>
-        <p:cNvPr id="1" name=""/>
-        <p:cNvGrpSpPr/>
-        <p:nvPr/>
-      </p:nvGrpSpPr>
-      <p:grpSpPr>
-        <a:xfrm>
-          <a:off x="0" y="0"/>
-          <a:ext cx="0" cy="0"/>
-          <a:chOff x="0" y="0"/>
-          <a:chExt cx="0" cy="0"/>
-        </a:xfrm>
-      </p:grpSpPr>
-      <p:sp>
-        <p:nvSpPr>
-          <p:cNvPr id="2" name="Título 1">
-            <a:extLst>
-              <a:ext uri="{FF2B5EF4-FFF2-40B4-BE49-F238E27FC236}">
-                <a16:creationId xmlns:a16="http://schemas.microsoft.com/office/drawing/2014/main" id="{13BF5B45-63CF-41F7-8496-D896490AE335}"/>
-              </a:ext>
-            </a:extLst>
-          </p:cNvPr>
-          <p:cNvSpPr>
-            <a:spLocks noGrp="1"/>
-          </p:cNvSpPr>
-          <p:nvPr>
-            <p:ph type="title"/>
-          </p:nvPr>
-        </p:nvSpPr>
-        <p:spPr/>
-        <p:txBody>
-          <a:bodyPr/>
-          <a:lstStyle/>
-          <a:p>
-            <a:r>
-              <a:rPr lang="pt-BR" dirty="0"/>
-              <a:t>Construtor </a:t>
-            </a:r>
-            <a:r>
-              <a:rPr lang="pt-BR" dirty="0" err="1"/>
-              <a:t>Super</a:t>
-            </a:r>
-            <a:r>
-              <a:rPr lang="pt-BR" dirty="0"/>
-              <a:t>()</a:t>
-            </a:r>
-          </a:p>
-        </p:txBody>
-      </p:sp>
-      <p:sp>
-        <p:nvSpPr>
-          <p:cNvPr id="3" name="Espaço Reservado para Conteúdo 2">
-            <a:extLst>
-              <a:ext uri="{FF2B5EF4-FFF2-40B4-BE49-F238E27FC236}">
-                <a16:creationId xmlns:a16="http://schemas.microsoft.com/office/drawing/2014/main" id="{05C539C4-EDD4-414C-ADA6-9C2633603CB2}"/>
-              </a:ext>
-            </a:extLst>
-          </p:cNvPr>
-          <p:cNvSpPr>
-            <a:spLocks noGrp="1"/>
-          </p:cNvSpPr>
-          <p:nvPr>
-            <p:ph idx="1"/>
-          </p:nvPr>
-        </p:nvSpPr>
-        <p:spPr>
-          <a:xfrm>
-            <a:off x="592347" y="1844675"/>
-            <a:ext cx="11007306" cy="1473291"/>
-          </a:xfrm>
-        </p:spPr>
-        <p:txBody>
-          <a:bodyPr/>
-          <a:lstStyle/>
-          <a:p>
-            <a:r>
-              <a:rPr lang="pt-BR" sz="1800" dirty="0"/>
-              <a:t>A palavra-chave </a:t>
-            </a:r>
-            <a:r>
-              <a:rPr lang="pt-BR" sz="1800" dirty="0" err="1"/>
-              <a:t>super</a:t>
-            </a:r>
-            <a:r>
-              <a:rPr lang="pt-BR" sz="1800" dirty="0"/>
-              <a:t> é utilizada para se referir à superclasse (classe pai) de uma classe derivada (classe filha). Ela é especialmente útil quando há a necessidade de reutilizar atributos ou métodos da classe pai, evitando a repetição de código.</a:t>
-            </a:r>
-          </a:p>
-        </p:txBody>
-      </p:sp>
-      <p:sp>
-        <p:nvSpPr>
-          <p:cNvPr id="7" name="CaixaDeTexto 6">
-            <a:extLst>
-              <a:ext uri="{FF2B5EF4-FFF2-40B4-BE49-F238E27FC236}">
-                <a16:creationId xmlns:a16="http://schemas.microsoft.com/office/drawing/2014/main" id="{15C42C8B-8DB6-4C73-97AE-4AF8FC519272}"/>
-              </a:ext>
-            </a:extLst>
-          </p:cNvPr>
-          <p:cNvSpPr txBox="1"/>
-          <p:nvPr/>
-        </p:nvSpPr>
-        <p:spPr>
-          <a:xfrm>
-            <a:off x="5503559" y="3520485"/>
-            <a:ext cx="1184883" cy="338554"/>
-          </a:xfrm>
-          <a:prstGeom prst="rect">
-            <a:avLst/>
-          </a:prstGeom>
-          <a:noFill/>
-        </p:spPr>
-        <p:txBody>
-          <a:bodyPr wrap="square" rtlCol="0">
-            <a:spAutoFit/>
-          </a:bodyPr>
-          <a:lstStyle/>
-          <a:p>
-            <a:pPr algn="ctr"/>
-            <a:r>
-              <a:rPr lang="pt-BR" sz="1600" dirty="0">
-                <a:latin typeface="Times New Roman" panose="02020603050405020304" pitchFamily="18" charset="0"/>
-                <a:cs typeface="Times New Roman" panose="02020603050405020304" pitchFamily="18" charset="0"/>
-              </a:rPr>
-              <a:t>Classe Filha</a:t>
-            </a:r>
-          </a:p>
-        </p:txBody>
-      </p:sp>
-      <p:sp>
-        <p:nvSpPr>
-          <p:cNvPr id="4" name="Retângulo 3">
-            <a:extLst>
-              <a:ext uri="{FF2B5EF4-FFF2-40B4-BE49-F238E27FC236}">
-                <a16:creationId xmlns:a16="http://schemas.microsoft.com/office/drawing/2014/main" id="{FFAD0326-5AFB-4F87-8E1F-8F1446812B25}"/>
-              </a:ext>
-            </a:extLst>
-          </p:cNvPr>
-          <p:cNvSpPr/>
-          <p:nvPr/>
-        </p:nvSpPr>
-        <p:spPr>
-          <a:xfrm>
-            <a:off x="1698171" y="4061558"/>
-            <a:ext cx="8795657" cy="2421176"/>
-          </a:xfrm>
-          <a:prstGeom prst="rect">
-            <a:avLst/>
-          </a:prstGeom>
-        </p:spPr>
-        <p:txBody>
-          <a:bodyPr wrap="square">
-            <a:spAutoFit/>
-          </a:bodyPr>
-          <a:lstStyle/>
-          <a:p>
-            <a:pPr>
-              <a:spcBef>
-                <a:spcPts val="150"/>
-              </a:spcBef>
-              <a:spcAft>
-                <a:spcPts val="150"/>
-              </a:spcAft>
-            </a:pPr>
-            <a:r>
-              <a:rPr lang="pt-BR" sz="1600" b="1" dirty="0" err="1">
-                <a:solidFill>
-                  <a:srgbClr val="7F0055"/>
-                </a:solidFill>
-                <a:latin typeface="Consolas" panose="020B0609020204030204" pitchFamily="49" charset="0"/>
-              </a:rPr>
-              <a:t>public</a:t>
-            </a:r>
-            <a:r>
-              <a:rPr lang="pt-BR" sz="1600" dirty="0">
-                <a:solidFill>
-                  <a:srgbClr val="000000"/>
-                </a:solidFill>
-                <a:latin typeface="Consolas" panose="020B0609020204030204" pitchFamily="49" charset="0"/>
-              </a:rPr>
-              <a:t> </a:t>
-            </a:r>
-            <a:r>
-              <a:rPr lang="pt-BR" sz="1600" b="1" dirty="0" err="1">
-                <a:solidFill>
-                  <a:srgbClr val="7F0055"/>
-                </a:solidFill>
-                <a:latin typeface="Consolas" panose="020B0609020204030204" pitchFamily="49" charset="0"/>
-              </a:rPr>
-              <a:t>class</a:t>
-            </a:r>
-            <a:r>
-              <a:rPr lang="pt-BR" sz="1600" dirty="0">
-                <a:solidFill>
-                  <a:srgbClr val="000000"/>
-                </a:solidFill>
-                <a:latin typeface="Consolas" panose="020B0609020204030204" pitchFamily="49" charset="0"/>
-              </a:rPr>
-              <a:t> Gerente </a:t>
-            </a:r>
-            <a:r>
-              <a:rPr lang="pt-BR" sz="1600" b="1" dirty="0" err="1">
-                <a:solidFill>
-                  <a:srgbClr val="7F0055"/>
-                </a:solidFill>
-                <a:latin typeface="Consolas" panose="020B0609020204030204" pitchFamily="49" charset="0"/>
-              </a:rPr>
-              <a:t>extends</a:t>
-            </a:r>
-            <a:r>
-              <a:rPr lang="pt-BR" sz="1600" dirty="0">
-                <a:solidFill>
-                  <a:srgbClr val="000000"/>
-                </a:solidFill>
-                <a:latin typeface="Consolas" panose="020B0609020204030204" pitchFamily="49" charset="0"/>
-              </a:rPr>
-              <a:t> </a:t>
-            </a:r>
-            <a:r>
-              <a:rPr lang="pt-BR" sz="1600" dirty="0" err="1">
-                <a:solidFill>
-                  <a:srgbClr val="000000"/>
-                </a:solidFill>
-                <a:latin typeface="Consolas" panose="020B0609020204030204" pitchFamily="49" charset="0"/>
-              </a:rPr>
-              <a:t>Funcionarios</a:t>
-            </a:r>
-            <a:r>
-              <a:rPr lang="pt-BR" sz="1600" dirty="0">
-                <a:solidFill>
-                  <a:srgbClr val="000000"/>
-                </a:solidFill>
-                <a:latin typeface="Consolas" panose="020B0609020204030204" pitchFamily="49" charset="0"/>
-              </a:rPr>
-              <a:t>{</a:t>
-            </a:r>
-          </a:p>
-          <a:p>
-            <a:pPr lvl="1">
-              <a:spcBef>
-                <a:spcPts val="150"/>
-              </a:spcBef>
-              <a:spcAft>
-                <a:spcPts val="150"/>
-              </a:spcAft>
-            </a:pPr>
-            <a:r>
-              <a:rPr lang="pt-BR" sz="1600" b="1" dirty="0" err="1">
-                <a:solidFill>
-                  <a:srgbClr val="7F0055"/>
-                </a:solidFill>
-                <a:latin typeface="Consolas" panose="020B0609020204030204" pitchFamily="49" charset="0"/>
-              </a:rPr>
-              <a:t>private</a:t>
-            </a:r>
-            <a:r>
-              <a:rPr lang="pt-BR" sz="1600" dirty="0">
-                <a:solidFill>
-                  <a:srgbClr val="000000"/>
-                </a:solidFill>
-                <a:latin typeface="Consolas" panose="020B0609020204030204" pitchFamily="49" charset="0"/>
-              </a:rPr>
-              <a:t> </a:t>
-            </a:r>
-            <a:r>
-              <a:rPr lang="pt-BR" sz="1600" b="1" dirty="0">
-                <a:solidFill>
-                  <a:srgbClr val="7F0055"/>
-                </a:solidFill>
-                <a:latin typeface="Consolas" panose="020B0609020204030204" pitchFamily="49" charset="0"/>
-              </a:rPr>
-              <a:t>double</a:t>
-            </a:r>
-            <a:r>
-              <a:rPr lang="pt-BR" sz="1600" dirty="0">
-                <a:solidFill>
-                  <a:srgbClr val="000000"/>
-                </a:solidFill>
-                <a:latin typeface="Consolas" panose="020B0609020204030204" pitchFamily="49" charset="0"/>
-              </a:rPr>
-              <a:t> </a:t>
-            </a:r>
-            <a:r>
-              <a:rPr lang="pt-BR" sz="1600" dirty="0" err="1">
-                <a:solidFill>
-                  <a:srgbClr val="0000C0"/>
-                </a:solidFill>
-                <a:latin typeface="Consolas" panose="020B0609020204030204" pitchFamily="49" charset="0"/>
-              </a:rPr>
-              <a:t>adicionalGerencia</a:t>
-            </a:r>
-            <a:r>
-              <a:rPr lang="pt-BR" sz="1600" dirty="0">
-                <a:solidFill>
-                  <a:srgbClr val="000000"/>
-                </a:solidFill>
-                <a:latin typeface="Consolas" panose="020B0609020204030204" pitchFamily="49" charset="0"/>
-              </a:rPr>
-              <a:t>;</a:t>
-            </a:r>
-          </a:p>
-          <a:p>
-            <a:pPr lvl="1">
-              <a:spcBef>
-                <a:spcPts val="150"/>
-              </a:spcBef>
-              <a:spcAft>
-                <a:spcPts val="150"/>
-              </a:spcAft>
-            </a:pPr>
-            <a:endParaRPr lang="pt-BR" sz="1600" b="1" dirty="0">
-              <a:solidFill>
-                <a:srgbClr val="7F0055"/>
-              </a:solidFill>
-              <a:latin typeface="Consolas" panose="020B0609020204030204" pitchFamily="49" charset="0"/>
-            </a:endParaRPr>
-          </a:p>
-          <a:p>
-            <a:pPr lvl="1">
-              <a:spcBef>
-                <a:spcPts val="150"/>
-              </a:spcBef>
-              <a:spcAft>
-                <a:spcPts val="150"/>
-              </a:spcAft>
-            </a:pPr>
-            <a:r>
-              <a:rPr lang="pt-BR" sz="1600" b="1" dirty="0" err="1">
-                <a:solidFill>
-                  <a:srgbClr val="7F0055"/>
-                </a:solidFill>
-                <a:latin typeface="Consolas" panose="020B0609020204030204" pitchFamily="49" charset="0"/>
-              </a:rPr>
-              <a:t>public</a:t>
-            </a:r>
-            <a:r>
-              <a:rPr lang="pt-BR" sz="1600" dirty="0">
-                <a:solidFill>
-                  <a:srgbClr val="000000"/>
-                </a:solidFill>
-                <a:latin typeface="Consolas" panose="020B0609020204030204" pitchFamily="49" charset="0"/>
-              </a:rPr>
-              <a:t> Gerente(String </a:t>
-            </a:r>
-            <a:r>
-              <a:rPr lang="pt-BR" sz="1600" dirty="0">
-                <a:solidFill>
-                  <a:srgbClr val="6A3E3E"/>
-                </a:solidFill>
-                <a:latin typeface="Consolas" panose="020B0609020204030204" pitchFamily="49" charset="0"/>
-              </a:rPr>
-              <a:t>nome</a:t>
-            </a:r>
-            <a:r>
-              <a:rPr lang="pt-BR" sz="1600" dirty="0">
-                <a:solidFill>
-                  <a:srgbClr val="000000"/>
-                </a:solidFill>
-                <a:latin typeface="Consolas" panose="020B0609020204030204" pitchFamily="49" charset="0"/>
-              </a:rPr>
-              <a:t>, </a:t>
-            </a:r>
-            <a:r>
-              <a:rPr lang="pt-BR" sz="1600" b="1" dirty="0">
-                <a:solidFill>
-                  <a:srgbClr val="7F0055"/>
-                </a:solidFill>
-                <a:latin typeface="Consolas" panose="020B0609020204030204" pitchFamily="49" charset="0"/>
-              </a:rPr>
-              <a:t>double</a:t>
-            </a:r>
-            <a:r>
-              <a:rPr lang="pt-BR" sz="1600" dirty="0">
-                <a:solidFill>
-                  <a:srgbClr val="000000"/>
-                </a:solidFill>
-                <a:latin typeface="Consolas" panose="020B0609020204030204" pitchFamily="49" charset="0"/>
-              </a:rPr>
-              <a:t> </a:t>
-            </a:r>
-            <a:r>
-              <a:rPr lang="pt-BR" sz="1600" dirty="0">
-                <a:solidFill>
-                  <a:srgbClr val="6A3E3E"/>
-                </a:solidFill>
-                <a:latin typeface="Consolas" panose="020B0609020204030204" pitchFamily="49" charset="0"/>
-              </a:rPr>
-              <a:t>salario</a:t>
-            </a:r>
-            <a:r>
-              <a:rPr lang="pt-BR" sz="1600" dirty="0">
-                <a:solidFill>
-                  <a:srgbClr val="000000"/>
-                </a:solidFill>
-                <a:latin typeface="Consolas" panose="020B0609020204030204" pitchFamily="49" charset="0"/>
-              </a:rPr>
-              <a:t>, </a:t>
-            </a:r>
-            <a:r>
-              <a:rPr lang="pt-BR" sz="1600" b="1" dirty="0">
-                <a:solidFill>
-                  <a:srgbClr val="7F0055"/>
-                </a:solidFill>
-                <a:latin typeface="Consolas" panose="020B0609020204030204" pitchFamily="49" charset="0"/>
-              </a:rPr>
-              <a:t>double</a:t>
-            </a:r>
-            <a:r>
-              <a:rPr lang="pt-BR" sz="1600" dirty="0">
-                <a:solidFill>
-                  <a:srgbClr val="000000"/>
-                </a:solidFill>
-                <a:latin typeface="Consolas" panose="020B0609020204030204" pitchFamily="49" charset="0"/>
-              </a:rPr>
-              <a:t> </a:t>
-            </a:r>
-            <a:r>
-              <a:rPr lang="pt-BR" sz="1600" dirty="0" err="1">
-                <a:solidFill>
-                  <a:srgbClr val="6A3E3E"/>
-                </a:solidFill>
-                <a:latin typeface="Consolas" panose="020B0609020204030204" pitchFamily="49" charset="0"/>
-              </a:rPr>
-              <a:t>adicionalGerencia</a:t>
-            </a:r>
-            <a:r>
-              <a:rPr lang="pt-BR" sz="1600" dirty="0">
-                <a:solidFill>
-                  <a:srgbClr val="000000"/>
-                </a:solidFill>
-                <a:latin typeface="Consolas" panose="020B0609020204030204" pitchFamily="49" charset="0"/>
-              </a:rPr>
-              <a:t>) {</a:t>
-            </a:r>
-          </a:p>
-          <a:p>
-            <a:pPr lvl="2">
-              <a:spcBef>
-                <a:spcPts val="150"/>
-              </a:spcBef>
-              <a:spcAft>
-                <a:spcPts val="150"/>
-              </a:spcAft>
-            </a:pPr>
-            <a:r>
-              <a:rPr lang="pt-BR" sz="1600" b="1" dirty="0" err="1">
-                <a:solidFill>
-                  <a:srgbClr val="7F0055"/>
-                </a:solidFill>
-                <a:latin typeface="Consolas" panose="020B0609020204030204" pitchFamily="49" charset="0"/>
-              </a:rPr>
-              <a:t>super</a:t>
-            </a:r>
-            <a:r>
-              <a:rPr lang="pt-BR" sz="1600" dirty="0">
-                <a:solidFill>
-                  <a:srgbClr val="000000"/>
-                </a:solidFill>
-                <a:latin typeface="Consolas" panose="020B0609020204030204" pitchFamily="49" charset="0"/>
-              </a:rPr>
-              <a:t>(</a:t>
-            </a:r>
-            <a:r>
-              <a:rPr lang="pt-BR" sz="1600" dirty="0">
-                <a:solidFill>
-                  <a:srgbClr val="6A3E3E"/>
-                </a:solidFill>
-                <a:latin typeface="Consolas" panose="020B0609020204030204" pitchFamily="49" charset="0"/>
-              </a:rPr>
-              <a:t>nome</a:t>
-            </a:r>
-            <a:r>
-              <a:rPr lang="pt-BR" sz="1600" dirty="0">
-                <a:solidFill>
-                  <a:srgbClr val="000000"/>
-                </a:solidFill>
-                <a:latin typeface="Consolas" panose="020B0609020204030204" pitchFamily="49" charset="0"/>
-              </a:rPr>
-              <a:t>, </a:t>
-            </a:r>
-            <a:r>
-              <a:rPr lang="pt-BR" sz="1600" dirty="0">
-                <a:solidFill>
-                  <a:srgbClr val="6A3E3E"/>
-                </a:solidFill>
-                <a:latin typeface="Consolas" panose="020B0609020204030204" pitchFamily="49" charset="0"/>
-              </a:rPr>
-              <a:t>salario</a:t>
-            </a:r>
-            <a:r>
-              <a:rPr lang="pt-BR" sz="1600" dirty="0">
-                <a:solidFill>
-                  <a:srgbClr val="000000"/>
-                </a:solidFill>
-                <a:latin typeface="Consolas" panose="020B0609020204030204" pitchFamily="49" charset="0"/>
-              </a:rPr>
-              <a:t>);</a:t>
-            </a:r>
-          </a:p>
-          <a:p>
-            <a:pPr lvl="2">
-              <a:spcBef>
-                <a:spcPts val="150"/>
-              </a:spcBef>
-              <a:spcAft>
-                <a:spcPts val="150"/>
-              </a:spcAft>
-            </a:pPr>
-            <a:r>
-              <a:rPr lang="pt-BR" sz="1600" b="1" dirty="0" err="1">
-                <a:solidFill>
-                  <a:srgbClr val="7F0055"/>
-                </a:solidFill>
-                <a:latin typeface="Consolas" panose="020B0609020204030204" pitchFamily="49" charset="0"/>
-              </a:rPr>
-              <a:t>this</a:t>
-            </a:r>
-            <a:r>
-              <a:rPr lang="pt-BR" sz="1600" dirty="0" err="1">
-                <a:solidFill>
-                  <a:srgbClr val="000000"/>
-                </a:solidFill>
-                <a:latin typeface="Consolas" panose="020B0609020204030204" pitchFamily="49" charset="0"/>
-              </a:rPr>
-              <a:t>.</a:t>
-            </a:r>
-            <a:r>
-              <a:rPr lang="pt-BR" sz="1600" dirty="0" err="1">
-                <a:solidFill>
-                  <a:srgbClr val="0000C0"/>
-                </a:solidFill>
-                <a:latin typeface="Consolas" panose="020B0609020204030204" pitchFamily="49" charset="0"/>
-              </a:rPr>
-              <a:t>adicionalGerencia</a:t>
-            </a:r>
-            <a:r>
-              <a:rPr lang="pt-BR" sz="1600" dirty="0">
-                <a:solidFill>
-                  <a:srgbClr val="000000"/>
-                </a:solidFill>
-                <a:latin typeface="Consolas" panose="020B0609020204030204" pitchFamily="49" charset="0"/>
-              </a:rPr>
-              <a:t> = </a:t>
-            </a:r>
-            <a:r>
-              <a:rPr lang="pt-BR" sz="1600" dirty="0" err="1">
-                <a:solidFill>
-                  <a:srgbClr val="6A3E3E"/>
-                </a:solidFill>
-                <a:latin typeface="Consolas" panose="020B0609020204030204" pitchFamily="49" charset="0"/>
-              </a:rPr>
-              <a:t>adicionalGerencia</a:t>
-            </a:r>
-            <a:r>
-              <a:rPr lang="pt-BR" sz="1600" dirty="0">
-                <a:solidFill>
-                  <a:srgbClr val="000000"/>
-                </a:solidFill>
-                <a:latin typeface="Consolas" panose="020B0609020204030204" pitchFamily="49" charset="0"/>
-              </a:rPr>
-              <a:t>;</a:t>
-            </a:r>
-          </a:p>
-          <a:p>
-            <a:pPr lvl="1">
-              <a:spcBef>
-                <a:spcPts val="150"/>
-              </a:spcBef>
-              <a:spcAft>
-                <a:spcPts val="150"/>
-              </a:spcAft>
-            </a:pPr>
-            <a:r>
-              <a:rPr lang="pt-BR" sz="1600" dirty="0">
-                <a:solidFill>
-                  <a:srgbClr val="000000"/>
-                </a:solidFill>
-                <a:latin typeface="Consolas" panose="020B0609020204030204" pitchFamily="49" charset="0"/>
-              </a:rPr>
-              <a:t>}</a:t>
-            </a:r>
-          </a:p>
-          <a:p>
-            <a:pPr>
-              <a:spcBef>
-                <a:spcPts val="150"/>
-              </a:spcBef>
-              <a:spcAft>
-                <a:spcPts val="150"/>
-              </a:spcAft>
-            </a:pPr>
-            <a:r>
-              <a:rPr lang="pt-BR" sz="1600" dirty="0">
-                <a:solidFill>
-                  <a:srgbClr val="000000"/>
-                </a:solidFill>
-                <a:latin typeface="Consolas" panose="020B0609020204030204" pitchFamily="49" charset="0"/>
-              </a:rPr>
-              <a:t>}</a:t>
-            </a:r>
-          </a:p>
-        </p:txBody>
-      </p:sp>
-    </p:spTree>
-    <p:extLst>
-      <p:ext uri="{BB962C8B-B14F-4D97-AF65-F5344CB8AC3E}">
-        <p14:creationId xmlns:p14="http://schemas.microsoft.com/office/powerpoint/2010/main" val="3696678201"/>
-      </p:ext>
-    </p:extLst>
-  </p:cSld>
-  <p:clrMapOvr>
-    <a:masterClrMapping/>
-  </p:clrMapOvr>
-</p:sld>
-</file>
-
 <file path=ppt/slides/slide9.xml><?xml version="1.0" encoding="utf-8"?>
 <p:sld xmlns:a="http://schemas.openxmlformats.org/drawingml/2006/main" xmlns:r="http://schemas.openxmlformats.org/officeDocument/2006/relationships" xmlns:p="http://schemas.openxmlformats.org/presentationml/2006/main">
   <p:cSld>
@@ -8581,7 +8408,7 @@
           <p:cNvPr id="2" name="Título 1">
             <a:extLst>
               <a:ext uri="{FF2B5EF4-FFF2-40B4-BE49-F238E27FC236}">
-                <a16:creationId xmlns:a16="http://schemas.microsoft.com/office/drawing/2014/main" id="{F68281D3-C181-4E1C-B325-E00D3550CEFA}"/>
+                <a16:creationId xmlns:a16="http://schemas.microsoft.com/office/drawing/2014/main" id="{13BF5B45-63CF-41F7-8496-D896490AE335}"/>
               </a:ext>
             </a:extLst>
           </p:cNvPr>
@@ -8598,13 +8425,17 @@
           <a:lstStyle/>
           <a:p>
             <a:r>
-              <a:rPr lang="pt-BR" b="1" dirty="0"/>
-              <a:t>O que é Polimorfismo?</a:t>
-            </a:r>
-            <a:br>
-              <a:rPr lang="pt-BR" b="1" dirty="0"/>
-            </a:br>
-            <a:endParaRPr lang="pt-BR" dirty="0"/>
+              <a:rPr lang="pt-BR" dirty="0"/>
+              <a:t>Construtor </a:t>
+            </a:r>
+            <a:r>
+              <a:rPr lang="pt-BR" dirty="0" err="1"/>
+              <a:t>Super</a:t>
+            </a:r>
+            <a:r>
+              <a:rPr lang="pt-BR" dirty="0"/>
+              <a:t>()</a:t>
+            </a:r>
           </a:p>
         </p:txBody>
       </p:sp>
@@ -8613,7 +8444,7 @@
           <p:cNvPr id="3" name="Espaço Reservado para Conteúdo 2">
             <a:extLst>
               <a:ext uri="{FF2B5EF4-FFF2-40B4-BE49-F238E27FC236}">
-                <a16:creationId xmlns:a16="http://schemas.microsoft.com/office/drawing/2014/main" id="{B58E572E-10D7-43D6-B230-D23680BEFDD1}"/>
+                <a16:creationId xmlns:a16="http://schemas.microsoft.com/office/drawing/2014/main" id="{05C539C4-EDD4-414C-ADA6-9C2633603CB2}"/>
               </a:ext>
             </a:extLst>
           </p:cNvPr>
@@ -8624,47 +8455,550 @@
             <p:ph idx="1"/>
           </p:nvPr>
         </p:nvSpPr>
-        <p:spPr/>
+        <p:spPr>
+          <a:xfrm>
+            <a:off x="592347" y="1844675"/>
+            <a:ext cx="11007306" cy="1473291"/>
+          </a:xfrm>
+        </p:spPr>
         <p:txBody>
           <a:bodyPr/>
           <a:lstStyle/>
           <a:p>
             <a:r>
-              <a:rPr lang="pt-BR" dirty="0"/>
-              <a:t>Polimorfismo é a habilidade de um mesmo objeto executar comportamentos diferentes, dependendo da forma como é utilizado no programa.</a:t>
-            </a:r>
-          </a:p>
-          <a:p>
-            <a:endParaRPr lang="pt-BR" dirty="0"/>
-          </a:p>
-          <a:p>
-            <a:pPr lvl="1"/>
-            <a:r>
-              <a:rPr lang="pt-BR" dirty="0"/>
-              <a:t>Sobrecarga (</a:t>
-            </a:r>
-            <a:r>
-              <a:rPr lang="pt-BR" dirty="0" err="1"/>
-              <a:t>Overloading</a:t>
-            </a:r>
-            <a:r>
-              <a:rPr lang="pt-BR" dirty="0"/>
-              <a:t>):Vários métodos com o mesmo nome, mas com parâmetros diferentes na mesma classe.</a:t>
-            </a:r>
-          </a:p>
-          <a:p>
-            <a:pPr lvl="1"/>
-            <a:r>
-              <a:rPr lang="pt-BR" dirty="0"/>
-              <a:t>Sobrescrita (</a:t>
-            </a:r>
-            <a:r>
-              <a:rPr lang="pt-BR" dirty="0" err="1"/>
-              <a:t>Overriding</a:t>
-            </a:r>
-            <a:r>
-              <a:rPr lang="pt-BR" dirty="0"/>
-              <a:t>):Uma subclasse redefine um método da superclasse, mantendo a mesma assinatura.</a:t>
+              <a:rPr lang="pt-BR" sz="1800" dirty="0"/>
+              <a:t>A palavra-chave </a:t>
+            </a:r>
+            <a:r>
+              <a:rPr lang="pt-BR" sz="1800" dirty="0" err="1"/>
+              <a:t>super</a:t>
+            </a:r>
+            <a:r>
+              <a:rPr lang="pt-BR" sz="1800" dirty="0"/>
+              <a:t> é utilizada para se referir à superclasse (classe pai) de uma classe derivada (classe filha). Ela é especialmente útil quando há a necessidade de reutilizar atributos ou métodos da classe pai, evitando a repetição de código.</a:t>
+            </a:r>
+          </a:p>
+        </p:txBody>
+      </p:sp>
+      <p:sp>
+        <p:nvSpPr>
+          <p:cNvPr id="6" name="CaixaDeTexto 5">
+            <a:extLst>
+              <a:ext uri="{FF2B5EF4-FFF2-40B4-BE49-F238E27FC236}">
+                <a16:creationId xmlns:a16="http://schemas.microsoft.com/office/drawing/2014/main" id="{2B572424-897C-4079-B040-AC0C43E820EC}"/>
+              </a:ext>
+            </a:extLst>
+          </p:cNvPr>
+          <p:cNvSpPr txBox="1"/>
+          <p:nvPr/>
+        </p:nvSpPr>
+        <p:spPr>
+          <a:xfrm>
+            <a:off x="5538260" y="3361405"/>
+            <a:ext cx="1115480" cy="338554"/>
+          </a:xfrm>
+          <a:prstGeom prst="rect">
+            <a:avLst/>
+          </a:prstGeom>
+          <a:noFill/>
+        </p:spPr>
+        <p:txBody>
+          <a:bodyPr wrap="square" rtlCol="0">
+            <a:spAutoFit/>
+          </a:bodyPr>
+          <a:lstStyle/>
+          <a:p>
+            <a:pPr algn="ctr"/>
+            <a:r>
+              <a:rPr lang="pt-BR" sz="1600" dirty="0">
+                <a:latin typeface="Times New Roman" panose="02020603050405020304" pitchFamily="18" charset="0"/>
+                <a:cs typeface="Times New Roman" panose="02020603050405020304" pitchFamily="18" charset="0"/>
+              </a:rPr>
+              <a:t>Classe Pai</a:t>
+            </a:r>
+          </a:p>
+        </p:txBody>
+      </p:sp>
+      <p:sp>
+        <p:nvSpPr>
+          <p:cNvPr id="8" name="Retângulo 7">
+            <a:extLst>
+              <a:ext uri="{FF2B5EF4-FFF2-40B4-BE49-F238E27FC236}">
+                <a16:creationId xmlns:a16="http://schemas.microsoft.com/office/drawing/2014/main" id="{974DDB22-2288-4893-8D35-C51A4D00B151}"/>
+              </a:ext>
+            </a:extLst>
+          </p:cNvPr>
+          <p:cNvSpPr/>
+          <p:nvPr/>
+        </p:nvSpPr>
+        <p:spPr>
+          <a:xfrm>
+            <a:off x="2960279" y="3743397"/>
+            <a:ext cx="6271441" cy="2749471"/>
+          </a:xfrm>
+          <a:prstGeom prst="rect">
+            <a:avLst/>
+          </a:prstGeom>
+        </p:spPr>
+        <p:txBody>
+          <a:bodyPr wrap="square">
+            <a:spAutoFit/>
+          </a:bodyPr>
+          <a:lstStyle/>
+          <a:p>
+            <a:pPr>
+              <a:spcBef>
+                <a:spcPts val="150"/>
+              </a:spcBef>
+              <a:spcAft>
+                <a:spcPts val="150"/>
+              </a:spcAft>
+            </a:pPr>
+            <a:r>
+              <a:rPr lang="pt-BR" sz="1600" b="1" dirty="0" err="1">
+                <a:solidFill>
+                  <a:srgbClr val="7F0055"/>
+                </a:solidFill>
+                <a:latin typeface="Consolas" panose="020B0609020204030204" pitchFamily="49" charset="0"/>
+              </a:rPr>
+              <a:t>public</a:t>
+            </a:r>
+            <a:r>
+              <a:rPr lang="pt-BR" sz="1600" dirty="0">
+                <a:solidFill>
+                  <a:srgbClr val="000000"/>
+                </a:solidFill>
+                <a:latin typeface="Consolas" panose="020B0609020204030204" pitchFamily="49" charset="0"/>
+              </a:rPr>
+              <a:t> </a:t>
+            </a:r>
+            <a:r>
+              <a:rPr lang="pt-BR" sz="1600" b="1" dirty="0" err="1">
+                <a:solidFill>
+                  <a:srgbClr val="7F0055"/>
+                </a:solidFill>
+                <a:latin typeface="Consolas" panose="020B0609020204030204" pitchFamily="49" charset="0"/>
+              </a:rPr>
+              <a:t>class</a:t>
+            </a:r>
+            <a:r>
+              <a:rPr lang="pt-BR" sz="1600" dirty="0">
+                <a:solidFill>
+                  <a:srgbClr val="000000"/>
+                </a:solidFill>
+                <a:latin typeface="Consolas" panose="020B0609020204030204" pitchFamily="49" charset="0"/>
+              </a:rPr>
+              <a:t> </a:t>
+            </a:r>
+            <a:r>
+              <a:rPr lang="pt-BR" sz="1600" dirty="0" err="1">
+                <a:solidFill>
+                  <a:srgbClr val="000000"/>
+                </a:solidFill>
+                <a:latin typeface="Consolas" panose="020B0609020204030204" pitchFamily="49" charset="0"/>
+              </a:rPr>
+              <a:t>Funcionarios</a:t>
+            </a:r>
+            <a:r>
+              <a:rPr lang="pt-BR" sz="1600" dirty="0">
+                <a:solidFill>
+                  <a:srgbClr val="000000"/>
+                </a:solidFill>
+                <a:latin typeface="Consolas" panose="020B0609020204030204" pitchFamily="49" charset="0"/>
+              </a:rPr>
+              <a:t> {</a:t>
+            </a:r>
+          </a:p>
+          <a:p>
+            <a:pPr lvl="1">
+              <a:spcBef>
+                <a:spcPts val="150"/>
+              </a:spcBef>
+              <a:spcAft>
+                <a:spcPts val="150"/>
+              </a:spcAft>
+            </a:pPr>
+            <a:r>
+              <a:rPr lang="pt-BR" sz="1600" b="1" dirty="0" err="1">
+                <a:solidFill>
+                  <a:srgbClr val="7F0055"/>
+                </a:solidFill>
+                <a:latin typeface="Consolas" panose="020B0609020204030204" pitchFamily="49" charset="0"/>
+              </a:rPr>
+              <a:t>private</a:t>
+            </a:r>
+            <a:r>
+              <a:rPr lang="pt-BR" sz="1600" dirty="0">
+                <a:solidFill>
+                  <a:srgbClr val="000000"/>
+                </a:solidFill>
+                <a:latin typeface="Consolas" panose="020B0609020204030204" pitchFamily="49" charset="0"/>
+              </a:rPr>
+              <a:t> String </a:t>
+            </a:r>
+            <a:r>
+              <a:rPr lang="pt-BR" sz="1600" u="sng" dirty="0">
+                <a:solidFill>
+                  <a:srgbClr val="0000C0"/>
+                </a:solidFill>
+                <a:latin typeface="Consolas" panose="020B0609020204030204" pitchFamily="49" charset="0"/>
+              </a:rPr>
+              <a:t>nome</a:t>
+            </a:r>
+            <a:r>
+              <a:rPr lang="pt-BR" sz="1600" dirty="0">
+                <a:solidFill>
+                  <a:srgbClr val="000000"/>
+                </a:solidFill>
+                <a:latin typeface="Consolas" panose="020B0609020204030204" pitchFamily="49" charset="0"/>
+              </a:rPr>
+              <a:t>;</a:t>
+            </a:r>
+          </a:p>
+          <a:p>
+            <a:pPr lvl="1">
+              <a:spcBef>
+                <a:spcPts val="150"/>
+              </a:spcBef>
+              <a:spcAft>
+                <a:spcPts val="150"/>
+              </a:spcAft>
+            </a:pPr>
+            <a:r>
+              <a:rPr lang="pt-BR" sz="1600" b="1" dirty="0" err="1">
+                <a:solidFill>
+                  <a:srgbClr val="7F0055"/>
+                </a:solidFill>
+                <a:latin typeface="Consolas" panose="020B0609020204030204" pitchFamily="49" charset="0"/>
+              </a:rPr>
+              <a:t>private</a:t>
+            </a:r>
+            <a:r>
+              <a:rPr lang="pt-BR" sz="1600" dirty="0">
+                <a:solidFill>
+                  <a:srgbClr val="000000"/>
+                </a:solidFill>
+                <a:latin typeface="Consolas" panose="020B0609020204030204" pitchFamily="49" charset="0"/>
+              </a:rPr>
+              <a:t> </a:t>
+            </a:r>
+            <a:r>
+              <a:rPr lang="pt-BR" sz="1600" b="1" dirty="0">
+                <a:solidFill>
+                  <a:srgbClr val="7F0055"/>
+                </a:solidFill>
+                <a:latin typeface="Consolas" panose="020B0609020204030204" pitchFamily="49" charset="0"/>
+              </a:rPr>
+              <a:t>double</a:t>
+            </a:r>
+            <a:r>
+              <a:rPr lang="pt-BR" sz="1600" dirty="0">
+                <a:solidFill>
+                  <a:srgbClr val="000000"/>
+                </a:solidFill>
+                <a:latin typeface="Consolas" panose="020B0609020204030204" pitchFamily="49" charset="0"/>
+              </a:rPr>
+              <a:t> </a:t>
+            </a:r>
+            <a:r>
+              <a:rPr lang="pt-BR" sz="1600" u="sng" dirty="0">
+                <a:solidFill>
+                  <a:srgbClr val="0000C0"/>
+                </a:solidFill>
+                <a:latin typeface="Consolas" panose="020B0609020204030204" pitchFamily="49" charset="0"/>
+              </a:rPr>
+              <a:t>salario</a:t>
+            </a:r>
+            <a:r>
+              <a:rPr lang="pt-BR" sz="1600" dirty="0">
+                <a:solidFill>
+                  <a:srgbClr val="000000"/>
+                </a:solidFill>
+                <a:latin typeface="Consolas" panose="020B0609020204030204" pitchFamily="49" charset="0"/>
+              </a:rPr>
+              <a:t>;</a:t>
+            </a:r>
+          </a:p>
+          <a:p>
+            <a:pPr lvl="1">
+              <a:spcBef>
+                <a:spcPts val="150"/>
+              </a:spcBef>
+              <a:spcAft>
+                <a:spcPts val="150"/>
+              </a:spcAft>
+            </a:pPr>
+            <a:endParaRPr lang="pt-BR" sz="1600" dirty="0">
+              <a:solidFill>
+                <a:srgbClr val="000000"/>
+              </a:solidFill>
+              <a:latin typeface="Consolas" panose="020B0609020204030204" pitchFamily="49" charset="0"/>
+            </a:endParaRPr>
+          </a:p>
+          <a:p>
+            <a:pPr lvl="1">
+              <a:spcBef>
+                <a:spcPts val="150"/>
+              </a:spcBef>
+              <a:spcAft>
+                <a:spcPts val="150"/>
+              </a:spcAft>
+            </a:pPr>
+            <a:r>
+              <a:rPr lang="pt-BR" sz="1600" b="1" dirty="0" err="1">
+                <a:solidFill>
+                  <a:srgbClr val="7F0055"/>
+                </a:solidFill>
+                <a:latin typeface="Consolas" panose="020B0609020204030204" pitchFamily="49" charset="0"/>
+              </a:rPr>
+              <a:t>public</a:t>
+            </a:r>
+            <a:r>
+              <a:rPr lang="pt-BR" sz="1600" dirty="0">
+                <a:solidFill>
+                  <a:srgbClr val="000000"/>
+                </a:solidFill>
+                <a:latin typeface="Consolas" panose="020B0609020204030204" pitchFamily="49" charset="0"/>
+              </a:rPr>
+              <a:t> </a:t>
+            </a:r>
+            <a:r>
+              <a:rPr lang="pt-BR" sz="1600" dirty="0" err="1">
+                <a:solidFill>
+                  <a:srgbClr val="000000"/>
+                </a:solidFill>
+                <a:latin typeface="Consolas" panose="020B0609020204030204" pitchFamily="49" charset="0"/>
+              </a:rPr>
+              <a:t>Funcionarios</a:t>
+            </a:r>
+            <a:r>
+              <a:rPr lang="pt-BR" sz="1600" dirty="0">
+                <a:solidFill>
+                  <a:srgbClr val="000000"/>
+                </a:solidFill>
+                <a:latin typeface="Consolas" panose="020B0609020204030204" pitchFamily="49" charset="0"/>
+              </a:rPr>
+              <a:t>(String </a:t>
+            </a:r>
+            <a:r>
+              <a:rPr lang="pt-BR" sz="1600" dirty="0">
+                <a:solidFill>
+                  <a:srgbClr val="6A3E3E"/>
+                </a:solidFill>
+                <a:latin typeface="Consolas" panose="020B0609020204030204" pitchFamily="49" charset="0"/>
+              </a:rPr>
+              <a:t>nome</a:t>
+            </a:r>
+            <a:r>
+              <a:rPr lang="pt-BR" sz="1600" dirty="0">
+                <a:solidFill>
+                  <a:srgbClr val="000000"/>
+                </a:solidFill>
+                <a:latin typeface="Consolas" panose="020B0609020204030204" pitchFamily="49" charset="0"/>
+              </a:rPr>
+              <a:t>, </a:t>
+            </a:r>
+            <a:r>
+              <a:rPr lang="pt-BR" sz="1600" b="1" dirty="0">
+                <a:solidFill>
+                  <a:srgbClr val="7F0055"/>
+                </a:solidFill>
+                <a:latin typeface="Consolas" panose="020B0609020204030204" pitchFamily="49" charset="0"/>
+              </a:rPr>
+              <a:t>double</a:t>
+            </a:r>
+            <a:r>
+              <a:rPr lang="pt-BR" sz="1600" dirty="0">
+                <a:solidFill>
+                  <a:srgbClr val="000000"/>
+                </a:solidFill>
+                <a:latin typeface="Consolas" panose="020B0609020204030204" pitchFamily="49" charset="0"/>
+              </a:rPr>
+              <a:t> </a:t>
+            </a:r>
+            <a:r>
+              <a:rPr lang="pt-BR" sz="1600" dirty="0">
+                <a:solidFill>
+                  <a:srgbClr val="6A3E3E"/>
+                </a:solidFill>
+                <a:latin typeface="Consolas" panose="020B0609020204030204" pitchFamily="49" charset="0"/>
+              </a:rPr>
+              <a:t>salario</a:t>
+            </a:r>
+            <a:r>
+              <a:rPr lang="pt-BR" sz="1600" dirty="0">
+                <a:solidFill>
+                  <a:srgbClr val="000000"/>
+                </a:solidFill>
+                <a:latin typeface="Consolas" panose="020B0609020204030204" pitchFamily="49" charset="0"/>
+              </a:rPr>
+              <a:t>) {</a:t>
+            </a:r>
+          </a:p>
+          <a:p>
+            <a:pPr lvl="2">
+              <a:spcBef>
+                <a:spcPts val="150"/>
+              </a:spcBef>
+              <a:spcAft>
+                <a:spcPts val="150"/>
+              </a:spcAft>
+            </a:pPr>
+            <a:r>
+              <a:rPr lang="pt-BR" sz="1600" b="1" dirty="0" err="1">
+                <a:solidFill>
+                  <a:srgbClr val="7F0055"/>
+                </a:solidFill>
+                <a:latin typeface="Consolas" panose="020B0609020204030204" pitchFamily="49" charset="0"/>
+              </a:rPr>
+              <a:t>this</a:t>
+            </a:r>
+            <a:r>
+              <a:rPr lang="pt-BR" sz="1600" dirty="0" err="1">
+                <a:solidFill>
+                  <a:srgbClr val="000000"/>
+                </a:solidFill>
+                <a:latin typeface="Consolas" panose="020B0609020204030204" pitchFamily="49" charset="0"/>
+              </a:rPr>
+              <a:t>.</a:t>
+            </a:r>
+            <a:r>
+              <a:rPr lang="pt-BR" sz="1600" dirty="0" err="1">
+                <a:solidFill>
+                  <a:srgbClr val="0000C0"/>
+                </a:solidFill>
+                <a:latin typeface="Consolas" panose="020B0609020204030204" pitchFamily="49" charset="0"/>
+              </a:rPr>
+              <a:t>nome</a:t>
+            </a:r>
+            <a:r>
+              <a:rPr lang="pt-BR" sz="1600" dirty="0">
+                <a:solidFill>
+                  <a:srgbClr val="000000"/>
+                </a:solidFill>
+                <a:latin typeface="Consolas" panose="020B0609020204030204" pitchFamily="49" charset="0"/>
+              </a:rPr>
+              <a:t> = </a:t>
+            </a:r>
+            <a:r>
+              <a:rPr lang="pt-BR" sz="1600" dirty="0">
+                <a:solidFill>
+                  <a:srgbClr val="6A3E3E"/>
+                </a:solidFill>
+                <a:latin typeface="Consolas" panose="020B0609020204030204" pitchFamily="49" charset="0"/>
+              </a:rPr>
+              <a:t>nome</a:t>
+            </a:r>
+            <a:r>
+              <a:rPr lang="pt-BR" sz="1600" dirty="0">
+                <a:solidFill>
+                  <a:srgbClr val="000000"/>
+                </a:solidFill>
+                <a:latin typeface="Consolas" panose="020B0609020204030204" pitchFamily="49" charset="0"/>
+              </a:rPr>
+              <a:t>;</a:t>
+            </a:r>
+          </a:p>
+          <a:p>
+            <a:pPr lvl="2">
+              <a:spcBef>
+                <a:spcPts val="150"/>
+              </a:spcBef>
+              <a:spcAft>
+                <a:spcPts val="150"/>
+              </a:spcAft>
+            </a:pPr>
+            <a:r>
+              <a:rPr lang="pt-BR" sz="1600" b="1" dirty="0" err="1">
+                <a:solidFill>
+                  <a:srgbClr val="7F0055"/>
+                </a:solidFill>
+                <a:latin typeface="Consolas" panose="020B0609020204030204" pitchFamily="49" charset="0"/>
+              </a:rPr>
+              <a:t>this</a:t>
+            </a:r>
+            <a:r>
+              <a:rPr lang="pt-BR" sz="1600" dirty="0" err="1">
+                <a:solidFill>
+                  <a:srgbClr val="000000"/>
+                </a:solidFill>
+                <a:latin typeface="Consolas" panose="020B0609020204030204" pitchFamily="49" charset="0"/>
+              </a:rPr>
+              <a:t>.</a:t>
+            </a:r>
+            <a:r>
+              <a:rPr lang="pt-BR" sz="1600" dirty="0" err="1">
+                <a:solidFill>
+                  <a:srgbClr val="0000C0"/>
+                </a:solidFill>
+                <a:latin typeface="Consolas" panose="020B0609020204030204" pitchFamily="49" charset="0"/>
+              </a:rPr>
+              <a:t>salario</a:t>
+            </a:r>
+            <a:r>
+              <a:rPr lang="pt-BR" sz="1600" dirty="0">
+                <a:solidFill>
+                  <a:srgbClr val="000000"/>
+                </a:solidFill>
+                <a:latin typeface="Consolas" panose="020B0609020204030204" pitchFamily="49" charset="0"/>
+              </a:rPr>
+              <a:t> = </a:t>
+            </a:r>
+            <a:r>
+              <a:rPr lang="pt-BR" sz="1600" dirty="0">
+                <a:solidFill>
+                  <a:srgbClr val="6A3E3E"/>
+                </a:solidFill>
+                <a:latin typeface="Consolas" panose="020B0609020204030204" pitchFamily="49" charset="0"/>
+              </a:rPr>
+              <a:t>salario</a:t>
+            </a:r>
+            <a:r>
+              <a:rPr lang="pt-BR" sz="1600" dirty="0">
+                <a:solidFill>
+                  <a:srgbClr val="000000"/>
+                </a:solidFill>
+                <a:latin typeface="Consolas" panose="020B0609020204030204" pitchFamily="49" charset="0"/>
+              </a:rPr>
+              <a:t>;</a:t>
+            </a:r>
+          </a:p>
+          <a:p>
+            <a:pPr marL="457200" lvl="2">
+              <a:spcBef>
+                <a:spcPts val="150"/>
+              </a:spcBef>
+              <a:spcAft>
+                <a:spcPts val="150"/>
+              </a:spcAft>
+            </a:pPr>
+            <a:r>
+              <a:rPr lang="pt-BR" sz="1600" dirty="0">
+                <a:solidFill>
+                  <a:srgbClr val="000000"/>
+                </a:solidFill>
+                <a:latin typeface="Consolas" panose="020B0609020204030204" pitchFamily="49" charset="0"/>
+              </a:rPr>
+              <a:t>}</a:t>
+            </a:r>
+          </a:p>
+          <a:p>
+            <a:pPr>
+              <a:spcBef>
+                <a:spcPts val="150"/>
+              </a:spcBef>
+              <a:spcAft>
+                <a:spcPts val="150"/>
+              </a:spcAft>
+            </a:pPr>
+            <a:r>
+              <a:rPr lang="pt-BR" sz="1600" dirty="0">
+                <a:solidFill>
+                  <a:srgbClr val="000000"/>
+                </a:solidFill>
+                <a:latin typeface="Consolas" panose="020B0609020204030204" pitchFamily="49" charset="0"/>
+              </a:rPr>
+              <a:t>}</a:t>
             </a:r>
           </a:p>
         </p:txBody>
@@ -8672,7 +9006,7 @@
     </p:spTree>
     <p:extLst>
       <p:ext uri="{BB962C8B-B14F-4D97-AF65-F5344CB8AC3E}">
-        <p14:creationId xmlns:p14="http://schemas.microsoft.com/office/powerpoint/2010/main" val="3973512991"/>
+        <p14:creationId xmlns:p14="http://schemas.microsoft.com/office/powerpoint/2010/main" val="229873426"/>
       </p:ext>
     </p:extLst>
   </p:cSld>

--- a/Projeto de Software e Segurança da Informação - 2026/Projeto de Software/Aula07-HerançaPolimorfismo/Herança e Porlimosfismo.pptx
+++ b/Projeto de Software e Segurança da Informação - 2026/Projeto de Software/Aula07-HerançaPolimorfismo/Herança e Porlimosfismo.pptx
@@ -5,7 +5,7 @@
     <p:sldMasterId id="2147483677" r:id="rId1"/>
   </p:sldMasterIdLst>
   <p:notesMasterIdLst>
-    <p:notesMasterId r:id="rId17"/>
+    <p:notesMasterId r:id="rId15"/>
   </p:notesMasterIdLst>
   <p:sldIdLst>
     <p:sldId id="256" r:id="rId2"/>
@@ -15,14 +15,12 @@
     <p:sldId id="269" r:id="rId6"/>
     <p:sldId id="270" r:id="rId7"/>
     <p:sldId id="257" r:id="rId8"/>
-    <p:sldId id="258" r:id="rId9"/>
-    <p:sldId id="259" r:id="rId10"/>
-    <p:sldId id="260" r:id="rId11"/>
-    <p:sldId id="261" r:id="rId12"/>
-    <p:sldId id="264" r:id="rId13"/>
-    <p:sldId id="265" r:id="rId14"/>
-    <p:sldId id="262" r:id="rId15"/>
-    <p:sldId id="263" r:id="rId16"/>
+    <p:sldId id="259" r:id="rId9"/>
+    <p:sldId id="260" r:id="rId10"/>
+    <p:sldId id="264" r:id="rId11"/>
+    <p:sldId id="265" r:id="rId12"/>
+    <p:sldId id="262" r:id="rId13"/>
+    <p:sldId id="263" r:id="rId14"/>
   </p:sldIdLst>
   <p:sldSz cx="12192000" cy="6858000"/>
   <p:notesSz cx="6858000" cy="9144000"/>
@@ -3794,7 +3792,7 @@
           <p:cNvPr id="2" name="Título 1">
             <a:extLst>
               <a:ext uri="{FF2B5EF4-FFF2-40B4-BE49-F238E27FC236}">
-                <a16:creationId xmlns:a16="http://schemas.microsoft.com/office/drawing/2014/main" id="{13BF5B45-63CF-41F7-8496-D896490AE335}"/>
+                <a16:creationId xmlns:a16="http://schemas.microsoft.com/office/drawing/2014/main" id="{F68281D3-C181-4E1C-B325-E00D3550CEFA}"/>
               </a:ext>
             </a:extLst>
           </p:cNvPr>
@@ -3812,16 +3810,12 @@
           <a:p>
             <a:r>
               <a:rPr lang="pt-BR" dirty="0"/>
-              <a:t>Construtor </a:t>
-            </a:r>
-            <a:r>
-              <a:rPr lang="pt-BR" dirty="0" err="1"/>
-              <a:t>Super</a:t>
-            </a:r>
-            <a:r>
+              <a:t>O que é Polimorfismo?</a:t>
+            </a:r>
+            <a:br>
               <a:rPr lang="pt-BR" dirty="0"/>
-              <a:t>()</a:t>
-            </a:r>
+            </a:br>
+            <a:endParaRPr lang="pt-BR" dirty="0"/>
           </a:p>
         </p:txBody>
       </p:sp>
@@ -3830,7 +3824,7 @@
           <p:cNvPr id="3" name="Espaço Reservado para Conteúdo 2">
             <a:extLst>
               <a:ext uri="{FF2B5EF4-FFF2-40B4-BE49-F238E27FC236}">
-                <a16:creationId xmlns:a16="http://schemas.microsoft.com/office/drawing/2014/main" id="{05C539C4-EDD4-414C-ADA6-9C2633603CB2}"/>
+                <a16:creationId xmlns:a16="http://schemas.microsoft.com/office/drawing/2014/main" id="{B58E572E-10D7-43D6-B230-D23680BEFDD1}"/>
               </a:ext>
             </a:extLst>
           </p:cNvPr>
@@ -3841,540 +3835,47 @@
             <p:ph idx="1"/>
           </p:nvPr>
         </p:nvSpPr>
-        <p:spPr>
-          <a:xfrm>
-            <a:off x="592347" y="1844675"/>
-            <a:ext cx="11007306" cy="1473291"/>
-          </a:xfrm>
-        </p:spPr>
+        <p:spPr/>
         <p:txBody>
           <a:bodyPr/>
           <a:lstStyle/>
           <a:p>
             <a:r>
-              <a:rPr lang="pt-BR" sz="1800" dirty="0"/>
-              <a:t>A palavra-chave </a:t>
-            </a:r>
-            <a:r>
-              <a:rPr lang="pt-BR" sz="1800" dirty="0" err="1"/>
-              <a:t>super</a:t>
-            </a:r>
-            <a:r>
-              <a:rPr lang="pt-BR" sz="1800" dirty="0"/>
-              <a:t> é utilizada para se referir à superclasse (classe pai) de uma classe derivada (classe filha). Ela é especialmente útil quando há a necessidade de reutilizar atributos ou métodos da classe pai, evitando a repetição de código.</a:t>
-            </a:r>
-          </a:p>
-        </p:txBody>
-      </p:sp>
-      <p:sp>
-        <p:nvSpPr>
-          <p:cNvPr id="7" name="CaixaDeTexto 6">
-            <a:extLst>
-              <a:ext uri="{FF2B5EF4-FFF2-40B4-BE49-F238E27FC236}">
-                <a16:creationId xmlns:a16="http://schemas.microsoft.com/office/drawing/2014/main" id="{15C42C8B-8DB6-4C73-97AE-4AF8FC519272}"/>
-              </a:ext>
-            </a:extLst>
-          </p:cNvPr>
-          <p:cNvSpPr txBox="1"/>
-          <p:nvPr/>
-        </p:nvSpPr>
-        <p:spPr>
-          <a:xfrm>
-            <a:off x="5503559" y="3520485"/>
-            <a:ext cx="1184883" cy="338554"/>
-          </a:xfrm>
-          <a:prstGeom prst="rect">
-            <a:avLst/>
-          </a:prstGeom>
-          <a:noFill/>
-        </p:spPr>
-        <p:txBody>
-          <a:bodyPr wrap="square" rtlCol="0">
-            <a:spAutoFit/>
-          </a:bodyPr>
-          <a:lstStyle/>
-          <a:p>
-            <a:pPr algn="ctr"/>
-            <a:r>
-              <a:rPr lang="pt-BR" sz="1600" dirty="0">
-                <a:latin typeface="Times New Roman" panose="02020603050405020304" pitchFamily="18" charset="0"/>
-                <a:cs typeface="Times New Roman" panose="02020603050405020304" pitchFamily="18" charset="0"/>
-              </a:rPr>
-              <a:t>Classe Filha</a:t>
-            </a:r>
-          </a:p>
-        </p:txBody>
-      </p:sp>
-      <p:sp>
-        <p:nvSpPr>
-          <p:cNvPr id="4" name="Retângulo 3">
-            <a:extLst>
-              <a:ext uri="{FF2B5EF4-FFF2-40B4-BE49-F238E27FC236}">
-                <a16:creationId xmlns:a16="http://schemas.microsoft.com/office/drawing/2014/main" id="{FFAD0326-5AFB-4F87-8E1F-8F1446812B25}"/>
-              </a:ext>
-            </a:extLst>
-          </p:cNvPr>
-          <p:cNvSpPr/>
-          <p:nvPr/>
-        </p:nvSpPr>
-        <p:spPr>
-          <a:xfrm>
-            <a:off x="1698171" y="4061558"/>
-            <a:ext cx="8795657" cy="2421176"/>
-          </a:xfrm>
-          <a:prstGeom prst="rect">
-            <a:avLst/>
-          </a:prstGeom>
-        </p:spPr>
-        <p:txBody>
-          <a:bodyPr wrap="square">
-            <a:spAutoFit/>
-          </a:bodyPr>
-          <a:lstStyle/>
-          <a:p>
-            <a:pPr>
-              <a:spcBef>
-                <a:spcPts val="150"/>
-              </a:spcBef>
-              <a:spcAft>
-                <a:spcPts val="150"/>
-              </a:spcAft>
-            </a:pPr>
-            <a:r>
-              <a:rPr lang="pt-BR" sz="1600" b="1" dirty="0" err="1">
-                <a:solidFill>
-                  <a:srgbClr val="7F0055"/>
-                </a:solidFill>
-                <a:latin typeface="Consolas" panose="020B0609020204030204" pitchFamily="49" charset="0"/>
-              </a:rPr>
-              <a:t>public</a:t>
-            </a:r>
-            <a:r>
-              <a:rPr lang="pt-BR" sz="1600" dirty="0">
-                <a:solidFill>
-                  <a:srgbClr val="000000"/>
-                </a:solidFill>
-                <a:latin typeface="Consolas" panose="020B0609020204030204" pitchFamily="49" charset="0"/>
-              </a:rPr>
-              <a:t> </a:t>
-            </a:r>
-            <a:r>
-              <a:rPr lang="pt-BR" sz="1600" b="1" dirty="0" err="1">
-                <a:solidFill>
-                  <a:srgbClr val="7F0055"/>
-                </a:solidFill>
-                <a:latin typeface="Consolas" panose="020B0609020204030204" pitchFamily="49" charset="0"/>
-              </a:rPr>
-              <a:t>class</a:t>
-            </a:r>
-            <a:r>
-              <a:rPr lang="pt-BR" sz="1600" dirty="0">
-                <a:solidFill>
-                  <a:srgbClr val="000000"/>
-                </a:solidFill>
-                <a:latin typeface="Consolas" panose="020B0609020204030204" pitchFamily="49" charset="0"/>
-              </a:rPr>
-              <a:t> Gerente </a:t>
-            </a:r>
-            <a:r>
-              <a:rPr lang="pt-BR" sz="1600" b="1" dirty="0" err="1">
-                <a:solidFill>
-                  <a:srgbClr val="7F0055"/>
-                </a:solidFill>
-                <a:latin typeface="Consolas" panose="020B0609020204030204" pitchFamily="49" charset="0"/>
-              </a:rPr>
-              <a:t>extends</a:t>
-            </a:r>
-            <a:r>
-              <a:rPr lang="pt-BR" sz="1600" dirty="0">
-                <a:solidFill>
-                  <a:srgbClr val="000000"/>
-                </a:solidFill>
-                <a:latin typeface="Consolas" panose="020B0609020204030204" pitchFamily="49" charset="0"/>
-              </a:rPr>
-              <a:t> </a:t>
-            </a:r>
-            <a:r>
-              <a:rPr lang="pt-BR" sz="1600" dirty="0" err="1">
-                <a:solidFill>
-                  <a:srgbClr val="000000"/>
-                </a:solidFill>
-                <a:latin typeface="Consolas" panose="020B0609020204030204" pitchFamily="49" charset="0"/>
-              </a:rPr>
-              <a:t>Funcionarios</a:t>
-            </a:r>
-            <a:r>
-              <a:rPr lang="pt-BR" sz="1600" dirty="0">
-                <a:solidFill>
-                  <a:srgbClr val="000000"/>
-                </a:solidFill>
-                <a:latin typeface="Consolas" panose="020B0609020204030204" pitchFamily="49" charset="0"/>
-              </a:rPr>
-              <a:t>{</a:t>
-            </a:r>
-          </a:p>
-          <a:p>
-            <a:pPr lvl="1">
-              <a:spcBef>
-                <a:spcPts val="150"/>
-              </a:spcBef>
-              <a:spcAft>
-                <a:spcPts val="150"/>
-              </a:spcAft>
-            </a:pPr>
-            <a:r>
-              <a:rPr lang="pt-BR" sz="1600" b="1" dirty="0" err="1">
-                <a:solidFill>
-                  <a:srgbClr val="7F0055"/>
-                </a:solidFill>
-                <a:latin typeface="Consolas" panose="020B0609020204030204" pitchFamily="49" charset="0"/>
-              </a:rPr>
-              <a:t>private</a:t>
-            </a:r>
-            <a:r>
-              <a:rPr lang="pt-BR" sz="1600" dirty="0">
-                <a:solidFill>
-                  <a:srgbClr val="000000"/>
-                </a:solidFill>
-                <a:latin typeface="Consolas" panose="020B0609020204030204" pitchFamily="49" charset="0"/>
-              </a:rPr>
-              <a:t> </a:t>
-            </a:r>
-            <a:r>
-              <a:rPr lang="pt-BR" sz="1600" b="1" dirty="0">
-                <a:solidFill>
-                  <a:srgbClr val="7F0055"/>
-                </a:solidFill>
-                <a:latin typeface="Consolas" panose="020B0609020204030204" pitchFamily="49" charset="0"/>
-              </a:rPr>
-              <a:t>double</a:t>
-            </a:r>
-            <a:r>
-              <a:rPr lang="pt-BR" sz="1600" dirty="0">
-                <a:solidFill>
-                  <a:srgbClr val="000000"/>
-                </a:solidFill>
-                <a:latin typeface="Consolas" panose="020B0609020204030204" pitchFamily="49" charset="0"/>
-              </a:rPr>
-              <a:t> </a:t>
-            </a:r>
-            <a:r>
-              <a:rPr lang="pt-BR" sz="1600" dirty="0" err="1">
-                <a:solidFill>
-                  <a:srgbClr val="0000C0"/>
-                </a:solidFill>
-                <a:latin typeface="Consolas" panose="020B0609020204030204" pitchFamily="49" charset="0"/>
-              </a:rPr>
-              <a:t>adicionalGerencia</a:t>
-            </a:r>
-            <a:r>
-              <a:rPr lang="pt-BR" sz="1600" dirty="0">
-                <a:solidFill>
-                  <a:srgbClr val="000000"/>
-                </a:solidFill>
-                <a:latin typeface="Consolas" panose="020B0609020204030204" pitchFamily="49" charset="0"/>
-              </a:rPr>
-              <a:t>;</a:t>
-            </a:r>
-          </a:p>
-          <a:p>
-            <a:pPr lvl="1">
-              <a:spcBef>
-                <a:spcPts val="150"/>
-              </a:spcBef>
-              <a:spcAft>
-                <a:spcPts val="150"/>
-              </a:spcAft>
-            </a:pPr>
-            <a:endParaRPr lang="pt-BR" sz="1600" b="1" dirty="0">
-              <a:solidFill>
-                <a:srgbClr val="7F0055"/>
-              </a:solidFill>
-              <a:latin typeface="Consolas" panose="020B0609020204030204" pitchFamily="49" charset="0"/>
-            </a:endParaRPr>
-          </a:p>
-          <a:p>
-            <a:pPr lvl="1">
-              <a:spcBef>
-                <a:spcPts val="150"/>
-              </a:spcBef>
-              <a:spcAft>
-                <a:spcPts val="150"/>
-              </a:spcAft>
-            </a:pPr>
-            <a:r>
-              <a:rPr lang="pt-BR" sz="1600" b="1" dirty="0" err="1">
-                <a:solidFill>
-                  <a:srgbClr val="7F0055"/>
-                </a:solidFill>
-                <a:latin typeface="Consolas" panose="020B0609020204030204" pitchFamily="49" charset="0"/>
-              </a:rPr>
-              <a:t>public</a:t>
-            </a:r>
-            <a:r>
-              <a:rPr lang="pt-BR" sz="1600" dirty="0">
-                <a:solidFill>
-                  <a:srgbClr val="000000"/>
-                </a:solidFill>
-                <a:latin typeface="Consolas" panose="020B0609020204030204" pitchFamily="49" charset="0"/>
-              </a:rPr>
-              <a:t> Gerente(String </a:t>
-            </a:r>
-            <a:r>
-              <a:rPr lang="pt-BR" sz="1600" dirty="0">
-                <a:solidFill>
-                  <a:srgbClr val="6A3E3E"/>
-                </a:solidFill>
-                <a:latin typeface="Consolas" panose="020B0609020204030204" pitchFamily="49" charset="0"/>
-              </a:rPr>
-              <a:t>nome</a:t>
-            </a:r>
-            <a:r>
-              <a:rPr lang="pt-BR" sz="1600" dirty="0">
-                <a:solidFill>
-                  <a:srgbClr val="000000"/>
-                </a:solidFill>
-                <a:latin typeface="Consolas" panose="020B0609020204030204" pitchFamily="49" charset="0"/>
-              </a:rPr>
-              <a:t>, </a:t>
-            </a:r>
-            <a:r>
-              <a:rPr lang="pt-BR" sz="1600" b="1" dirty="0">
-                <a:solidFill>
-                  <a:srgbClr val="7F0055"/>
-                </a:solidFill>
-                <a:latin typeface="Consolas" panose="020B0609020204030204" pitchFamily="49" charset="0"/>
-              </a:rPr>
-              <a:t>double</a:t>
-            </a:r>
-            <a:r>
-              <a:rPr lang="pt-BR" sz="1600" dirty="0">
-                <a:solidFill>
-                  <a:srgbClr val="000000"/>
-                </a:solidFill>
-                <a:latin typeface="Consolas" panose="020B0609020204030204" pitchFamily="49" charset="0"/>
-              </a:rPr>
-              <a:t> </a:t>
-            </a:r>
-            <a:r>
-              <a:rPr lang="pt-BR" sz="1600" dirty="0">
-                <a:solidFill>
-                  <a:srgbClr val="6A3E3E"/>
-                </a:solidFill>
-                <a:latin typeface="Consolas" panose="020B0609020204030204" pitchFamily="49" charset="0"/>
-              </a:rPr>
-              <a:t>salario</a:t>
-            </a:r>
-            <a:r>
-              <a:rPr lang="pt-BR" sz="1600" dirty="0">
-                <a:solidFill>
-                  <a:srgbClr val="000000"/>
-                </a:solidFill>
-                <a:latin typeface="Consolas" panose="020B0609020204030204" pitchFamily="49" charset="0"/>
-              </a:rPr>
-              <a:t>, </a:t>
-            </a:r>
-            <a:r>
-              <a:rPr lang="pt-BR" sz="1600" b="1" dirty="0">
-                <a:solidFill>
-                  <a:srgbClr val="7F0055"/>
-                </a:solidFill>
-                <a:latin typeface="Consolas" panose="020B0609020204030204" pitchFamily="49" charset="0"/>
-              </a:rPr>
-              <a:t>double</a:t>
-            </a:r>
-            <a:r>
-              <a:rPr lang="pt-BR" sz="1600" dirty="0">
-                <a:solidFill>
-                  <a:srgbClr val="000000"/>
-                </a:solidFill>
-                <a:latin typeface="Consolas" panose="020B0609020204030204" pitchFamily="49" charset="0"/>
-              </a:rPr>
-              <a:t> </a:t>
-            </a:r>
-            <a:r>
-              <a:rPr lang="pt-BR" sz="1600" dirty="0" err="1">
-                <a:solidFill>
-                  <a:srgbClr val="6A3E3E"/>
-                </a:solidFill>
-                <a:latin typeface="Consolas" panose="020B0609020204030204" pitchFamily="49" charset="0"/>
-              </a:rPr>
-              <a:t>adicionalGerencia</a:t>
-            </a:r>
-            <a:r>
-              <a:rPr lang="pt-BR" sz="1600" dirty="0">
-                <a:solidFill>
-                  <a:srgbClr val="000000"/>
-                </a:solidFill>
-                <a:latin typeface="Consolas" panose="020B0609020204030204" pitchFamily="49" charset="0"/>
-              </a:rPr>
-              <a:t>) {</a:t>
-            </a:r>
-          </a:p>
-          <a:p>
-            <a:pPr lvl="2">
-              <a:spcBef>
-                <a:spcPts val="150"/>
-              </a:spcBef>
-              <a:spcAft>
-                <a:spcPts val="150"/>
-              </a:spcAft>
-            </a:pPr>
-            <a:r>
-              <a:rPr lang="pt-BR" sz="1600" b="1" dirty="0" err="1">
-                <a:solidFill>
-                  <a:srgbClr val="7F0055"/>
-                </a:solidFill>
-                <a:latin typeface="Consolas" panose="020B0609020204030204" pitchFamily="49" charset="0"/>
-              </a:rPr>
-              <a:t>super</a:t>
-            </a:r>
-            <a:r>
-              <a:rPr lang="pt-BR" sz="1600" dirty="0">
-                <a:solidFill>
-                  <a:srgbClr val="000000"/>
-                </a:solidFill>
-                <a:latin typeface="Consolas" panose="020B0609020204030204" pitchFamily="49" charset="0"/>
-              </a:rPr>
-              <a:t>(</a:t>
-            </a:r>
-            <a:r>
-              <a:rPr lang="pt-BR" sz="1600" dirty="0">
-                <a:solidFill>
-                  <a:srgbClr val="6A3E3E"/>
-                </a:solidFill>
-                <a:latin typeface="Consolas" panose="020B0609020204030204" pitchFamily="49" charset="0"/>
-              </a:rPr>
-              <a:t>nome</a:t>
-            </a:r>
-            <a:r>
-              <a:rPr lang="pt-BR" sz="1600" dirty="0">
-                <a:solidFill>
-                  <a:srgbClr val="000000"/>
-                </a:solidFill>
-                <a:latin typeface="Consolas" panose="020B0609020204030204" pitchFamily="49" charset="0"/>
-              </a:rPr>
-              <a:t>, </a:t>
-            </a:r>
-            <a:r>
-              <a:rPr lang="pt-BR" sz="1600" dirty="0">
-                <a:solidFill>
-                  <a:srgbClr val="6A3E3E"/>
-                </a:solidFill>
-                <a:latin typeface="Consolas" panose="020B0609020204030204" pitchFamily="49" charset="0"/>
-              </a:rPr>
-              <a:t>salario</a:t>
-            </a:r>
-            <a:r>
-              <a:rPr lang="pt-BR" sz="1600" dirty="0">
-                <a:solidFill>
-                  <a:srgbClr val="000000"/>
-                </a:solidFill>
-                <a:latin typeface="Consolas" panose="020B0609020204030204" pitchFamily="49" charset="0"/>
-              </a:rPr>
-              <a:t>);</a:t>
-            </a:r>
-          </a:p>
-          <a:p>
-            <a:pPr lvl="2">
-              <a:spcBef>
-                <a:spcPts val="150"/>
-              </a:spcBef>
-              <a:spcAft>
-                <a:spcPts val="150"/>
-              </a:spcAft>
-            </a:pPr>
-            <a:r>
-              <a:rPr lang="pt-BR" sz="1600" b="1" dirty="0" err="1">
-                <a:solidFill>
-                  <a:srgbClr val="7F0055"/>
-                </a:solidFill>
-                <a:latin typeface="Consolas" panose="020B0609020204030204" pitchFamily="49" charset="0"/>
-              </a:rPr>
-              <a:t>this</a:t>
-            </a:r>
-            <a:r>
-              <a:rPr lang="pt-BR" sz="1600" dirty="0" err="1">
-                <a:solidFill>
-                  <a:srgbClr val="000000"/>
-                </a:solidFill>
-                <a:latin typeface="Consolas" panose="020B0609020204030204" pitchFamily="49" charset="0"/>
-              </a:rPr>
-              <a:t>.</a:t>
-            </a:r>
-            <a:r>
-              <a:rPr lang="pt-BR" sz="1600" dirty="0" err="1">
-                <a:solidFill>
-                  <a:srgbClr val="0000C0"/>
-                </a:solidFill>
-                <a:latin typeface="Consolas" panose="020B0609020204030204" pitchFamily="49" charset="0"/>
-              </a:rPr>
-              <a:t>adicionalGerencia</a:t>
-            </a:r>
-            <a:r>
-              <a:rPr lang="pt-BR" sz="1600" dirty="0">
-                <a:solidFill>
-                  <a:srgbClr val="000000"/>
-                </a:solidFill>
-                <a:latin typeface="Consolas" panose="020B0609020204030204" pitchFamily="49" charset="0"/>
-              </a:rPr>
-              <a:t> = </a:t>
-            </a:r>
-            <a:r>
-              <a:rPr lang="pt-BR" sz="1600" dirty="0" err="1">
-                <a:solidFill>
-                  <a:srgbClr val="6A3E3E"/>
-                </a:solidFill>
-                <a:latin typeface="Consolas" panose="020B0609020204030204" pitchFamily="49" charset="0"/>
-              </a:rPr>
-              <a:t>adicionalGerencia</a:t>
-            </a:r>
-            <a:r>
-              <a:rPr lang="pt-BR" sz="1600" dirty="0">
-                <a:solidFill>
-                  <a:srgbClr val="000000"/>
-                </a:solidFill>
-                <a:latin typeface="Consolas" panose="020B0609020204030204" pitchFamily="49" charset="0"/>
-              </a:rPr>
-              <a:t>;</a:t>
-            </a:r>
-          </a:p>
-          <a:p>
-            <a:pPr lvl="1">
-              <a:spcBef>
-                <a:spcPts val="150"/>
-              </a:spcBef>
-              <a:spcAft>
-                <a:spcPts val="150"/>
-              </a:spcAft>
-            </a:pPr>
-            <a:r>
-              <a:rPr lang="pt-BR" sz="1600" dirty="0">
-                <a:solidFill>
-                  <a:srgbClr val="000000"/>
-                </a:solidFill>
-                <a:latin typeface="Consolas" panose="020B0609020204030204" pitchFamily="49" charset="0"/>
-              </a:rPr>
-              <a:t>}</a:t>
-            </a:r>
-          </a:p>
-          <a:p>
-            <a:pPr>
-              <a:spcBef>
-                <a:spcPts val="150"/>
-              </a:spcBef>
-              <a:spcAft>
-                <a:spcPts val="150"/>
-              </a:spcAft>
-            </a:pPr>
-            <a:r>
-              <a:rPr lang="pt-BR" sz="1600" dirty="0">
-                <a:solidFill>
-                  <a:srgbClr val="000000"/>
-                </a:solidFill>
-                <a:latin typeface="Consolas" panose="020B0609020204030204" pitchFamily="49" charset="0"/>
-              </a:rPr>
-              <a:t>}</a:t>
+              <a:rPr lang="pt-BR" dirty="0"/>
+              <a:t>Polimorfismo é a habilidade de um mesmo objeto executar comportamentos diferentes, dependendo da forma como é utilizado no programa.</a:t>
+            </a:r>
+          </a:p>
+          <a:p>
+            <a:endParaRPr lang="pt-BR" dirty="0"/>
+          </a:p>
+          <a:p>
+            <a:pPr lvl="1"/>
+            <a:r>
+              <a:rPr lang="pt-BR" dirty="0"/>
+              <a:t>Sobrecarga (</a:t>
+            </a:r>
+            <a:r>
+              <a:rPr lang="pt-BR" dirty="0" err="1"/>
+              <a:t>Overloading</a:t>
+            </a:r>
+            <a:r>
+              <a:rPr lang="pt-BR" dirty="0"/>
+              <a:t>):Vários métodos com o mesmo nome, mas com parâmetros diferentes na mesma classe.</a:t>
+            </a:r>
+          </a:p>
+          <a:p>
+            <a:pPr lvl="1"/>
+            <a:r>
+              <a:rPr lang="pt-BR" dirty="0"/>
+              <a:t>Sobrescrita (</a:t>
+            </a:r>
+            <a:r>
+              <a:rPr lang="pt-BR" dirty="0" err="1"/>
+              <a:t>Overriding</a:t>
+            </a:r>
+            <a:r>
+              <a:rPr lang="pt-BR" dirty="0"/>
+              <a:t>):Uma subclasse redefine um método da superclasse, mantendo a mesma assinatura.</a:t>
             </a:r>
           </a:p>
         </p:txBody>
@@ -4382,7 +3883,7 @@
     </p:spTree>
     <p:extLst>
       <p:ext uri="{BB962C8B-B14F-4D97-AF65-F5344CB8AC3E}">
-        <p14:creationId xmlns:p14="http://schemas.microsoft.com/office/powerpoint/2010/main" val="13419183"/>
+        <p14:creationId xmlns:p14="http://schemas.microsoft.com/office/powerpoint/2010/main" val="3973512991"/>
       </p:ext>
     </p:extLst>
   </p:cSld>
@@ -4414,7 +3915,7 @@
           <p:cNvPr id="2" name="Título 1">
             <a:extLst>
               <a:ext uri="{FF2B5EF4-FFF2-40B4-BE49-F238E27FC236}">
-                <a16:creationId xmlns:a16="http://schemas.microsoft.com/office/drawing/2014/main" id="{13BF5B45-63CF-41F7-8496-D896490AE335}"/>
+                <a16:creationId xmlns:a16="http://schemas.microsoft.com/office/drawing/2014/main" id="{4A744C23-AA41-4EE5-936C-BE42F1928F7C}"/>
               </a:ext>
             </a:extLst>
           </p:cNvPr>
@@ -4432,95 +3933,7 @@
           <a:p>
             <a:r>
               <a:rPr lang="pt-BR" dirty="0"/>
-              <a:t>Construtor </a:t>
-            </a:r>
-            <a:r>
-              <a:rPr lang="pt-BR" dirty="0" err="1"/>
-              <a:t>Super</a:t>
-            </a:r>
-            <a:r>
-              <a:rPr lang="pt-BR" dirty="0"/>
-              <a:t>()</a:t>
-            </a:r>
-          </a:p>
-        </p:txBody>
-      </p:sp>
-      <p:sp>
-        <p:nvSpPr>
-          <p:cNvPr id="3" name="Espaço Reservado para Conteúdo 2">
-            <a:extLst>
-              <a:ext uri="{FF2B5EF4-FFF2-40B4-BE49-F238E27FC236}">
-                <a16:creationId xmlns:a16="http://schemas.microsoft.com/office/drawing/2014/main" id="{05C539C4-EDD4-414C-ADA6-9C2633603CB2}"/>
-              </a:ext>
-            </a:extLst>
-          </p:cNvPr>
-          <p:cNvSpPr>
-            <a:spLocks noGrp="1"/>
-          </p:cNvSpPr>
-          <p:nvPr>
-            <p:ph idx="1"/>
-          </p:nvPr>
-        </p:nvSpPr>
-        <p:spPr>
-          <a:xfrm>
-            <a:off x="592347" y="1844675"/>
-            <a:ext cx="11007306" cy="1473291"/>
-          </a:xfrm>
-        </p:spPr>
-        <p:txBody>
-          <a:bodyPr/>
-          <a:lstStyle/>
-          <a:p>
-            <a:r>
-              <a:rPr lang="pt-BR" sz="1800" dirty="0"/>
-              <a:t>A palavra-chave </a:t>
-            </a:r>
-            <a:r>
-              <a:rPr lang="pt-BR" sz="1800" dirty="0" err="1"/>
-              <a:t>super</a:t>
-            </a:r>
-            <a:r>
-              <a:rPr lang="pt-BR" sz="1800" dirty="0"/>
-              <a:t> é utilizada para se referir à superclasse (classe pai) de uma classe derivada (classe filha). Ela é especialmente útil quando há a necessidade de reutilizar atributos ou métodos da classe pai, evitando a repetição de código.</a:t>
-            </a:r>
-          </a:p>
-        </p:txBody>
-      </p:sp>
-      <p:sp>
-        <p:nvSpPr>
-          <p:cNvPr id="7" name="CaixaDeTexto 6">
-            <a:extLst>
-              <a:ext uri="{FF2B5EF4-FFF2-40B4-BE49-F238E27FC236}">
-                <a16:creationId xmlns:a16="http://schemas.microsoft.com/office/drawing/2014/main" id="{15C42C8B-8DB6-4C73-97AE-4AF8FC519272}"/>
-              </a:ext>
-            </a:extLst>
-          </p:cNvPr>
-          <p:cNvSpPr txBox="1"/>
-          <p:nvPr/>
-        </p:nvSpPr>
-        <p:spPr>
-          <a:xfrm>
-            <a:off x="5503559" y="3520485"/>
-            <a:ext cx="1184883" cy="338554"/>
-          </a:xfrm>
-          <a:prstGeom prst="rect">
-            <a:avLst/>
-          </a:prstGeom>
-          <a:noFill/>
-        </p:spPr>
-        <p:txBody>
-          <a:bodyPr wrap="square" rtlCol="0">
-            <a:spAutoFit/>
-          </a:bodyPr>
-          <a:lstStyle/>
-          <a:p>
-            <a:pPr algn="ctr"/>
-            <a:r>
-              <a:rPr lang="pt-BR" sz="1600" dirty="0">
-                <a:latin typeface="Times New Roman" panose="02020603050405020304" pitchFamily="18" charset="0"/>
-                <a:cs typeface="Times New Roman" panose="02020603050405020304" pitchFamily="18" charset="0"/>
-              </a:rPr>
-              <a:t>Classe Filha</a:t>
+              <a:t>Exemplo de Polimorfismo</a:t>
             </a:r>
           </a:p>
         </p:txBody>
@@ -4530,7 +3943,7 @@
           <p:cNvPr id="4" name="Retângulo 3">
             <a:extLst>
               <a:ext uri="{FF2B5EF4-FFF2-40B4-BE49-F238E27FC236}">
-                <a16:creationId xmlns:a16="http://schemas.microsoft.com/office/drawing/2014/main" id="{FFAD0326-5AFB-4F87-8E1F-8F1446812B25}"/>
+                <a16:creationId xmlns:a16="http://schemas.microsoft.com/office/drawing/2014/main" id="{A9C127C7-5E90-4A82-86A4-C9E34D1D6277}"/>
               </a:ext>
             </a:extLst>
           </p:cNvPr>
@@ -4539,8 +3952,8 @@
         </p:nvSpPr>
         <p:spPr>
           <a:xfrm>
-            <a:off x="1698171" y="4061558"/>
-            <a:ext cx="8795657" cy="2421176"/>
+            <a:off x="852311" y="3028407"/>
+            <a:ext cx="4698999" cy="2975173"/>
           </a:xfrm>
           <a:prstGeom prst="rect">
             <a:avLst/>
@@ -4561,7 +3974,7 @@
               </a:spcAft>
             </a:pPr>
             <a:r>
-              <a:rPr lang="pt-BR" sz="1600" b="1" dirty="0" err="1">
+              <a:rPr lang="pt-BR" sz="1400" b="1" dirty="0" err="1">
                 <a:solidFill>
                   <a:srgbClr val="7F0055"/>
                 </a:solidFill>
@@ -4570,7 +3983,7 @@
               <a:t>public</a:t>
             </a:r>
             <a:r>
-              <a:rPr lang="pt-BR" sz="1600" dirty="0">
+              <a:rPr lang="pt-BR" sz="1400" dirty="0">
                 <a:solidFill>
                   <a:srgbClr val="000000"/>
                 </a:solidFill>
@@ -4579,7 +3992,7 @@
               <a:t> </a:t>
             </a:r>
             <a:r>
-              <a:rPr lang="pt-BR" sz="1600" b="1" dirty="0" err="1">
+              <a:rPr lang="pt-BR" sz="1400" b="1" dirty="0" err="1">
                 <a:solidFill>
                   <a:srgbClr val="7F0055"/>
                 </a:solidFill>
@@ -4588,53 +4001,17 @@
               <a:t>class</a:t>
             </a:r>
             <a:r>
-              <a:rPr lang="pt-BR" sz="1600" dirty="0">
-                <a:solidFill>
-                  <a:srgbClr val="000000"/>
-                </a:solidFill>
-                <a:latin typeface="Consolas" panose="020B0609020204030204" pitchFamily="49" charset="0"/>
-              </a:rPr>
-              <a:t> Gerente </a:t>
-            </a:r>
-            <a:r>
-              <a:rPr lang="pt-BR" sz="1600" b="1" dirty="0" err="1">
-                <a:solidFill>
-                  <a:srgbClr val="7F0055"/>
-                </a:solidFill>
-                <a:latin typeface="Consolas" panose="020B0609020204030204" pitchFamily="49" charset="0"/>
-              </a:rPr>
-              <a:t>extends</a:t>
-            </a:r>
-            <a:r>
-              <a:rPr lang="pt-BR" sz="1600" dirty="0">
-                <a:solidFill>
-                  <a:srgbClr val="000000"/>
-                </a:solidFill>
-                <a:latin typeface="Consolas" panose="020B0609020204030204" pitchFamily="49" charset="0"/>
-              </a:rPr>
-              <a:t> </a:t>
-            </a:r>
-            <a:r>
-              <a:rPr lang="pt-BR" sz="1600" dirty="0" err="1">
-                <a:solidFill>
-                  <a:srgbClr val="000000"/>
-                </a:solidFill>
-                <a:latin typeface="Consolas" panose="020B0609020204030204" pitchFamily="49" charset="0"/>
-              </a:rPr>
-              <a:t>Funcionarios</a:t>
-            </a:r>
-            <a:r>
-              <a:rPr lang="pt-BR" sz="1600" dirty="0">
-                <a:solidFill>
-                  <a:srgbClr val="000000"/>
-                </a:solidFill>
-                <a:latin typeface="Consolas" panose="020B0609020204030204" pitchFamily="49" charset="0"/>
-              </a:rPr>
-              <a:t>{</a:t>
-            </a:r>
-          </a:p>
-          <a:p>
-            <a:pPr lvl="1">
+              <a:rPr lang="pt-BR" sz="1400" dirty="0">
+                <a:solidFill>
+                  <a:srgbClr val="000000"/>
+                </a:solidFill>
+                <a:latin typeface="Consolas" panose="020B0609020204030204" pitchFamily="49" charset="0"/>
+              </a:rPr>
+              <a:t> Calculadora {</a:t>
+            </a:r>
+          </a:p>
+          <a:p>
+            <a:pPr indent="457200">
               <a:spcBef>
                 <a:spcPts val="150"/>
               </a:spcBef>
@@ -4643,16 +4020,16 @@
               </a:spcAft>
             </a:pPr>
             <a:r>
-              <a:rPr lang="pt-BR" sz="1600" b="1" dirty="0" err="1">
+              <a:rPr lang="pt-BR" sz="1400" b="1" dirty="0" err="1">
                 <a:solidFill>
                   <a:srgbClr val="7F0055"/>
                 </a:solidFill>
                 <a:latin typeface="Consolas" panose="020B0609020204030204" pitchFamily="49" charset="0"/>
               </a:rPr>
-              <a:t>private</a:t>
-            </a:r>
-            <a:r>
-              <a:rPr lang="pt-BR" sz="1600" dirty="0">
+              <a:t>public</a:t>
+            </a:r>
+            <a:r>
+              <a:rPr lang="pt-BR" sz="1400" dirty="0">
                 <a:solidFill>
                   <a:srgbClr val="000000"/>
                 </a:solidFill>
@@ -4661,16 +4038,34 @@
               <a:t> </a:t>
             </a:r>
             <a:r>
-              <a:rPr lang="pt-BR" sz="1600" b="1" dirty="0">
+              <a:rPr lang="pt-BR" sz="1400" b="1" dirty="0" err="1">
                 <a:solidFill>
                   <a:srgbClr val="7F0055"/>
                 </a:solidFill>
                 <a:latin typeface="Consolas" panose="020B0609020204030204" pitchFamily="49" charset="0"/>
               </a:rPr>
-              <a:t>double</a:t>
-            </a:r>
-            <a:r>
-              <a:rPr lang="pt-BR" sz="1600" dirty="0">
+              <a:t>int</a:t>
+            </a:r>
+            <a:r>
+              <a:rPr lang="pt-BR" sz="1400" dirty="0">
+                <a:solidFill>
+                  <a:srgbClr val="000000"/>
+                </a:solidFill>
+                <a:latin typeface="Consolas" panose="020B0609020204030204" pitchFamily="49" charset="0"/>
+              </a:rPr>
+              <a:t> somar(</a:t>
+            </a:r>
+            <a:r>
+              <a:rPr lang="pt-BR" sz="1400" b="1" dirty="0" err="1">
+                <a:solidFill>
+                  <a:srgbClr val="7F0055"/>
+                </a:solidFill>
+                <a:latin typeface="Consolas" panose="020B0609020204030204" pitchFamily="49" charset="0"/>
+              </a:rPr>
+              <a:t>int</a:t>
+            </a:r>
+            <a:r>
+              <a:rPr lang="pt-BR" sz="1400" dirty="0">
                 <a:solidFill>
                   <a:srgbClr val="000000"/>
                 </a:solidFill>
@@ -4679,26 +4074,62 @@
               <a:t> </a:t>
             </a:r>
             <a:r>
-              <a:rPr lang="pt-BR" sz="1600" dirty="0" err="1">
-                <a:solidFill>
-                  <a:srgbClr val="0000C0"/>
-                </a:solidFill>
-                <a:latin typeface="Consolas" panose="020B0609020204030204" pitchFamily="49" charset="0"/>
-              </a:rPr>
-              <a:t>adicionalGerencia</a:t>
-            </a:r>
-            <a:r>
-              <a:rPr lang="pt-BR" sz="1600" dirty="0">
-                <a:solidFill>
-                  <a:srgbClr val="000000"/>
-                </a:solidFill>
-                <a:latin typeface="Consolas" panose="020B0609020204030204" pitchFamily="49" charset="0"/>
-              </a:rPr>
-              <a:t>;</a:t>
-            </a:r>
-          </a:p>
-          <a:p>
-            <a:pPr lvl="1">
+              <a:rPr lang="pt-BR" sz="1400" dirty="0">
+                <a:solidFill>
+                  <a:srgbClr val="6A3E3E"/>
+                </a:solidFill>
+                <a:latin typeface="Consolas" panose="020B0609020204030204" pitchFamily="49" charset="0"/>
+              </a:rPr>
+              <a:t>a</a:t>
+            </a:r>
+            <a:r>
+              <a:rPr lang="pt-BR" sz="1400" dirty="0">
+                <a:solidFill>
+                  <a:srgbClr val="000000"/>
+                </a:solidFill>
+                <a:latin typeface="Consolas" panose="020B0609020204030204" pitchFamily="49" charset="0"/>
+              </a:rPr>
+              <a:t>, </a:t>
+            </a:r>
+            <a:r>
+              <a:rPr lang="pt-BR" sz="1400" b="1" dirty="0" err="1">
+                <a:solidFill>
+                  <a:srgbClr val="7F0055"/>
+                </a:solidFill>
+                <a:latin typeface="Consolas" panose="020B0609020204030204" pitchFamily="49" charset="0"/>
+              </a:rPr>
+              <a:t>int</a:t>
+            </a:r>
+            <a:r>
+              <a:rPr lang="pt-BR" sz="1400" dirty="0">
+                <a:solidFill>
+                  <a:srgbClr val="000000"/>
+                </a:solidFill>
+                <a:latin typeface="Consolas" panose="020B0609020204030204" pitchFamily="49" charset="0"/>
+              </a:rPr>
+              <a:t> </a:t>
+            </a:r>
+            <a:r>
+              <a:rPr lang="pt-BR" sz="1400" dirty="0">
+                <a:solidFill>
+                  <a:srgbClr val="6A3E3E"/>
+                </a:solidFill>
+                <a:latin typeface="Consolas" panose="020B0609020204030204" pitchFamily="49" charset="0"/>
+              </a:rPr>
+              <a:t>b</a:t>
+            </a:r>
+            <a:r>
+              <a:rPr lang="pt-BR" sz="1400" dirty="0">
+                <a:solidFill>
+                  <a:srgbClr val="000000"/>
+                </a:solidFill>
+                <a:latin typeface="Consolas" panose="020B0609020204030204" pitchFamily="49" charset="0"/>
+              </a:rPr>
+              <a:t>) {</a:t>
+            </a:r>
+          </a:p>
+          <a:p>
+            <a:pPr indent="914400">
               <a:spcBef>
                 <a:spcPts val="150"/>
               </a:spcBef>
@@ -4706,15 +4137,63 @@
                 <a:spcPts val="150"/>
               </a:spcAft>
             </a:pPr>
-            <a:endParaRPr lang="pt-BR" sz="1600" b="1" dirty="0">
-              <a:solidFill>
-                <a:srgbClr val="7F0055"/>
-              </a:solidFill>
-              <a:latin typeface="Consolas" panose="020B0609020204030204" pitchFamily="49" charset="0"/>
-            </a:endParaRPr>
-          </a:p>
-          <a:p>
-            <a:pPr lvl="1">
+            <a:r>
+              <a:rPr lang="pt-BR" sz="1400" b="1" dirty="0" err="1">
+                <a:solidFill>
+                  <a:srgbClr val="7F0055"/>
+                </a:solidFill>
+                <a:latin typeface="Consolas" panose="020B0609020204030204" pitchFamily="49" charset="0"/>
+              </a:rPr>
+              <a:t>return</a:t>
+            </a:r>
+            <a:r>
+              <a:rPr lang="pt-BR" sz="1400" dirty="0">
+                <a:solidFill>
+                  <a:srgbClr val="000000"/>
+                </a:solidFill>
+                <a:latin typeface="Consolas" panose="020B0609020204030204" pitchFamily="49" charset="0"/>
+              </a:rPr>
+              <a:t> </a:t>
+            </a:r>
+            <a:r>
+              <a:rPr lang="pt-BR" sz="1400" dirty="0">
+                <a:solidFill>
+                  <a:srgbClr val="6A3E3E"/>
+                </a:solidFill>
+                <a:latin typeface="Consolas" panose="020B0609020204030204" pitchFamily="49" charset="0"/>
+              </a:rPr>
+              <a:t>a</a:t>
+            </a:r>
+            <a:r>
+              <a:rPr lang="pt-BR" sz="1400" dirty="0">
+                <a:solidFill>
+                  <a:srgbClr val="000000"/>
+                </a:solidFill>
+                <a:latin typeface="Consolas" panose="020B0609020204030204" pitchFamily="49" charset="0"/>
+              </a:rPr>
+              <a:t> + </a:t>
+            </a:r>
+            <a:r>
+              <a:rPr lang="pt-BR" sz="1400" dirty="0">
+                <a:solidFill>
+                  <a:srgbClr val="6A3E3E"/>
+                </a:solidFill>
+                <a:latin typeface="Consolas" panose="020B0609020204030204" pitchFamily="49" charset="0"/>
+              </a:rPr>
+              <a:t>b</a:t>
+            </a:r>
+            <a:r>
+              <a:rPr lang="pt-BR" sz="1400" dirty="0">
+                <a:solidFill>
+                  <a:srgbClr val="000000"/>
+                </a:solidFill>
+                <a:latin typeface="Consolas" panose="020B0609020204030204" pitchFamily="49" charset="0"/>
+              </a:rPr>
+              <a:t>;</a:t>
+            </a:r>
+          </a:p>
+          <a:p>
+            <a:pPr indent="457200">
               <a:spcBef>
                 <a:spcPts val="150"/>
               </a:spcBef>
@@ -4723,116 +4202,17 @@
               </a:spcAft>
             </a:pPr>
             <a:r>
-              <a:rPr lang="pt-BR" sz="1600" b="1" dirty="0" err="1">
-                <a:solidFill>
-                  <a:srgbClr val="7F0055"/>
-                </a:solidFill>
-                <a:latin typeface="Consolas" panose="020B0609020204030204" pitchFamily="49" charset="0"/>
-              </a:rPr>
-              <a:t>public</a:t>
-            </a:r>
-            <a:r>
-              <a:rPr lang="pt-BR" sz="1600" dirty="0">
-                <a:solidFill>
-                  <a:srgbClr val="000000"/>
-                </a:solidFill>
-                <a:latin typeface="Consolas" panose="020B0609020204030204" pitchFamily="49" charset="0"/>
-              </a:rPr>
-              <a:t> Gerente(String </a:t>
-            </a:r>
-            <a:r>
-              <a:rPr lang="pt-BR" sz="1600" dirty="0">
-                <a:solidFill>
-                  <a:srgbClr val="6A3E3E"/>
-                </a:solidFill>
-                <a:latin typeface="Consolas" panose="020B0609020204030204" pitchFamily="49" charset="0"/>
-              </a:rPr>
-              <a:t>nome</a:t>
-            </a:r>
-            <a:r>
-              <a:rPr lang="pt-BR" sz="1600" dirty="0">
-                <a:solidFill>
-                  <a:srgbClr val="000000"/>
-                </a:solidFill>
-                <a:latin typeface="Consolas" panose="020B0609020204030204" pitchFamily="49" charset="0"/>
-              </a:rPr>
-              <a:t>, </a:t>
-            </a:r>
-            <a:r>
-              <a:rPr lang="pt-BR" sz="1600" b="1" dirty="0">
-                <a:solidFill>
-                  <a:srgbClr val="7F0055"/>
-                </a:solidFill>
-                <a:latin typeface="Consolas" panose="020B0609020204030204" pitchFamily="49" charset="0"/>
-              </a:rPr>
-              <a:t>double</a:t>
-            </a:r>
-            <a:r>
-              <a:rPr lang="pt-BR" sz="1600" dirty="0">
-                <a:solidFill>
-                  <a:srgbClr val="000000"/>
-                </a:solidFill>
-                <a:latin typeface="Consolas" panose="020B0609020204030204" pitchFamily="49" charset="0"/>
-              </a:rPr>
-              <a:t> </a:t>
-            </a:r>
-            <a:r>
-              <a:rPr lang="pt-BR" sz="1600" dirty="0">
-                <a:solidFill>
-                  <a:srgbClr val="6A3E3E"/>
-                </a:solidFill>
-                <a:latin typeface="Consolas" panose="020B0609020204030204" pitchFamily="49" charset="0"/>
-              </a:rPr>
-              <a:t>salario</a:t>
-            </a:r>
-            <a:r>
-              <a:rPr lang="pt-BR" sz="1600" dirty="0">
-                <a:solidFill>
-                  <a:srgbClr val="000000"/>
-                </a:solidFill>
-                <a:latin typeface="Consolas" panose="020B0609020204030204" pitchFamily="49" charset="0"/>
-              </a:rPr>
-              <a:t>, </a:t>
-            </a:r>
-            <a:r>
-              <a:rPr lang="pt-BR" sz="1600" b="1" dirty="0">
-                <a:solidFill>
-                  <a:srgbClr val="7F0055"/>
-                </a:solidFill>
-                <a:latin typeface="Consolas" panose="020B0609020204030204" pitchFamily="49" charset="0"/>
-              </a:rPr>
-              <a:t>double</a:t>
-            </a:r>
-            <a:r>
-              <a:rPr lang="pt-BR" sz="1600" dirty="0">
-                <a:solidFill>
-                  <a:srgbClr val="000000"/>
-                </a:solidFill>
-                <a:latin typeface="Consolas" panose="020B0609020204030204" pitchFamily="49" charset="0"/>
-              </a:rPr>
-              <a:t> </a:t>
-            </a:r>
-            <a:r>
-              <a:rPr lang="pt-BR" sz="1600" dirty="0" err="1">
-                <a:solidFill>
-                  <a:srgbClr val="6A3E3E"/>
-                </a:solidFill>
-                <a:latin typeface="Consolas" panose="020B0609020204030204" pitchFamily="49" charset="0"/>
-              </a:rPr>
-              <a:t>adicionalGerencia</a:t>
-            </a:r>
-            <a:r>
-              <a:rPr lang="pt-BR" sz="1600" dirty="0">
-                <a:solidFill>
-                  <a:srgbClr val="000000"/>
-                </a:solidFill>
-                <a:latin typeface="Consolas" panose="020B0609020204030204" pitchFamily="49" charset="0"/>
-              </a:rPr>
-              <a:t>) {</a:t>
-            </a:r>
-          </a:p>
-          <a:p>
-            <a:pPr lvl="2">
+              <a:rPr lang="pt-BR" sz="1400" dirty="0">
+                <a:solidFill>
+                  <a:srgbClr val="000000"/>
+                </a:solidFill>
+                <a:latin typeface="Consolas" panose="020B0609020204030204" pitchFamily="49" charset="0"/>
+              </a:rPr>
+              <a:t>}</a:t>
+            </a:r>
+          </a:p>
+          <a:p>
+            <a:pPr indent="457200">
               <a:spcBef>
                 <a:spcPts val="150"/>
               </a:spcBef>
@@ -4841,34 +4221,70 @@
               </a:spcAft>
             </a:pPr>
             <a:r>
-              <a:rPr lang="pt-BR" sz="1600" b="1" dirty="0" err="1">
+              <a:rPr lang="pt-BR" sz="1400" b="1" dirty="0" err="1">
                 <a:solidFill>
                   <a:srgbClr val="7F0055"/>
                 </a:solidFill>
                 <a:latin typeface="Consolas" panose="020B0609020204030204" pitchFamily="49" charset="0"/>
               </a:rPr>
-              <a:t>super</a:t>
-            </a:r>
-            <a:r>
-              <a:rPr lang="pt-BR" sz="1600" dirty="0">
-                <a:solidFill>
-                  <a:srgbClr val="000000"/>
-                </a:solidFill>
-                <a:latin typeface="Consolas" panose="020B0609020204030204" pitchFamily="49" charset="0"/>
-              </a:rPr>
-              <a:t>(</a:t>
-            </a:r>
-            <a:r>
-              <a:rPr lang="pt-BR" sz="1600" dirty="0">
+              <a:t>public</a:t>
+            </a:r>
+            <a:r>
+              <a:rPr lang="pt-BR" sz="1400" dirty="0">
+                <a:solidFill>
+                  <a:srgbClr val="000000"/>
+                </a:solidFill>
+                <a:latin typeface="Consolas" panose="020B0609020204030204" pitchFamily="49" charset="0"/>
+              </a:rPr>
+              <a:t> </a:t>
+            </a:r>
+            <a:r>
+              <a:rPr lang="pt-BR" sz="1400" b="1" dirty="0" err="1">
+                <a:solidFill>
+                  <a:srgbClr val="7F0055"/>
+                </a:solidFill>
+                <a:latin typeface="Consolas" panose="020B0609020204030204" pitchFamily="49" charset="0"/>
+              </a:rPr>
+              <a:t>double</a:t>
+            </a:r>
+            <a:r>
+              <a:rPr lang="pt-BR" sz="1400" dirty="0">
+                <a:solidFill>
+                  <a:srgbClr val="000000"/>
+                </a:solidFill>
+                <a:latin typeface="Consolas" panose="020B0609020204030204" pitchFamily="49" charset="0"/>
+              </a:rPr>
+              <a:t> somar(</a:t>
+            </a:r>
+            <a:r>
+              <a:rPr lang="pt-BR" sz="1400" b="1" dirty="0" err="1">
+                <a:solidFill>
+                  <a:srgbClr val="7F0055"/>
+                </a:solidFill>
+                <a:latin typeface="Consolas" panose="020B0609020204030204" pitchFamily="49" charset="0"/>
+              </a:rPr>
+              <a:t>double</a:t>
+            </a:r>
+            <a:r>
+              <a:rPr lang="pt-BR" sz="1400" dirty="0">
+                <a:solidFill>
+                  <a:srgbClr val="000000"/>
+                </a:solidFill>
+                <a:latin typeface="Consolas" panose="020B0609020204030204" pitchFamily="49" charset="0"/>
+              </a:rPr>
+              <a:t> </a:t>
+            </a:r>
+            <a:r>
+              <a:rPr lang="pt-BR" sz="1400" dirty="0">
                 <a:solidFill>
                   <a:srgbClr val="6A3E3E"/>
                 </a:solidFill>
                 <a:latin typeface="Consolas" panose="020B0609020204030204" pitchFamily="49" charset="0"/>
               </a:rPr>
-              <a:t>nome</a:t>
-            </a:r>
-            <a:r>
-              <a:rPr lang="pt-BR" sz="1600" dirty="0">
+              <a:t>a</a:t>
+            </a:r>
+            <a:r>
+              <a:rPr lang="pt-BR" sz="1400" dirty="0">
                 <a:solidFill>
                   <a:srgbClr val="000000"/>
                 </a:solidFill>
@@ -4877,26 +4293,44 @@
               <a:t>, </a:t>
             </a:r>
             <a:r>
-              <a:rPr lang="pt-BR" sz="1600" dirty="0">
+              <a:rPr lang="pt-BR" sz="1400" b="1" dirty="0" err="1">
+                <a:solidFill>
+                  <a:srgbClr val="7F0055"/>
+                </a:solidFill>
+                <a:latin typeface="Consolas" panose="020B0609020204030204" pitchFamily="49" charset="0"/>
+              </a:rPr>
+              <a:t>double</a:t>
+            </a:r>
+            <a:r>
+              <a:rPr lang="pt-BR" sz="1400" dirty="0">
+                <a:solidFill>
+                  <a:srgbClr val="000000"/>
+                </a:solidFill>
+                <a:latin typeface="Consolas" panose="020B0609020204030204" pitchFamily="49" charset="0"/>
+              </a:rPr>
+              <a:t> </a:t>
+            </a:r>
+            <a:r>
+              <a:rPr lang="pt-BR" sz="1400" dirty="0">
                 <a:solidFill>
                   <a:srgbClr val="6A3E3E"/>
                 </a:solidFill>
                 <a:latin typeface="Consolas" panose="020B0609020204030204" pitchFamily="49" charset="0"/>
               </a:rPr>
-              <a:t>salario</a:t>
-            </a:r>
-            <a:r>
-              <a:rPr lang="pt-BR" sz="1600" dirty="0">
-                <a:solidFill>
-                  <a:srgbClr val="000000"/>
-                </a:solidFill>
-                <a:latin typeface="Consolas" panose="020B0609020204030204" pitchFamily="49" charset="0"/>
-              </a:rPr>
-              <a:t>);</a:t>
-            </a:r>
-          </a:p>
-          <a:p>
-            <a:pPr lvl="2">
+              <a:t>b</a:t>
+            </a:r>
+            <a:r>
+              <a:rPr lang="pt-BR" sz="1400" dirty="0">
+                <a:solidFill>
+                  <a:srgbClr val="000000"/>
+                </a:solidFill>
+                <a:latin typeface="Consolas" panose="020B0609020204030204" pitchFamily="49" charset="0"/>
+              </a:rPr>
+              <a:t>) {</a:t>
+            </a:r>
+          </a:p>
+          <a:p>
+            <a:pPr indent="914400">
               <a:spcBef>
                 <a:spcPts val="150"/>
               </a:spcBef>
@@ -4905,52 +4339,52 @@
               </a:spcAft>
             </a:pPr>
             <a:r>
-              <a:rPr lang="pt-BR" sz="1600" b="1" dirty="0" err="1">
+              <a:rPr lang="pt-BR" sz="1400" b="1" dirty="0" err="1">
                 <a:solidFill>
                   <a:srgbClr val="7F0055"/>
                 </a:solidFill>
                 <a:latin typeface="Consolas" panose="020B0609020204030204" pitchFamily="49" charset="0"/>
               </a:rPr>
-              <a:t>this</a:t>
-            </a:r>
-            <a:r>
-              <a:rPr lang="pt-BR" sz="1600" dirty="0" err="1">
-                <a:solidFill>
-                  <a:srgbClr val="000000"/>
-                </a:solidFill>
-                <a:latin typeface="Consolas" panose="020B0609020204030204" pitchFamily="49" charset="0"/>
-              </a:rPr>
-              <a:t>.</a:t>
-            </a:r>
-            <a:r>
-              <a:rPr lang="pt-BR" sz="1600" dirty="0" err="1">
-                <a:solidFill>
-                  <a:srgbClr val="0000C0"/>
-                </a:solidFill>
-                <a:latin typeface="Consolas" panose="020B0609020204030204" pitchFamily="49" charset="0"/>
-              </a:rPr>
-              <a:t>adicionalGerencia</a:t>
-            </a:r>
-            <a:r>
-              <a:rPr lang="pt-BR" sz="1600" dirty="0">
-                <a:solidFill>
-                  <a:srgbClr val="000000"/>
-                </a:solidFill>
-                <a:latin typeface="Consolas" panose="020B0609020204030204" pitchFamily="49" charset="0"/>
-              </a:rPr>
-              <a:t> = </a:t>
-            </a:r>
-            <a:r>
-              <a:rPr lang="pt-BR" sz="1600" dirty="0" err="1">
+              <a:t>return</a:t>
+            </a:r>
+            <a:r>
+              <a:rPr lang="pt-BR" sz="1400" dirty="0">
+                <a:solidFill>
+                  <a:srgbClr val="000000"/>
+                </a:solidFill>
+                <a:latin typeface="Consolas" panose="020B0609020204030204" pitchFamily="49" charset="0"/>
+              </a:rPr>
+              <a:t> </a:t>
+            </a:r>
+            <a:r>
+              <a:rPr lang="pt-BR" sz="1400" dirty="0">
                 <a:solidFill>
                   <a:srgbClr val="6A3E3E"/>
                 </a:solidFill>
                 <a:latin typeface="Consolas" panose="020B0609020204030204" pitchFamily="49" charset="0"/>
               </a:rPr>
-              <a:t>adicionalGerencia</a:t>
-            </a:r>
-            <a:r>
-              <a:rPr lang="pt-BR" sz="1600" dirty="0">
+              <a:t>a</a:t>
+            </a:r>
+            <a:r>
+              <a:rPr lang="pt-BR" sz="1400" dirty="0">
+                <a:solidFill>
+                  <a:srgbClr val="000000"/>
+                </a:solidFill>
+                <a:latin typeface="Consolas" panose="020B0609020204030204" pitchFamily="49" charset="0"/>
+              </a:rPr>
+              <a:t> + </a:t>
+            </a:r>
+            <a:r>
+              <a:rPr lang="pt-BR" sz="1400" dirty="0">
+                <a:solidFill>
+                  <a:srgbClr val="6A3E3E"/>
+                </a:solidFill>
+                <a:latin typeface="Consolas" panose="020B0609020204030204" pitchFamily="49" charset="0"/>
+              </a:rPr>
+              <a:t>b</a:t>
+            </a:r>
+            <a:r>
+              <a:rPr lang="pt-BR" sz="1400" dirty="0">
                 <a:solidFill>
                   <a:srgbClr val="000000"/>
                 </a:solidFill>
@@ -4960,7 +4394,7 @@
             </a:r>
           </a:p>
           <a:p>
-            <a:pPr lvl="1">
+            <a:pPr indent="457200">
               <a:spcBef>
                 <a:spcPts val="150"/>
               </a:spcBef>
@@ -4969,7 +4403,262 @@
               </a:spcAft>
             </a:pPr>
             <a:r>
-              <a:rPr lang="pt-BR" sz="1600" dirty="0">
+              <a:rPr lang="pt-BR" sz="1400" dirty="0">
+                <a:solidFill>
+                  <a:srgbClr val="000000"/>
+                </a:solidFill>
+                <a:latin typeface="Consolas" panose="020B0609020204030204" pitchFamily="49" charset="0"/>
+              </a:rPr>
+              <a:t>}</a:t>
+            </a:r>
+          </a:p>
+          <a:p>
+            <a:pPr indent="457200">
+              <a:spcBef>
+                <a:spcPts val="150"/>
+              </a:spcBef>
+              <a:spcAft>
+                <a:spcPts val="150"/>
+              </a:spcAft>
+            </a:pPr>
+            <a:r>
+              <a:rPr lang="pt-BR" sz="1400" b="1" dirty="0" err="1">
+                <a:solidFill>
+                  <a:srgbClr val="7F0055"/>
+                </a:solidFill>
+                <a:latin typeface="Consolas" panose="020B0609020204030204" pitchFamily="49" charset="0"/>
+              </a:rPr>
+              <a:t>public</a:t>
+            </a:r>
+            <a:r>
+              <a:rPr lang="pt-BR" sz="1400" dirty="0">
+                <a:solidFill>
+                  <a:srgbClr val="000000"/>
+                </a:solidFill>
+                <a:latin typeface="Consolas" panose="020B0609020204030204" pitchFamily="49" charset="0"/>
+              </a:rPr>
+              <a:t> </a:t>
+            </a:r>
+            <a:r>
+              <a:rPr lang="pt-BR" sz="1400" b="1" dirty="0" err="1">
+                <a:solidFill>
+                  <a:srgbClr val="7F0055"/>
+                </a:solidFill>
+                <a:latin typeface="Consolas" panose="020B0609020204030204" pitchFamily="49" charset="0"/>
+              </a:rPr>
+              <a:t>int</a:t>
+            </a:r>
+            <a:r>
+              <a:rPr lang="pt-BR" sz="1400" dirty="0">
+                <a:solidFill>
+                  <a:srgbClr val="000000"/>
+                </a:solidFill>
+                <a:latin typeface="Consolas" panose="020B0609020204030204" pitchFamily="49" charset="0"/>
+              </a:rPr>
+              <a:t> somar(</a:t>
+            </a:r>
+            <a:r>
+              <a:rPr lang="pt-BR" sz="1400" b="1" dirty="0" err="1">
+                <a:solidFill>
+                  <a:srgbClr val="7F0055"/>
+                </a:solidFill>
+                <a:latin typeface="Consolas" panose="020B0609020204030204" pitchFamily="49" charset="0"/>
+              </a:rPr>
+              <a:t>int</a:t>
+            </a:r>
+            <a:r>
+              <a:rPr lang="pt-BR" sz="1400" dirty="0">
+                <a:solidFill>
+                  <a:srgbClr val="000000"/>
+                </a:solidFill>
+                <a:latin typeface="Consolas" panose="020B0609020204030204" pitchFamily="49" charset="0"/>
+              </a:rPr>
+              <a:t> </a:t>
+            </a:r>
+            <a:r>
+              <a:rPr lang="pt-BR" sz="1400" dirty="0">
+                <a:solidFill>
+                  <a:srgbClr val="6A3E3E"/>
+                </a:solidFill>
+                <a:latin typeface="Consolas" panose="020B0609020204030204" pitchFamily="49" charset="0"/>
+              </a:rPr>
+              <a:t>a</a:t>
+            </a:r>
+            <a:r>
+              <a:rPr lang="pt-BR" sz="1400" dirty="0">
+                <a:solidFill>
+                  <a:srgbClr val="000000"/>
+                </a:solidFill>
+                <a:latin typeface="Consolas" panose="020B0609020204030204" pitchFamily="49" charset="0"/>
+              </a:rPr>
+              <a:t>, </a:t>
+            </a:r>
+            <a:r>
+              <a:rPr lang="pt-BR" sz="1400" b="1" dirty="0" err="1">
+                <a:solidFill>
+                  <a:srgbClr val="7F0055"/>
+                </a:solidFill>
+                <a:latin typeface="Consolas" panose="020B0609020204030204" pitchFamily="49" charset="0"/>
+              </a:rPr>
+              <a:t>int</a:t>
+            </a:r>
+            <a:r>
+              <a:rPr lang="pt-BR" sz="1400" dirty="0">
+                <a:solidFill>
+                  <a:srgbClr val="000000"/>
+                </a:solidFill>
+                <a:latin typeface="Consolas" panose="020B0609020204030204" pitchFamily="49" charset="0"/>
+              </a:rPr>
+              <a:t> </a:t>
+            </a:r>
+            <a:r>
+              <a:rPr lang="pt-BR" sz="1400" dirty="0">
+                <a:solidFill>
+                  <a:srgbClr val="6A3E3E"/>
+                </a:solidFill>
+                <a:latin typeface="Consolas" panose="020B0609020204030204" pitchFamily="49" charset="0"/>
+              </a:rPr>
+              <a:t>b</a:t>
+            </a:r>
+            <a:r>
+              <a:rPr lang="pt-BR" sz="1400" dirty="0">
+                <a:solidFill>
+                  <a:srgbClr val="000000"/>
+                </a:solidFill>
+                <a:latin typeface="Consolas" panose="020B0609020204030204" pitchFamily="49" charset="0"/>
+              </a:rPr>
+              <a:t>, </a:t>
+            </a:r>
+            <a:r>
+              <a:rPr lang="pt-BR" sz="1400" b="1" dirty="0" err="1">
+                <a:solidFill>
+                  <a:srgbClr val="7F0055"/>
+                </a:solidFill>
+                <a:latin typeface="Consolas" panose="020B0609020204030204" pitchFamily="49" charset="0"/>
+              </a:rPr>
+              <a:t>int</a:t>
+            </a:r>
+            <a:r>
+              <a:rPr lang="pt-BR" sz="1400" dirty="0">
+                <a:solidFill>
+                  <a:srgbClr val="000000"/>
+                </a:solidFill>
+                <a:latin typeface="Consolas" panose="020B0609020204030204" pitchFamily="49" charset="0"/>
+              </a:rPr>
+              <a:t> </a:t>
+            </a:r>
+            <a:r>
+              <a:rPr lang="pt-BR" sz="1400" dirty="0">
+                <a:solidFill>
+                  <a:srgbClr val="6A3E3E"/>
+                </a:solidFill>
+                <a:latin typeface="Consolas" panose="020B0609020204030204" pitchFamily="49" charset="0"/>
+              </a:rPr>
+              <a:t>c</a:t>
+            </a:r>
+            <a:r>
+              <a:rPr lang="pt-BR" sz="1400" dirty="0">
+                <a:solidFill>
+                  <a:srgbClr val="000000"/>
+                </a:solidFill>
+                <a:latin typeface="Consolas" panose="020B0609020204030204" pitchFamily="49" charset="0"/>
+              </a:rPr>
+              <a:t>) {</a:t>
+            </a:r>
+          </a:p>
+          <a:p>
+            <a:pPr indent="914400">
+              <a:spcBef>
+                <a:spcPts val="150"/>
+              </a:spcBef>
+              <a:spcAft>
+                <a:spcPts val="150"/>
+              </a:spcAft>
+            </a:pPr>
+            <a:r>
+              <a:rPr lang="pt-BR" sz="1400" b="1" dirty="0" err="1">
+                <a:solidFill>
+                  <a:srgbClr val="7F0055"/>
+                </a:solidFill>
+                <a:latin typeface="Consolas" panose="020B0609020204030204" pitchFamily="49" charset="0"/>
+              </a:rPr>
+              <a:t>return</a:t>
+            </a:r>
+            <a:r>
+              <a:rPr lang="pt-BR" sz="1400" dirty="0">
+                <a:solidFill>
+                  <a:srgbClr val="000000"/>
+                </a:solidFill>
+                <a:latin typeface="Consolas" panose="020B0609020204030204" pitchFamily="49" charset="0"/>
+              </a:rPr>
+              <a:t> </a:t>
+            </a:r>
+            <a:r>
+              <a:rPr lang="pt-BR" sz="1400" dirty="0">
+                <a:solidFill>
+                  <a:srgbClr val="6A3E3E"/>
+                </a:solidFill>
+                <a:latin typeface="Consolas" panose="020B0609020204030204" pitchFamily="49" charset="0"/>
+              </a:rPr>
+              <a:t>a</a:t>
+            </a:r>
+            <a:r>
+              <a:rPr lang="pt-BR" sz="1400" dirty="0">
+                <a:solidFill>
+                  <a:srgbClr val="000000"/>
+                </a:solidFill>
+                <a:latin typeface="Consolas" panose="020B0609020204030204" pitchFamily="49" charset="0"/>
+              </a:rPr>
+              <a:t> + </a:t>
+            </a:r>
+            <a:r>
+              <a:rPr lang="pt-BR" sz="1400" dirty="0">
+                <a:solidFill>
+                  <a:srgbClr val="6A3E3E"/>
+                </a:solidFill>
+                <a:latin typeface="Consolas" panose="020B0609020204030204" pitchFamily="49" charset="0"/>
+              </a:rPr>
+              <a:t>b</a:t>
+            </a:r>
+            <a:r>
+              <a:rPr lang="pt-BR" sz="1400" dirty="0">
+                <a:solidFill>
+                  <a:srgbClr val="000000"/>
+                </a:solidFill>
+                <a:latin typeface="Consolas" panose="020B0609020204030204" pitchFamily="49" charset="0"/>
+              </a:rPr>
+              <a:t> + </a:t>
+            </a:r>
+            <a:r>
+              <a:rPr lang="pt-BR" sz="1400" dirty="0">
+                <a:solidFill>
+                  <a:srgbClr val="6A3E3E"/>
+                </a:solidFill>
+                <a:latin typeface="Consolas" panose="020B0609020204030204" pitchFamily="49" charset="0"/>
+              </a:rPr>
+              <a:t>c</a:t>
+            </a:r>
+            <a:r>
+              <a:rPr lang="pt-BR" sz="1400" dirty="0">
+                <a:solidFill>
+                  <a:srgbClr val="000000"/>
+                </a:solidFill>
+                <a:latin typeface="Consolas" panose="020B0609020204030204" pitchFamily="49" charset="0"/>
+              </a:rPr>
+              <a:t>;</a:t>
+            </a:r>
+          </a:p>
+          <a:p>
+            <a:pPr indent="457200">
+              <a:spcBef>
+                <a:spcPts val="150"/>
+              </a:spcBef>
+              <a:spcAft>
+                <a:spcPts val="150"/>
+              </a:spcAft>
+            </a:pPr>
+            <a:r>
+              <a:rPr lang="pt-BR" sz="1400" dirty="0">
                 <a:solidFill>
                   <a:srgbClr val="000000"/>
                 </a:solidFill>
@@ -4988,13 +4677,575 @@
               </a:spcAft>
             </a:pPr>
             <a:r>
-              <a:rPr lang="pt-BR" sz="1600" dirty="0">
+              <a:rPr lang="pt-BR" sz="1400" dirty="0">
                 <a:solidFill>
                   <a:srgbClr val="000000"/>
                 </a:solidFill>
                 <a:latin typeface="Consolas" panose="020B0609020204030204" pitchFamily="49" charset="0"/>
               </a:rPr>
               <a:t>}</a:t>
+            </a:r>
+          </a:p>
+        </p:txBody>
+      </p:sp>
+      <p:sp>
+        <p:nvSpPr>
+          <p:cNvPr id="5" name="CaixaDeTexto 4">
+            <a:extLst>
+              <a:ext uri="{FF2B5EF4-FFF2-40B4-BE49-F238E27FC236}">
+                <a16:creationId xmlns:a16="http://schemas.microsoft.com/office/drawing/2014/main" id="{84F9EC0C-06FF-4414-87FA-9B60D0B83818}"/>
+              </a:ext>
+            </a:extLst>
+          </p:cNvPr>
+          <p:cNvSpPr txBox="1"/>
+          <p:nvPr/>
+        </p:nvSpPr>
+        <p:spPr>
+          <a:xfrm>
+            <a:off x="1897943" y="2514600"/>
+            <a:ext cx="2607734" cy="369332"/>
+          </a:xfrm>
+          <a:prstGeom prst="rect">
+            <a:avLst/>
+          </a:prstGeom>
+          <a:noFill/>
+        </p:spPr>
+        <p:txBody>
+          <a:bodyPr wrap="square" rtlCol="0">
+            <a:spAutoFit/>
+          </a:bodyPr>
+          <a:lstStyle/>
+          <a:p>
+            <a:pPr algn="ctr"/>
+            <a:r>
+              <a:rPr lang="pt-BR" dirty="0">
+                <a:latin typeface="Times New Roman" panose="02020603050405020304" pitchFamily="18" charset="0"/>
+                <a:cs typeface="Times New Roman" panose="02020603050405020304" pitchFamily="18" charset="0"/>
+              </a:rPr>
+              <a:t>Sobrecarga</a:t>
+            </a:r>
+          </a:p>
+        </p:txBody>
+      </p:sp>
+      <p:sp>
+        <p:nvSpPr>
+          <p:cNvPr id="6" name="Retângulo 5">
+            <a:extLst>
+              <a:ext uri="{FF2B5EF4-FFF2-40B4-BE49-F238E27FC236}">
+                <a16:creationId xmlns:a16="http://schemas.microsoft.com/office/drawing/2014/main" id="{92256B6E-0262-418B-82DC-A9263E124FF3}"/>
+              </a:ext>
+            </a:extLst>
+          </p:cNvPr>
+          <p:cNvSpPr/>
+          <p:nvPr/>
+        </p:nvSpPr>
+        <p:spPr>
+          <a:xfrm>
+            <a:off x="6403622" y="3028407"/>
+            <a:ext cx="4936067" cy="3241913"/>
+          </a:xfrm>
+          <a:prstGeom prst="rect">
+            <a:avLst/>
+          </a:prstGeom>
+        </p:spPr>
+        <p:txBody>
+          <a:bodyPr wrap="square">
+            <a:spAutoFit/>
+          </a:bodyPr>
+          <a:lstStyle/>
+          <a:p>
+            <a:pPr>
+              <a:spcBef>
+                <a:spcPts val="150"/>
+              </a:spcBef>
+              <a:spcAft>
+                <a:spcPts val="150"/>
+              </a:spcAft>
+            </a:pPr>
+            <a:r>
+              <a:rPr lang="pt-BR" sz="1400" b="1" dirty="0" err="1">
+                <a:solidFill>
+                  <a:srgbClr val="7F0055"/>
+                </a:solidFill>
+                <a:latin typeface="Consolas" panose="020B0609020204030204" pitchFamily="49" charset="0"/>
+              </a:rPr>
+              <a:t>class</a:t>
+            </a:r>
+            <a:r>
+              <a:rPr lang="pt-BR" sz="1400" dirty="0">
+                <a:solidFill>
+                  <a:srgbClr val="000000"/>
+                </a:solidFill>
+                <a:latin typeface="Consolas" panose="020B0609020204030204" pitchFamily="49" charset="0"/>
+              </a:rPr>
+              <a:t> Animal {</a:t>
+            </a:r>
+          </a:p>
+          <a:p>
+            <a:pPr indent="457200">
+              <a:spcBef>
+                <a:spcPts val="150"/>
+              </a:spcBef>
+              <a:spcAft>
+                <a:spcPts val="150"/>
+              </a:spcAft>
+            </a:pPr>
+            <a:r>
+              <a:rPr lang="pt-BR" sz="1400" b="1" dirty="0" err="1">
+                <a:solidFill>
+                  <a:srgbClr val="7F0055"/>
+                </a:solidFill>
+                <a:latin typeface="Consolas" panose="020B0609020204030204" pitchFamily="49" charset="0"/>
+              </a:rPr>
+              <a:t>public</a:t>
+            </a:r>
+            <a:r>
+              <a:rPr lang="pt-BR" sz="1400" dirty="0">
+                <a:solidFill>
+                  <a:srgbClr val="000000"/>
+                </a:solidFill>
+                <a:latin typeface="Consolas" panose="020B0609020204030204" pitchFamily="49" charset="0"/>
+              </a:rPr>
+              <a:t> </a:t>
+            </a:r>
+            <a:r>
+              <a:rPr lang="pt-BR" sz="1400" b="1" dirty="0" err="1">
+                <a:solidFill>
+                  <a:srgbClr val="7F0055"/>
+                </a:solidFill>
+                <a:latin typeface="Consolas" panose="020B0609020204030204" pitchFamily="49" charset="0"/>
+              </a:rPr>
+              <a:t>void</a:t>
+            </a:r>
+            <a:r>
+              <a:rPr lang="pt-BR" sz="1400" dirty="0">
+                <a:solidFill>
+                  <a:srgbClr val="000000"/>
+                </a:solidFill>
+                <a:latin typeface="Consolas" panose="020B0609020204030204" pitchFamily="49" charset="0"/>
+              </a:rPr>
+              <a:t> </a:t>
+            </a:r>
+            <a:r>
+              <a:rPr lang="pt-BR" sz="1400" dirty="0" err="1">
+                <a:solidFill>
+                  <a:srgbClr val="000000"/>
+                </a:solidFill>
+                <a:latin typeface="Consolas" panose="020B0609020204030204" pitchFamily="49" charset="0"/>
+              </a:rPr>
+              <a:t>emitirSom</a:t>
+            </a:r>
+            <a:r>
+              <a:rPr lang="pt-BR" sz="1400" dirty="0">
+                <a:solidFill>
+                  <a:srgbClr val="000000"/>
+                </a:solidFill>
+                <a:latin typeface="Consolas" panose="020B0609020204030204" pitchFamily="49" charset="0"/>
+              </a:rPr>
+              <a:t>() {</a:t>
+            </a:r>
+          </a:p>
+          <a:p>
+            <a:pPr indent="914400">
+              <a:spcBef>
+                <a:spcPts val="150"/>
+              </a:spcBef>
+              <a:spcAft>
+                <a:spcPts val="150"/>
+              </a:spcAft>
+            </a:pPr>
+            <a:r>
+              <a:rPr lang="pt-BR" sz="1400" dirty="0" err="1">
+                <a:solidFill>
+                  <a:srgbClr val="000000"/>
+                </a:solidFill>
+                <a:latin typeface="Consolas" panose="020B0609020204030204" pitchFamily="49" charset="0"/>
+              </a:rPr>
+              <a:t>System.</a:t>
+            </a:r>
+            <a:r>
+              <a:rPr lang="pt-BR" sz="1400" b="1" i="1" dirty="0" err="1">
+                <a:solidFill>
+                  <a:srgbClr val="0000C0"/>
+                </a:solidFill>
+                <a:latin typeface="Consolas" panose="020B0609020204030204" pitchFamily="49" charset="0"/>
+              </a:rPr>
+              <a:t>out</a:t>
+            </a:r>
+            <a:r>
+              <a:rPr lang="pt-BR" sz="1400" dirty="0" err="1">
+                <a:solidFill>
+                  <a:srgbClr val="000000"/>
+                </a:solidFill>
+                <a:latin typeface="Consolas" panose="020B0609020204030204" pitchFamily="49" charset="0"/>
+              </a:rPr>
+              <a:t>.println</a:t>
+            </a:r>
+            <a:r>
+              <a:rPr lang="pt-BR" sz="1400" dirty="0">
+                <a:solidFill>
+                  <a:srgbClr val="000000"/>
+                </a:solidFill>
+                <a:latin typeface="Consolas" panose="020B0609020204030204" pitchFamily="49" charset="0"/>
+              </a:rPr>
+              <a:t>(</a:t>
+            </a:r>
+            <a:r>
+              <a:rPr lang="pt-BR" sz="1400" dirty="0">
+                <a:solidFill>
+                  <a:srgbClr val="2A00FF"/>
+                </a:solidFill>
+                <a:latin typeface="Consolas" panose="020B0609020204030204" pitchFamily="49" charset="0"/>
+              </a:rPr>
+              <a:t>"Animal faz som"</a:t>
+            </a:r>
+            <a:r>
+              <a:rPr lang="pt-BR" sz="1400" dirty="0">
+                <a:solidFill>
+                  <a:srgbClr val="000000"/>
+                </a:solidFill>
+                <a:latin typeface="Consolas" panose="020B0609020204030204" pitchFamily="49" charset="0"/>
+              </a:rPr>
+              <a:t>);</a:t>
+            </a:r>
+          </a:p>
+          <a:p>
+            <a:pPr indent="457200">
+              <a:spcBef>
+                <a:spcPts val="150"/>
+              </a:spcBef>
+              <a:spcAft>
+                <a:spcPts val="150"/>
+              </a:spcAft>
+            </a:pPr>
+            <a:r>
+              <a:rPr lang="pt-BR" sz="1400" dirty="0">
+                <a:solidFill>
+                  <a:srgbClr val="000000"/>
+                </a:solidFill>
+                <a:latin typeface="Consolas" panose="020B0609020204030204" pitchFamily="49" charset="0"/>
+              </a:rPr>
+              <a:t>}</a:t>
+            </a:r>
+          </a:p>
+          <a:p>
+            <a:pPr>
+              <a:spcBef>
+                <a:spcPts val="150"/>
+              </a:spcBef>
+              <a:spcAft>
+                <a:spcPts val="150"/>
+              </a:spcAft>
+            </a:pPr>
+            <a:r>
+              <a:rPr lang="pt-BR" sz="1400" dirty="0">
+                <a:solidFill>
+                  <a:srgbClr val="000000"/>
+                </a:solidFill>
+                <a:latin typeface="Consolas" panose="020B0609020204030204" pitchFamily="49" charset="0"/>
+              </a:rPr>
+              <a:t>}</a:t>
+            </a:r>
+          </a:p>
+          <a:p>
+            <a:pPr>
+              <a:spcBef>
+                <a:spcPts val="150"/>
+              </a:spcBef>
+              <a:spcAft>
+                <a:spcPts val="150"/>
+              </a:spcAft>
+            </a:pPr>
+            <a:endParaRPr lang="pt-BR" sz="1400" dirty="0">
+              <a:solidFill>
+                <a:srgbClr val="000000"/>
+              </a:solidFill>
+              <a:latin typeface="Consolas" panose="020B0609020204030204" pitchFamily="49" charset="0"/>
+            </a:endParaRPr>
+          </a:p>
+          <a:p>
+            <a:pPr>
+              <a:spcBef>
+                <a:spcPts val="150"/>
+              </a:spcBef>
+              <a:spcAft>
+                <a:spcPts val="150"/>
+              </a:spcAft>
+            </a:pPr>
+            <a:r>
+              <a:rPr lang="pt-BR" sz="1400" b="1" dirty="0" err="1">
+                <a:solidFill>
+                  <a:srgbClr val="7F0055"/>
+                </a:solidFill>
+                <a:latin typeface="Consolas" panose="020B0609020204030204" pitchFamily="49" charset="0"/>
+              </a:rPr>
+              <a:t>class</a:t>
+            </a:r>
+            <a:r>
+              <a:rPr lang="pt-BR" sz="1400" dirty="0">
+                <a:solidFill>
+                  <a:srgbClr val="000000"/>
+                </a:solidFill>
+                <a:latin typeface="Consolas" panose="020B0609020204030204" pitchFamily="49" charset="0"/>
+              </a:rPr>
+              <a:t> Gato </a:t>
+            </a:r>
+            <a:r>
+              <a:rPr lang="pt-BR" sz="1400" b="1" dirty="0" err="1">
+                <a:solidFill>
+                  <a:srgbClr val="7F0055"/>
+                </a:solidFill>
+                <a:latin typeface="Consolas" panose="020B0609020204030204" pitchFamily="49" charset="0"/>
+              </a:rPr>
+              <a:t>extends</a:t>
+            </a:r>
+            <a:r>
+              <a:rPr lang="pt-BR" sz="1400" dirty="0">
+                <a:solidFill>
+                  <a:srgbClr val="000000"/>
+                </a:solidFill>
+                <a:latin typeface="Consolas" panose="020B0609020204030204" pitchFamily="49" charset="0"/>
+              </a:rPr>
+              <a:t> Animal {</a:t>
+            </a:r>
+          </a:p>
+          <a:p>
+            <a:pPr indent="457200">
+              <a:spcBef>
+                <a:spcPts val="150"/>
+              </a:spcBef>
+              <a:spcAft>
+                <a:spcPts val="150"/>
+              </a:spcAft>
+            </a:pPr>
+            <a:r>
+              <a:rPr lang="pt-BR" sz="1400" dirty="0">
+                <a:solidFill>
+                  <a:srgbClr val="646464"/>
+                </a:solidFill>
+                <a:latin typeface="Consolas" panose="020B0609020204030204" pitchFamily="49" charset="0"/>
+              </a:rPr>
+              <a:t>@</a:t>
+            </a:r>
+            <a:r>
+              <a:rPr lang="pt-BR" sz="1400" dirty="0" err="1">
+                <a:solidFill>
+                  <a:srgbClr val="646464"/>
+                </a:solidFill>
+                <a:latin typeface="Consolas" panose="020B0609020204030204" pitchFamily="49" charset="0"/>
+              </a:rPr>
+              <a:t>Override</a:t>
+            </a:r>
+            <a:endParaRPr lang="pt-BR" sz="1400" dirty="0">
+              <a:solidFill>
+                <a:srgbClr val="000000"/>
+              </a:solidFill>
+              <a:latin typeface="Consolas" panose="020B0609020204030204" pitchFamily="49" charset="0"/>
+            </a:endParaRPr>
+          </a:p>
+          <a:p>
+            <a:pPr indent="457200">
+              <a:spcBef>
+                <a:spcPts val="150"/>
+              </a:spcBef>
+              <a:spcAft>
+                <a:spcPts val="150"/>
+              </a:spcAft>
+            </a:pPr>
+            <a:r>
+              <a:rPr lang="pt-BR" sz="1400" b="1" dirty="0" err="1">
+                <a:solidFill>
+                  <a:srgbClr val="7F0055"/>
+                </a:solidFill>
+                <a:latin typeface="Consolas" panose="020B0609020204030204" pitchFamily="49" charset="0"/>
+              </a:rPr>
+              <a:t>public</a:t>
+            </a:r>
+            <a:r>
+              <a:rPr lang="pt-BR" sz="1400" dirty="0">
+                <a:solidFill>
+                  <a:srgbClr val="000000"/>
+                </a:solidFill>
+                <a:latin typeface="Consolas" panose="020B0609020204030204" pitchFamily="49" charset="0"/>
+              </a:rPr>
+              <a:t> </a:t>
+            </a:r>
+            <a:r>
+              <a:rPr lang="pt-BR" sz="1400" b="1" dirty="0" err="1">
+                <a:solidFill>
+                  <a:srgbClr val="7F0055"/>
+                </a:solidFill>
+                <a:latin typeface="Consolas" panose="020B0609020204030204" pitchFamily="49" charset="0"/>
+              </a:rPr>
+              <a:t>void</a:t>
+            </a:r>
+            <a:r>
+              <a:rPr lang="pt-BR" sz="1400" dirty="0">
+                <a:solidFill>
+                  <a:srgbClr val="000000"/>
+                </a:solidFill>
+                <a:latin typeface="Consolas" panose="020B0609020204030204" pitchFamily="49" charset="0"/>
+              </a:rPr>
+              <a:t> </a:t>
+            </a:r>
+            <a:r>
+              <a:rPr lang="pt-BR" sz="1400" dirty="0" err="1">
+                <a:solidFill>
+                  <a:srgbClr val="000000"/>
+                </a:solidFill>
+                <a:latin typeface="Consolas" panose="020B0609020204030204" pitchFamily="49" charset="0"/>
+              </a:rPr>
+              <a:t>emitirSom</a:t>
+            </a:r>
+            <a:r>
+              <a:rPr lang="pt-BR" sz="1400" dirty="0">
+                <a:solidFill>
+                  <a:srgbClr val="000000"/>
+                </a:solidFill>
+                <a:latin typeface="Consolas" panose="020B0609020204030204" pitchFamily="49" charset="0"/>
+              </a:rPr>
+              <a:t>() {</a:t>
+            </a:r>
+          </a:p>
+          <a:p>
+            <a:pPr indent="914400">
+              <a:spcBef>
+                <a:spcPts val="150"/>
+              </a:spcBef>
+              <a:spcAft>
+                <a:spcPts val="150"/>
+              </a:spcAft>
+            </a:pPr>
+            <a:r>
+              <a:rPr lang="pt-BR" sz="1400" dirty="0" err="1">
+                <a:solidFill>
+                  <a:srgbClr val="000000"/>
+                </a:solidFill>
+                <a:latin typeface="Consolas" panose="020B0609020204030204" pitchFamily="49" charset="0"/>
+              </a:rPr>
+              <a:t>System.</a:t>
+            </a:r>
+            <a:r>
+              <a:rPr lang="pt-BR" sz="1400" b="1" i="1" dirty="0" err="1">
+                <a:solidFill>
+                  <a:srgbClr val="0000C0"/>
+                </a:solidFill>
+                <a:latin typeface="Consolas" panose="020B0609020204030204" pitchFamily="49" charset="0"/>
+              </a:rPr>
+              <a:t>out</a:t>
+            </a:r>
+            <a:r>
+              <a:rPr lang="pt-BR" sz="1400" dirty="0" err="1">
+                <a:solidFill>
+                  <a:srgbClr val="000000"/>
+                </a:solidFill>
+                <a:latin typeface="Consolas" panose="020B0609020204030204" pitchFamily="49" charset="0"/>
+              </a:rPr>
+              <a:t>.println</a:t>
+            </a:r>
+            <a:r>
+              <a:rPr lang="pt-BR" sz="1400" dirty="0">
+                <a:solidFill>
+                  <a:srgbClr val="000000"/>
+                </a:solidFill>
+                <a:latin typeface="Consolas" panose="020B0609020204030204" pitchFamily="49" charset="0"/>
+              </a:rPr>
+              <a:t>(</a:t>
+            </a:r>
+            <a:r>
+              <a:rPr lang="pt-BR" sz="1400" dirty="0">
+                <a:solidFill>
+                  <a:srgbClr val="2A00FF"/>
+                </a:solidFill>
+                <a:latin typeface="Consolas" panose="020B0609020204030204" pitchFamily="49" charset="0"/>
+              </a:rPr>
+              <a:t>"Gato mia"</a:t>
+            </a:r>
+            <a:r>
+              <a:rPr lang="pt-BR" sz="1400" dirty="0">
+                <a:solidFill>
+                  <a:srgbClr val="000000"/>
+                </a:solidFill>
+                <a:latin typeface="Consolas" panose="020B0609020204030204" pitchFamily="49" charset="0"/>
+              </a:rPr>
+              <a:t>);</a:t>
+            </a:r>
+          </a:p>
+          <a:p>
+            <a:pPr indent="457200">
+              <a:spcBef>
+                <a:spcPts val="150"/>
+              </a:spcBef>
+              <a:spcAft>
+                <a:spcPts val="150"/>
+              </a:spcAft>
+            </a:pPr>
+            <a:r>
+              <a:rPr lang="pt-BR" sz="1400" dirty="0">
+                <a:solidFill>
+                  <a:srgbClr val="000000"/>
+                </a:solidFill>
+                <a:latin typeface="Consolas" panose="020B0609020204030204" pitchFamily="49" charset="0"/>
+              </a:rPr>
+              <a:t>}</a:t>
+            </a:r>
+          </a:p>
+          <a:p>
+            <a:pPr>
+              <a:spcBef>
+                <a:spcPts val="150"/>
+              </a:spcBef>
+              <a:spcAft>
+                <a:spcPts val="150"/>
+              </a:spcAft>
+            </a:pPr>
+            <a:r>
+              <a:rPr lang="pt-BR" sz="1400" dirty="0">
+                <a:solidFill>
+                  <a:srgbClr val="000000"/>
+                </a:solidFill>
+                <a:latin typeface="Consolas" panose="020B0609020204030204" pitchFamily="49" charset="0"/>
+              </a:rPr>
+              <a:t>}</a:t>
+            </a:r>
+          </a:p>
+        </p:txBody>
+      </p:sp>
+      <p:sp>
+        <p:nvSpPr>
+          <p:cNvPr id="7" name="CaixaDeTexto 6">
+            <a:extLst>
+              <a:ext uri="{FF2B5EF4-FFF2-40B4-BE49-F238E27FC236}">
+                <a16:creationId xmlns:a16="http://schemas.microsoft.com/office/drawing/2014/main" id="{EB5AEC25-BA37-441D-87EC-8DE38AED57BF}"/>
+              </a:ext>
+            </a:extLst>
+          </p:cNvPr>
+          <p:cNvSpPr txBox="1"/>
+          <p:nvPr/>
+        </p:nvSpPr>
+        <p:spPr>
+          <a:xfrm>
+            <a:off x="7567788" y="2514600"/>
+            <a:ext cx="2607734" cy="369332"/>
+          </a:xfrm>
+          <a:prstGeom prst="rect">
+            <a:avLst/>
+          </a:prstGeom>
+          <a:noFill/>
+        </p:spPr>
+        <p:txBody>
+          <a:bodyPr wrap="square" rtlCol="0">
+            <a:spAutoFit/>
+          </a:bodyPr>
+          <a:lstStyle/>
+          <a:p>
+            <a:pPr algn="ctr"/>
+            <a:r>
+              <a:rPr lang="pt-BR" dirty="0">
+                <a:latin typeface="Times New Roman" panose="02020603050405020304" pitchFamily="18" charset="0"/>
+                <a:cs typeface="Times New Roman" panose="02020603050405020304" pitchFamily="18" charset="0"/>
+              </a:rPr>
+              <a:t>Sobrescrita</a:t>
             </a:r>
           </a:p>
         </p:txBody>
@@ -5002,7 +5253,7 @@
     </p:spTree>
     <p:extLst>
       <p:ext uri="{BB962C8B-B14F-4D97-AF65-F5344CB8AC3E}">
-        <p14:creationId xmlns:p14="http://schemas.microsoft.com/office/powerpoint/2010/main" val="3696678201"/>
+        <p14:creationId xmlns:p14="http://schemas.microsoft.com/office/powerpoint/2010/main" val="2967410373"/>
       </p:ext>
     </p:extLst>
   </p:cSld>
@@ -5034,1499 +5285,6 @@
           <p:cNvPr id="2" name="Título 1">
             <a:extLst>
               <a:ext uri="{FF2B5EF4-FFF2-40B4-BE49-F238E27FC236}">
-                <a16:creationId xmlns:a16="http://schemas.microsoft.com/office/drawing/2014/main" id="{F68281D3-C181-4E1C-B325-E00D3550CEFA}"/>
-              </a:ext>
-            </a:extLst>
-          </p:cNvPr>
-          <p:cNvSpPr>
-            <a:spLocks noGrp="1"/>
-          </p:cNvSpPr>
-          <p:nvPr>
-            <p:ph type="title"/>
-          </p:nvPr>
-        </p:nvSpPr>
-        <p:spPr/>
-        <p:txBody>
-          <a:bodyPr/>
-          <a:lstStyle/>
-          <a:p>
-            <a:r>
-              <a:rPr lang="pt-BR" b="1" dirty="0"/>
-              <a:t>O que é Polimorfismo?</a:t>
-            </a:r>
-            <a:br>
-              <a:rPr lang="pt-BR" b="1" dirty="0"/>
-            </a:br>
-            <a:endParaRPr lang="pt-BR" dirty="0"/>
-          </a:p>
-        </p:txBody>
-      </p:sp>
-      <p:sp>
-        <p:nvSpPr>
-          <p:cNvPr id="3" name="Espaço Reservado para Conteúdo 2">
-            <a:extLst>
-              <a:ext uri="{FF2B5EF4-FFF2-40B4-BE49-F238E27FC236}">
-                <a16:creationId xmlns:a16="http://schemas.microsoft.com/office/drawing/2014/main" id="{B58E572E-10D7-43D6-B230-D23680BEFDD1}"/>
-              </a:ext>
-            </a:extLst>
-          </p:cNvPr>
-          <p:cNvSpPr>
-            <a:spLocks noGrp="1"/>
-          </p:cNvSpPr>
-          <p:nvPr>
-            <p:ph idx="1"/>
-          </p:nvPr>
-        </p:nvSpPr>
-        <p:spPr/>
-        <p:txBody>
-          <a:bodyPr/>
-          <a:lstStyle/>
-          <a:p>
-            <a:r>
-              <a:rPr lang="pt-BR" dirty="0"/>
-              <a:t>Polimorfismo é a habilidade de um mesmo objeto executar comportamentos diferentes, dependendo da forma como é utilizado no programa.</a:t>
-            </a:r>
-          </a:p>
-          <a:p>
-            <a:endParaRPr lang="pt-BR" dirty="0"/>
-          </a:p>
-          <a:p>
-            <a:pPr lvl="1"/>
-            <a:r>
-              <a:rPr lang="pt-BR" dirty="0"/>
-              <a:t>Sobrecarga (</a:t>
-            </a:r>
-            <a:r>
-              <a:rPr lang="pt-BR" dirty="0" err="1"/>
-              <a:t>Overloading</a:t>
-            </a:r>
-            <a:r>
-              <a:rPr lang="pt-BR" dirty="0"/>
-              <a:t>):Vários métodos com o mesmo nome, mas com parâmetros diferentes na mesma classe.</a:t>
-            </a:r>
-          </a:p>
-          <a:p>
-            <a:pPr lvl="1"/>
-            <a:r>
-              <a:rPr lang="pt-BR" dirty="0"/>
-              <a:t>Sobrescrita (</a:t>
-            </a:r>
-            <a:r>
-              <a:rPr lang="pt-BR" dirty="0" err="1"/>
-              <a:t>Overriding</a:t>
-            </a:r>
-            <a:r>
-              <a:rPr lang="pt-BR" dirty="0"/>
-              <a:t>):Uma subclasse redefine um método da superclasse, mantendo a mesma assinatura.</a:t>
-            </a:r>
-          </a:p>
-        </p:txBody>
-      </p:sp>
-    </p:spTree>
-    <p:extLst>
-      <p:ext uri="{BB962C8B-B14F-4D97-AF65-F5344CB8AC3E}">
-        <p14:creationId xmlns:p14="http://schemas.microsoft.com/office/powerpoint/2010/main" val="3973512991"/>
-      </p:ext>
-    </p:extLst>
-  </p:cSld>
-  <p:clrMapOvr>
-    <a:masterClrMapping/>
-  </p:clrMapOvr>
-</p:sld>
-</file>
-
-<file path=ppt/slides/slide13.xml><?xml version="1.0" encoding="utf-8"?>
-<p:sld xmlns:a="http://schemas.openxmlformats.org/drawingml/2006/main" xmlns:r="http://schemas.openxmlformats.org/officeDocument/2006/relationships" xmlns:p="http://schemas.openxmlformats.org/presentationml/2006/main">
-  <p:cSld>
-    <p:spTree>
-      <p:nvGrpSpPr>
-        <p:cNvPr id="1" name=""/>
-        <p:cNvGrpSpPr/>
-        <p:nvPr/>
-      </p:nvGrpSpPr>
-      <p:grpSpPr>
-        <a:xfrm>
-          <a:off x="0" y="0"/>
-          <a:ext cx="0" cy="0"/>
-          <a:chOff x="0" y="0"/>
-          <a:chExt cx="0" cy="0"/>
-        </a:xfrm>
-      </p:grpSpPr>
-      <p:sp>
-        <p:nvSpPr>
-          <p:cNvPr id="2" name="Título 1">
-            <a:extLst>
-              <a:ext uri="{FF2B5EF4-FFF2-40B4-BE49-F238E27FC236}">
-                <a16:creationId xmlns:a16="http://schemas.microsoft.com/office/drawing/2014/main" id="{4A744C23-AA41-4EE5-936C-BE42F1928F7C}"/>
-              </a:ext>
-            </a:extLst>
-          </p:cNvPr>
-          <p:cNvSpPr>
-            <a:spLocks noGrp="1"/>
-          </p:cNvSpPr>
-          <p:nvPr>
-            <p:ph type="title"/>
-          </p:nvPr>
-        </p:nvSpPr>
-        <p:spPr/>
-        <p:txBody>
-          <a:bodyPr/>
-          <a:lstStyle/>
-          <a:p>
-            <a:r>
-              <a:rPr lang="pt-BR" dirty="0"/>
-              <a:t>Exemplo de Polimorfismo</a:t>
-            </a:r>
-          </a:p>
-        </p:txBody>
-      </p:sp>
-      <p:sp>
-        <p:nvSpPr>
-          <p:cNvPr id="4" name="Retângulo 3">
-            <a:extLst>
-              <a:ext uri="{FF2B5EF4-FFF2-40B4-BE49-F238E27FC236}">
-                <a16:creationId xmlns:a16="http://schemas.microsoft.com/office/drawing/2014/main" id="{A9C127C7-5E90-4A82-86A4-C9E34D1D6277}"/>
-              </a:ext>
-            </a:extLst>
-          </p:cNvPr>
-          <p:cNvSpPr/>
-          <p:nvPr/>
-        </p:nvSpPr>
-        <p:spPr>
-          <a:xfrm>
-            <a:off x="852311" y="3028407"/>
-            <a:ext cx="4698999" cy="2975173"/>
-          </a:xfrm>
-          <a:prstGeom prst="rect">
-            <a:avLst/>
-          </a:prstGeom>
-        </p:spPr>
-        <p:txBody>
-          <a:bodyPr wrap="square">
-            <a:spAutoFit/>
-          </a:bodyPr>
-          <a:lstStyle/>
-          <a:p>
-            <a:pPr>
-              <a:spcBef>
-                <a:spcPts val="150"/>
-              </a:spcBef>
-              <a:spcAft>
-                <a:spcPts val="150"/>
-              </a:spcAft>
-            </a:pPr>
-            <a:r>
-              <a:rPr lang="pt-BR" sz="1400" b="1" dirty="0" err="1">
-                <a:solidFill>
-                  <a:srgbClr val="7F0055"/>
-                </a:solidFill>
-                <a:latin typeface="Consolas" panose="020B0609020204030204" pitchFamily="49" charset="0"/>
-              </a:rPr>
-              <a:t>public</a:t>
-            </a:r>
-            <a:r>
-              <a:rPr lang="pt-BR" sz="1400" dirty="0">
-                <a:solidFill>
-                  <a:srgbClr val="000000"/>
-                </a:solidFill>
-                <a:latin typeface="Consolas" panose="020B0609020204030204" pitchFamily="49" charset="0"/>
-              </a:rPr>
-              <a:t> </a:t>
-            </a:r>
-            <a:r>
-              <a:rPr lang="pt-BR" sz="1400" b="1" dirty="0" err="1">
-                <a:solidFill>
-                  <a:srgbClr val="7F0055"/>
-                </a:solidFill>
-                <a:latin typeface="Consolas" panose="020B0609020204030204" pitchFamily="49" charset="0"/>
-              </a:rPr>
-              <a:t>class</a:t>
-            </a:r>
-            <a:r>
-              <a:rPr lang="pt-BR" sz="1400" dirty="0">
-                <a:solidFill>
-                  <a:srgbClr val="000000"/>
-                </a:solidFill>
-                <a:latin typeface="Consolas" panose="020B0609020204030204" pitchFamily="49" charset="0"/>
-              </a:rPr>
-              <a:t> Calculadora {</a:t>
-            </a:r>
-          </a:p>
-          <a:p>
-            <a:pPr indent="457200">
-              <a:spcBef>
-                <a:spcPts val="150"/>
-              </a:spcBef>
-              <a:spcAft>
-                <a:spcPts val="150"/>
-              </a:spcAft>
-            </a:pPr>
-            <a:r>
-              <a:rPr lang="pt-BR" sz="1400" b="1" dirty="0" err="1">
-                <a:solidFill>
-                  <a:srgbClr val="7F0055"/>
-                </a:solidFill>
-                <a:latin typeface="Consolas" panose="020B0609020204030204" pitchFamily="49" charset="0"/>
-              </a:rPr>
-              <a:t>public</a:t>
-            </a:r>
-            <a:r>
-              <a:rPr lang="pt-BR" sz="1400" dirty="0">
-                <a:solidFill>
-                  <a:srgbClr val="000000"/>
-                </a:solidFill>
-                <a:latin typeface="Consolas" panose="020B0609020204030204" pitchFamily="49" charset="0"/>
-              </a:rPr>
-              <a:t> </a:t>
-            </a:r>
-            <a:r>
-              <a:rPr lang="pt-BR" sz="1400" b="1" dirty="0" err="1">
-                <a:solidFill>
-                  <a:srgbClr val="7F0055"/>
-                </a:solidFill>
-                <a:latin typeface="Consolas" panose="020B0609020204030204" pitchFamily="49" charset="0"/>
-              </a:rPr>
-              <a:t>int</a:t>
-            </a:r>
-            <a:r>
-              <a:rPr lang="pt-BR" sz="1400" dirty="0">
-                <a:solidFill>
-                  <a:srgbClr val="000000"/>
-                </a:solidFill>
-                <a:latin typeface="Consolas" panose="020B0609020204030204" pitchFamily="49" charset="0"/>
-              </a:rPr>
-              <a:t> somar(</a:t>
-            </a:r>
-            <a:r>
-              <a:rPr lang="pt-BR" sz="1400" b="1" dirty="0" err="1">
-                <a:solidFill>
-                  <a:srgbClr val="7F0055"/>
-                </a:solidFill>
-                <a:latin typeface="Consolas" panose="020B0609020204030204" pitchFamily="49" charset="0"/>
-              </a:rPr>
-              <a:t>int</a:t>
-            </a:r>
-            <a:r>
-              <a:rPr lang="pt-BR" sz="1400" dirty="0">
-                <a:solidFill>
-                  <a:srgbClr val="000000"/>
-                </a:solidFill>
-                <a:latin typeface="Consolas" panose="020B0609020204030204" pitchFamily="49" charset="0"/>
-              </a:rPr>
-              <a:t> </a:t>
-            </a:r>
-            <a:r>
-              <a:rPr lang="pt-BR" sz="1400" dirty="0">
-                <a:solidFill>
-                  <a:srgbClr val="6A3E3E"/>
-                </a:solidFill>
-                <a:latin typeface="Consolas" panose="020B0609020204030204" pitchFamily="49" charset="0"/>
-              </a:rPr>
-              <a:t>a</a:t>
-            </a:r>
-            <a:r>
-              <a:rPr lang="pt-BR" sz="1400" dirty="0">
-                <a:solidFill>
-                  <a:srgbClr val="000000"/>
-                </a:solidFill>
-                <a:latin typeface="Consolas" panose="020B0609020204030204" pitchFamily="49" charset="0"/>
-              </a:rPr>
-              <a:t>, </a:t>
-            </a:r>
-            <a:r>
-              <a:rPr lang="pt-BR" sz="1400" b="1" dirty="0" err="1">
-                <a:solidFill>
-                  <a:srgbClr val="7F0055"/>
-                </a:solidFill>
-                <a:latin typeface="Consolas" panose="020B0609020204030204" pitchFamily="49" charset="0"/>
-              </a:rPr>
-              <a:t>int</a:t>
-            </a:r>
-            <a:r>
-              <a:rPr lang="pt-BR" sz="1400" dirty="0">
-                <a:solidFill>
-                  <a:srgbClr val="000000"/>
-                </a:solidFill>
-                <a:latin typeface="Consolas" panose="020B0609020204030204" pitchFamily="49" charset="0"/>
-              </a:rPr>
-              <a:t> </a:t>
-            </a:r>
-            <a:r>
-              <a:rPr lang="pt-BR" sz="1400" dirty="0">
-                <a:solidFill>
-                  <a:srgbClr val="6A3E3E"/>
-                </a:solidFill>
-                <a:latin typeface="Consolas" panose="020B0609020204030204" pitchFamily="49" charset="0"/>
-              </a:rPr>
-              <a:t>b</a:t>
-            </a:r>
-            <a:r>
-              <a:rPr lang="pt-BR" sz="1400" dirty="0">
-                <a:solidFill>
-                  <a:srgbClr val="000000"/>
-                </a:solidFill>
-                <a:latin typeface="Consolas" panose="020B0609020204030204" pitchFamily="49" charset="0"/>
-              </a:rPr>
-              <a:t>) {</a:t>
-            </a:r>
-          </a:p>
-          <a:p>
-            <a:pPr indent="914400">
-              <a:spcBef>
-                <a:spcPts val="150"/>
-              </a:spcBef>
-              <a:spcAft>
-                <a:spcPts val="150"/>
-              </a:spcAft>
-            </a:pPr>
-            <a:r>
-              <a:rPr lang="pt-BR" sz="1400" b="1" dirty="0" err="1">
-                <a:solidFill>
-                  <a:srgbClr val="7F0055"/>
-                </a:solidFill>
-                <a:latin typeface="Consolas" panose="020B0609020204030204" pitchFamily="49" charset="0"/>
-              </a:rPr>
-              <a:t>return</a:t>
-            </a:r>
-            <a:r>
-              <a:rPr lang="pt-BR" sz="1400" dirty="0">
-                <a:solidFill>
-                  <a:srgbClr val="000000"/>
-                </a:solidFill>
-                <a:latin typeface="Consolas" panose="020B0609020204030204" pitchFamily="49" charset="0"/>
-              </a:rPr>
-              <a:t> </a:t>
-            </a:r>
-            <a:r>
-              <a:rPr lang="pt-BR" sz="1400" dirty="0">
-                <a:solidFill>
-                  <a:srgbClr val="6A3E3E"/>
-                </a:solidFill>
-                <a:latin typeface="Consolas" panose="020B0609020204030204" pitchFamily="49" charset="0"/>
-              </a:rPr>
-              <a:t>a</a:t>
-            </a:r>
-            <a:r>
-              <a:rPr lang="pt-BR" sz="1400" dirty="0">
-                <a:solidFill>
-                  <a:srgbClr val="000000"/>
-                </a:solidFill>
-                <a:latin typeface="Consolas" panose="020B0609020204030204" pitchFamily="49" charset="0"/>
-              </a:rPr>
-              <a:t> + </a:t>
-            </a:r>
-            <a:r>
-              <a:rPr lang="pt-BR" sz="1400" dirty="0">
-                <a:solidFill>
-                  <a:srgbClr val="6A3E3E"/>
-                </a:solidFill>
-                <a:latin typeface="Consolas" panose="020B0609020204030204" pitchFamily="49" charset="0"/>
-              </a:rPr>
-              <a:t>b</a:t>
-            </a:r>
-            <a:r>
-              <a:rPr lang="pt-BR" sz="1400" dirty="0">
-                <a:solidFill>
-                  <a:srgbClr val="000000"/>
-                </a:solidFill>
-                <a:latin typeface="Consolas" panose="020B0609020204030204" pitchFamily="49" charset="0"/>
-              </a:rPr>
-              <a:t>;</a:t>
-            </a:r>
-          </a:p>
-          <a:p>
-            <a:pPr indent="457200">
-              <a:spcBef>
-                <a:spcPts val="150"/>
-              </a:spcBef>
-              <a:spcAft>
-                <a:spcPts val="150"/>
-              </a:spcAft>
-            </a:pPr>
-            <a:r>
-              <a:rPr lang="pt-BR" sz="1400" dirty="0">
-                <a:solidFill>
-                  <a:srgbClr val="000000"/>
-                </a:solidFill>
-                <a:latin typeface="Consolas" panose="020B0609020204030204" pitchFamily="49" charset="0"/>
-              </a:rPr>
-              <a:t>}</a:t>
-            </a:r>
-          </a:p>
-          <a:p>
-            <a:pPr indent="457200">
-              <a:spcBef>
-                <a:spcPts val="150"/>
-              </a:spcBef>
-              <a:spcAft>
-                <a:spcPts val="150"/>
-              </a:spcAft>
-            </a:pPr>
-            <a:r>
-              <a:rPr lang="pt-BR" sz="1400" b="1" dirty="0" err="1">
-                <a:solidFill>
-                  <a:srgbClr val="7F0055"/>
-                </a:solidFill>
-                <a:latin typeface="Consolas" panose="020B0609020204030204" pitchFamily="49" charset="0"/>
-              </a:rPr>
-              <a:t>public</a:t>
-            </a:r>
-            <a:r>
-              <a:rPr lang="pt-BR" sz="1400" dirty="0">
-                <a:solidFill>
-                  <a:srgbClr val="000000"/>
-                </a:solidFill>
-                <a:latin typeface="Consolas" panose="020B0609020204030204" pitchFamily="49" charset="0"/>
-              </a:rPr>
-              <a:t> </a:t>
-            </a:r>
-            <a:r>
-              <a:rPr lang="pt-BR" sz="1400" b="1" dirty="0" err="1">
-                <a:solidFill>
-                  <a:srgbClr val="7F0055"/>
-                </a:solidFill>
-                <a:latin typeface="Consolas" panose="020B0609020204030204" pitchFamily="49" charset="0"/>
-              </a:rPr>
-              <a:t>double</a:t>
-            </a:r>
-            <a:r>
-              <a:rPr lang="pt-BR" sz="1400" dirty="0">
-                <a:solidFill>
-                  <a:srgbClr val="000000"/>
-                </a:solidFill>
-                <a:latin typeface="Consolas" panose="020B0609020204030204" pitchFamily="49" charset="0"/>
-              </a:rPr>
-              <a:t> somar(</a:t>
-            </a:r>
-            <a:r>
-              <a:rPr lang="pt-BR" sz="1400" b="1" dirty="0" err="1">
-                <a:solidFill>
-                  <a:srgbClr val="7F0055"/>
-                </a:solidFill>
-                <a:latin typeface="Consolas" panose="020B0609020204030204" pitchFamily="49" charset="0"/>
-              </a:rPr>
-              <a:t>double</a:t>
-            </a:r>
-            <a:r>
-              <a:rPr lang="pt-BR" sz="1400" dirty="0">
-                <a:solidFill>
-                  <a:srgbClr val="000000"/>
-                </a:solidFill>
-                <a:latin typeface="Consolas" panose="020B0609020204030204" pitchFamily="49" charset="0"/>
-              </a:rPr>
-              <a:t> </a:t>
-            </a:r>
-            <a:r>
-              <a:rPr lang="pt-BR" sz="1400" dirty="0">
-                <a:solidFill>
-                  <a:srgbClr val="6A3E3E"/>
-                </a:solidFill>
-                <a:latin typeface="Consolas" panose="020B0609020204030204" pitchFamily="49" charset="0"/>
-              </a:rPr>
-              <a:t>a</a:t>
-            </a:r>
-            <a:r>
-              <a:rPr lang="pt-BR" sz="1400" dirty="0">
-                <a:solidFill>
-                  <a:srgbClr val="000000"/>
-                </a:solidFill>
-                <a:latin typeface="Consolas" panose="020B0609020204030204" pitchFamily="49" charset="0"/>
-              </a:rPr>
-              <a:t>, </a:t>
-            </a:r>
-            <a:r>
-              <a:rPr lang="pt-BR" sz="1400" b="1" dirty="0" err="1">
-                <a:solidFill>
-                  <a:srgbClr val="7F0055"/>
-                </a:solidFill>
-                <a:latin typeface="Consolas" panose="020B0609020204030204" pitchFamily="49" charset="0"/>
-              </a:rPr>
-              <a:t>double</a:t>
-            </a:r>
-            <a:r>
-              <a:rPr lang="pt-BR" sz="1400" dirty="0">
-                <a:solidFill>
-                  <a:srgbClr val="000000"/>
-                </a:solidFill>
-                <a:latin typeface="Consolas" panose="020B0609020204030204" pitchFamily="49" charset="0"/>
-              </a:rPr>
-              <a:t> </a:t>
-            </a:r>
-            <a:r>
-              <a:rPr lang="pt-BR" sz="1400" dirty="0">
-                <a:solidFill>
-                  <a:srgbClr val="6A3E3E"/>
-                </a:solidFill>
-                <a:latin typeface="Consolas" panose="020B0609020204030204" pitchFamily="49" charset="0"/>
-              </a:rPr>
-              <a:t>b</a:t>
-            </a:r>
-            <a:r>
-              <a:rPr lang="pt-BR" sz="1400" dirty="0">
-                <a:solidFill>
-                  <a:srgbClr val="000000"/>
-                </a:solidFill>
-                <a:latin typeface="Consolas" panose="020B0609020204030204" pitchFamily="49" charset="0"/>
-              </a:rPr>
-              <a:t>) {</a:t>
-            </a:r>
-          </a:p>
-          <a:p>
-            <a:pPr indent="914400">
-              <a:spcBef>
-                <a:spcPts val="150"/>
-              </a:spcBef>
-              <a:spcAft>
-                <a:spcPts val="150"/>
-              </a:spcAft>
-            </a:pPr>
-            <a:r>
-              <a:rPr lang="pt-BR" sz="1400" b="1" dirty="0" err="1">
-                <a:solidFill>
-                  <a:srgbClr val="7F0055"/>
-                </a:solidFill>
-                <a:latin typeface="Consolas" panose="020B0609020204030204" pitchFamily="49" charset="0"/>
-              </a:rPr>
-              <a:t>return</a:t>
-            </a:r>
-            <a:r>
-              <a:rPr lang="pt-BR" sz="1400" dirty="0">
-                <a:solidFill>
-                  <a:srgbClr val="000000"/>
-                </a:solidFill>
-                <a:latin typeface="Consolas" panose="020B0609020204030204" pitchFamily="49" charset="0"/>
-              </a:rPr>
-              <a:t> </a:t>
-            </a:r>
-            <a:r>
-              <a:rPr lang="pt-BR" sz="1400" dirty="0">
-                <a:solidFill>
-                  <a:srgbClr val="6A3E3E"/>
-                </a:solidFill>
-                <a:latin typeface="Consolas" panose="020B0609020204030204" pitchFamily="49" charset="0"/>
-              </a:rPr>
-              <a:t>a</a:t>
-            </a:r>
-            <a:r>
-              <a:rPr lang="pt-BR" sz="1400" dirty="0">
-                <a:solidFill>
-                  <a:srgbClr val="000000"/>
-                </a:solidFill>
-                <a:latin typeface="Consolas" panose="020B0609020204030204" pitchFamily="49" charset="0"/>
-              </a:rPr>
-              <a:t> + </a:t>
-            </a:r>
-            <a:r>
-              <a:rPr lang="pt-BR" sz="1400" dirty="0">
-                <a:solidFill>
-                  <a:srgbClr val="6A3E3E"/>
-                </a:solidFill>
-                <a:latin typeface="Consolas" panose="020B0609020204030204" pitchFamily="49" charset="0"/>
-              </a:rPr>
-              <a:t>b</a:t>
-            </a:r>
-            <a:r>
-              <a:rPr lang="pt-BR" sz="1400" dirty="0">
-                <a:solidFill>
-                  <a:srgbClr val="000000"/>
-                </a:solidFill>
-                <a:latin typeface="Consolas" panose="020B0609020204030204" pitchFamily="49" charset="0"/>
-              </a:rPr>
-              <a:t>;</a:t>
-            </a:r>
-          </a:p>
-          <a:p>
-            <a:pPr indent="457200">
-              <a:spcBef>
-                <a:spcPts val="150"/>
-              </a:spcBef>
-              <a:spcAft>
-                <a:spcPts val="150"/>
-              </a:spcAft>
-            </a:pPr>
-            <a:r>
-              <a:rPr lang="pt-BR" sz="1400" dirty="0">
-                <a:solidFill>
-                  <a:srgbClr val="000000"/>
-                </a:solidFill>
-                <a:latin typeface="Consolas" panose="020B0609020204030204" pitchFamily="49" charset="0"/>
-              </a:rPr>
-              <a:t>}</a:t>
-            </a:r>
-          </a:p>
-          <a:p>
-            <a:pPr indent="457200">
-              <a:spcBef>
-                <a:spcPts val="150"/>
-              </a:spcBef>
-              <a:spcAft>
-                <a:spcPts val="150"/>
-              </a:spcAft>
-            </a:pPr>
-            <a:r>
-              <a:rPr lang="pt-BR" sz="1400" b="1" dirty="0" err="1">
-                <a:solidFill>
-                  <a:srgbClr val="7F0055"/>
-                </a:solidFill>
-                <a:latin typeface="Consolas" panose="020B0609020204030204" pitchFamily="49" charset="0"/>
-              </a:rPr>
-              <a:t>public</a:t>
-            </a:r>
-            <a:r>
-              <a:rPr lang="pt-BR" sz="1400" dirty="0">
-                <a:solidFill>
-                  <a:srgbClr val="000000"/>
-                </a:solidFill>
-                <a:latin typeface="Consolas" panose="020B0609020204030204" pitchFamily="49" charset="0"/>
-              </a:rPr>
-              <a:t> </a:t>
-            </a:r>
-            <a:r>
-              <a:rPr lang="pt-BR" sz="1400" b="1" dirty="0" err="1">
-                <a:solidFill>
-                  <a:srgbClr val="7F0055"/>
-                </a:solidFill>
-                <a:latin typeface="Consolas" panose="020B0609020204030204" pitchFamily="49" charset="0"/>
-              </a:rPr>
-              <a:t>int</a:t>
-            </a:r>
-            <a:r>
-              <a:rPr lang="pt-BR" sz="1400" dirty="0">
-                <a:solidFill>
-                  <a:srgbClr val="000000"/>
-                </a:solidFill>
-                <a:latin typeface="Consolas" panose="020B0609020204030204" pitchFamily="49" charset="0"/>
-              </a:rPr>
-              <a:t> somar(</a:t>
-            </a:r>
-            <a:r>
-              <a:rPr lang="pt-BR" sz="1400" b="1" dirty="0" err="1">
-                <a:solidFill>
-                  <a:srgbClr val="7F0055"/>
-                </a:solidFill>
-                <a:latin typeface="Consolas" panose="020B0609020204030204" pitchFamily="49" charset="0"/>
-              </a:rPr>
-              <a:t>int</a:t>
-            </a:r>
-            <a:r>
-              <a:rPr lang="pt-BR" sz="1400" dirty="0">
-                <a:solidFill>
-                  <a:srgbClr val="000000"/>
-                </a:solidFill>
-                <a:latin typeface="Consolas" panose="020B0609020204030204" pitchFamily="49" charset="0"/>
-              </a:rPr>
-              <a:t> </a:t>
-            </a:r>
-            <a:r>
-              <a:rPr lang="pt-BR" sz="1400" dirty="0">
-                <a:solidFill>
-                  <a:srgbClr val="6A3E3E"/>
-                </a:solidFill>
-                <a:latin typeface="Consolas" panose="020B0609020204030204" pitchFamily="49" charset="0"/>
-              </a:rPr>
-              <a:t>a</a:t>
-            </a:r>
-            <a:r>
-              <a:rPr lang="pt-BR" sz="1400" dirty="0">
-                <a:solidFill>
-                  <a:srgbClr val="000000"/>
-                </a:solidFill>
-                <a:latin typeface="Consolas" panose="020B0609020204030204" pitchFamily="49" charset="0"/>
-              </a:rPr>
-              <a:t>, </a:t>
-            </a:r>
-            <a:r>
-              <a:rPr lang="pt-BR" sz="1400" b="1" dirty="0" err="1">
-                <a:solidFill>
-                  <a:srgbClr val="7F0055"/>
-                </a:solidFill>
-                <a:latin typeface="Consolas" panose="020B0609020204030204" pitchFamily="49" charset="0"/>
-              </a:rPr>
-              <a:t>int</a:t>
-            </a:r>
-            <a:r>
-              <a:rPr lang="pt-BR" sz="1400" dirty="0">
-                <a:solidFill>
-                  <a:srgbClr val="000000"/>
-                </a:solidFill>
-                <a:latin typeface="Consolas" panose="020B0609020204030204" pitchFamily="49" charset="0"/>
-              </a:rPr>
-              <a:t> </a:t>
-            </a:r>
-            <a:r>
-              <a:rPr lang="pt-BR" sz="1400" dirty="0">
-                <a:solidFill>
-                  <a:srgbClr val="6A3E3E"/>
-                </a:solidFill>
-                <a:latin typeface="Consolas" panose="020B0609020204030204" pitchFamily="49" charset="0"/>
-              </a:rPr>
-              <a:t>b</a:t>
-            </a:r>
-            <a:r>
-              <a:rPr lang="pt-BR" sz="1400" dirty="0">
-                <a:solidFill>
-                  <a:srgbClr val="000000"/>
-                </a:solidFill>
-                <a:latin typeface="Consolas" panose="020B0609020204030204" pitchFamily="49" charset="0"/>
-              </a:rPr>
-              <a:t>, </a:t>
-            </a:r>
-            <a:r>
-              <a:rPr lang="pt-BR" sz="1400" b="1" dirty="0" err="1">
-                <a:solidFill>
-                  <a:srgbClr val="7F0055"/>
-                </a:solidFill>
-                <a:latin typeface="Consolas" panose="020B0609020204030204" pitchFamily="49" charset="0"/>
-              </a:rPr>
-              <a:t>int</a:t>
-            </a:r>
-            <a:r>
-              <a:rPr lang="pt-BR" sz="1400" dirty="0">
-                <a:solidFill>
-                  <a:srgbClr val="000000"/>
-                </a:solidFill>
-                <a:latin typeface="Consolas" panose="020B0609020204030204" pitchFamily="49" charset="0"/>
-              </a:rPr>
-              <a:t> </a:t>
-            </a:r>
-            <a:r>
-              <a:rPr lang="pt-BR" sz="1400" dirty="0">
-                <a:solidFill>
-                  <a:srgbClr val="6A3E3E"/>
-                </a:solidFill>
-                <a:latin typeface="Consolas" panose="020B0609020204030204" pitchFamily="49" charset="0"/>
-              </a:rPr>
-              <a:t>c</a:t>
-            </a:r>
-            <a:r>
-              <a:rPr lang="pt-BR" sz="1400" dirty="0">
-                <a:solidFill>
-                  <a:srgbClr val="000000"/>
-                </a:solidFill>
-                <a:latin typeface="Consolas" panose="020B0609020204030204" pitchFamily="49" charset="0"/>
-              </a:rPr>
-              <a:t>) {</a:t>
-            </a:r>
-          </a:p>
-          <a:p>
-            <a:pPr indent="914400">
-              <a:spcBef>
-                <a:spcPts val="150"/>
-              </a:spcBef>
-              <a:spcAft>
-                <a:spcPts val="150"/>
-              </a:spcAft>
-            </a:pPr>
-            <a:r>
-              <a:rPr lang="pt-BR" sz="1400" b="1" dirty="0" err="1">
-                <a:solidFill>
-                  <a:srgbClr val="7F0055"/>
-                </a:solidFill>
-                <a:latin typeface="Consolas" panose="020B0609020204030204" pitchFamily="49" charset="0"/>
-              </a:rPr>
-              <a:t>return</a:t>
-            </a:r>
-            <a:r>
-              <a:rPr lang="pt-BR" sz="1400" dirty="0">
-                <a:solidFill>
-                  <a:srgbClr val="000000"/>
-                </a:solidFill>
-                <a:latin typeface="Consolas" panose="020B0609020204030204" pitchFamily="49" charset="0"/>
-              </a:rPr>
-              <a:t> </a:t>
-            </a:r>
-            <a:r>
-              <a:rPr lang="pt-BR" sz="1400" dirty="0">
-                <a:solidFill>
-                  <a:srgbClr val="6A3E3E"/>
-                </a:solidFill>
-                <a:latin typeface="Consolas" panose="020B0609020204030204" pitchFamily="49" charset="0"/>
-              </a:rPr>
-              <a:t>a</a:t>
-            </a:r>
-            <a:r>
-              <a:rPr lang="pt-BR" sz="1400" dirty="0">
-                <a:solidFill>
-                  <a:srgbClr val="000000"/>
-                </a:solidFill>
-                <a:latin typeface="Consolas" panose="020B0609020204030204" pitchFamily="49" charset="0"/>
-              </a:rPr>
-              <a:t> + </a:t>
-            </a:r>
-            <a:r>
-              <a:rPr lang="pt-BR" sz="1400" dirty="0">
-                <a:solidFill>
-                  <a:srgbClr val="6A3E3E"/>
-                </a:solidFill>
-                <a:latin typeface="Consolas" panose="020B0609020204030204" pitchFamily="49" charset="0"/>
-              </a:rPr>
-              <a:t>b</a:t>
-            </a:r>
-            <a:r>
-              <a:rPr lang="pt-BR" sz="1400" dirty="0">
-                <a:solidFill>
-                  <a:srgbClr val="000000"/>
-                </a:solidFill>
-                <a:latin typeface="Consolas" panose="020B0609020204030204" pitchFamily="49" charset="0"/>
-              </a:rPr>
-              <a:t> + </a:t>
-            </a:r>
-            <a:r>
-              <a:rPr lang="pt-BR" sz="1400" dirty="0">
-                <a:solidFill>
-                  <a:srgbClr val="6A3E3E"/>
-                </a:solidFill>
-                <a:latin typeface="Consolas" panose="020B0609020204030204" pitchFamily="49" charset="0"/>
-              </a:rPr>
-              <a:t>c</a:t>
-            </a:r>
-            <a:r>
-              <a:rPr lang="pt-BR" sz="1400" dirty="0">
-                <a:solidFill>
-                  <a:srgbClr val="000000"/>
-                </a:solidFill>
-                <a:latin typeface="Consolas" panose="020B0609020204030204" pitchFamily="49" charset="0"/>
-              </a:rPr>
-              <a:t>;</a:t>
-            </a:r>
-          </a:p>
-          <a:p>
-            <a:pPr indent="457200">
-              <a:spcBef>
-                <a:spcPts val="150"/>
-              </a:spcBef>
-              <a:spcAft>
-                <a:spcPts val="150"/>
-              </a:spcAft>
-            </a:pPr>
-            <a:r>
-              <a:rPr lang="pt-BR" sz="1400" dirty="0">
-                <a:solidFill>
-                  <a:srgbClr val="000000"/>
-                </a:solidFill>
-                <a:latin typeface="Consolas" panose="020B0609020204030204" pitchFamily="49" charset="0"/>
-              </a:rPr>
-              <a:t>}</a:t>
-            </a:r>
-          </a:p>
-          <a:p>
-            <a:pPr>
-              <a:spcBef>
-                <a:spcPts val="150"/>
-              </a:spcBef>
-              <a:spcAft>
-                <a:spcPts val="150"/>
-              </a:spcAft>
-            </a:pPr>
-            <a:r>
-              <a:rPr lang="pt-BR" sz="1400" dirty="0">
-                <a:solidFill>
-                  <a:srgbClr val="000000"/>
-                </a:solidFill>
-                <a:latin typeface="Consolas" panose="020B0609020204030204" pitchFamily="49" charset="0"/>
-              </a:rPr>
-              <a:t>}</a:t>
-            </a:r>
-          </a:p>
-        </p:txBody>
-      </p:sp>
-      <p:sp>
-        <p:nvSpPr>
-          <p:cNvPr id="5" name="CaixaDeTexto 4">
-            <a:extLst>
-              <a:ext uri="{FF2B5EF4-FFF2-40B4-BE49-F238E27FC236}">
-                <a16:creationId xmlns:a16="http://schemas.microsoft.com/office/drawing/2014/main" id="{84F9EC0C-06FF-4414-87FA-9B60D0B83818}"/>
-              </a:ext>
-            </a:extLst>
-          </p:cNvPr>
-          <p:cNvSpPr txBox="1"/>
-          <p:nvPr/>
-        </p:nvSpPr>
-        <p:spPr>
-          <a:xfrm>
-            <a:off x="1897943" y="2514600"/>
-            <a:ext cx="2607734" cy="369332"/>
-          </a:xfrm>
-          <a:prstGeom prst="rect">
-            <a:avLst/>
-          </a:prstGeom>
-          <a:noFill/>
-        </p:spPr>
-        <p:txBody>
-          <a:bodyPr wrap="square" rtlCol="0">
-            <a:spAutoFit/>
-          </a:bodyPr>
-          <a:lstStyle/>
-          <a:p>
-            <a:pPr algn="ctr"/>
-            <a:r>
-              <a:rPr lang="pt-BR" dirty="0">
-                <a:latin typeface="Times New Roman" panose="02020603050405020304" pitchFamily="18" charset="0"/>
-                <a:cs typeface="Times New Roman" panose="02020603050405020304" pitchFamily="18" charset="0"/>
-              </a:rPr>
-              <a:t>Sobrecarga</a:t>
-            </a:r>
-          </a:p>
-        </p:txBody>
-      </p:sp>
-      <p:sp>
-        <p:nvSpPr>
-          <p:cNvPr id="6" name="Retângulo 5">
-            <a:extLst>
-              <a:ext uri="{FF2B5EF4-FFF2-40B4-BE49-F238E27FC236}">
-                <a16:creationId xmlns:a16="http://schemas.microsoft.com/office/drawing/2014/main" id="{92256B6E-0262-418B-82DC-A9263E124FF3}"/>
-              </a:ext>
-            </a:extLst>
-          </p:cNvPr>
-          <p:cNvSpPr/>
-          <p:nvPr/>
-        </p:nvSpPr>
-        <p:spPr>
-          <a:xfrm>
-            <a:off x="6403622" y="3028407"/>
-            <a:ext cx="4936067" cy="3241913"/>
-          </a:xfrm>
-          <a:prstGeom prst="rect">
-            <a:avLst/>
-          </a:prstGeom>
-        </p:spPr>
-        <p:txBody>
-          <a:bodyPr wrap="square">
-            <a:spAutoFit/>
-          </a:bodyPr>
-          <a:lstStyle/>
-          <a:p>
-            <a:pPr>
-              <a:spcBef>
-                <a:spcPts val="150"/>
-              </a:spcBef>
-              <a:spcAft>
-                <a:spcPts val="150"/>
-              </a:spcAft>
-            </a:pPr>
-            <a:r>
-              <a:rPr lang="pt-BR" sz="1400" b="1" dirty="0" err="1">
-                <a:solidFill>
-                  <a:srgbClr val="7F0055"/>
-                </a:solidFill>
-                <a:latin typeface="Consolas" panose="020B0609020204030204" pitchFamily="49" charset="0"/>
-              </a:rPr>
-              <a:t>class</a:t>
-            </a:r>
-            <a:r>
-              <a:rPr lang="pt-BR" sz="1400" dirty="0">
-                <a:solidFill>
-                  <a:srgbClr val="000000"/>
-                </a:solidFill>
-                <a:latin typeface="Consolas" panose="020B0609020204030204" pitchFamily="49" charset="0"/>
-              </a:rPr>
-              <a:t> Animal {</a:t>
-            </a:r>
-          </a:p>
-          <a:p>
-            <a:pPr indent="457200">
-              <a:spcBef>
-                <a:spcPts val="150"/>
-              </a:spcBef>
-              <a:spcAft>
-                <a:spcPts val="150"/>
-              </a:spcAft>
-            </a:pPr>
-            <a:r>
-              <a:rPr lang="pt-BR" sz="1400" b="1" dirty="0" err="1">
-                <a:solidFill>
-                  <a:srgbClr val="7F0055"/>
-                </a:solidFill>
-                <a:latin typeface="Consolas" panose="020B0609020204030204" pitchFamily="49" charset="0"/>
-              </a:rPr>
-              <a:t>public</a:t>
-            </a:r>
-            <a:r>
-              <a:rPr lang="pt-BR" sz="1400" dirty="0">
-                <a:solidFill>
-                  <a:srgbClr val="000000"/>
-                </a:solidFill>
-                <a:latin typeface="Consolas" panose="020B0609020204030204" pitchFamily="49" charset="0"/>
-              </a:rPr>
-              <a:t> </a:t>
-            </a:r>
-            <a:r>
-              <a:rPr lang="pt-BR" sz="1400" b="1" dirty="0" err="1">
-                <a:solidFill>
-                  <a:srgbClr val="7F0055"/>
-                </a:solidFill>
-                <a:latin typeface="Consolas" panose="020B0609020204030204" pitchFamily="49" charset="0"/>
-              </a:rPr>
-              <a:t>void</a:t>
-            </a:r>
-            <a:r>
-              <a:rPr lang="pt-BR" sz="1400" dirty="0">
-                <a:solidFill>
-                  <a:srgbClr val="000000"/>
-                </a:solidFill>
-                <a:latin typeface="Consolas" panose="020B0609020204030204" pitchFamily="49" charset="0"/>
-              </a:rPr>
-              <a:t> </a:t>
-            </a:r>
-            <a:r>
-              <a:rPr lang="pt-BR" sz="1400" dirty="0" err="1">
-                <a:solidFill>
-                  <a:srgbClr val="000000"/>
-                </a:solidFill>
-                <a:latin typeface="Consolas" panose="020B0609020204030204" pitchFamily="49" charset="0"/>
-              </a:rPr>
-              <a:t>emitirSom</a:t>
-            </a:r>
-            <a:r>
-              <a:rPr lang="pt-BR" sz="1400" dirty="0">
-                <a:solidFill>
-                  <a:srgbClr val="000000"/>
-                </a:solidFill>
-                <a:latin typeface="Consolas" panose="020B0609020204030204" pitchFamily="49" charset="0"/>
-              </a:rPr>
-              <a:t>() {</a:t>
-            </a:r>
-          </a:p>
-          <a:p>
-            <a:pPr indent="914400">
-              <a:spcBef>
-                <a:spcPts val="150"/>
-              </a:spcBef>
-              <a:spcAft>
-                <a:spcPts val="150"/>
-              </a:spcAft>
-            </a:pPr>
-            <a:r>
-              <a:rPr lang="pt-BR" sz="1400" dirty="0" err="1">
-                <a:solidFill>
-                  <a:srgbClr val="000000"/>
-                </a:solidFill>
-                <a:latin typeface="Consolas" panose="020B0609020204030204" pitchFamily="49" charset="0"/>
-              </a:rPr>
-              <a:t>System.</a:t>
-            </a:r>
-            <a:r>
-              <a:rPr lang="pt-BR" sz="1400" b="1" i="1" dirty="0" err="1">
-                <a:solidFill>
-                  <a:srgbClr val="0000C0"/>
-                </a:solidFill>
-                <a:latin typeface="Consolas" panose="020B0609020204030204" pitchFamily="49" charset="0"/>
-              </a:rPr>
-              <a:t>out</a:t>
-            </a:r>
-            <a:r>
-              <a:rPr lang="pt-BR" sz="1400" dirty="0" err="1">
-                <a:solidFill>
-                  <a:srgbClr val="000000"/>
-                </a:solidFill>
-                <a:latin typeface="Consolas" panose="020B0609020204030204" pitchFamily="49" charset="0"/>
-              </a:rPr>
-              <a:t>.println</a:t>
-            </a:r>
-            <a:r>
-              <a:rPr lang="pt-BR" sz="1400" dirty="0">
-                <a:solidFill>
-                  <a:srgbClr val="000000"/>
-                </a:solidFill>
-                <a:latin typeface="Consolas" panose="020B0609020204030204" pitchFamily="49" charset="0"/>
-              </a:rPr>
-              <a:t>(</a:t>
-            </a:r>
-            <a:r>
-              <a:rPr lang="pt-BR" sz="1400" dirty="0">
-                <a:solidFill>
-                  <a:srgbClr val="2A00FF"/>
-                </a:solidFill>
-                <a:latin typeface="Consolas" panose="020B0609020204030204" pitchFamily="49" charset="0"/>
-              </a:rPr>
-              <a:t>"Animal faz som"</a:t>
-            </a:r>
-            <a:r>
-              <a:rPr lang="pt-BR" sz="1400" dirty="0">
-                <a:solidFill>
-                  <a:srgbClr val="000000"/>
-                </a:solidFill>
-                <a:latin typeface="Consolas" panose="020B0609020204030204" pitchFamily="49" charset="0"/>
-              </a:rPr>
-              <a:t>);</a:t>
-            </a:r>
-          </a:p>
-          <a:p>
-            <a:pPr indent="457200">
-              <a:spcBef>
-                <a:spcPts val="150"/>
-              </a:spcBef>
-              <a:spcAft>
-                <a:spcPts val="150"/>
-              </a:spcAft>
-            </a:pPr>
-            <a:r>
-              <a:rPr lang="pt-BR" sz="1400" dirty="0">
-                <a:solidFill>
-                  <a:srgbClr val="000000"/>
-                </a:solidFill>
-                <a:latin typeface="Consolas" panose="020B0609020204030204" pitchFamily="49" charset="0"/>
-              </a:rPr>
-              <a:t>}</a:t>
-            </a:r>
-          </a:p>
-          <a:p>
-            <a:pPr>
-              <a:spcBef>
-                <a:spcPts val="150"/>
-              </a:spcBef>
-              <a:spcAft>
-                <a:spcPts val="150"/>
-              </a:spcAft>
-            </a:pPr>
-            <a:r>
-              <a:rPr lang="pt-BR" sz="1400" dirty="0">
-                <a:solidFill>
-                  <a:srgbClr val="000000"/>
-                </a:solidFill>
-                <a:latin typeface="Consolas" panose="020B0609020204030204" pitchFamily="49" charset="0"/>
-              </a:rPr>
-              <a:t>}</a:t>
-            </a:r>
-          </a:p>
-          <a:p>
-            <a:pPr>
-              <a:spcBef>
-                <a:spcPts val="150"/>
-              </a:spcBef>
-              <a:spcAft>
-                <a:spcPts val="150"/>
-              </a:spcAft>
-            </a:pPr>
-            <a:endParaRPr lang="pt-BR" sz="1400" dirty="0">
-              <a:solidFill>
-                <a:srgbClr val="000000"/>
-              </a:solidFill>
-              <a:latin typeface="Consolas" panose="020B0609020204030204" pitchFamily="49" charset="0"/>
-            </a:endParaRPr>
-          </a:p>
-          <a:p>
-            <a:pPr>
-              <a:spcBef>
-                <a:spcPts val="150"/>
-              </a:spcBef>
-              <a:spcAft>
-                <a:spcPts val="150"/>
-              </a:spcAft>
-            </a:pPr>
-            <a:r>
-              <a:rPr lang="pt-BR" sz="1400" b="1" dirty="0" err="1">
-                <a:solidFill>
-                  <a:srgbClr val="7F0055"/>
-                </a:solidFill>
-                <a:latin typeface="Consolas" panose="020B0609020204030204" pitchFamily="49" charset="0"/>
-              </a:rPr>
-              <a:t>class</a:t>
-            </a:r>
-            <a:r>
-              <a:rPr lang="pt-BR" sz="1400" dirty="0">
-                <a:solidFill>
-                  <a:srgbClr val="000000"/>
-                </a:solidFill>
-                <a:latin typeface="Consolas" panose="020B0609020204030204" pitchFamily="49" charset="0"/>
-              </a:rPr>
-              <a:t> Gato </a:t>
-            </a:r>
-            <a:r>
-              <a:rPr lang="pt-BR" sz="1400" b="1" dirty="0" err="1">
-                <a:solidFill>
-                  <a:srgbClr val="7F0055"/>
-                </a:solidFill>
-                <a:latin typeface="Consolas" panose="020B0609020204030204" pitchFamily="49" charset="0"/>
-              </a:rPr>
-              <a:t>extends</a:t>
-            </a:r>
-            <a:r>
-              <a:rPr lang="pt-BR" sz="1400" dirty="0">
-                <a:solidFill>
-                  <a:srgbClr val="000000"/>
-                </a:solidFill>
-                <a:latin typeface="Consolas" panose="020B0609020204030204" pitchFamily="49" charset="0"/>
-              </a:rPr>
-              <a:t> Animal {</a:t>
-            </a:r>
-          </a:p>
-          <a:p>
-            <a:pPr indent="457200">
-              <a:spcBef>
-                <a:spcPts val="150"/>
-              </a:spcBef>
-              <a:spcAft>
-                <a:spcPts val="150"/>
-              </a:spcAft>
-            </a:pPr>
-            <a:r>
-              <a:rPr lang="pt-BR" sz="1400" dirty="0">
-                <a:solidFill>
-                  <a:srgbClr val="646464"/>
-                </a:solidFill>
-                <a:latin typeface="Consolas" panose="020B0609020204030204" pitchFamily="49" charset="0"/>
-              </a:rPr>
-              <a:t>@</a:t>
-            </a:r>
-            <a:r>
-              <a:rPr lang="pt-BR" sz="1400" dirty="0" err="1">
-                <a:solidFill>
-                  <a:srgbClr val="646464"/>
-                </a:solidFill>
-                <a:latin typeface="Consolas" panose="020B0609020204030204" pitchFamily="49" charset="0"/>
-              </a:rPr>
-              <a:t>Override</a:t>
-            </a:r>
-            <a:endParaRPr lang="pt-BR" sz="1400" dirty="0">
-              <a:solidFill>
-                <a:srgbClr val="000000"/>
-              </a:solidFill>
-              <a:latin typeface="Consolas" panose="020B0609020204030204" pitchFamily="49" charset="0"/>
-            </a:endParaRPr>
-          </a:p>
-          <a:p>
-            <a:pPr indent="457200">
-              <a:spcBef>
-                <a:spcPts val="150"/>
-              </a:spcBef>
-              <a:spcAft>
-                <a:spcPts val="150"/>
-              </a:spcAft>
-            </a:pPr>
-            <a:r>
-              <a:rPr lang="pt-BR" sz="1400" b="1" dirty="0" err="1">
-                <a:solidFill>
-                  <a:srgbClr val="7F0055"/>
-                </a:solidFill>
-                <a:latin typeface="Consolas" panose="020B0609020204030204" pitchFamily="49" charset="0"/>
-              </a:rPr>
-              <a:t>public</a:t>
-            </a:r>
-            <a:r>
-              <a:rPr lang="pt-BR" sz="1400" dirty="0">
-                <a:solidFill>
-                  <a:srgbClr val="000000"/>
-                </a:solidFill>
-                <a:latin typeface="Consolas" panose="020B0609020204030204" pitchFamily="49" charset="0"/>
-              </a:rPr>
-              <a:t> </a:t>
-            </a:r>
-            <a:r>
-              <a:rPr lang="pt-BR" sz="1400" b="1" dirty="0" err="1">
-                <a:solidFill>
-                  <a:srgbClr val="7F0055"/>
-                </a:solidFill>
-                <a:latin typeface="Consolas" panose="020B0609020204030204" pitchFamily="49" charset="0"/>
-              </a:rPr>
-              <a:t>void</a:t>
-            </a:r>
-            <a:r>
-              <a:rPr lang="pt-BR" sz="1400" dirty="0">
-                <a:solidFill>
-                  <a:srgbClr val="000000"/>
-                </a:solidFill>
-                <a:latin typeface="Consolas" panose="020B0609020204030204" pitchFamily="49" charset="0"/>
-              </a:rPr>
-              <a:t> </a:t>
-            </a:r>
-            <a:r>
-              <a:rPr lang="pt-BR" sz="1400" dirty="0" err="1">
-                <a:solidFill>
-                  <a:srgbClr val="000000"/>
-                </a:solidFill>
-                <a:latin typeface="Consolas" panose="020B0609020204030204" pitchFamily="49" charset="0"/>
-              </a:rPr>
-              <a:t>emitirSom</a:t>
-            </a:r>
-            <a:r>
-              <a:rPr lang="pt-BR" sz="1400" dirty="0">
-                <a:solidFill>
-                  <a:srgbClr val="000000"/>
-                </a:solidFill>
-                <a:latin typeface="Consolas" panose="020B0609020204030204" pitchFamily="49" charset="0"/>
-              </a:rPr>
-              <a:t>() {</a:t>
-            </a:r>
-          </a:p>
-          <a:p>
-            <a:pPr indent="914400">
-              <a:spcBef>
-                <a:spcPts val="150"/>
-              </a:spcBef>
-              <a:spcAft>
-                <a:spcPts val="150"/>
-              </a:spcAft>
-            </a:pPr>
-            <a:r>
-              <a:rPr lang="pt-BR" sz="1400" dirty="0" err="1">
-                <a:solidFill>
-                  <a:srgbClr val="000000"/>
-                </a:solidFill>
-                <a:latin typeface="Consolas" panose="020B0609020204030204" pitchFamily="49" charset="0"/>
-              </a:rPr>
-              <a:t>System.</a:t>
-            </a:r>
-            <a:r>
-              <a:rPr lang="pt-BR" sz="1400" b="1" i="1" dirty="0" err="1">
-                <a:solidFill>
-                  <a:srgbClr val="0000C0"/>
-                </a:solidFill>
-                <a:latin typeface="Consolas" panose="020B0609020204030204" pitchFamily="49" charset="0"/>
-              </a:rPr>
-              <a:t>out</a:t>
-            </a:r>
-            <a:r>
-              <a:rPr lang="pt-BR" sz="1400" dirty="0" err="1">
-                <a:solidFill>
-                  <a:srgbClr val="000000"/>
-                </a:solidFill>
-                <a:latin typeface="Consolas" panose="020B0609020204030204" pitchFamily="49" charset="0"/>
-              </a:rPr>
-              <a:t>.println</a:t>
-            </a:r>
-            <a:r>
-              <a:rPr lang="pt-BR" sz="1400" dirty="0">
-                <a:solidFill>
-                  <a:srgbClr val="000000"/>
-                </a:solidFill>
-                <a:latin typeface="Consolas" panose="020B0609020204030204" pitchFamily="49" charset="0"/>
-              </a:rPr>
-              <a:t>(</a:t>
-            </a:r>
-            <a:r>
-              <a:rPr lang="pt-BR" sz="1400" dirty="0">
-                <a:solidFill>
-                  <a:srgbClr val="2A00FF"/>
-                </a:solidFill>
-                <a:latin typeface="Consolas" panose="020B0609020204030204" pitchFamily="49" charset="0"/>
-              </a:rPr>
-              <a:t>"Gato mia"</a:t>
-            </a:r>
-            <a:r>
-              <a:rPr lang="pt-BR" sz="1400" dirty="0">
-                <a:solidFill>
-                  <a:srgbClr val="000000"/>
-                </a:solidFill>
-                <a:latin typeface="Consolas" panose="020B0609020204030204" pitchFamily="49" charset="0"/>
-              </a:rPr>
-              <a:t>);</a:t>
-            </a:r>
-          </a:p>
-          <a:p>
-            <a:pPr indent="457200">
-              <a:spcBef>
-                <a:spcPts val="150"/>
-              </a:spcBef>
-              <a:spcAft>
-                <a:spcPts val="150"/>
-              </a:spcAft>
-            </a:pPr>
-            <a:r>
-              <a:rPr lang="pt-BR" sz="1400" dirty="0">
-                <a:solidFill>
-                  <a:srgbClr val="000000"/>
-                </a:solidFill>
-                <a:latin typeface="Consolas" panose="020B0609020204030204" pitchFamily="49" charset="0"/>
-              </a:rPr>
-              <a:t>}</a:t>
-            </a:r>
-          </a:p>
-          <a:p>
-            <a:pPr>
-              <a:spcBef>
-                <a:spcPts val="150"/>
-              </a:spcBef>
-              <a:spcAft>
-                <a:spcPts val="150"/>
-              </a:spcAft>
-            </a:pPr>
-            <a:r>
-              <a:rPr lang="pt-BR" sz="1400" dirty="0">
-                <a:solidFill>
-                  <a:srgbClr val="000000"/>
-                </a:solidFill>
-                <a:latin typeface="Consolas" panose="020B0609020204030204" pitchFamily="49" charset="0"/>
-              </a:rPr>
-              <a:t>}</a:t>
-            </a:r>
-          </a:p>
-        </p:txBody>
-      </p:sp>
-      <p:sp>
-        <p:nvSpPr>
-          <p:cNvPr id="7" name="CaixaDeTexto 6">
-            <a:extLst>
-              <a:ext uri="{FF2B5EF4-FFF2-40B4-BE49-F238E27FC236}">
-                <a16:creationId xmlns:a16="http://schemas.microsoft.com/office/drawing/2014/main" id="{EB5AEC25-BA37-441D-87EC-8DE38AED57BF}"/>
-              </a:ext>
-            </a:extLst>
-          </p:cNvPr>
-          <p:cNvSpPr txBox="1"/>
-          <p:nvPr/>
-        </p:nvSpPr>
-        <p:spPr>
-          <a:xfrm>
-            <a:off x="7567788" y="2514600"/>
-            <a:ext cx="2607734" cy="369332"/>
-          </a:xfrm>
-          <a:prstGeom prst="rect">
-            <a:avLst/>
-          </a:prstGeom>
-          <a:noFill/>
-        </p:spPr>
-        <p:txBody>
-          <a:bodyPr wrap="square" rtlCol="0">
-            <a:spAutoFit/>
-          </a:bodyPr>
-          <a:lstStyle/>
-          <a:p>
-            <a:pPr algn="ctr"/>
-            <a:r>
-              <a:rPr lang="pt-BR" dirty="0">
-                <a:latin typeface="Times New Roman" panose="02020603050405020304" pitchFamily="18" charset="0"/>
-                <a:cs typeface="Times New Roman" panose="02020603050405020304" pitchFamily="18" charset="0"/>
-              </a:rPr>
-              <a:t>Sobrescrita</a:t>
-            </a:r>
-          </a:p>
-        </p:txBody>
-      </p:sp>
-    </p:spTree>
-    <p:extLst>
-      <p:ext uri="{BB962C8B-B14F-4D97-AF65-F5344CB8AC3E}">
-        <p14:creationId xmlns:p14="http://schemas.microsoft.com/office/powerpoint/2010/main" val="2967410373"/>
-      </p:ext>
-    </p:extLst>
-  </p:cSld>
-  <p:clrMapOvr>
-    <a:masterClrMapping/>
-  </p:clrMapOvr>
-</p:sld>
-</file>
-
-<file path=ppt/slides/slide14.xml><?xml version="1.0" encoding="utf-8"?>
-<p:sld xmlns:a="http://schemas.openxmlformats.org/drawingml/2006/main" xmlns:r="http://schemas.openxmlformats.org/officeDocument/2006/relationships" xmlns:p="http://schemas.openxmlformats.org/presentationml/2006/main">
-  <p:cSld>
-    <p:spTree>
-      <p:nvGrpSpPr>
-        <p:cNvPr id="1" name=""/>
-        <p:cNvGrpSpPr/>
-        <p:nvPr/>
-      </p:nvGrpSpPr>
-      <p:grpSpPr>
-        <a:xfrm>
-          <a:off x="0" y="0"/>
-          <a:ext cx="0" cy="0"/>
-          <a:chOff x="0" y="0"/>
-          <a:chExt cx="0" cy="0"/>
-        </a:xfrm>
-      </p:grpSpPr>
-      <p:sp>
-        <p:nvSpPr>
-          <p:cNvPr id="2" name="Título 1">
-            <a:extLst>
-              <a:ext uri="{FF2B5EF4-FFF2-40B4-BE49-F238E27FC236}">
                 <a16:creationId xmlns:a16="http://schemas.microsoft.com/office/drawing/2014/main" id="{98F55CF7-7DD5-478F-8B89-574E79ED855F}"/>
               </a:ext>
             </a:extLst>
@@ -6619,7 +5377,7 @@
 </p:sld>
 </file>
 
-<file path=ppt/slides/slide15.xml><?xml version="1.0" encoding="utf-8"?>
+<file path=ppt/slides/slide13.xml><?xml version="1.0" encoding="utf-8"?>
 <p:sld xmlns:a="http://schemas.openxmlformats.org/drawingml/2006/main" xmlns:r="http://schemas.openxmlformats.org/officeDocument/2006/relationships" xmlns:p="http://schemas.openxmlformats.org/presentationml/2006/main">
   <p:cSld>
     <p:spTree>
@@ -7720,6 +6478,413 @@
           </a:p>
         </p:txBody>
       </p:sp>
+      <p:pic>
+        <p:nvPicPr>
+          <p:cNvPr id="4" name="Imagem 3">
+            <a:extLst>
+              <a:ext uri="{FF2B5EF4-FFF2-40B4-BE49-F238E27FC236}">
+                <a16:creationId xmlns:a16="http://schemas.microsoft.com/office/drawing/2014/main" id="{518CD119-6200-2052-5613-63D7BB2393E1}"/>
+              </a:ext>
+            </a:extLst>
+          </p:cNvPr>
+          <p:cNvPicPr>
+            <a:picLocks noChangeAspect="1"/>
+          </p:cNvPicPr>
+          <p:nvPr/>
+        </p:nvPicPr>
+        <p:blipFill>
+          <a:blip r:embed="rId2"/>
+          <a:stretch>
+            <a:fillRect/>
+          </a:stretch>
+        </p:blipFill>
+        <p:spPr>
+          <a:xfrm>
+            <a:off x="4645565" y="1860991"/>
+            <a:ext cx="2900870" cy="2160000"/>
+          </a:xfrm>
+          <a:prstGeom prst="rect">
+            <a:avLst/>
+          </a:prstGeom>
+        </p:spPr>
+      </p:pic>
+      <p:pic>
+        <p:nvPicPr>
+          <p:cNvPr id="6" name="Imagem 5">
+            <a:extLst>
+              <a:ext uri="{FF2B5EF4-FFF2-40B4-BE49-F238E27FC236}">
+                <a16:creationId xmlns:a16="http://schemas.microsoft.com/office/drawing/2014/main" id="{766A1EBA-5E4B-7A69-2163-E90E0F1FF285}"/>
+              </a:ext>
+            </a:extLst>
+          </p:cNvPr>
+          <p:cNvPicPr>
+            <a:picLocks noChangeAspect="1"/>
+          </p:cNvPicPr>
+          <p:nvPr/>
+        </p:nvPicPr>
+        <p:blipFill>
+          <a:blip r:embed="rId3"/>
+          <a:stretch>
+            <a:fillRect/>
+          </a:stretch>
+        </p:blipFill>
+        <p:spPr>
+          <a:xfrm>
+            <a:off x="946320" y="4865524"/>
+            <a:ext cx="2802240" cy="1260000"/>
+          </a:xfrm>
+          <a:prstGeom prst="rect">
+            <a:avLst/>
+          </a:prstGeom>
+        </p:spPr>
+      </p:pic>
+      <p:pic>
+        <p:nvPicPr>
+          <p:cNvPr id="8" name="Imagem 7">
+            <a:extLst>
+              <a:ext uri="{FF2B5EF4-FFF2-40B4-BE49-F238E27FC236}">
+                <a16:creationId xmlns:a16="http://schemas.microsoft.com/office/drawing/2014/main" id="{835AF5FE-4972-5182-C2C2-75F1F94F4501}"/>
+              </a:ext>
+            </a:extLst>
+          </p:cNvPr>
+          <p:cNvPicPr>
+            <a:picLocks noChangeAspect="1"/>
+          </p:cNvPicPr>
+          <p:nvPr/>
+        </p:nvPicPr>
+        <p:blipFill>
+          <a:blip r:embed="rId4"/>
+          <a:stretch>
+            <a:fillRect/>
+          </a:stretch>
+        </p:blipFill>
+        <p:spPr>
+          <a:xfrm>
+            <a:off x="4694880" y="4865525"/>
+            <a:ext cx="2802240" cy="1260000"/>
+          </a:xfrm>
+          <a:prstGeom prst="rect">
+            <a:avLst/>
+          </a:prstGeom>
+        </p:spPr>
+      </p:pic>
+      <p:pic>
+        <p:nvPicPr>
+          <p:cNvPr id="10" name="Imagem 9">
+            <a:extLst>
+              <a:ext uri="{FF2B5EF4-FFF2-40B4-BE49-F238E27FC236}">
+                <a16:creationId xmlns:a16="http://schemas.microsoft.com/office/drawing/2014/main" id="{53E7CB8D-963B-FC1D-C8F9-EBC4FAC767F4}"/>
+              </a:ext>
+            </a:extLst>
+          </p:cNvPr>
+          <p:cNvPicPr>
+            <a:picLocks noChangeAspect="1"/>
+          </p:cNvPicPr>
+          <p:nvPr/>
+        </p:nvPicPr>
+        <p:blipFill>
+          <a:blip r:embed="rId5"/>
+          <a:stretch>
+            <a:fillRect/>
+          </a:stretch>
+        </p:blipFill>
+        <p:spPr>
+          <a:xfrm>
+            <a:off x="8443440" y="4865524"/>
+            <a:ext cx="2802240" cy="1260000"/>
+          </a:xfrm>
+          <a:prstGeom prst="rect">
+            <a:avLst/>
+          </a:prstGeom>
+        </p:spPr>
+      </p:pic>
+      <p:cxnSp>
+        <p:nvCxnSpPr>
+          <p:cNvPr id="14" name="Conector: Angulado 13">
+            <a:extLst>
+              <a:ext uri="{FF2B5EF4-FFF2-40B4-BE49-F238E27FC236}">
+                <a16:creationId xmlns:a16="http://schemas.microsoft.com/office/drawing/2014/main" id="{030682DC-8010-3C61-3997-42FF4B61EF0F}"/>
+              </a:ext>
+            </a:extLst>
+          </p:cNvPr>
+          <p:cNvCxnSpPr>
+            <a:stCxn id="4" idx="1"/>
+            <a:endCxn id="6" idx="0"/>
+          </p:cNvCxnSpPr>
+          <p:nvPr/>
+        </p:nvCxnSpPr>
+        <p:spPr>
+          <a:xfrm rot="10800000" flipV="1">
+            <a:off x="2347441" y="2940990"/>
+            <a:ext cx="2298125" cy="1924533"/>
+          </a:xfrm>
+          <a:prstGeom prst="bentConnector2">
+            <a:avLst/>
+          </a:prstGeom>
+          <a:ln w="38100">
+            <a:solidFill>
+              <a:schemeClr val="tx1"/>
+            </a:solidFill>
+            <a:tailEnd type="triangle"/>
+          </a:ln>
+        </p:spPr>
+        <p:style>
+          <a:lnRef idx="1">
+            <a:schemeClr val="accent1"/>
+          </a:lnRef>
+          <a:fillRef idx="0">
+            <a:schemeClr val="accent1"/>
+          </a:fillRef>
+          <a:effectRef idx="0">
+            <a:schemeClr val="accent1"/>
+          </a:effectRef>
+          <a:fontRef idx="minor">
+            <a:schemeClr val="tx1"/>
+          </a:fontRef>
+        </p:style>
+      </p:cxnSp>
+      <p:cxnSp>
+        <p:nvCxnSpPr>
+          <p:cNvPr id="16" name="Conector de Seta Reta 15">
+            <a:extLst>
+              <a:ext uri="{FF2B5EF4-FFF2-40B4-BE49-F238E27FC236}">
+                <a16:creationId xmlns:a16="http://schemas.microsoft.com/office/drawing/2014/main" id="{61612BD8-A330-6137-1C4B-1BAE77330D7D}"/>
+              </a:ext>
+            </a:extLst>
+          </p:cNvPr>
+          <p:cNvCxnSpPr>
+            <a:stCxn id="4" idx="2"/>
+            <a:endCxn id="8" idx="0"/>
+          </p:cNvCxnSpPr>
+          <p:nvPr/>
+        </p:nvCxnSpPr>
+        <p:spPr>
+          <a:xfrm>
+            <a:off x="6096000" y="4020991"/>
+            <a:ext cx="0" cy="844534"/>
+          </a:xfrm>
+          <a:prstGeom prst="straightConnector1">
+            <a:avLst/>
+          </a:prstGeom>
+          <a:ln w="38100">
+            <a:solidFill>
+              <a:schemeClr val="tx1"/>
+            </a:solidFill>
+            <a:tailEnd type="triangle"/>
+          </a:ln>
+        </p:spPr>
+        <p:style>
+          <a:lnRef idx="1">
+            <a:schemeClr val="accent1"/>
+          </a:lnRef>
+          <a:fillRef idx="0">
+            <a:schemeClr val="accent1"/>
+          </a:fillRef>
+          <a:effectRef idx="0">
+            <a:schemeClr val="accent1"/>
+          </a:effectRef>
+          <a:fontRef idx="minor">
+            <a:schemeClr val="tx1"/>
+          </a:fontRef>
+        </p:style>
+      </p:cxnSp>
+      <p:cxnSp>
+        <p:nvCxnSpPr>
+          <p:cNvPr id="18" name="Conector: Angulado 17">
+            <a:extLst>
+              <a:ext uri="{FF2B5EF4-FFF2-40B4-BE49-F238E27FC236}">
+                <a16:creationId xmlns:a16="http://schemas.microsoft.com/office/drawing/2014/main" id="{7D7A350D-2ECC-E1E0-CDDA-EC93911B3064}"/>
+              </a:ext>
+            </a:extLst>
+          </p:cNvPr>
+          <p:cNvCxnSpPr>
+            <a:stCxn id="4" idx="3"/>
+            <a:endCxn id="10" idx="0"/>
+          </p:cNvCxnSpPr>
+          <p:nvPr/>
+        </p:nvCxnSpPr>
+        <p:spPr>
+          <a:xfrm>
+            <a:off x="7546435" y="2940991"/>
+            <a:ext cx="2298125" cy="1924533"/>
+          </a:xfrm>
+          <a:prstGeom prst="bentConnector2">
+            <a:avLst/>
+          </a:prstGeom>
+          <a:ln w="38100">
+            <a:solidFill>
+              <a:schemeClr val="tx1"/>
+            </a:solidFill>
+            <a:tailEnd type="triangle"/>
+          </a:ln>
+        </p:spPr>
+        <p:style>
+          <a:lnRef idx="1">
+            <a:schemeClr val="accent1"/>
+          </a:lnRef>
+          <a:fillRef idx="0">
+            <a:schemeClr val="accent1"/>
+          </a:fillRef>
+          <a:effectRef idx="0">
+            <a:schemeClr val="accent1"/>
+          </a:effectRef>
+          <a:fontRef idx="minor">
+            <a:schemeClr val="tx1"/>
+          </a:fontRef>
+        </p:style>
+      </p:cxnSp>
+      <p:sp>
+        <p:nvSpPr>
+          <p:cNvPr id="19" name="CaixaDeTexto 18">
+            <a:extLst>
+              <a:ext uri="{FF2B5EF4-FFF2-40B4-BE49-F238E27FC236}">
+                <a16:creationId xmlns:a16="http://schemas.microsoft.com/office/drawing/2014/main" id="{EB6AA209-4668-3863-A5DF-75737009A963}"/>
+              </a:ext>
+            </a:extLst>
+          </p:cNvPr>
+          <p:cNvSpPr txBox="1"/>
+          <p:nvPr/>
+        </p:nvSpPr>
+        <p:spPr>
+          <a:xfrm>
+            <a:off x="7641771" y="2198327"/>
+            <a:ext cx="2441694" cy="369332"/>
+          </a:xfrm>
+          <a:prstGeom prst="rect">
+            <a:avLst/>
+          </a:prstGeom>
+          <a:noFill/>
+        </p:spPr>
+        <p:txBody>
+          <a:bodyPr wrap="none" rtlCol="0">
+            <a:spAutoFit/>
+          </a:bodyPr>
+          <a:lstStyle/>
+          <a:p>
+            <a:r>
+              <a:rPr lang="pt-BR" dirty="0">
+                <a:latin typeface="Times New Roman" panose="02020603050405020304" pitchFamily="18" charset="0"/>
+                <a:cs typeface="Times New Roman" panose="02020603050405020304" pitchFamily="18" charset="0"/>
+              </a:rPr>
+              <a:t>Superclasse (Classe Pai)</a:t>
+            </a:r>
+          </a:p>
+        </p:txBody>
+      </p:sp>
+      <p:sp>
+        <p:nvSpPr>
+          <p:cNvPr id="20" name="CaixaDeTexto 19">
+            <a:extLst>
+              <a:ext uri="{FF2B5EF4-FFF2-40B4-BE49-F238E27FC236}">
+                <a16:creationId xmlns:a16="http://schemas.microsoft.com/office/drawing/2014/main" id="{9A2A2D1F-769B-4ABA-9F99-67BBEECFFFA6}"/>
+              </a:ext>
+            </a:extLst>
+          </p:cNvPr>
+          <p:cNvSpPr txBox="1"/>
+          <p:nvPr/>
+        </p:nvSpPr>
+        <p:spPr>
+          <a:xfrm>
+            <a:off x="4875153" y="6249992"/>
+            <a:ext cx="2441694" cy="369332"/>
+          </a:xfrm>
+          <a:prstGeom prst="rect">
+            <a:avLst/>
+          </a:prstGeom>
+          <a:noFill/>
+        </p:spPr>
+        <p:txBody>
+          <a:bodyPr wrap="none" rtlCol="0">
+            <a:spAutoFit/>
+          </a:bodyPr>
+          <a:lstStyle/>
+          <a:p>
+            <a:r>
+              <a:rPr lang="pt-BR" dirty="0">
+                <a:latin typeface="Times New Roman" panose="02020603050405020304" pitchFamily="18" charset="0"/>
+                <a:cs typeface="Times New Roman" panose="02020603050405020304" pitchFamily="18" charset="0"/>
+              </a:rPr>
+              <a:t>Subclasse (Classe Filha)</a:t>
+            </a:r>
+          </a:p>
+        </p:txBody>
+      </p:sp>
+      <p:sp>
+        <p:nvSpPr>
+          <p:cNvPr id="21" name="CaixaDeTexto 20">
+            <a:extLst>
+              <a:ext uri="{FF2B5EF4-FFF2-40B4-BE49-F238E27FC236}">
+                <a16:creationId xmlns:a16="http://schemas.microsoft.com/office/drawing/2014/main" id="{97FB5A31-8834-3502-3120-7A98DCE920F0}"/>
+              </a:ext>
+            </a:extLst>
+          </p:cNvPr>
+          <p:cNvSpPr txBox="1"/>
+          <p:nvPr/>
+        </p:nvSpPr>
+        <p:spPr>
+          <a:xfrm>
+            <a:off x="1126593" y="6246528"/>
+            <a:ext cx="2441694" cy="369332"/>
+          </a:xfrm>
+          <a:prstGeom prst="rect">
+            <a:avLst/>
+          </a:prstGeom>
+          <a:noFill/>
+        </p:spPr>
+        <p:txBody>
+          <a:bodyPr wrap="none" rtlCol="0">
+            <a:spAutoFit/>
+          </a:bodyPr>
+          <a:lstStyle/>
+          <a:p>
+            <a:r>
+              <a:rPr lang="pt-BR" dirty="0">
+                <a:latin typeface="Times New Roman" panose="02020603050405020304" pitchFamily="18" charset="0"/>
+                <a:cs typeface="Times New Roman" panose="02020603050405020304" pitchFamily="18" charset="0"/>
+              </a:rPr>
+              <a:t>Subclasse (Classe Filha)</a:t>
+            </a:r>
+          </a:p>
+        </p:txBody>
+      </p:sp>
+      <p:sp>
+        <p:nvSpPr>
+          <p:cNvPr id="22" name="CaixaDeTexto 21">
+            <a:extLst>
+              <a:ext uri="{FF2B5EF4-FFF2-40B4-BE49-F238E27FC236}">
+                <a16:creationId xmlns:a16="http://schemas.microsoft.com/office/drawing/2014/main" id="{743BD69A-0615-04F4-EA96-69B16AB34A5B}"/>
+              </a:ext>
+            </a:extLst>
+          </p:cNvPr>
+          <p:cNvSpPr txBox="1"/>
+          <p:nvPr/>
+        </p:nvSpPr>
+        <p:spPr>
+          <a:xfrm>
+            <a:off x="8623713" y="6246528"/>
+            <a:ext cx="2441694" cy="369332"/>
+          </a:xfrm>
+          <a:prstGeom prst="rect">
+            <a:avLst/>
+          </a:prstGeom>
+          <a:noFill/>
+        </p:spPr>
+        <p:txBody>
+          <a:bodyPr wrap="none" rtlCol="0">
+            <a:spAutoFit/>
+          </a:bodyPr>
+          <a:lstStyle/>
+          <a:p>
+            <a:r>
+              <a:rPr lang="pt-BR" dirty="0">
+                <a:latin typeface="Times New Roman" panose="02020603050405020304" pitchFamily="18" charset="0"/>
+                <a:cs typeface="Times New Roman" panose="02020603050405020304" pitchFamily="18" charset="0"/>
+              </a:rPr>
+              <a:t>Subclasse (Classe Filha)</a:t>
+            </a:r>
+          </a:p>
+        </p:txBody>
+      </p:sp>
     </p:spTree>
     <p:extLst>
       <p:ext uri="{BB962C8B-B14F-4D97-AF65-F5344CB8AC3E}">
@@ -7832,7 +6997,7 @@
         <p:spPr>
           <a:xfrm>
             <a:off x="1365932" y="5124140"/>
-            <a:ext cx="2970685" cy="878830"/>
+            <a:ext cx="2844048" cy="878830"/>
           </a:xfrm>
           <a:prstGeom prst="rect">
             <a:avLst/>
@@ -7883,7 +7048,7 @@
                 </a:solidFill>
                 <a:latin typeface="Consolas" panose="020B0609020204030204" pitchFamily="49" charset="0"/>
               </a:rPr>
-              <a:t> Veiculo {</a:t>
+              <a:t> Animal {</a:t>
             </a:r>
           </a:p>
           <a:p>
@@ -7919,7 +7084,7 @@
         <p:spPr>
           <a:xfrm>
             <a:off x="5702549" y="5123531"/>
-            <a:ext cx="4743606" cy="880049"/>
+            <a:ext cx="4996881" cy="880049"/>
           </a:xfrm>
           <a:prstGeom prst="rect">
             <a:avLst/>
@@ -7970,7 +7135,7 @@
                 </a:solidFill>
                 <a:latin typeface="Consolas" panose="020B0609020204030204" pitchFamily="49" charset="0"/>
               </a:rPr>
-              <a:t> Carro </a:t>
+              <a:t> Cachorro </a:t>
             </a:r>
             <a:r>
               <a:rPr lang="pt-BR" b="1" dirty="0" err="1">
@@ -7988,7 +7153,7 @@
                 </a:solidFill>
                 <a:latin typeface="Consolas" panose="020B0609020204030204" pitchFamily="49" charset="0"/>
               </a:rPr>
-              <a:t> Veiculo {</a:t>
+              <a:t> Animal {</a:t>
             </a:r>
           </a:p>
           <a:p>
@@ -8024,7 +7189,7 @@
         </p:nvSpPr>
         <p:spPr>
           <a:xfrm>
-            <a:off x="2293534" y="4754199"/>
+            <a:off x="2230216" y="4754199"/>
             <a:ext cx="1115480" cy="338554"/>
           </a:xfrm>
           <a:prstGeom prst="rect">
@@ -8063,7 +7228,7 @@
         </p:nvSpPr>
         <p:spPr>
           <a:xfrm>
-            <a:off x="7481911" y="4784977"/>
+            <a:off x="7608548" y="4784977"/>
             <a:ext cx="1184883" cy="338554"/>
           </a:xfrm>
           <a:prstGeom prst="rect">
@@ -8123,7 +7288,7 @@
           <p:cNvPr id="2" name="Título 1">
             <a:extLst>
               <a:ext uri="{FF2B5EF4-FFF2-40B4-BE49-F238E27FC236}">
-                <a16:creationId xmlns:a16="http://schemas.microsoft.com/office/drawing/2014/main" id="{E043F642-E38A-4B17-B305-F70323727EF7}"/>
+                <a16:creationId xmlns:a16="http://schemas.microsoft.com/office/drawing/2014/main" id="{13BF5B45-63CF-41F7-8496-D896490AE335}"/>
               </a:ext>
             </a:extLst>
           </p:cNvPr>
@@ -8141,7 +7306,15 @@
           <a:p>
             <a:r>
               <a:rPr lang="pt-BR" dirty="0"/>
-              <a:t>Exemplo </a:t>
+              <a:t>Construtor </a:t>
+            </a:r>
+            <a:r>
+              <a:rPr lang="pt-BR" dirty="0" err="1"/>
+              <a:t>Super</a:t>
+            </a:r>
+            <a:r>
+              <a:rPr lang="pt-BR" dirty="0"/>
+              <a:t>()</a:t>
             </a:r>
           </a:p>
         </p:txBody>
@@ -8151,7 +7324,7 @@
           <p:cNvPr id="3" name="Espaço Reservado para Conteúdo 2">
             <a:extLst>
               <a:ext uri="{FF2B5EF4-FFF2-40B4-BE49-F238E27FC236}">
-                <a16:creationId xmlns:a16="http://schemas.microsoft.com/office/drawing/2014/main" id="{2A74A100-D328-4756-BBA8-8AB542B26B35}"/>
+                <a16:creationId xmlns:a16="http://schemas.microsoft.com/office/drawing/2014/main" id="{05C539C4-EDD4-414C-ADA6-9C2633603CB2}"/>
               </a:ext>
             </a:extLst>
           </p:cNvPr>
@@ -8164,8 +7337,8 @@
         </p:nvSpPr>
         <p:spPr>
           <a:xfrm>
-            <a:off x="592347" y="1844675"/>
-            <a:ext cx="11007306" cy="994319"/>
+            <a:off x="592347" y="1772553"/>
+            <a:ext cx="11007306" cy="849349"/>
           </a:xfrm>
         </p:spPr>
         <p:txBody>
@@ -8174,209 +7347,635 @@
           <a:p>
             <a:r>
               <a:rPr lang="pt-BR" sz="1600" dirty="0"/>
-              <a:t>Um exemplo prático de herança pode ser um sistema de gestão de funcionários, onde há uma classe genérica chamada </a:t>
+              <a:t>A palavra-chave </a:t>
             </a:r>
             <a:r>
               <a:rPr lang="pt-BR" sz="1600" dirty="0" err="1"/>
-              <a:t>Funcionario</a:t>
+              <a:t>super</a:t>
             </a:r>
             <a:r>
               <a:rPr lang="pt-BR" sz="1600" dirty="0"/>
-              <a:t>, e classes mais específicas como Gerente e Vendedor, que herdam características e comportamentos da classe pai.</a:t>
+              <a:t> é utilizada para se referir à superclasse (classe pai) de uma classe derivada (classe filha). Ela é especialmente útil quando há a necessidade de reutilizar atributos ou métodos da classe pai, evitando a repetição de código.</a:t>
             </a:r>
           </a:p>
         </p:txBody>
       </p:sp>
-      <p:pic>
-        <p:nvPicPr>
-          <p:cNvPr id="7" name="Imagem 6">
-            <a:extLst>
-              <a:ext uri="{FF2B5EF4-FFF2-40B4-BE49-F238E27FC236}">
-                <a16:creationId xmlns:a16="http://schemas.microsoft.com/office/drawing/2014/main" id="{5E8AE307-8B5A-4EB5-AE5D-95027CF12C2A}"/>
-              </a:ext>
-            </a:extLst>
-          </p:cNvPr>
-          <p:cNvPicPr>
-            <a:picLocks noChangeAspect="1"/>
-          </p:cNvPicPr>
+      <p:sp>
+        <p:nvSpPr>
+          <p:cNvPr id="8" name="Retângulo 7">
+            <a:extLst>
+              <a:ext uri="{FF2B5EF4-FFF2-40B4-BE49-F238E27FC236}">
+                <a16:creationId xmlns:a16="http://schemas.microsoft.com/office/drawing/2014/main" id="{974DDB22-2288-4893-8D35-C51A4D00B151}"/>
+              </a:ext>
+            </a:extLst>
+          </p:cNvPr>
+          <p:cNvSpPr/>
           <p:nvPr/>
-        </p:nvPicPr>
-        <p:blipFill>
-          <a:blip r:embed="rId2"/>
-          <a:stretch>
-            <a:fillRect/>
-          </a:stretch>
-        </p:blipFill>
-        <p:spPr>
-          <a:xfrm>
-            <a:off x="4267588" y="2908138"/>
-            <a:ext cx="3240000" cy="1300408"/>
+        </p:nvSpPr>
+        <p:spPr>
+          <a:xfrm>
+            <a:off x="2920294" y="3091462"/>
+            <a:ext cx="6351412" cy="2975173"/>
           </a:xfrm>
           <a:prstGeom prst="rect">
             <a:avLst/>
           </a:prstGeom>
         </p:spPr>
-      </p:pic>
-      <p:pic>
-        <p:nvPicPr>
-          <p:cNvPr id="8" name="Imagem 7">
-            <a:extLst>
-              <a:ext uri="{FF2B5EF4-FFF2-40B4-BE49-F238E27FC236}">
-                <a16:creationId xmlns:a16="http://schemas.microsoft.com/office/drawing/2014/main" id="{33868085-22EF-419F-B2AC-212A12FC168B}"/>
-              </a:ext>
-            </a:extLst>
-          </p:cNvPr>
-          <p:cNvPicPr>
-            <a:picLocks noChangeAspect="1"/>
-          </p:cNvPicPr>
-          <p:nvPr/>
-        </p:nvPicPr>
-        <p:blipFill>
-          <a:blip r:embed="rId3"/>
-          <a:stretch>
-            <a:fillRect/>
-          </a:stretch>
-        </p:blipFill>
-        <p:spPr>
-          <a:xfrm>
-            <a:off x="1456081" y="5249412"/>
-            <a:ext cx="3240000" cy="1053000"/>
-          </a:xfrm>
-          <a:prstGeom prst="rect">
-            <a:avLst/>
-          </a:prstGeom>
-        </p:spPr>
-      </p:pic>
-      <p:pic>
-        <p:nvPicPr>
-          <p:cNvPr id="9" name="Imagem 8">
-            <a:extLst>
-              <a:ext uri="{FF2B5EF4-FFF2-40B4-BE49-F238E27FC236}">
-                <a16:creationId xmlns:a16="http://schemas.microsoft.com/office/drawing/2014/main" id="{F9C11D01-EFA5-4C5F-9D54-CCFC18BC144A}"/>
-              </a:ext>
-            </a:extLst>
-          </p:cNvPr>
-          <p:cNvPicPr>
-            <a:picLocks noChangeAspect="1"/>
-          </p:cNvPicPr>
-          <p:nvPr/>
-        </p:nvPicPr>
-        <p:blipFill>
-          <a:blip r:embed="rId4"/>
-          <a:stretch>
-            <a:fillRect/>
-          </a:stretch>
-        </p:blipFill>
-        <p:spPr>
-          <a:xfrm>
-            <a:off x="7079095" y="5249412"/>
-            <a:ext cx="3240000" cy="1055398"/>
-          </a:xfrm>
-          <a:prstGeom prst="rect">
-            <a:avLst/>
-          </a:prstGeom>
-        </p:spPr>
-      </p:pic>
-      <p:cxnSp>
-        <p:nvCxnSpPr>
-          <p:cNvPr id="11" name="Conector: Angulado 10">
-            <a:extLst>
-              <a:ext uri="{FF2B5EF4-FFF2-40B4-BE49-F238E27FC236}">
-                <a16:creationId xmlns:a16="http://schemas.microsoft.com/office/drawing/2014/main" id="{5DCC4665-BFFC-40AE-AFE7-D861CB10BDEF}"/>
-              </a:ext>
-            </a:extLst>
-          </p:cNvPr>
-          <p:cNvCxnSpPr>
-            <a:stCxn id="7" idx="2"/>
-            <a:endCxn id="8" idx="0"/>
-          </p:cNvCxnSpPr>
-          <p:nvPr/>
-        </p:nvCxnSpPr>
-        <p:spPr>
-          <a:xfrm rot="5400000">
-            <a:off x="3961402" y="3323226"/>
-            <a:ext cx="1040866" cy="2811507"/>
-          </a:xfrm>
-          <a:prstGeom prst="bentConnector3">
-            <a:avLst/>
-          </a:prstGeom>
-          <a:ln w="28575">
-            <a:solidFill>
-              <a:schemeClr val="tx1">
-                <a:lumMod val="95000"/>
-                <a:lumOff val="5000"/>
-              </a:schemeClr>
-            </a:solidFill>
-            <a:tailEnd type="triangle"/>
-          </a:ln>
-        </p:spPr>
-        <p:style>
-          <a:lnRef idx="1">
-            <a:schemeClr val="accent1"/>
-          </a:lnRef>
-          <a:fillRef idx="0">
-            <a:schemeClr val="accent1"/>
-          </a:fillRef>
-          <a:effectRef idx="0">
-            <a:schemeClr val="accent1"/>
-          </a:effectRef>
-          <a:fontRef idx="minor">
-            <a:schemeClr val="tx1"/>
-          </a:fontRef>
-        </p:style>
-      </p:cxnSp>
-      <p:cxnSp>
-        <p:nvCxnSpPr>
-          <p:cNvPr id="13" name="Conector: Angulado 12">
-            <a:extLst>
-              <a:ext uri="{FF2B5EF4-FFF2-40B4-BE49-F238E27FC236}">
-                <a16:creationId xmlns:a16="http://schemas.microsoft.com/office/drawing/2014/main" id="{033EE9D9-2A89-4ADA-90DE-318D1F09CB34}"/>
-              </a:ext>
-            </a:extLst>
-          </p:cNvPr>
-          <p:cNvCxnSpPr>
-            <a:stCxn id="7" idx="2"/>
-            <a:endCxn id="9" idx="0"/>
-          </p:cNvCxnSpPr>
-          <p:nvPr/>
-        </p:nvCxnSpPr>
-        <p:spPr>
-          <a:xfrm rot="16200000" flipH="1">
-            <a:off x="6772908" y="3323225"/>
-            <a:ext cx="1040866" cy="2811507"/>
-          </a:xfrm>
-          <a:prstGeom prst="bentConnector3">
-            <a:avLst/>
-          </a:prstGeom>
-          <a:ln w="28575">
-            <a:solidFill>
-              <a:schemeClr val="tx1">
-                <a:lumMod val="95000"/>
-                <a:lumOff val="5000"/>
-              </a:schemeClr>
-            </a:solidFill>
-            <a:tailEnd type="triangle"/>
-          </a:ln>
-        </p:spPr>
-        <p:style>
-          <a:lnRef idx="1">
-            <a:schemeClr val="accent1"/>
-          </a:lnRef>
-          <a:fillRef idx="0">
-            <a:schemeClr val="accent1"/>
-          </a:fillRef>
-          <a:effectRef idx="0">
-            <a:schemeClr val="accent1"/>
-          </a:effectRef>
-          <a:fontRef idx="minor">
-            <a:schemeClr val="tx1"/>
-          </a:fontRef>
-        </p:style>
-      </p:cxnSp>
+        <p:txBody>
+          <a:bodyPr wrap="square">
+            <a:spAutoFit/>
+          </a:bodyPr>
+          <a:lstStyle/>
+          <a:p>
+            <a:pPr>
+              <a:spcBef>
+                <a:spcPts val="150"/>
+              </a:spcBef>
+              <a:spcAft>
+                <a:spcPts val="150"/>
+              </a:spcAft>
+            </a:pPr>
+            <a:r>
+              <a:rPr lang="pt-BR" sz="1400" b="1" dirty="0" err="1">
+                <a:solidFill>
+                  <a:srgbClr val="7F0055"/>
+                </a:solidFill>
+                <a:latin typeface="Consolas" panose="020B0609020204030204" pitchFamily="49" charset="0"/>
+              </a:rPr>
+              <a:t>public</a:t>
+            </a:r>
+            <a:r>
+              <a:rPr lang="pt-BR" sz="1400" dirty="0">
+                <a:solidFill>
+                  <a:srgbClr val="000000"/>
+                </a:solidFill>
+                <a:latin typeface="Consolas" panose="020B0609020204030204" pitchFamily="49" charset="0"/>
+              </a:rPr>
+              <a:t> </a:t>
+            </a:r>
+            <a:r>
+              <a:rPr lang="pt-BR" sz="1400" b="1" dirty="0" err="1">
+                <a:solidFill>
+                  <a:srgbClr val="7F0055"/>
+                </a:solidFill>
+                <a:latin typeface="Consolas" panose="020B0609020204030204" pitchFamily="49" charset="0"/>
+              </a:rPr>
+              <a:t>class</a:t>
+            </a:r>
+            <a:r>
+              <a:rPr lang="pt-BR" sz="1400" dirty="0">
+                <a:solidFill>
+                  <a:srgbClr val="000000"/>
+                </a:solidFill>
+                <a:latin typeface="Consolas" panose="020B0609020204030204" pitchFamily="49" charset="0"/>
+              </a:rPr>
+              <a:t> Animal {</a:t>
+            </a:r>
+          </a:p>
+          <a:p>
+            <a:pPr lvl="1">
+              <a:spcBef>
+                <a:spcPts val="150"/>
+              </a:spcBef>
+              <a:spcAft>
+                <a:spcPts val="150"/>
+              </a:spcAft>
+            </a:pPr>
+            <a:r>
+              <a:rPr lang="pt-BR" sz="1400" b="1" dirty="0" err="1">
+                <a:solidFill>
+                  <a:srgbClr val="7F0055"/>
+                </a:solidFill>
+                <a:latin typeface="Consolas" panose="020B0609020204030204" pitchFamily="49" charset="0"/>
+              </a:rPr>
+              <a:t>private</a:t>
+            </a:r>
+            <a:r>
+              <a:rPr lang="pt-BR" sz="1400" dirty="0">
+                <a:solidFill>
+                  <a:srgbClr val="000000"/>
+                </a:solidFill>
+                <a:latin typeface="Consolas" panose="020B0609020204030204" pitchFamily="49" charset="0"/>
+              </a:rPr>
+              <a:t> String </a:t>
+            </a:r>
+            <a:r>
+              <a:rPr lang="pt-BR" sz="1400" u="sng" dirty="0">
+                <a:solidFill>
+                  <a:srgbClr val="0000C0"/>
+                </a:solidFill>
+                <a:latin typeface="Consolas" panose="020B0609020204030204" pitchFamily="49" charset="0"/>
+              </a:rPr>
+              <a:t>nome</a:t>
+            </a:r>
+            <a:r>
+              <a:rPr lang="pt-BR" sz="1400" dirty="0">
+                <a:solidFill>
+                  <a:srgbClr val="000000"/>
+                </a:solidFill>
+                <a:latin typeface="Consolas" panose="020B0609020204030204" pitchFamily="49" charset="0"/>
+              </a:rPr>
+              <a:t>;</a:t>
+            </a:r>
+          </a:p>
+          <a:p>
+            <a:pPr lvl="1">
+              <a:spcBef>
+                <a:spcPts val="150"/>
+              </a:spcBef>
+              <a:spcAft>
+                <a:spcPts val="150"/>
+              </a:spcAft>
+            </a:pPr>
+            <a:r>
+              <a:rPr lang="pt-BR" sz="1400" b="1" dirty="0" err="1">
+                <a:solidFill>
+                  <a:srgbClr val="7F0055"/>
+                </a:solidFill>
+                <a:latin typeface="Consolas" panose="020B0609020204030204" pitchFamily="49" charset="0"/>
+              </a:rPr>
+              <a:t>private</a:t>
+            </a:r>
+            <a:r>
+              <a:rPr lang="pt-BR" sz="1400" dirty="0">
+                <a:solidFill>
+                  <a:srgbClr val="000000"/>
+                </a:solidFill>
+                <a:latin typeface="Consolas" panose="020B0609020204030204" pitchFamily="49" charset="0"/>
+              </a:rPr>
+              <a:t> </a:t>
+            </a:r>
+            <a:r>
+              <a:rPr lang="pt-BR" sz="1400" b="1" dirty="0" err="1">
+                <a:solidFill>
+                  <a:srgbClr val="7F0055"/>
+                </a:solidFill>
+                <a:latin typeface="Consolas" panose="020B0609020204030204" pitchFamily="49" charset="0"/>
+              </a:rPr>
+              <a:t>double</a:t>
+            </a:r>
+            <a:r>
+              <a:rPr lang="pt-BR" sz="1400" dirty="0">
+                <a:solidFill>
+                  <a:srgbClr val="000000"/>
+                </a:solidFill>
+                <a:latin typeface="Consolas" panose="020B0609020204030204" pitchFamily="49" charset="0"/>
+              </a:rPr>
+              <a:t> </a:t>
+            </a:r>
+            <a:r>
+              <a:rPr lang="pt-BR" sz="1400" u="sng" dirty="0">
+                <a:solidFill>
+                  <a:srgbClr val="0000C0"/>
+                </a:solidFill>
+                <a:latin typeface="Consolas" panose="020B0609020204030204" pitchFamily="49" charset="0"/>
+              </a:rPr>
+              <a:t>peso</a:t>
+            </a:r>
+            <a:r>
+              <a:rPr lang="pt-BR" sz="1400" dirty="0">
+                <a:solidFill>
+                  <a:srgbClr val="000000"/>
+                </a:solidFill>
+                <a:latin typeface="Consolas" panose="020B0609020204030204" pitchFamily="49" charset="0"/>
+              </a:rPr>
+              <a:t>;</a:t>
+            </a:r>
+          </a:p>
+          <a:p>
+            <a:pPr lvl="1">
+              <a:spcBef>
+                <a:spcPts val="150"/>
+              </a:spcBef>
+              <a:spcAft>
+                <a:spcPts val="150"/>
+              </a:spcAft>
+            </a:pPr>
+            <a:r>
+              <a:rPr lang="pt-BR" sz="1400" b="1" dirty="0" err="1">
+                <a:solidFill>
+                  <a:srgbClr val="7F0055"/>
+                </a:solidFill>
+                <a:latin typeface="Consolas" panose="020B0609020204030204" pitchFamily="49" charset="0"/>
+              </a:rPr>
+              <a:t>private</a:t>
+            </a:r>
+            <a:r>
+              <a:rPr lang="pt-BR" sz="1400" dirty="0">
+                <a:solidFill>
+                  <a:srgbClr val="000000"/>
+                </a:solidFill>
+                <a:latin typeface="Consolas" panose="020B0609020204030204" pitchFamily="49" charset="0"/>
+              </a:rPr>
+              <a:t> </a:t>
+            </a:r>
+            <a:r>
+              <a:rPr lang="pt-BR" sz="1400" b="1" dirty="0" err="1">
+                <a:solidFill>
+                  <a:srgbClr val="7F0055"/>
+                </a:solidFill>
+                <a:latin typeface="Consolas" panose="020B0609020204030204" pitchFamily="49" charset="0"/>
+              </a:rPr>
+              <a:t>int</a:t>
+            </a:r>
+            <a:r>
+              <a:rPr lang="pt-BR" sz="1400" dirty="0">
+                <a:solidFill>
+                  <a:srgbClr val="000000"/>
+                </a:solidFill>
+                <a:latin typeface="Consolas" panose="020B0609020204030204" pitchFamily="49" charset="0"/>
+              </a:rPr>
+              <a:t> </a:t>
+            </a:r>
+            <a:r>
+              <a:rPr lang="pt-BR" sz="1400" u="sng" dirty="0">
+                <a:solidFill>
+                  <a:srgbClr val="0000C0"/>
+                </a:solidFill>
+                <a:latin typeface="Consolas" panose="020B0609020204030204" pitchFamily="49" charset="0"/>
+              </a:rPr>
+              <a:t>idade</a:t>
+            </a:r>
+            <a:r>
+              <a:rPr lang="pt-BR" sz="1400" dirty="0">
+                <a:solidFill>
+                  <a:srgbClr val="000000"/>
+                </a:solidFill>
+                <a:latin typeface="Consolas" panose="020B0609020204030204" pitchFamily="49" charset="0"/>
+              </a:rPr>
+              <a:t>;</a:t>
+            </a:r>
+          </a:p>
+          <a:p>
+            <a:pPr lvl="1">
+              <a:spcBef>
+                <a:spcPts val="150"/>
+              </a:spcBef>
+              <a:spcAft>
+                <a:spcPts val="150"/>
+              </a:spcAft>
+            </a:pPr>
+            <a:endParaRPr lang="pt-BR" sz="1400" dirty="0">
+              <a:solidFill>
+                <a:srgbClr val="000000"/>
+              </a:solidFill>
+              <a:latin typeface="Consolas" panose="020B0609020204030204" pitchFamily="49" charset="0"/>
+            </a:endParaRPr>
+          </a:p>
+          <a:p>
+            <a:pPr lvl="1">
+              <a:spcBef>
+                <a:spcPts val="150"/>
+              </a:spcBef>
+              <a:spcAft>
+                <a:spcPts val="150"/>
+              </a:spcAft>
+            </a:pPr>
+            <a:r>
+              <a:rPr lang="pt-BR" sz="1400" b="1" dirty="0" err="1">
+                <a:solidFill>
+                  <a:srgbClr val="7F0055"/>
+                </a:solidFill>
+                <a:latin typeface="Consolas" panose="020B0609020204030204" pitchFamily="49" charset="0"/>
+              </a:rPr>
+              <a:t>public</a:t>
+            </a:r>
+            <a:r>
+              <a:rPr lang="pt-BR" sz="1400" dirty="0">
+                <a:solidFill>
+                  <a:srgbClr val="000000"/>
+                </a:solidFill>
+                <a:latin typeface="Consolas" panose="020B0609020204030204" pitchFamily="49" charset="0"/>
+              </a:rPr>
+              <a:t> Animal(String </a:t>
+            </a:r>
+            <a:r>
+              <a:rPr lang="pt-BR" sz="1400" dirty="0">
+                <a:solidFill>
+                  <a:srgbClr val="6A3E3E"/>
+                </a:solidFill>
+                <a:latin typeface="Consolas" panose="020B0609020204030204" pitchFamily="49" charset="0"/>
+              </a:rPr>
+              <a:t>nome</a:t>
+            </a:r>
+            <a:r>
+              <a:rPr lang="pt-BR" sz="1400" dirty="0">
+                <a:solidFill>
+                  <a:srgbClr val="000000"/>
+                </a:solidFill>
+                <a:latin typeface="Consolas" panose="020B0609020204030204" pitchFamily="49" charset="0"/>
+              </a:rPr>
+              <a:t>, </a:t>
+            </a:r>
+            <a:r>
+              <a:rPr lang="pt-BR" sz="1400" b="1" dirty="0" err="1">
+                <a:solidFill>
+                  <a:srgbClr val="7F0055"/>
+                </a:solidFill>
+                <a:latin typeface="Consolas" panose="020B0609020204030204" pitchFamily="49" charset="0"/>
+              </a:rPr>
+              <a:t>double</a:t>
+            </a:r>
+            <a:r>
+              <a:rPr lang="pt-BR" sz="1400" dirty="0">
+                <a:solidFill>
+                  <a:srgbClr val="000000"/>
+                </a:solidFill>
+                <a:latin typeface="Consolas" panose="020B0609020204030204" pitchFamily="49" charset="0"/>
+              </a:rPr>
+              <a:t> </a:t>
+            </a:r>
+            <a:r>
+              <a:rPr lang="pt-BR" sz="1400" dirty="0">
+                <a:solidFill>
+                  <a:srgbClr val="6A3E3E"/>
+                </a:solidFill>
+                <a:latin typeface="Consolas" panose="020B0609020204030204" pitchFamily="49" charset="0"/>
+              </a:rPr>
+              <a:t>peso, </a:t>
+            </a:r>
+            <a:r>
+              <a:rPr lang="pt-BR" sz="1400" b="1" dirty="0" err="1">
+                <a:solidFill>
+                  <a:srgbClr val="7F0055"/>
+                </a:solidFill>
+                <a:latin typeface="Consolas" panose="020B0609020204030204" pitchFamily="49" charset="0"/>
+              </a:rPr>
+              <a:t>int</a:t>
+            </a:r>
+            <a:r>
+              <a:rPr lang="pt-BR" sz="1400" b="1" dirty="0">
+                <a:solidFill>
+                  <a:srgbClr val="7F0055"/>
+                </a:solidFill>
+                <a:latin typeface="Consolas" panose="020B0609020204030204" pitchFamily="49" charset="0"/>
+              </a:rPr>
+              <a:t> </a:t>
+            </a:r>
+            <a:r>
+              <a:rPr lang="pt-BR" sz="1400" dirty="0">
+                <a:solidFill>
+                  <a:srgbClr val="6A3E3E"/>
+                </a:solidFill>
+                <a:latin typeface="Consolas" panose="020B0609020204030204" pitchFamily="49" charset="0"/>
+              </a:rPr>
+              <a:t>idade</a:t>
+            </a:r>
+            <a:r>
+              <a:rPr lang="pt-BR" sz="1400" dirty="0">
+                <a:solidFill>
+                  <a:srgbClr val="000000"/>
+                </a:solidFill>
+                <a:latin typeface="Consolas" panose="020B0609020204030204" pitchFamily="49" charset="0"/>
+              </a:rPr>
+              <a:t>) {</a:t>
+            </a:r>
+          </a:p>
+          <a:p>
+            <a:pPr lvl="2">
+              <a:spcBef>
+                <a:spcPts val="150"/>
+              </a:spcBef>
+              <a:spcAft>
+                <a:spcPts val="150"/>
+              </a:spcAft>
+            </a:pPr>
+            <a:r>
+              <a:rPr lang="pt-BR" sz="1400" b="1" dirty="0" err="1">
+                <a:solidFill>
+                  <a:srgbClr val="7F0055"/>
+                </a:solidFill>
+                <a:latin typeface="Consolas" panose="020B0609020204030204" pitchFamily="49" charset="0"/>
+              </a:rPr>
+              <a:t>this</a:t>
+            </a:r>
+            <a:r>
+              <a:rPr lang="pt-BR" sz="1400" dirty="0" err="1">
+                <a:solidFill>
+                  <a:srgbClr val="000000"/>
+                </a:solidFill>
+                <a:latin typeface="Consolas" panose="020B0609020204030204" pitchFamily="49" charset="0"/>
+              </a:rPr>
+              <a:t>.</a:t>
+            </a:r>
+            <a:r>
+              <a:rPr lang="pt-BR" sz="1400" dirty="0" err="1">
+                <a:solidFill>
+                  <a:srgbClr val="0000C0"/>
+                </a:solidFill>
+                <a:latin typeface="Consolas" panose="020B0609020204030204" pitchFamily="49" charset="0"/>
+              </a:rPr>
+              <a:t>nome</a:t>
+            </a:r>
+            <a:r>
+              <a:rPr lang="pt-BR" sz="1400" dirty="0">
+                <a:solidFill>
+                  <a:srgbClr val="000000"/>
+                </a:solidFill>
+                <a:latin typeface="Consolas" panose="020B0609020204030204" pitchFamily="49" charset="0"/>
+              </a:rPr>
+              <a:t> = </a:t>
+            </a:r>
+            <a:r>
+              <a:rPr lang="pt-BR" sz="1400" dirty="0">
+                <a:solidFill>
+                  <a:srgbClr val="6A3E3E"/>
+                </a:solidFill>
+                <a:latin typeface="Consolas" panose="020B0609020204030204" pitchFamily="49" charset="0"/>
+              </a:rPr>
+              <a:t>nome</a:t>
+            </a:r>
+            <a:r>
+              <a:rPr lang="pt-BR" sz="1400" dirty="0">
+                <a:solidFill>
+                  <a:srgbClr val="000000"/>
+                </a:solidFill>
+                <a:latin typeface="Consolas" panose="020B0609020204030204" pitchFamily="49" charset="0"/>
+              </a:rPr>
+              <a:t>;</a:t>
+            </a:r>
+          </a:p>
+          <a:p>
+            <a:pPr lvl="2">
+              <a:spcBef>
+                <a:spcPts val="150"/>
+              </a:spcBef>
+              <a:spcAft>
+                <a:spcPts val="150"/>
+              </a:spcAft>
+            </a:pPr>
+            <a:r>
+              <a:rPr lang="pt-BR" sz="1400" b="1" dirty="0" err="1">
+                <a:solidFill>
+                  <a:srgbClr val="7F0055"/>
+                </a:solidFill>
+                <a:latin typeface="Consolas" panose="020B0609020204030204" pitchFamily="49" charset="0"/>
+              </a:rPr>
+              <a:t>this</a:t>
+            </a:r>
+            <a:r>
+              <a:rPr lang="pt-BR" sz="1400" dirty="0" err="1">
+                <a:solidFill>
+                  <a:srgbClr val="000000"/>
+                </a:solidFill>
+                <a:latin typeface="Consolas" panose="020B0609020204030204" pitchFamily="49" charset="0"/>
+              </a:rPr>
+              <a:t>.</a:t>
+            </a:r>
+            <a:r>
+              <a:rPr lang="pt-BR" sz="1400" dirty="0" err="1">
+                <a:solidFill>
+                  <a:srgbClr val="0000C0"/>
+                </a:solidFill>
+                <a:latin typeface="Consolas" panose="020B0609020204030204" pitchFamily="49" charset="0"/>
+              </a:rPr>
+              <a:t>peso</a:t>
+            </a:r>
+            <a:r>
+              <a:rPr lang="pt-BR" sz="1400" dirty="0">
+                <a:solidFill>
+                  <a:srgbClr val="000000"/>
+                </a:solidFill>
+                <a:latin typeface="Consolas" panose="020B0609020204030204" pitchFamily="49" charset="0"/>
+              </a:rPr>
+              <a:t> = </a:t>
+            </a:r>
+            <a:r>
+              <a:rPr lang="pt-BR" sz="1400" dirty="0">
+                <a:solidFill>
+                  <a:srgbClr val="6A3E3E"/>
+                </a:solidFill>
+                <a:latin typeface="Consolas" panose="020B0609020204030204" pitchFamily="49" charset="0"/>
+              </a:rPr>
+              <a:t>peso</a:t>
+            </a:r>
+            <a:r>
+              <a:rPr lang="pt-BR" sz="1400" dirty="0">
+                <a:solidFill>
+                  <a:srgbClr val="000000"/>
+                </a:solidFill>
+                <a:latin typeface="Consolas" panose="020B0609020204030204" pitchFamily="49" charset="0"/>
+              </a:rPr>
+              <a:t>;</a:t>
+            </a:r>
+          </a:p>
+          <a:p>
+            <a:pPr lvl="2">
+              <a:spcBef>
+                <a:spcPts val="150"/>
+              </a:spcBef>
+              <a:spcAft>
+                <a:spcPts val="150"/>
+              </a:spcAft>
+            </a:pPr>
+            <a:r>
+              <a:rPr lang="pt-BR" sz="1400" b="1" dirty="0" err="1">
+                <a:solidFill>
+                  <a:srgbClr val="7F0055"/>
+                </a:solidFill>
+                <a:latin typeface="Consolas" panose="020B0609020204030204" pitchFamily="49" charset="0"/>
+              </a:rPr>
+              <a:t>this</a:t>
+            </a:r>
+            <a:r>
+              <a:rPr lang="pt-BR" sz="1400" dirty="0" err="1">
+                <a:solidFill>
+                  <a:srgbClr val="000000"/>
+                </a:solidFill>
+                <a:latin typeface="Consolas" panose="020B0609020204030204" pitchFamily="49" charset="0"/>
+              </a:rPr>
+              <a:t>.</a:t>
+            </a:r>
+            <a:r>
+              <a:rPr lang="pt-BR" sz="1400" dirty="0" err="1">
+                <a:solidFill>
+                  <a:srgbClr val="0000C0"/>
+                </a:solidFill>
+                <a:latin typeface="Consolas" panose="020B0609020204030204" pitchFamily="49" charset="0"/>
+              </a:rPr>
+              <a:t>idade</a:t>
+            </a:r>
+            <a:r>
+              <a:rPr lang="pt-BR" sz="1400" dirty="0">
+                <a:solidFill>
+                  <a:srgbClr val="0000C0"/>
+                </a:solidFill>
+                <a:latin typeface="Consolas" panose="020B0609020204030204" pitchFamily="49" charset="0"/>
+              </a:rPr>
+              <a:t> </a:t>
+            </a:r>
+            <a:r>
+              <a:rPr lang="pt-BR" sz="1400" dirty="0">
+                <a:solidFill>
+                  <a:srgbClr val="000000"/>
+                </a:solidFill>
+                <a:latin typeface="Consolas" panose="020B0609020204030204" pitchFamily="49" charset="0"/>
+              </a:rPr>
+              <a:t>= </a:t>
+            </a:r>
+            <a:r>
+              <a:rPr lang="pt-BR" sz="1400" dirty="0">
+                <a:solidFill>
+                  <a:srgbClr val="6A3E3E"/>
+                </a:solidFill>
+                <a:latin typeface="Consolas" panose="020B0609020204030204" pitchFamily="49" charset="0"/>
+              </a:rPr>
+              <a:t>idade</a:t>
+            </a:r>
+            <a:r>
+              <a:rPr lang="pt-BR" sz="1400" dirty="0">
+                <a:solidFill>
+                  <a:srgbClr val="000000"/>
+                </a:solidFill>
+                <a:latin typeface="Consolas" panose="020B0609020204030204" pitchFamily="49" charset="0"/>
+              </a:rPr>
+              <a:t>;</a:t>
+            </a:r>
+          </a:p>
+          <a:p>
+            <a:pPr marL="457200" lvl="2">
+              <a:spcBef>
+                <a:spcPts val="150"/>
+              </a:spcBef>
+              <a:spcAft>
+                <a:spcPts val="150"/>
+              </a:spcAft>
+            </a:pPr>
+            <a:r>
+              <a:rPr lang="pt-BR" sz="1400" dirty="0">
+                <a:solidFill>
+                  <a:srgbClr val="000000"/>
+                </a:solidFill>
+                <a:latin typeface="Consolas" panose="020B0609020204030204" pitchFamily="49" charset="0"/>
+              </a:rPr>
+              <a:t>}</a:t>
+            </a:r>
+          </a:p>
+          <a:p>
+            <a:pPr>
+              <a:spcBef>
+                <a:spcPts val="150"/>
+              </a:spcBef>
+              <a:spcAft>
+                <a:spcPts val="150"/>
+              </a:spcAft>
+            </a:pPr>
+            <a:r>
+              <a:rPr lang="pt-BR" sz="1400" dirty="0">
+                <a:solidFill>
+                  <a:srgbClr val="000000"/>
+                </a:solidFill>
+                <a:latin typeface="Consolas" panose="020B0609020204030204" pitchFamily="49" charset="0"/>
+              </a:rPr>
+              <a:t>}</a:t>
+            </a:r>
+          </a:p>
+        </p:txBody>
+      </p:sp>
     </p:spTree>
     <p:extLst>
       <p:ext uri="{BB962C8B-B14F-4D97-AF65-F5344CB8AC3E}">
-        <p14:creationId xmlns:p14="http://schemas.microsoft.com/office/powerpoint/2010/main" val="1963364193"/>
+        <p14:creationId xmlns:p14="http://schemas.microsoft.com/office/powerpoint/2010/main" val="229873426"/>
       </p:ext>
     </p:extLst>
   </p:cSld>
@@ -8457,7 +8056,7 @@
         </p:nvSpPr>
         <p:spPr>
           <a:xfrm>
-            <a:off x="592347" y="1844675"/>
+            <a:off x="592346" y="1675093"/>
             <a:ext cx="11007306" cy="1473291"/>
           </a:xfrm>
         </p:spPr>
@@ -8482,49 +8081,10 @@
       </p:sp>
       <p:sp>
         <p:nvSpPr>
-          <p:cNvPr id="6" name="CaixaDeTexto 5">
-            <a:extLst>
-              <a:ext uri="{FF2B5EF4-FFF2-40B4-BE49-F238E27FC236}">
-                <a16:creationId xmlns:a16="http://schemas.microsoft.com/office/drawing/2014/main" id="{2B572424-897C-4079-B040-AC0C43E820EC}"/>
-              </a:ext>
-            </a:extLst>
-          </p:cNvPr>
-          <p:cNvSpPr txBox="1"/>
-          <p:nvPr/>
-        </p:nvSpPr>
-        <p:spPr>
-          <a:xfrm>
-            <a:off x="5538260" y="3361405"/>
-            <a:ext cx="1115480" cy="338554"/>
-          </a:xfrm>
-          <a:prstGeom prst="rect">
-            <a:avLst/>
-          </a:prstGeom>
-          <a:noFill/>
-        </p:spPr>
-        <p:txBody>
-          <a:bodyPr wrap="square" rtlCol="0">
-            <a:spAutoFit/>
-          </a:bodyPr>
-          <a:lstStyle/>
-          <a:p>
-            <a:pPr algn="ctr"/>
-            <a:r>
-              <a:rPr lang="pt-BR" sz="1600" dirty="0">
-                <a:latin typeface="Times New Roman" panose="02020603050405020304" pitchFamily="18" charset="0"/>
-                <a:cs typeface="Times New Roman" panose="02020603050405020304" pitchFamily="18" charset="0"/>
-              </a:rPr>
-              <a:t>Classe Pai</a:t>
-            </a:r>
-          </a:p>
-        </p:txBody>
-      </p:sp>
-      <p:sp>
-        <p:nvSpPr>
-          <p:cNvPr id="8" name="Retângulo 7">
-            <a:extLst>
-              <a:ext uri="{FF2B5EF4-FFF2-40B4-BE49-F238E27FC236}">
-                <a16:creationId xmlns:a16="http://schemas.microsoft.com/office/drawing/2014/main" id="{974DDB22-2288-4893-8D35-C51A4D00B151}"/>
+          <p:cNvPr id="4" name="Retângulo 3">
+            <a:extLst>
+              <a:ext uri="{FF2B5EF4-FFF2-40B4-BE49-F238E27FC236}">
+                <a16:creationId xmlns:a16="http://schemas.microsoft.com/office/drawing/2014/main" id="{FFAD0326-5AFB-4F87-8E1F-8F1446812B25}"/>
               </a:ext>
             </a:extLst>
           </p:cNvPr>
@@ -8533,8 +8093,8 @@
         </p:nvSpPr>
         <p:spPr>
           <a:xfrm>
-            <a:off x="2960279" y="3743397"/>
-            <a:ext cx="6271441" cy="2749471"/>
+            <a:off x="2415073" y="3520484"/>
+            <a:ext cx="7361854" cy="2174954"/>
           </a:xfrm>
           <a:prstGeom prst="rect">
             <a:avLst/>
@@ -8555,7 +8115,7 @@
               </a:spcAft>
             </a:pPr>
             <a:r>
-              <a:rPr lang="pt-BR" sz="1600" b="1" dirty="0" err="1">
+              <a:rPr lang="pt-BR" sz="1400" b="1" dirty="0" err="1">
                 <a:solidFill>
                   <a:srgbClr val="7F0055"/>
                 </a:solidFill>
@@ -8564,7 +8124,7 @@
               <a:t>public</a:t>
             </a:r>
             <a:r>
-              <a:rPr lang="pt-BR" sz="1600" dirty="0">
+              <a:rPr lang="pt-BR" sz="1400" dirty="0">
                 <a:solidFill>
                   <a:srgbClr val="000000"/>
                 </a:solidFill>
@@ -8573,7 +8133,7 @@
               <a:t> </a:t>
             </a:r>
             <a:r>
-              <a:rPr lang="pt-BR" sz="1600" b="1" dirty="0" err="1">
+              <a:rPr lang="pt-BR" sz="1400" b="1" dirty="0" err="1">
                 <a:solidFill>
                   <a:srgbClr val="7F0055"/>
                 </a:solidFill>
@@ -8582,31 +8142,31 @@
               <a:t>class</a:t>
             </a:r>
             <a:r>
-              <a:rPr lang="pt-BR" sz="1600" dirty="0">
-                <a:solidFill>
-                  <a:srgbClr val="000000"/>
-                </a:solidFill>
-                <a:latin typeface="Consolas" panose="020B0609020204030204" pitchFamily="49" charset="0"/>
-              </a:rPr>
-              <a:t> </a:t>
-            </a:r>
-            <a:r>
-              <a:rPr lang="pt-BR" sz="1600" dirty="0" err="1">
-                <a:solidFill>
-                  <a:srgbClr val="000000"/>
-                </a:solidFill>
-                <a:latin typeface="Consolas" panose="020B0609020204030204" pitchFamily="49" charset="0"/>
-              </a:rPr>
-              <a:t>Funcionarios</a:t>
-            </a:r>
-            <a:r>
-              <a:rPr lang="pt-BR" sz="1600" dirty="0">
-                <a:solidFill>
-                  <a:srgbClr val="000000"/>
-                </a:solidFill>
-                <a:latin typeface="Consolas" panose="020B0609020204030204" pitchFamily="49" charset="0"/>
-              </a:rPr>
-              <a:t> {</a:t>
+              <a:rPr lang="pt-BR" sz="1400" dirty="0">
+                <a:solidFill>
+                  <a:srgbClr val="000000"/>
+                </a:solidFill>
+                <a:latin typeface="Consolas" panose="020B0609020204030204" pitchFamily="49" charset="0"/>
+              </a:rPr>
+              <a:t> Cachorro </a:t>
+            </a:r>
+            <a:r>
+              <a:rPr lang="pt-BR" sz="1400" b="1" dirty="0" err="1">
+                <a:solidFill>
+                  <a:srgbClr val="7F0055"/>
+                </a:solidFill>
+                <a:latin typeface="Consolas" panose="020B0609020204030204" pitchFamily="49" charset="0"/>
+              </a:rPr>
+              <a:t>extends</a:t>
+            </a:r>
+            <a:r>
+              <a:rPr lang="pt-BR" sz="1400" dirty="0">
+                <a:solidFill>
+                  <a:srgbClr val="000000"/>
+                </a:solidFill>
+                <a:latin typeface="Consolas" panose="020B0609020204030204" pitchFamily="49" charset="0"/>
+              </a:rPr>
+              <a:t> Animais{</a:t>
             </a:r>
           </a:p>
           <a:p>
@@ -8619,7 +8179,7 @@
               </a:spcAft>
             </a:pPr>
             <a:r>
-              <a:rPr lang="pt-BR" sz="1600" b="1" dirty="0" err="1">
+              <a:rPr lang="pt-BR" sz="1400" b="1" dirty="0" err="1">
                 <a:solidFill>
                   <a:srgbClr val="7F0055"/>
                 </a:solidFill>
@@ -8628,25 +8188,43 @@
               <a:t>private</a:t>
             </a:r>
             <a:r>
-              <a:rPr lang="pt-BR" sz="1600" dirty="0">
-                <a:solidFill>
-                  <a:srgbClr val="000000"/>
-                </a:solidFill>
-                <a:latin typeface="Consolas" panose="020B0609020204030204" pitchFamily="49" charset="0"/>
-              </a:rPr>
-              <a:t> String </a:t>
-            </a:r>
-            <a:r>
-              <a:rPr lang="pt-BR" sz="1600" u="sng" dirty="0">
+              <a:rPr lang="pt-BR" sz="1400" dirty="0">
+                <a:solidFill>
+                  <a:srgbClr val="000000"/>
+                </a:solidFill>
+                <a:latin typeface="Consolas" panose="020B0609020204030204" pitchFamily="49" charset="0"/>
+              </a:rPr>
+              <a:t> </a:t>
+            </a:r>
+            <a:r>
+              <a:rPr lang="pt-BR" sz="1400" dirty="0" err="1">
+                <a:solidFill>
+                  <a:srgbClr val="000000"/>
+                </a:solidFill>
+                <a:latin typeface="Consolas" panose="020B0609020204030204" pitchFamily="49" charset="0"/>
+              </a:rPr>
+              <a:t>String</a:t>
+            </a:r>
+            <a:r>
+              <a:rPr lang="pt-BR" sz="1400" dirty="0">
+                <a:solidFill>
+                  <a:srgbClr val="000000"/>
+                </a:solidFill>
+                <a:latin typeface="Consolas" panose="020B0609020204030204" pitchFamily="49" charset="0"/>
+              </a:rPr>
+              <a:t> </a:t>
+            </a:r>
+            <a:r>
+              <a:rPr lang="pt-BR" sz="1400" u="sng" dirty="0" err="1">
                 <a:solidFill>
                   <a:srgbClr val="0000C0"/>
                 </a:solidFill>
                 <a:latin typeface="Consolas" panose="020B0609020204030204" pitchFamily="49" charset="0"/>
               </a:rPr>
-              <a:t>nome</a:t>
-            </a:r>
-            <a:r>
-              <a:rPr lang="pt-BR" sz="1600" dirty="0">
+              <a:t>raca</a:t>
+            </a:r>
+            <a:r>
+              <a:rPr lang="pt-BR" sz="1400" dirty="0">
                 <a:solidFill>
                   <a:srgbClr val="000000"/>
                 </a:solidFill>
@@ -8664,60 +8242,12 @@
                 <a:spcPts val="150"/>
               </a:spcAft>
             </a:pPr>
-            <a:r>
-              <a:rPr lang="pt-BR" sz="1600" b="1" dirty="0" err="1">
-                <a:solidFill>
-                  <a:srgbClr val="7F0055"/>
-                </a:solidFill>
-                <a:latin typeface="Consolas" panose="020B0609020204030204" pitchFamily="49" charset="0"/>
-              </a:rPr>
-              <a:t>private</a:t>
-            </a:r>
-            <a:r>
-              <a:rPr lang="pt-BR" sz="1600" dirty="0">
-                <a:solidFill>
-                  <a:srgbClr val="000000"/>
-                </a:solidFill>
-                <a:latin typeface="Consolas" panose="020B0609020204030204" pitchFamily="49" charset="0"/>
-              </a:rPr>
-              <a:t> </a:t>
-            </a:r>
-            <a:r>
-              <a:rPr lang="pt-BR" sz="1600" b="1" dirty="0">
-                <a:solidFill>
-                  <a:srgbClr val="7F0055"/>
-                </a:solidFill>
-                <a:latin typeface="Consolas" panose="020B0609020204030204" pitchFamily="49" charset="0"/>
-              </a:rPr>
-              <a:t>double</a:t>
-            </a:r>
-            <a:r>
-              <a:rPr lang="pt-BR" sz="1600" dirty="0">
-                <a:solidFill>
-                  <a:srgbClr val="000000"/>
-                </a:solidFill>
-                <a:latin typeface="Consolas" panose="020B0609020204030204" pitchFamily="49" charset="0"/>
-              </a:rPr>
-              <a:t> </a:t>
-            </a:r>
-            <a:r>
-              <a:rPr lang="pt-BR" sz="1600" u="sng" dirty="0">
-                <a:solidFill>
-                  <a:srgbClr val="0000C0"/>
-                </a:solidFill>
-                <a:latin typeface="Consolas" panose="020B0609020204030204" pitchFamily="49" charset="0"/>
-              </a:rPr>
-              <a:t>salario</a:t>
-            </a:r>
-            <a:r>
-              <a:rPr lang="pt-BR" sz="1600" dirty="0">
-                <a:solidFill>
-                  <a:srgbClr val="000000"/>
-                </a:solidFill>
-                <a:latin typeface="Consolas" panose="020B0609020204030204" pitchFamily="49" charset="0"/>
-              </a:rPr>
-              <a:t>;</a:t>
-            </a:r>
+            <a:endParaRPr lang="pt-BR" sz="1400" b="1" dirty="0">
+              <a:solidFill>
+                <a:srgbClr val="7F0055"/>
+              </a:solidFill>
+              <a:latin typeface="Consolas" panose="020B0609020204030204" pitchFamily="49" charset="0"/>
+            </a:endParaRPr>
           </a:p>
           <a:p>
             <a:pPr lvl="1">
@@ -8728,12 +8258,278 @@
                 <a:spcPts val="150"/>
               </a:spcAft>
             </a:pPr>
-            <a:endParaRPr lang="pt-BR" sz="1600" dirty="0">
-              <a:solidFill>
-                <a:srgbClr val="000000"/>
-              </a:solidFill>
-              <a:latin typeface="Consolas" panose="020B0609020204030204" pitchFamily="49" charset="0"/>
-            </a:endParaRPr>
+            <a:r>
+              <a:rPr lang="pt-BR" sz="1400" b="1" dirty="0" err="1">
+                <a:solidFill>
+                  <a:srgbClr val="7F0055"/>
+                </a:solidFill>
+                <a:latin typeface="Consolas" panose="020B0609020204030204" pitchFamily="49" charset="0"/>
+              </a:rPr>
+              <a:t>public</a:t>
+            </a:r>
+            <a:r>
+              <a:rPr lang="pt-BR" sz="1400" dirty="0">
+                <a:solidFill>
+                  <a:srgbClr val="000000"/>
+                </a:solidFill>
+                <a:latin typeface="Consolas" panose="020B0609020204030204" pitchFamily="49" charset="0"/>
+              </a:rPr>
+              <a:t> Cachorro(</a:t>
+            </a:r>
+            <a:r>
+              <a:rPr lang="pt-BR" sz="1400" dirty="0" err="1">
+                <a:solidFill>
+                  <a:srgbClr val="000000"/>
+                </a:solidFill>
+                <a:latin typeface="Consolas" panose="020B0609020204030204" pitchFamily="49" charset="0"/>
+              </a:rPr>
+              <a:t>String</a:t>
+            </a:r>
+            <a:r>
+              <a:rPr lang="pt-BR" sz="1400" dirty="0">
+                <a:solidFill>
+                  <a:srgbClr val="000000"/>
+                </a:solidFill>
+                <a:latin typeface="Consolas" panose="020B0609020204030204" pitchFamily="49" charset="0"/>
+              </a:rPr>
+              <a:t> </a:t>
+            </a:r>
+            <a:r>
+              <a:rPr lang="pt-BR" sz="1400" dirty="0">
+                <a:solidFill>
+                  <a:srgbClr val="6A3E3E"/>
+                </a:solidFill>
+                <a:latin typeface="Consolas" panose="020B0609020204030204" pitchFamily="49" charset="0"/>
+              </a:rPr>
+              <a:t>nome</a:t>
+            </a:r>
+            <a:r>
+              <a:rPr lang="pt-BR" sz="1400" dirty="0">
+                <a:solidFill>
+                  <a:srgbClr val="000000"/>
+                </a:solidFill>
+                <a:latin typeface="Consolas" panose="020B0609020204030204" pitchFamily="49" charset="0"/>
+              </a:rPr>
+              <a:t>, </a:t>
+            </a:r>
+            <a:r>
+              <a:rPr lang="pt-BR" sz="1400" b="1" dirty="0" err="1">
+                <a:solidFill>
+                  <a:srgbClr val="7F0055"/>
+                </a:solidFill>
+                <a:latin typeface="Consolas" panose="020B0609020204030204" pitchFamily="49" charset="0"/>
+              </a:rPr>
+              <a:t>double</a:t>
+            </a:r>
+            <a:r>
+              <a:rPr lang="pt-BR" sz="1400" dirty="0">
+                <a:solidFill>
+                  <a:srgbClr val="000000"/>
+                </a:solidFill>
+                <a:latin typeface="Consolas" panose="020B0609020204030204" pitchFamily="49" charset="0"/>
+              </a:rPr>
+              <a:t> </a:t>
+            </a:r>
+            <a:r>
+              <a:rPr lang="pt-BR" sz="1400" dirty="0">
+                <a:solidFill>
+                  <a:srgbClr val="6A3E3E"/>
+                </a:solidFill>
+                <a:latin typeface="Consolas" panose="020B0609020204030204" pitchFamily="49" charset="0"/>
+              </a:rPr>
+              <a:t>peso, </a:t>
+            </a:r>
+            <a:r>
+              <a:rPr lang="pt-BR" sz="1400" b="1" dirty="0" err="1">
+                <a:solidFill>
+                  <a:srgbClr val="7F0055"/>
+                </a:solidFill>
+                <a:latin typeface="Consolas" panose="020B0609020204030204" pitchFamily="49" charset="0"/>
+              </a:rPr>
+              <a:t>int</a:t>
+            </a:r>
+            <a:r>
+              <a:rPr lang="pt-BR" sz="1400" b="1" dirty="0">
+                <a:solidFill>
+                  <a:srgbClr val="7F0055"/>
+                </a:solidFill>
+                <a:latin typeface="Consolas" panose="020B0609020204030204" pitchFamily="49" charset="0"/>
+              </a:rPr>
+              <a:t> </a:t>
+            </a:r>
+            <a:r>
+              <a:rPr lang="pt-BR" sz="1400" dirty="0">
+                <a:solidFill>
+                  <a:srgbClr val="6A3E3E"/>
+                </a:solidFill>
+                <a:latin typeface="Consolas" panose="020B0609020204030204" pitchFamily="49" charset="0"/>
+              </a:rPr>
+              <a:t>idade, </a:t>
+            </a:r>
+            <a:r>
+              <a:rPr lang="pt-BR" sz="1400" dirty="0" err="1">
+                <a:solidFill>
+                  <a:srgbClr val="000000"/>
+                </a:solidFill>
+                <a:latin typeface="Consolas" panose="020B0609020204030204" pitchFamily="49" charset="0"/>
+              </a:rPr>
+              <a:t>String</a:t>
+            </a:r>
+            <a:r>
+              <a:rPr lang="pt-BR" sz="1400" dirty="0">
+                <a:solidFill>
+                  <a:srgbClr val="000000"/>
+                </a:solidFill>
+                <a:latin typeface="Consolas" panose="020B0609020204030204" pitchFamily="49" charset="0"/>
+              </a:rPr>
+              <a:t> </a:t>
+            </a:r>
+            <a:r>
+              <a:rPr lang="pt-BR" sz="1400" dirty="0" err="1">
+                <a:solidFill>
+                  <a:srgbClr val="6A3E3E"/>
+                </a:solidFill>
+                <a:latin typeface="Consolas" panose="020B0609020204030204" pitchFamily="49" charset="0"/>
+              </a:rPr>
+              <a:t>raca</a:t>
+            </a:r>
+            <a:r>
+              <a:rPr lang="pt-BR" sz="1400" dirty="0">
+                <a:solidFill>
+                  <a:srgbClr val="000000"/>
+                </a:solidFill>
+                <a:latin typeface="Consolas" panose="020B0609020204030204" pitchFamily="49" charset="0"/>
+              </a:rPr>
+              <a:t>) {</a:t>
+            </a:r>
+          </a:p>
+          <a:p>
+            <a:pPr lvl="2">
+              <a:spcBef>
+                <a:spcPts val="150"/>
+              </a:spcBef>
+              <a:spcAft>
+                <a:spcPts val="150"/>
+              </a:spcAft>
+            </a:pPr>
+            <a:r>
+              <a:rPr lang="pt-BR" sz="1400" b="1" dirty="0">
+                <a:solidFill>
+                  <a:srgbClr val="7F0055"/>
+                </a:solidFill>
+                <a:latin typeface="Consolas" panose="020B0609020204030204" pitchFamily="49" charset="0"/>
+              </a:rPr>
+              <a:t>super</a:t>
+            </a:r>
+            <a:r>
+              <a:rPr lang="pt-BR" sz="1400" dirty="0">
+                <a:solidFill>
+                  <a:srgbClr val="000000"/>
+                </a:solidFill>
+                <a:latin typeface="Consolas" panose="020B0609020204030204" pitchFamily="49" charset="0"/>
+              </a:rPr>
+              <a:t>(</a:t>
+            </a:r>
+            <a:r>
+              <a:rPr lang="pt-BR" sz="1400" dirty="0">
+                <a:solidFill>
+                  <a:srgbClr val="6A3E3E"/>
+                </a:solidFill>
+                <a:latin typeface="Consolas" panose="020B0609020204030204" pitchFamily="49" charset="0"/>
+              </a:rPr>
+              <a:t>nome</a:t>
+            </a:r>
+            <a:r>
+              <a:rPr lang="pt-BR" sz="1400" dirty="0">
+                <a:solidFill>
+                  <a:srgbClr val="000000"/>
+                </a:solidFill>
+                <a:latin typeface="Consolas" panose="020B0609020204030204" pitchFamily="49" charset="0"/>
+              </a:rPr>
+              <a:t>, </a:t>
+            </a:r>
+            <a:r>
+              <a:rPr lang="pt-BR" sz="1400" dirty="0">
+                <a:solidFill>
+                  <a:srgbClr val="6A3E3E"/>
+                </a:solidFill>
+                <a:latin typeface="Consolas" panose="020B0609020204030204" pitchFamily="49" charset="0"/>
+              </a:rPr>
+              <a:t>peso, idade</a:t>
+            </a:r>
+            <a:r>
+              <a:rPr lang="pt-BR" sz="1400" dirty="0">
+                <a:solidFill>
+                  <a:srgbClr val="000000"/>
+                </a:solidFill>
+                <a:latin typeface="Consolas" panose="020B0609020204030204" pitchFamily="49" charset="0"/>
+              </a:rPr>
+              <a:t>);</a:t>
+            </a:r>
+          </a:p>
+          <a:p>
+            <a:pPr lvl="2">
+              <a:spcBef>
+                <a:spcPts val="150"/>
+              </a:spcBef>
+              <a:spcAft>
+                <a:spcPts val="150"/>
+              </a:spcAft>
+            </a:pPr>
+            <a:r>
+              <a:rPr lang="pt-BR" sz="1400" b="1" dirty="0" err="1">
+                <a:solidFill>
+                  <a:srgbClr val="7F0055"/>
+                </a:solidFill>
+                <a:latin typeface="Consolas" panose="020B0609020204030204" pitchFamily="49" charset="0"/>
+              </a:rPr>
+              <a:t>this</a:t>
+            </a:r>
+            <a:r>
+              <a:rPr lang="pt-BR" sz="1400" dirty="0" err="1">
+                <a:solidFill>
+                  <a:srgbClr val="000000"/>
+                </a:solidFill>
+                <a:latin typeface="Consolas" panose="020B0609020204030204" pitchFamily="49" charset="0"/>
+              </a:rPr>
+              <a:t>.</a:t>
+            </a:r>
+            <a:r>
+              <a:rPr lang="pt-BR" sz="1400" dirty="0" err="1">
+                <a:solidFill>
+                  <a:srgbClr val="0000C0"/>
+                </a:solidFill>
+                <a:latin typeface="Consolas" panose="020B0609020204030204" pitchFamily="49" charset="0"/>
+              </a:rPr>
+              <a:t>raca</a:t>
+            </a:r>
+            <a:r>
+              <a:rPr lang="pt-BR" sz="1400" dirty="0">
+                <a:solidFill>
+                  <a:srgbClr val="000000"/>
+                </a:solidFill>
+                <a:latin typeface="Consolas" panose="020B0609020204030204" pitchFamily="49" charset="0"/>
+              </a:rPr>
+              <a:t>= </a:t>
+            </a:r>
+            <a:r>
+              <a:rPr lang="pt-BR" sz="1400" dirty="0" err="1">
+                <a:solidFill>
+                  <a:srgbClr val="6A3E3E"/>
+                </a:solidFill>
+                <a:latin typeface="Consolas" panose="020B0609020204030204" pitchFamily="49" charset="0"/>
+              </a:rPr>
+              <a:t>raca</a:t>
+            </a:r>
+            <a:r>
+              <a:rPr lang="pt-BR" sz="1400" dirty="0">
+                <a:solidFill>
+                  <a:srgbClr val="000000"/>
+                </a:solidFill>
+                <a:latin typeface="Consolas" panose="020B0609020204030204" pitchFamily="49" charset="0"/>
+              </a:rPr>
+              <a:t>;</a:t>
+            </a:r>
           </a:p>
           <a:p>
             <a:pPr lvl="1">
@@ -8745,235 +8541,7 @@
               </a:spcAft>
             </a:pPr>
             <a:r>
-              <a:rPr lang="pt-BR" sz="1600" b="1" dirty="0" err="1">
-                <a:solidFill>
-                  <a:srgbClr val="7F0055"/>
-                </a:solidFill>
-                <a:latin typeface="Consolas" panose="020B0609020204030204" pitchFamily="49" charset="0"/>
-              </a:rPr>
-              <a:t>public</a:t>
-            </a:r>
-            <a:r>
-              <a:rPr lang="pt-BR" sz="1600" dirty="0">
-                <a:solidFill>
-                  <a:srgbClr val="000000"/>
-                </a:solidFill>
-                <a:latin typeface="Consolas" panose="020B0609020204030204" pitchFamily="49" charset="0"/>
-              </a:rPr>
-              <a:t> </a:t>
-            </a:r>
-            <a:r>
-              <a:rPr lang="pt-BR" sz="1600" dirty="0" err="1">
-                <a:solidFill>
-                  <a:srgbClr val="000000"/>
-                </a:solidFill>
-                <a:latin typeface="Consolas" panose="020B0609020204030204" pitchFamily="49" charset="0"/>
-              </a:rPr>
-              <a:t>Funcionarios</a:t>
-            </a:r>
-            <a:r>
-              <a:rPr lang="pt-BR" sz="1600" dirty="0">
-                <a:solidFill>
-                  <a:srgbClr val="000000"/>
-                </a:solidFill>
-                <a:latin typeface="Consolas" panose="020B0609020204030204" pitchFamily="49" charset="0"/>
-              </a:rPr>
-              <a:t>(String </a:t>
-            </a:r>
-            <a:r>
-              <a:rPr lang="pt-BR" sz="1600" dirty="0">
-                <a:solidFill>
-                  <a:srgbClr val="6A3E3E"/>
-                </a:solidFill>
-                <a:latin typeface="Consolas" panose="020B0609020204030204" pitchFamily="49" charset="0"/>
-              </a:rPr>
-              <a:t>nome</a:t>
-            </a:r>
-            <a:r>
-              <a:rPr lang="pt-BR" sz="1600" dirty="0">
-                <a:solidFill>
-                  <a:srgbClr val="000000"/>
-                </a:solidFill>
-                <a:latin typeface="Consolas" panose="020B0609020204030204" pitchFamily="49" charset="0"/>
-              </a:rPr>
-              <a:t>, </a:t>
-            </a:r>
-            <a:r>
-              <a:rPr lang="pt-BR" sz="1600" b="1" dirty="0">
-                <a:solidFill>
-                  <a:srgbClr val="7F0055"/>
-                </a:solidFill>
-                <a:latin typeface="Consolas" panose="020B0609020204030204" pitchFamily="49" charset="0"/>
-              </a:rPr>
-              <a:t>double</a:t>
-            </a:r>
-            <a:r>
-              <a:rPr lang="pt-BR" sz="1600" dirty="0">
-                <a:solidFill>
-                  <a:srgbClr val="000000"/>
-                </a:solidFill>
-                <a:latin typeface="Consolas" panose="020B0609020204030204" pitchFamily="49" charset="0"/>
-              </a:rPr>
-              <a:t> </a:t>
-            </a:r>
-            <a:r>
-              <a:rPr lang="pt-BR" sz="1600" dirty="0">
-                <a:solidFill>
-                  <a:srgbClr val="6A3E3E"/>
-                </a:solidFill>
-                <a:latin typeface="Consolas" panose="020B0609020204030204" pitchFamily="49" charset="0"/>
-              </a:rPr>
-              <a:t>salario</a:t>
-            </a:r>
-            <a:r>
-              <a:rPr lang="pt-BR" sz="1600" dirty="0">
-                <a:solidFill>
-                  <a:srgbClr val="000000"/>
-                </a:solidFill>
-                <a:latin typeface="Consolas" panose="020B0609020204030204" pitchFamily="49" charset="0"/>
-              </a:rPr>
-              <a:t>) {</a:t>
-            </a:r>
-          </a:p>
-          <a:p>
-            <a:pPr lvl="2">
-              <a:spcBef>
-                <a:spcPts val="150"/>
-              </a:spcBef>
-              <a:spcAft>
-                <a:spcPts val="150"/>
-              </a:spcAft>
-            </a:pPr>
-            <a:r>
-              <a:rPr lang="pt-BR" sz="1600" b="1" dirty="0" err="1">
-                <a:solidFill>
-                  <a:srgbClr val="7F0055"/>
-                </a:solidFill>
-                <a:latin typeface="Consolas" panose="020B0609020204030204" pitchFamily="49" charset="0"/>
-              </a:rPr>
-              <a:t>this</a:t>
-            </a:r>
-            <a:r>
-              <a:rPr lang="pt-BR" sz="1600" dirty="0" err="1">
-                <a:solidFill>
-                  <a:srgbClr val="000000"/>
-                </a:solidFill>
-                <a:latin typeface="Consolas" panose="020B0609020204030204" pitchFamily="49" charset="0"/>
-              </a:rPr>
-              <a:t>.</a:t>
-            </a:r>
-            <a:r>
-              <a:rPr lang="pt-BR" sz="1600" dirty="0" err="1">
-                <a:solidFill>
-                  <a:srgbClr val="0000C0"/>
-                </a:solidFill>
-                <a:latin typeface="Consolas" panose="020B0609020204030204" pitchFamily="49" charset="0"/>
-              </a:rPr>
-              <a:t>nome</a:t>
-            </a:r>
-            <a:r>
-              <a:rPr lang="pt-BR" sz="1600" dirty="0">
-                <a:solidFill>
-                  <a:srgbClr val="000000"/>
-                </a:solidFill>
-                <a:latin typeface="Consolas" panose="020B0609020204030204" pitchFamily="49" charset="0"/>
-              </a:rPr>
-              <a:t> = </a:t>
-            </a:r>
-            <a:r>
-              <a:rPr lang="pt-BR" sz="1600" dirty="0">
-                <a:solidFill>
-                  <a:srgbClr val="6A3E3E"/>
-                </a:solidFill>
-                <a:latin typeface="Consolas" panose="020B0609020204030204" pitchFamily="49" charset="0"/>
-              </a:rPr>
-              <a:t>nome</a:t>
-            </a:r>
-            <a:r>
-              <a:rPr lang="pt-BR" sz="1600" dirty="0">
-                <a:solidFill>
-                  <a:srgbClr val="000000"/>
-                </a:solidFill>
-                <a:latin typeface="Consolas" panose="020B0609020204030204" pitchFamily="49" charset="0"/>
-              </a:rPr>
-              <a:t>;</a:t>
-            </a:r>
-          </a:p>
-          <a:p>
-            <a:pPr lvl="2">
-              <a:spcBef>
-                <a:spcPts val="150"/>
-              </a:spcBef>
-              <a:spcAft>
-                <a:spcPts val="150"/>
-              </a:spcAft>
-            </a:pPr>
-            <a:r>
-              <a:rPr lang="pt-BR" sz="1600" b="1" dirty="0" err="1">
-                <a:solidFill>
-                  <a:srgbClr val="7F0055"/>
-                </a:solidFill>
-                <a:latin typeface="Consolas" panose="020B0609020204030204" pitchFamily="49" charset="0"/>
-              </a:rPr>
-              <a:t>this</a:t>
-            </a:r>
-            <a:r>
-              <a:rPr lang="pt-BR" sz="1600" dirty="0" err="1">
-                <a:solidFill>
-                  <a:srgbClr val="000000"/>
-                </a:solidFill>
-                <a:latin typeface="Consolas" panose="020B0609020204030204" pitchFamily="49" charset="0"/>
-              </a:rPr>
-              <a:t>.</a:t>
-            </a:r>
-            <a:r>
-              <a:rPr lang="pt-BR" sz="1600" dirty="0" err="1">
-                <a:solidFill>
-                  <a:srgbClr val="0000C0"/>
-                </a:solidFill>
-                <a:latin typeface="Consolas" panose="020B0609020204030204" pitchFamily="49" charset="0"/>
-              </a:rPr>
-              <a:t>salario</a:t>
-            </a:r>
-            <a:r>
-              <a:rPr lang="pt-BR" sz="1600" dirty="0">
-                <a:solidFill>
-                  <a:srgbClr val="000000"/>
-                </a:solidFill>
-                <a:latin typeface="Consolas" panose="020B0609020204030204" pitchFamily="49" charset="0"/>
-              </a:rPr>
-              <a:t> = </a:t>
-            </a:r>
-            <a:r>
-              <a:rPr lang="pt-BR" sz="1600" dirty="0">
-                <a:solidFill>
-                  <a:srgbClr val="6A3E3E"/>
-                </a:solidFill>
-                <a:latin typeface="Consolas" panose="020B0609020204030204" pitchFamily="49" charset="0"/>
-              </a:rPr>
-              <a:t>salario</a:t>
-            </a:r>
-            <a:r>
-              <a:rPr lang="pt-BR" sz="1600" dirty="0">
-                <a:solidFill>
-                  <a:srgbClr val="000000"/>
-                </a:solidFill>
-                <a:latin typeface="Consolas" panose="020B0609020204030204" pitchFamily="49" charset="0"/>
-              </a:rPr>
-              <a:t>;</a:t>
-            </a:r>
-          </a:p>
-          <a:p>
-            <a:pPr marL="457200" lvl="2">
-              <a:spcBef>
-                <a:spcPts val="150"/>
-              </a:spcBef>
-              <a:spcAft>
-                <a:spcPts val="150"/>
-              </a:spcAft>
-            </a:pPr>
-            <a:r>
-              <a:rPr lang="pt-BR" sz="1600" dirty="0">
+              <a:rPr lang="pt-BR" sz="1400" dirty="0">
                 <a:solidFill>
                   <a:srgbClr val="000000"/>
                 </a:solidFill>
@@ -8992,7 +8560,7 @@
               </a:spcAft>
             </a:pPr>
             <a:r>
-              <a:rPr lang="pt-BR" sz="1600" dirty="0">
+              <a:rPr lang="pt-BR" sz="1400" dirty="0">
                 <a:solidFill>
                   <a:srgbClr val="000000"/>
                 </a:solidFill>
@@ -9006,7 +8574,7 @@
     </p:spTree>
     <p:extLst>
       <p:ext uri="{BB962C8B-B14F-4D97-AF65-F5344CB8AC3E}">
-        <p14:creationId xmlns:p14="http://schemas.microsoft.com/office/powerpoint/2010/main" val="229873426"/>
+        <p14:creationId xmlns:p14="http://schemas.microsoft.com/office/powerpoint/2010/main" val="13419183"/>
       </p:ext>
     </p:extLst>
   </p:cSld>
